--- a/skills/mint-report-deck/assets/presentation/Mint_Report_Component_Library.pptx
+++ b/skills/mint-report-deck/assets/presentation/Mint_Report_Component_Library.pptx
@@ -2,28 +2,31 @@
 <file path=ppt/presentation.xml><?xml version="1.0" encoding="utf-8"?>
 <p:presentation xmlns:p="http://schemas.openxmlformats.org/presentationml/2006/main">
   <p:sldMasterIdLst>
-    <p:sldMasterId xmlns:r="http://schemas.openxmlformats.org/officeDocument/2006/relationships" id="2147483648" r:id="Re4aaa4753c8c4800"/>
-    <p:sldMasterId xmlns:r="http://schemas.openxmlformats.org/officeDocument/2006/relationships" id="2147483650" r:id="Reece1cad7bd24454"/>
+    <p:sldMasterId xmlns:r="http://schemas.openxmlformats.org/officeDocument/2006/relationships" id="2147483648" r:id="Rb164933b427c443f"/>
+    <p:sldMasterId xmlns:r="http://schemas.openxmlformats.org/officeDocument/2006/relationships" id="2147483650" r:id="R20430abb242d465a"/>
   </p:sldMasterIdLst>
   <p:notesMasterIdLst>
-    <p:notesMasterId xmlns:r="http://schemas.openxmlformats.org/officeDocument/2006/relationships" r:id="R0625747eebaa408f"/>
+    <p:notesMasterId xmlns:r="http://schemas.openxmlformats.org/officeDocument/2006/relationships" r:id="Rff1454ad58634d7f"/>
   </p:notesMasterIdLst>
   <p:sldIdLst>
-    <p:sldId xmlns:r="http://schemas.openxmlformats.org/officeDocument/2006/relationships" id="256" r:id="Rfcd9c4d3f7a74528"/>
-    <p:sldId xmlns:r="http://schemas.openxmlformats.org/officeDocument/2006/relationships" id="257" r:id="R30b3b23eb1514f24"/>
-    <p:sldId xmlns:r="http://schemas.openxmlformats.org/officeDocument/2006/relationships" id="258" r:id="Rc54965a250ec4e1c"/>
-    <p:sldId xmlns:r="http://schemas.openxmlformats.org/officeDocument/2006/relationships" id="259" r:id="Rbb57990c06594634"/>
-    <p:sldId xmlns:r="http://schemas.openxmlformats.org/officeDocument/2006/relationships" id="260" r:id="Rb53d1386ddd04e3a"/>
-    <p:sldId xmlns:r="http://schemas.openxmlformats.org/officeDocument/2006/relationships" id="261" r:id="R4ec16cb97e1640f8"/>
-    <p:sldId xmlns:r="http://schemas.openxmlformats.org/officeDocument/2006/relationships" id="262" r:id="R7446a956ffba43f4"/>
-    <p:sldId xmlns:r="http://schemas.openxmlformats.org/officeDocument/2006/relationships" id="263" r:id="R2babb10bf3624e49"/>
-    <p:sldId xmlns:r="http://schemas.openxmlformats.org/officeDocument/2006/relationships" id="264" r:id="Ra52d8d7d147740e2"/>
-    <p:sldId xmlns:r="http://schemas.openxmlformats.org/officeDocument/2006/relationships" id="265" r:id="Rc39d1e2fe25d42a3"/>
-    <p:sldId xmlns:r="http://schemas.openxmlformats.org/officeDocument/2006/relationships" id="266" r:id="R57b0212d6da240dc"/>
-    <p:sldId xmlns:r="http://schemas.openxmlformats.org/officeDocument/2006/relationships" id="267" r:id="R7d7fa834b32f4d9c"/>
-    <p:sldId xmlns:r="http://schemas.openxmlformats.org/officeDocument/2006/relationships" id="268" r:id="R06c2cebef98d428f"/>
-    <p:sldId xmlns:r="http://schemas.openxmlformats.org/officeDocument/2006/relationships" id="269" r:id="R522099dc50b24ee5"/>
-    <p:sldId xmlns:r="http://schemas.openxmlformats.org/officeDocument/2006/relationships" id="270" r:id="R23eb8dbdf30f444f"/>
+    <p:sldId xmlns:r="http://schemas.openxmlformats.org/officeDocument/2006/relationships" id="256" r:id="R3dbfff76ef98413b"/>
+    <p:sldId xmlns:r="http://schemas.openxmlformats.org/officeDocument/2006/relationships" id="257" r:id="Rfe1a9f4311084b11"/>
+    <p:sldId xmlns:r="http://schemas.openxmlformats.org/officeDocument/2006/relationships" id="258" r:id="R41c9c47481154070"/>
+    <p:sldId xmlns:r="http://schemas.openxmlformats.org/officeDocument/2006/relationships" id="259" r:id="R7561512730db4314"/>
+    <p:sldId xmlns:r="http://schemas.openxmlformats.org/officeDocument/2006/relationships" id="260" r:id="R79569057269741d5"/>
+    <p:sldId xmlns:r="http://schemas.openxmlformats.org/officeDocument/2006/relationships" id="261" r:id="Rd4ef9610cfc64895"/>
+    <p:sldId xmlns:r="http://schemas.openxmlformats.org/officeDocument/2006/relationships" id="262" r:id="Re3c4191a0898405d"/>
+    <p:sldId xmlns:r="http://schemas.openxmlformats.org/officeDocument/2006/relationships" id="263" r:id="R7093bfec587c4b19"/>
+    <p:sldId xmlns:r="http://schemas.openxmlformats.org/officeDocument/2006/relationships" id="264" r:id="R42f8cbf058d84bae"/>
+    <p:sldId xmlns:r="http://schemas.openxmlformats.org/officeDocument/2006/relationships" id="265" r:id="Ra32535bb7e26409c"/>
+    <p:sldId xmlns:r="http://schemas.openxmlformats.org/officeDocument/2006/relationships" id="266" r:id="R2ad9db9725074b43"/>
+    <p:sldId xmlns:r="http://schemas.openxmlformats.org/officeDocument/2006/relationships" id="267" r:id="Ra3ce60bd6b5c4750"/>
+    <p:sldId xmlns:r="http://schemas.openxmlformats.org/officeDocument/2006/relationships" id="268" r:id="Rf766befff7374536"/>
+    <p:sldId xmlns:r="http://schemas.openxmlformats.org/officeDocument/2006/relationships" id="269" r:id="Re015c1586f84467e"/>
+    <p:sldId xmlns:r="http://schemas.openxmlformats.org/officeDocument/2006/relationships" id="270" r:id="R51295d67a3ec4764"/>
+    <p:sldId xmlns:r="http://schemas.openxmlformats.org/officeDocument/2006/relationships" id="271" r:id="Ra39b0066f63147ee"/>
+    <p:sldId xmlns:r="http://schemas.openxmlformats.org/officeDocument/2006/relationships" id="272" r:id="Re888c9ea35934558"/>
+    <p:sldId xmlns:r="http://schemas.openxmlformats.org/officeDocument/2006/relationships" id="273" r:id="R4075aaae88a74703"/>
   </p:sldIdLst>
   <p:sldSz cx="12192000" cy="6858000"/>
   <p:notesSz cx="6858000" cy="9144000"/>
@@ -879,6 +882,204 @@
 </p:notes>
 </file>
 
+<file path=ppt/notesSlides/notesSlide16.xml><?xml version="1.0" encoding="utf-8"?>
+<p:notes xmlns:p="http://schemas.openxmlformats.org/presentationml/2006/main">
+  <p:cSld>
+    <p:spTree>
+      <p:nvGrpSpPr>
+        <p:cNvPr id="1" name=""/>
+        <p:cNvGrpSpPr/>
+        <p:nvPr/>
+      </p:nvGrpSpPr>
+      <p:grpSpPr>
+        <a:xfrm xmlns:a="http://schemas.openxmlformats.org/drawingml/2006/main"/>
+      </p:grpSpPr>
+      <p:sp>
+        <p:nvSpPr>
+          <p:cNvPr id="2" name="Slide Image Placeholder 1"/>
+          <p:cNvSpPr>
+            <a:spLocks xmlns:a="http://schemas.openxmlformats.org/drawingml/2006/main" noGrp="1"/>
+          </p:cNvSpPr>
+          <p:nvPr>
+            <p:ph type="sldImg" idx="0"/>
+          </p:nvPr>
+        </p:nvSpPr>
+        <p:spPr/>
+      </p:sp>
+      <p:sp>
+        <p:nvSpPr>
+          <p:cNvPr id="3" name="Notes Placeholder 2"/>
+          <p:cNvSpPr>
+            <a:spLocks xmlns:a="http://schemas.openxmlformats.org/drawingml/2006/main" noGrp="1"/>
+          </p:cNvSpPr>
+          <p:nvPr>
+            <p:ph type="body" idx="1"/>
+          </p:nvPr>
+        </p:nvSpPr>
+        <p:spPr/>
+        <p:txBody>
+          <a:bodyPr xmlns:a="http://schemas.openxmlformats.org/drawingml/2006/main"/>
+          <a:lstStyle xmlns:a="http://schemas.openxmlformats.org/drawingml/2006/main"/>
+          <a:p xmlns:a="http://schemas.openxmlformats.org/drawingml/2006/main"/>
+        </p:txBody>
+      </p:sp>
+      <p:sp>
+        <p:nvSpPr>
+          <p:cNvPr id="4" name="Slide Number Placeholder 3"/>
+          <p:cNvSpPr>
+            <a:spLocks xmlns:a="http://schemas.openxmlformats.org/drawingml/2006/main" noGrp="1"/>
+          </p:cNvSpPr>
+          <p:nvPr>
+            <p:ph type="sldNum" idx="5"/>
+          </p:nvPr>
+        </p:nvSpPr>
+        <p:spPr/>
+        <p:txBody>
+          <a:bodyPr xmlns:a="http://schemas.openxmlformats.org/drawingml/2006/main"/>
+          <a:lstStyle xmlns:a="http://schemas.openxmlformats.org/drawingml/2006/main"/>
+          <a:p xmlns:a="http://schemas.openxmlformats.org/drawingml/2006/main"/>
+        </p:txBody>
+      </p:sp>
+    </p:spTree>
+  </p:cSld>
+  <p:clrMapOvr>
+    <a:masterClrMapping xmlns:a="http://schemas.openxmlformats.org/drawingml/2006/main"/>
+  </p:clrMapOvr>
+</p:notes>
+</file>
+
+<file path=ppt/notesSlides/notesSlide17.xml><?xml version="1.0" encoding="utf-8"?>
+<p:notes xmlns:p="http://schemas.openxmlformats.org/presentationml/2006/main">
+  <p:cSld>
+    <p:spTree>
+      <p:nvGrpSpPr>
+        <p:cNvPr id="1" name=""/>
+        <p:cNvGrpSpPr/>
+        <p:nvPr/>
+      </p:nvGrpSpPr>
+      <p:grpSpPr>
+        <a:xfrm xmlns:a="http://schemas.openxmlformats.org/drawingml/2006/main"/>
+      </p:grpSpPr>
+      <p:sp>
+        <p:nvSpPr>
+          <p:cNvPr id="2" name="Slide Image Placeholder 1"/>
+          <p:cNvSpPr>
+            <a:spLocks xmlns:a="http://schemas.openxmlformats.org/drawingml/2006/main" noGrp="1"/>
+          </p:cNvSpPr>
+          <p:nvPr>
+            <p:ph type="sldImg" idx="0"/>
+          </p:nvPr>
+        </p:nvSpPr>
+        <p:spPr/>
+      </p:sp>
+      <p:sp>
+        <p:nvSpPr>
+          <p:cNvPr id="3" name="Notes Placeholder 2"/>
+          <p:cNvSpPr>
+            <a:spLocks xmlns:a="http://schemas.openxmlformats.org/drawingml/2006/main" noGrp="1"/>
+          </p:cNvSpPr>
+          <p:nvPr>
+            <p:ph type="body" idx="1"/>
+          </p:nvPr>
+        </p:nvSpPr>
+        <p:spPr/>
+        <p:txBody>
+          <a:bodyPr xmlns:a="http://schemas.openxmlformats.org/drawingml/2006/main"/>
+          <a:lstStyle xmlns:a="http://schemas.openxmlformats.org/drawingml/2006/main"/>
+          <a:p xmlns:a="http://schemas.openxmlformats.org/drawingml/2006/main"/>
+        </p:txBody>
+      </p:sp>
+      <p:sp>
+        <p:nvSpPr>
+          <p:cNvPr id="4" name="Slide Number Placeholder 3"/>
+          <p:cNvSpPr>
+            <a:spLocks xmlns:a="http://schemas.openxmlformats.org/drawingml/2006/main" noGrp="1"/>
+          </p:cNvSpPr>
+          <p:nvPr>
+            <p:ph type="sldNum" idx="5"/>
+          </p:nvPr>
+        </p:nvSpPr>
+        <p:spPr/>
+        <p:txBody>
+          <a:bodyPr xmlns:a="http://schemas.openxmlformats.org/drawingml/2006/main"/>
+          <a:lstStyle xmlns:a="http://schemas.openxmlformats.org/drawingml/2006/main"/>
+          <a:p xmlns:a="http://schemas.openxmlformats.org/drawingml/2006/main"/>
+        </p:txBody>
+      </p:sp>
+    </p:spTree>
+  </p:cSld>
+  <p:clrMapOvr>
+    <a:masterClrMapping xmlns:a="http://schemas.openxmlformats.org/drawingml/2006/main"/>
+  </p:clrMapOvr>
+</p:notes>
+</file>
+
+<file path=ppt/notesSlides/notesSlide18.xml><?xml version="1.0" encoding="utf-8"?>
+<p:notes xmlns:p="http://schemas.openxmlformats.org/presentationml/2006/main">
+  <p:cSld>
+    <p:spTree>
+      <p:nvGrpSpPr>
+        <p:cNvPr id="1" name=""/>
+        <p:cNvGrpSpPr/>
+        <p:nvPr/>
+      </p:nvGrpSpPr>
+      <p:grpSpPr>
+        <a:xfrm xmlns:a="http://schemas.openxmlformats.org/drawingml/2006/main"/>
+      </p:grpSpPr>
+      <p:sp>
+        <p:nvSpPr>
+          <p:cNvPr id="2" name="Slide Image Placeholder 1"/>
+          <p:cNvSpPr>
+            <a:spLocks xmlns:a="http://schemas.openxmlformats.org/drawingml/2006/main" noGrp="1"/>
+          </p:cNvSpPr>
+          <p:nvPr>
+            <p:ph type="sldImg" idx="0"/>
+          </p:nvPr>
+        </p:nvSpPr>
+        <p:spPr/>
+      </p:sp>
+      <p:sp>
+        <p:nvSpPr>
+          <p:cNvPr id="3" name="Notes Placeholder 2"/>
+          <p:cNvSpPr>
+            <a:spLocks xmlns:a="http://schemas.openxmlformats.org/drawingml/2006/main" noGrp="1"/>
+          </p:cNvSpPr>
+          <p:nvPr>
+            <p:ph type="body" idx="1"/>
+          </p:nvPr>
+        </p:nvSpPr>
+        <p:spPr/>
+        <p:txBody>
+          <a:bodyPr xmlns:a="http://schemas.openxmlformats.org/drawingml/2006/main"/>
+          <a:lstStyle xmlns:a="http://schemas.openxmlformats.org/drawingml/2006/main"/>
+          <a:p xmlns:a="http://schemas.openxmlformats.org/drawingml/2006/main"/>
+        </p:txBody>
+      </p:sp>
+      <p:sp>
+        <p:nvSpPr>
+          <p:cNvPr id="4" name="Slide Number Placeholder 3"/>
+          <p:cNvSpPr>
+            <a:spLocks xmlns:a="http://schemas.openxmlformats.org/drawingml/2006/main" noGrp="1"/>
+          </p:cNvSpPr>
+          <p:nvPr>
+            <p:ph type="sldNum" idx="5"/>
+          </p:nvPr>
+        </p:nvSpPr>
+        <p:spPr/>
+        <p:txBody>
+          <a:bodyPr xmlns:a="http://schemas.openxmlformats.org/drawingml/2006/main"/>
+          <a:lstStyle xmlns:a="http://schemas.openxmlformats.org/drawingml/2006/main"/>
+          <a:p xmlns:a="http://schemas.openxmlformats.org/drawingml/2006/main"/>
+        </p:txBody>
+      </p:sp>
+    </p:spTree>
+  </p:cSld>
+  <p:clrMapOvr>
+    <a:masterClrMapping xmlns:a="http://schemas.openxmlformats.org/drawingml/2006/main"/>
+  </p:clrMapOvr>
+</p:notes>
+</file>
+
 <file path=ppt/notesSlides/notesSlide2.xml><?xml version="1.0" encoding="utf-8"?>
 <p:notes xmlns:p="http://schemas.openxmlformats.org/presentationml/2006/main">
   <p:cSld>
@@ -1441,7 +1642,7 @@
           <p:cNvPr id="2" name="placeholder_1">
             <a:extLst xmlns:a="http://schemas.openxmlformats.org/drawingml/2006/main">
               <a:ext uri="{FF2B5EF4-FFF2-40B4-BE49-F238E27FC236}">
-                <a16:creationId xmlns:a16="http://schemas.microsoft.com/office/drawing/2014/main" id="{95C6E85D-B6E1-4EEE-B983-7C39EC044CB4}"/>
+                <a16:creationId xmlns:a16="http://schemas.microsoft.com/office/drawing/2014/main" id="{F02158CC-9E9A-43EA-AF6D-74E5A94942CF}"/>
               </a:ext>
             </a:extLst>
           </p:cNvPr>
@@ -1493,7 +1694,7 @@
           <p:cNvPr id="2" name="placeholder_1">
             <a:extLst xmlns:a="http://schemas.openxmlformats.org/drawingml/2006/main">
               <a:ext uri="{FF2B5EF4-FFF2-40B4-BE49-F238E27FC236}">
-                <a16:creationId xmlns:a16="http://schemas.microsoft.com/office/drawing/2014/main" id="{2CA111DA-9CCE-4839-A0F2-8895B39E794C}"/>
+                <a16:creationId xmlns:a16="http://schemas.microsoft.com/office/drawing/2014/main" id="{B64D8E95-6412-43F3-ABDC-591CB738A3E6}"/>
               </a:ext>
             </a:extLst>
           </p:cNvPr>
@@ -1545,7 +1746,7 @@
           <p:cNvPr id="2" name="placeholder_1">
             <a:extLst xmlns:a="http://schemas.openxmlformats.org/drawingml/2006/main">
               <a:ext uri="{FF2B5EF4-FFF2-40B4-BE49-F238E27FC236}">
-                <a16:creationId xmlns:a16="http://schemas.microsoft.com/office/drawing/2014/main" id="{9EDF7D27-3688-449A-84F6-2E5D654263D6}"/>
+                <a16:creationId xmlns:a16="http://schemas.microsoft.com/office/drawing/2014/main" id="{6E6CC211-F538-40AF-90A1-005354E976E5}"/>
               </a:ext>
             </a:extLst>
           </p:cNvPr>
@@ -1597,7 +1798,7 @@
           <p:cNvPr id="2" name="placeholder_1">
             <a:extLst xmlns:a="http://schemas.openxmlformats.org/drawingml/2006/main">
               <a:ext uri="{FF2B5EF4-FFF2-40B4-BE49-F238E27FC236}">
-                <a16:creationId xmlns:a16="http://schemas.microsoft.com/office/drawing/2014/main" id="{FF967C95-4F5F-4D23-97EF-A03938F193E2}"/>
+                <a16:creationId xmlns:a16="http://schemas.microsoft.com/office/drawing/2014/main" id="{F160F547-C2DF-4076-89EC-BF8FEAE33A25}"/>
               </a:ext>
             </a:extLst>
           </p:cNvPr>
@@ -1649,7 +1850,7 @@
           <p:cNvPr id="2" name="placeholder_1">
             <a:extLst xmlns:a="http://schemas.openxmlformats.org/drawingml/2006/main">
               <a:ext uri="{FF2B5EF4-FFF2-40B4-BE49-F238E27FC236}">
-                <a16:creationId xmlns:a16="http://schemas.microsoft.com/office/drawing/2014/main" id="{B5531C31-9FB9-47CC-A2B7-85CDD816C83E}"/>
+                <a16:creationId xmlns:a16="http://schemas.microsoft.com/office/drawing/2014/main" id="{8125C7E4-B07A-4E55-89D0-3276A2E418E7}"/>
               </a:ext>
             </a:extLst>
           </p:cNvPr>
@@ -1685,6 +1886,162 @@
 </file>
 
 <file path=ppt/slideLayouts/slideLayout15.xml><?xml version="1.0" encoding="utf-8"?>
+<p:sldLayout xmlns:p="http://schemas.openxmlformats.org/presentationml/2006/main">
+  <p:cSld name="Mint · 能力链路">
+    <p:spTree>
+      <p:nvGrpSpPr>
+        <p:cNvPr id="1" name=""/>
+        <p:cNvGrpSpPr/>
+        <p:nvPr/>
+      </p:nvGrpSpPr>
+      <p:grpSpPr>
+        <a:xfrm xmlns:a="http://schemas.openxmlformats.org/drawingml/2006/main"/>
+      </p:grpSpPr>
+      <p:sp>
+        <p:nvSpPr>
+          <p:cNvPr id="2" name="placeholder_1">
+            <a:extLst xmlns:a="http://schemas.openxmlformats.org/drawingml/2006/main">
+              <a:ext uri="{FF2B5EF4-FFF2-40B4-BE49-F238E27FC236}">
+                <a16:creationId xmlns:a16="http://schemas.microsoft.com/office/drawing/2014/main" id="{0572ED7B-698D-4892-9ECC-99EAA947DEB7}"/>
+              </a:ext>
+            </a:extLst>
+          </p:cNvPr>
+          <p:cNvSpPr>
+            <a:spLocks xmlns:a="http://schemas.openxmlformats.org/drawingml/2006/main" noGrp="1"/>
+          </p:cNvSpPr>
+          <p:nvPr>
+            <p:ph type="title" idx="0"/>
+          </p:nvPr>
+        </p:nvSpPr>
+        <p:spPr>
+          <a:xfrm xmlns:a="http://schemas.openxmlformats.org/drawingml/2006/main">
+            <a:off x="571500" y="666750"/>
+            <a:ext cx="11049000" cy="628650"/>
+          </a:xfrm>
+          <a:prstGeom xmlns:a="http://schemas.openxmlformats.org/drawingml/2006/main" prst="rect">
+            <a:avLst/>
+          </a:prstGeom>
+        </p:spPr>
+        <p:txBody>
+          <a:bodyPr xmlns:a="http://schemas.openxmlformats.org/drawingml/2006/main"/>
+          <a:lstStyle xmlns:a="http://schemas.openxmlformats.org/drawingml/2006/main"/>
+          <a:p xmlns:a="http://schemas.openxmlformats.org/drawingml/2006/main">
+            <a:r>
+              <a:t>能力链路标题</a:t>
+            </a:r>
+          </a:p>
+        </p:txBody>
+      </p:sp>
+    </p:spTree>
+  </p:cSld>
+</p:sldLayout>
+</file>
+
+<file path=ppt/slideLayouts/slideLayout16.xml><?xml version="1.0" encoding="utf-8"?>
+<p:sldLayout xmlns:p="http://schemas.openxmlformats.org/presentationml/2006/main">
+  <p:cSld name="Mint · 风险聚焦">
+    <p:spTree>
+      <p:nvGrpSpPr>
+        <p:cNvPr id="1" name=""/>
+        <p:cNvGrpSpPr/>
+        <p:nvPr/>
+      </p:nvGrpSpPr>
+      <p:grpSpPr>
+        <a:xfrm xmlns:a="http://schemas.openxmlformats.org/drawingml/2006/main"/>
+      </p:grpSpPr>
+      <p:sp>
+        <p:nvSpPr>
+          <p:cNvPr id="2" name="placeholder_1">
+            <a:extLst xmlns:a="http://schemas.openxmlformats.org/drawingml/2006/main">
+              <a:ext uri="{FF2B5EF4-FFF2-40B4-BE49-F238E27FC236}">
+                <a16:creationId xmlns:a16="http://schemas.microsoft.com/office/drawing/2014/main" id="{EA22199D-C22A-4BC4-B656-5733E2EEAFC6}"/>
+              </a:ext>
+            </a:extLst>
+          </p:cNvPr>
+          <p:cNvSpPr>
+            <a:spLocks xmlns:a="http://schemas.openxmlformats.org/drawingml/2006/main" noGrp="1"/>
+          </p:cNvSpPr>
+          <p:nvPr>
+            <p:ph type="title" idx="0"/>
+          </p:nvPr>
+        </p:nvSpPr>
+        <p:spPr>
+          <a:xfrm xmlns:a="http://schemas.openxmlformats.org/drawingml/2006/main">
+            <a:off x="571500" y="666750"/>
+            <a:ext cx="11049000" cy="628650"/>
+          </a:xfrm>
+          <a:prstGeom xmlns:a="http://schemas.openxmlformats.org/drawingml/2006/main" prst="rect">
+            <a:avLst/>
+          </a:prstGeom>
+        </p:spPr>
+        <p:txBody>
+          <a:bodyPr xmlns:a="http://schemas.openxmlformats.org/drawingml/2006/main"/>
+          <a:lstStyle xmlns:a="http://schemas.openxmlformats.org/drawingml/2006/main"/>
+          <a:p xmlns:a="http://schemas.openxmlformats.org/drawingml/2006/main">
+            <a:r>
+              <a:t>风险聚焦标题</a:t>
+            </a:r>
+          </a:p>
+        </p:txBody>
+      </p:sp>
+    </p:spTree>
+  </p:cSld>
+</p:sldLayout>
+</file>
+
+<file path=ppt/slideLayouts/slideLayout17.xml><?xml version="1.0" encoding="utf-8"?>
+<p:sldLayout xmlns:p="http://schemas.openxmlformats.org/presentationml/2006/main">
+  <p:cSld name="Mint · 资金决策">
+    <p:spTree>
+      <p:nvGrpSpPr>
+        <p:cNvPr id="1" name=""/>
+        <p:cNvGrpSpPr/>
+        <p:nvPr/>
+      </p:nvGrpSpPr>
+      <p:grpSpPr>
+        <a:xfrm xmlns:a="http://schemas.openxmlformats.org/drawingml/2006/main"/>
+      </p:grpSpPr>
+      <p:sp>
+        <p:nvSpPr>
+          <p:cNvPr id="2" name="placeholder_1">
+            <a:extLst xmlns:a="http://schemas.openxmlformats.org/drawingml/2006/main">
+              <a:ext uri="{FF2B5EF4-FFF2-40B4-BE49-F238E27FC236}">
+                <a16:creationId xmlns:a16="http://schemas.microsoft.com/office/drawing/2014/main" id="{E1025233-0DC2-466E-8FA5-4F4936C8961A}"/>
+              </a:ext>
+            </a:extLst>
+          </p:cNvPr>
+          <p:cNvSpPr>
+            <a:spLocks xmlns:a="http://schemas.openxmlformats.org/drawingml/2006/main" noGrp="1"/>
+          </p:cNvSpPr>
+          <p:nvPr>
+            <p:ph type="title" idx="0"/>
+          </p:nvPr>
+        </p:nvSpPr>
+        <p:spPr>
+          <a:xfrm xmlns:a="http://schemas.openxmlformats.org/drawingml/2006/main">
+            <a:off x="571500" y="666750"/>
+            <a:ext cx="11049000" cy="628650"/>
+          </a:xfrm>
+          <a:prstGeom xmlns:a="http://schemas.openxmlformats.org/drawingml/2006/main" prst="rect">
+            <a:avLst/>
+          </a:prstGeom>
+        </p:spPr>
+        <p:txBody>
+          <a:bodyPr xmlns:a="http://schemas.openxmlformats.org/drawingml/2006/main"/>
+          <a:lstStyle xmlns:a="http://schemas.openxmlformats.org/drawingml/2006/main"/>
+          <a:p xmlns:a="http://schemas.openxmlformats.org/drawingml/2006/main">
+            <a:r>
+              <a:t>资金决策标题</a:t>
+            </a:r>
+          </a:p>
+        </p:txBody>
+      </p:sp>
+    </p:spTree>
+  </p:cSld>
+</p:sldLayout>
+</file>
+
+<file path=ppt/slideLayouts/slideLayout18.xml><?xml version="1.0" encoding="utf-8"?>
 <p:sldLayout xmlns:p="http://schemas.openxmlformats.org/presentationml/2006/main">
   <p:cSld name="Mint · 章节页">
     <p:spTree>
@@ -1701,7 +2058,7 @@
           <p:cNvPr id="2" name="placeholder_1">
             <a:extLst xmlns:a="http://schemas.openxmlformats.org/drawingml/2006/main">
               <a:ext uri="{FF2B5EF4-FFF2-40B4-BE49-F238E27FC236}">
-                <a16:creationId xmlns:a16="http://schemas.microsoft.com/office/drawing/2014/main" id="{EAC6F422-573A-4638-9835-4F544211E9EF}"/>
+                <a16:creationId xmlns:a16="http://schemas.microsoft.com/office/drawing/2014/main" id="{8834652F-FB24-43F1-B2FE-64F84E6711AA}"/>
               </a:ext>
             </a:extLst>
           </p:cNvPr>
@@ -1736,7 +2093,7 @@
 </p:sldLayout>
 </file>
 
-<file path=ppt/slideLayouts/slideLayout16.xml><?xml version="1.0" encoding="utf-8"?>
+<file path=ppt/slideLayouts/slideLayout19.xml><?xml version="1.0" encoding="utf-8"?>
 <p:sldLayout xmlns:p="http://schemas.openxmlformats.org/presentationml/2006/main">
   <p:cSld name="Mint · 结尾页">
     <p:spTree>
@@ -1753,7 +2110,7 @@
           <p:cNvPr id="2" name="placeholder_1">
             <a:extLst xmlns:a="http://schemas.openxmlformats.org/drawingml/2006/main">
               <a:ext uri="{FF2B5EF4-FFF2-40B4-BE49-F238E27FC236}">
-                <a16:creationId xmlns:a16="http://schemas.microsoft.com/office/drawing/2014/main" id="{86A5FDB6-B8CC-412F-BFFB-EC868707037E}"/>
+                <a16:creationId xmlns:a16="http://schemas.microsoft.com/office/drawing/2014/main" id="{84C3E027-0A74-403C-AEF0-CDF84A3DCFF8}"/>
               </a:ext>
             </a:extLst>
           </p:cNvPr>
@@ -1805,7 +2162,7 @@
           <p:cNvPr id="2" name="placeholder_1">
             <a:extLst xmlns:a="http://schemas.openxmlformats.org/drawingml/2006/main">
               <a:ext uri="{FF2B5EF4-FFF2-40B4-BE49-F238E27FC236}">
-                <a16:creationId xmlns:a16="http://schemas.microsoft.com/office/drawing/2014/main" id="{C75BF00A-180B-4955-A182-873E87E7EB35}"/>
+                <a16:creationId xmlns:a16="http://schemas.microsoft.com/office/drawing/2014/main" id="{0C588439-E6BF-400B-AFA1-53B37568ED86}"/>
               </a:ext>
             </a:extLst>
           </p:cNvPr>
@@ -1857,7 +2214,7 @@
           <p:cNvPr id="2" name="placeholder_1">
             <a:extLst xmlns:a="http://schemas.openxmlformats.org/drawingml/2006/main">
               <a:ext uri="{FF2B5EF4-FFF2-40B4-BE49-F238E27FC236}">
-                <a16:creationId xmlns:a16="http://schemas.microsoft.com/office/drawing/2014/main" id="{591DA47C-839D-4739-934A-5400D7B1B74C}"/>
+                <a16:creationId xmlns:a16="http://schemas.microsoft.com/office/drawing/2014/main" id="{287212EB-97DF-471D-AC5C-067E1CC7AAAB}"/>
               </a:ext>
             </a:extLst>
           </p:cNvPr>
@@ -1909,7 +2266,7 @@
           <p:cNvPr id="2" name="placeholder_1">
             <a:extLst xmlns:a="http://schemas.openxmlformats.org/drawingml/2006/main">
               <a:ext uri="{FF2B5EF4-FFF2-40B4-BE49-F238E27FC236}">
-                <a16:creationId xmlns:a16="http://schemas.microsoft.com/office/drawing/2014/main" id="{F60E65B0-1709-44B8-BA11-E17CF046E91A}"/>
+                <a16:creationId xmlns:a16="http://schemas.microsoft.com/office/drawing/2014/main" id="{DB24FC6E-0F3A-49D0-98E1-AB2AB1408B4C}"/>
               </a:ext>
             </a:extLst>
           </p:cNvPr>
@@ -1961,7 +2318,7 @@
           <p:cNvPr id="2" name="placeholder_1">
             <a:extLst xmlns:a="http://schemas.openxmlformats.org/drawingml/2006/main">
               <a:ext uri="{FF2B5EF4-FFF2-40B4-BE49-F238E27FC236}">
-                <a16:creationId xmlns:a16="http://schemas.microsoft.com/office/drawing/2014/main" id="{616792A8-79B5-4E5E-8BF4-A4E40A89BFF7}"/>
+                <a16:creationId xmlns:a16="http://schemas.microsoft.com/office/drawing/2014/main" id="{5E90EF40-783A-432A-827E-68031EBE67EE}"/>
               </a:ext>
             </a:extLst>
           </p:cNvPr>
@@ -2013,7 +2370,7 @@
           <p:cNvPr id="2" name="placeholder_1">
             <a:extLst xmlns:a="http://schemas.openxmlformats.org/drawingml/2006/main">
               <a:ext uri="{FF2B5EF4-FFF2-40B4-BE49-F238E27FC236}">
-                <a16:creationId xmlns:a16="http://schemas.microsoft.com/office/drawing/2014/main" id="{8F5571FD-2011-44EA-B65B-78AEB04C0504}"/>
+                <a16:creationId xmlns:a16="http://schemas.microsoft.com/office/drawing/2014/main" id="{A59D9E9D-432A-4629-A834-850C28E6F351}"/>
               </a:ext>
             </a:extLst>
           </p:cNvPr>
@@ -2065,7 +2422,7 @@
           <p:cNvPr id="2" name="placeholder_1">
             <a:extLst xmlns:a="http://schemas.openxmlformats.org/drawingml/2006/main">
               <a:ext uri="{FF2B5EF4-FFF2-40B4-BE49-F238E27FC236}">
-                <a16:creationId xmlns:a16="http://schemas.microsoft.com/office/drawing/2014/main" id="{99516655-216D-4DB2-B9C0-70F61DFFF702}"/>
+                <a16:creationId xmlns:a16="http://schemas.microsoft.com/office/drawing/2014/main" id="{D16D2610-A155-476C-99E5-F9D92F374A8C}"/>
               </a:ext>
             </a:extLst>
           </p:cNvPr>
@@ -2117,7 +2474,7 @@
           <p:cNvPr id="2" name="placeholder_1">
             <a:extLst xmlns:a="http://schemas.openxmlformats.org/drawingml/2006/main">
               <a:ext uri="{FF2B5EF4-FFF2-40B4-BE49-F238E27FC236}">
-                <a16:creationId xmlns:a16="http://schemas.microsoft.com/office/drawing/2014/main" id="{7AE035AA-3ABE-4531-A953-CAC0E0F1B662}"/>
+                <a16:creationId xmlns:a16="http://schemas.microsoft.com/office/drawing/2014/main" id="{B2E21B38-E315-4985-ACB3-6902EF746BAF}"/>
               </a:ext>
             </a:extLst>
           </p:cNvPr>
@@ -2169,7 +2526,7 @@
           <p:cNvPr id="2" name="placeholder_1">
             <a:extLst xmlns:a="http://schemas.openxmlformats.org/drawingml/2006/main">
               <a:ext uri="{FF2B5EF4-FFF2-40B4-BE49-F238E27FC236}">
-                <a16:creationId xmlns:a16="http://schemas.microsoft.com/office/drawing/2014/main" id="{E9932D0D-950B-4B13-93FC-273D06433E21}"/>
+                <a16:creationId xmlns:a16="http://schemas.microsoft.com/office/drawing/2014/main" id="{002CA5DF-ABF1-442A-B38C-92773B011F65}"/>
               </a:ext>
             </a:extLst>
           </p:cNvPr>
@@ -2225,7 +2582,7 @@
   </p:cSld>
   <p:clrMap bg1="lt1" tx1="dk1" bg2="lt2" tx2="dk2" accent1="accent1" accent2="accent2" accent3="accent3" accent4="accent4" accent5="accent5" accent6="accent6" hlink="hlink" folHlink="folHlink"/>
   <p:sldLayoutIdLst>
-    <p:sldLayoutId xmlns:r="http://schemas.openxmlformats.org/officeDocument/2006/relationships" id="2147483649" r:id="R1da75cc76d65433f"/>
+    <p:sldLayoutId xmlns:r="http://schemas.openxmlformats.org/officeDocument/2006/relationships" id="2147483649" r:id="Rf94b1099bc794870"/>
   </p:sldLayoutIdLst>
   <p:txStyles>
     <p:titleStyle>
@@ -2523,21 +2880,24 @@
   </p:cSld>
   <p:clrMap bg1="lt1" tx1="dk1" bg2="lt2" tx2="dk2" accent1="accent1" accent2="accent2" accent3="accent3" accent4="accent4" accent5="accent5" accent6="accent6" hlink="hlink" folHlink="folHlink"/>
   <p:sldLayoutIdLst>
-    <p:sldLayoutId xmlns:r="http://schemas.openxmlformats.org/officeDocument/2006/relationships" id="2147483651" r:id="Rc38a91c464664ab1"/>
-    <p:sldLayoutId xmlns:r="http://schemas.openxmlformats.org/officeDocument/2006/relationships" id="2147483652" r:id="R1e9e14b3d5ef4421"/>
-    <p:sldLayoutId xmlns:r="http://schemas.openxmlformats.org/officeDocument/2006/relationships" id="2147483653" r:id="Refcc08a90ef84a28"/>
-    <p:sldLayoutId xmlns:r="http://schemas.openxmlformats.org/officeDocument/2006/relationships" id="2147483654" r:id="Re282a36e178d4f63"/>
-    <p:sldLayoutId xmlns:r="http://schemas.openxmlformats.org/officeDocument/2006/relationships" id="2147483655" r:id="R6ed1e5e6d9874d64"/>
-    <p:sldLayoutId xmlns:r="http://schemas.openxmlformats.org/officeDocument/2006/relationships" id="2147483656" r:id="R02eb4694df794ee9"/>
-    <p:sldLayoutId xmlns:r="http://schemas.openxmlformats.org/officeDocument/2006/relationships" id="2147483657" r:id="R87168ae1d6eb4dac"/>
-    <p:sldLayoutId xmlns:r="http://schemas.openxmlformats.org/officeDocument/2006/relationships" id="2147483658" r:id="R9852907604a9427a"/>
-    <p:sldLayoutId xmlns:r="http://schemas.openxmlformats.org/officeDocument/2006/relationships" id="2147483659" r:id="R45acdd57e6be4421"/>
-    <p:sldLayoutId xmlns:r="http://schemas.openxmlformats.org/officeDocument/2006/relationships" id="2147483660" r:id="Rd35cb4ba649c413d"/>
-    <p:sldLayoutId xmlns:r="http://schemas.openxmlformats.org/officeDocument/2006/relationships" id="2147483661" r:id="Ra3e8b5c7b4124afc"/>
-    <p:sldLayoutId xmlns:r="http://schemas.openxmlformats.org/officeDocument/2006/relationships" id="2147483662" r:id="R29f417dc040440de"/>
-    <p:sldLayoutId xmlns:r="http://schemas.openxmlformats.org/officeDocument/2006/relationships" id="2147483663" r:id="R1109e172b97d4600"/>
-    <p:sldLayoutId xmlns:r="http://schemas.openxmlformats.org/officeDocument/2006/relationships" id="2147483664" r:id="Ra26a6e06820442c6"/>
-    <p:sldLayoutId xmlns:r="http://schemas.openxmlformats.org/officeDocument/2006/relationships" id="2147483665" r:id="Rc3725bc226ad43d4"/>
+    <p:sldLayoutId xmlns:r="http://schemas.openxmlformats.org/officeDocument/2006/relationships" id="2147483651" r:id="R3f6e89b7fab246cc"/>
+    <p:sldLayoutId xmlns:r="http://schemas.openxmlformats.org/officeDocument/2006/relationships" id="2147483652" r:id="Rd0baa5b359eb4e27"/>
+    <p:sldLayoutId xmlns:r="http://schemas.openxmlformats.org/officeDocument/2006/relationships" id="2147483653" r:id="R079eba36541745ca"/>
+    <p:sldLayoutId xmlns:r="http://schemas.openxmlformats.org/officeDocument/2006/relationships" id="2147483654" r:id="Rd50e1108809b47fa"/>
+    <p:sldLayoutId xmlns:r="http://schemas.openxmlformats.org/officeDocument/2006/relationships" id="2147483655" r:id="R5d1e961149134a5c"/>
+    <p:sldLayoutId xmlns:r="http://schemas.openxmlformats.org/officeDocument/2006/relationships" id="2147483656" r:id="Rad2582c3554a4167"/>
+    <p:sldLayoutId xmlns:r="http://schemas.openxmlformats.org/officeDocument/2006/relationships" id="2147483657" r:id="Rcbf2c3a731d14290"/>
+    <p:sldLayoutId xmlns:r="http://schemas.openxmlformats.org/officeDocument/2006/relationships" id="2147483658" r:id="Rabaada37e9f04de9"/>
+    <p:sldLayoutId xmlns:r="http://schemas.openxmlformats.org/officeDocument/2006/relationships" id="2147483659" r:id="R9f3df0090a794a33"/>
+    <p:sldLayoutId xmlns:r="http://schemas.openxmlformats.org/officeDocument/2006/relationships" id="2147483660" r:id="R6d13b13aa77349d6"/>
+    <p:sldLayoutId xmlns:r="http://schemas.openxmlformats.org/officeDocument/2006/relationships" id="2147483661" r:id="R3ee6b822089f44f9"/>
+    <p:sldLayoutId xmlns:r="http://schemas.openxmlformats.org/officeDocument/2006/relationships" id="2147483662" r:id="R830b39c4f0344c16"/>
+    <p:sldLayoutId xmlns:r="http://schemas.openxmlformats.org/officeDocument/2006/relationships" id="2147483663" r:id="Rd71acfe0a2d4419d"/>
+    <p:sldLayoutId xmlns:r="http://schemas.openxmlformats.org/officeDocument/2006/relationships" id="2147483664" r:id="R5f476d1be0a04024"/>
+    <p:sldLayoutId xmlns:r="http://schemas.openxmlformats.org/officeDocument/2006/relationships" id="2147483665" r:id="R023a2c1dbe364642"/>
+    <p:sldLayoutId xmlns:r="http://schemas.openxmlformats.org/officeDocument/2006/relationships" id="2147483666" r:id="Ra1764a903ccc4ecd"/>
+    <p:sldLayoutId xmlns:r="http://schemas.openxmlformats.org/officeDocument/2006/relationships" id="2147483667" r:id="R9d4125e3a50444ca"/>
+    <p:sldLayoutId xmlns:r="http://schemas.openxmlformats.org/officeDocument/2006/relationships" id="2147483668" r:id="R7809815c1cd94b14"/>
   </p:sldLayoutIdLst>
 </p:sldMaster>
 </file>
@@ -3420,7 +3780,7 @@
           <p:cNvPr id="13" name="cover-light-panel">
             <a:extLst xmlns:a="http://schemas.openxmlformats.org/drawingml/2006/main">
               <a:ext uri="{FF2B5EF4-FFF2-40B4-BE49-F238E27FC236}">
-                <a16:creationId xmlns:a16="http://schemas.microsoft.com/office/drawing/2014/main" id="{4D177AE3-AB31-4DBA-B82D-AE98149BD1D0}"/>
+                <a16:creationId xmlns:a16="http://schemas.microsoft.com/office/drawing/2014/main" id="{4FB8E102-1F2B-45BC-9F00-7CBA6199E6F6}"/>
               </a:ext>
             </a:extLst>
           </p:cNvPr>
@@ -3451,7 +3811,7 @@
           <p:cNvPr id="2" name="cover-eyebrow">
             <a:extLst xmlns:a="http://schemas.openxmlformats.org/drawingml/2006/main">
               <a:ext uri="{FF2B5EF4-FFF2-40B4-BE49-F238E27FC236}">
-                <a16:creationId xmlns:a16="http://schemas.microsoft.com/office/drawing/2014/main" id="{AA522438-21A3-44F1-9E26-A144EFDC593B}"/>
+                <a16:creationId xmlns:a16="http://schemas.microsoft.com/office/drawing/2014/main" id="{55360180-D474-4C92-9ED2-F9A1F2FB323A}"/>
               </a:ext>
             </a:extLst>
           </p:cNvPr>
@@ -3491,7 +3851,7 @@
                   <a:srgbClr val="8CCDB2"/>
                 </a:solidFill>
               </a:rPr>
-              <a:t>MINT · REPORT SYSTEM V0.2</a:t>
+              <a:t>MINT · REPORT SYSTEM V0.3</a:t>
             </a:r>
           </a:p>
         </p:txBody>
@@ -3501,7 +3861,7 @@
           <p:cNvPr id="3" name="cover-title">
             <a:extLst xmlns:a="http://schemas.openxmlformats.org/drawingml/2006/main">
               <a:ext uri="{FF2B5EF4-FFF2-40B4-BE49-F238E27FC236}">
-                <a16:creationId xmlns:a16="http://schemas.microsoft.com/office/drawing/2014/main" id="{89D9B770-D127-47EA-9EF6-801F8AC376EB}"/>
+                <a16:creationId xmlns:a16="http://schemas.microsoft.com/office/drawing/2014/main" id="{5E69F5C0-B87A-42D0-86AA-AF81F75227E4}"/>
               </a:ext>
             </a:extLst>
           </p:cNvPr>
@@ -3551,7 +3911,7 @@
           <p:cNvPr id="4" name="cover-subtitle">
             <a:extLst xmlns:a="http://schemas.openxmlformats.org/drawingml/2006/main">
               <a:ext uri="{FF2B5EF4-FFF2-40B4-BE49-F238E27FC236}">
-                <a16:creationId xmlns:a16="http://schemas.microsoft.com/office/drawing/2014/main" id="{EE4A96F9-1CE2-445A-A57B-1931ADA53FF9}"/>
+                <a16:creationId xmlns:a16="http://schemas.microsoft.com/office/drawing/2014/main" id="{0218BF75-F1C8-42D7-AE5C-3087F3D67BBB}"/>
               </a:ext>
             </a:extLst>
           </p:cNvPr>
@@ -3601,7 +3961,7 @@
           <p:cNvPr id="5" name="rule-70-585">
             <a:extLst xmlns:a="http://schemas.openxmlformats.org/drawingml/2006/main">
               <a:ext uri="{FF2B5EF4-FFF2-40B4-BE49-F238E27FC236}">
-                <a16:creationId xmlns:a16="http://schemas.microsoft.com/office/drawing/2014/main" id="{94CC6CD0-E737-42E5-9E4E-D9D39A47631A}"/>
+                <a16:creationId xmlns:a16="http://schemas.microsoft.com/office/drawing/2014/main" id="{7CA54C70-1C5A-45AB-B4CD-59947125E09B}"/>
               </a:ext>
             </a:extLst>
           </p:cNvPr>
@@ -3632,7 +3992,7 @@
           <p:cNvPr id="6" name="cover-meta">
             <a:extLst xmlns:a="http://schemas.openxmlformats.org/drawingml/2006/main">
               <a:ext uri="{FF2B5EF4-FFF2-40B4-BE49-F238E27FC236}">
-                <a16:creationId xmlns:a16="http://schemas.microsoft.com/office/drawing/2014/main" id="{86A9DF0F-70A3-4041-B7F8-7AC1F1EB1104}"/>
+                <a16:creationId xmlns:a16="http://schemas.microsoft.com/office/drawing/2014/main" id="{6130EB8A-44E2-458B-BC9E-9CDE49B8B5B7}"/>
               </a:ext>
             </a:extLst>
           </p:cNvPr>
@@ -3682,7 +4042,7 @@
           <p:cNvPr id="7" name="arc-0">
             <a:extLst xmlns:a="http://schemas.openxmlformats.org/drawingml/2006/main">
               <a:ext uri="{FF2B5EF4-FFF2-40B4-BE49-F238E27FC236}">
-                <a16:creationId xmlns:a16="http://schemas.microsoft.com/office/drawing/2014/main" id="{79DC80AC-F925-4571-AC40-3E52ADE46BDF}"/>
+                <a16:creationId xmlns:a16="http://schemas.microsoft.com/office/drawing/2014/main" id="{DFA736AF-992C-4DE0-BFD1-2E99506DF43A}"/>
               </a:ext>
             </a:extLst>
           </p:cNvPr>
@@ -3713,7 +4073,7 @@
           <p:cNvPr id="8" name="arc-1">
             <a:extLst xmlns:a="http://schemas.openxmlformats.org/drawingml/2006/main">
               <a:ext uri="{FF2B5EF4-FFF2-40B4-BE49-F238E27FC236}">
-                <a16:creationId xmlns:a16="http://schemas.microsoft.com/office/drawing/2014/main" id="{EBBBA300-8069-4727-8B62-20EB66F869EC}"/>
+                <a16:creationId xmlns:a16="http://schemas.microsoft.com/office/drawing/2014/main" id="{CE9C025A-A788-48C8-9B7E-CCA7518F0D7D}"/>
               </a:ext>
             </a:extLst>
           </p:cNvPr>
@@ -3744,7 +4104,7 @@
           <p:cNvPr id="9" name="arc-2">
             <a:extLst xmlns:a="http://schemas.openxmlformats.org/drawingml/2006/main">
               <a:ext uri="{FF2B5EF4-FFF2-40B4-BE49-F238E27FC236}">
-                <a16:creationId xmlns:a16="http://schemas.microsoft.com/office/drawing/2014/main" id="{7948B4D5-7F53-4EB1-905F-F1732FB07443}"/>
+                <a16:creationId xmlns:a16="http://schemas.microsoft.com/office/drawing/2014/main" id="{75DE574B-F742-44D8-9B6C-E1F74E89E539}"/>
               </a:ext>
             </a:extLst>
           </p:cNvPr>
@@ -3775,7 +4135,7 @@
           <p:cNvPr id="10" name="arc-3">
             <a:extLst xmlns:a="http://schemas.openxmlformats.org/drawingml/2006/main">
               <a:ext uri="{FF2B5EF4-FFF2-40B4-BE49-F238E27FC236}">
-                <a16:creationId xmlns:a16="http://schemas.microsoft.com/office/drawing/2014/main" id="{B8AC17BD-8356-4502-BABE-9AE09F64D334}"/>
+                <a16:creationId xmlns:a16="http://schemas.microsoft.com/office/drawing/2014/main" id="{CB93A2AC-262A-4F42-B73A-E5C8BD3E4629}"/>
               </a:ext>
             </a:extLst>
           </p:cNvPr>
@@ -3806,7 +4166,7 @@
           <p:cNvPr id="11" name="cover-mark">
             <a:extLst xmlns:a="http://schemas.openxmlformats.org/drawingml/2006/main">
               <a:ext uri="{FF2B5EF4-FFF2-40B4-BE49-F238E27FC236}">
-                <a16:creationId xmlns:a16="http://schemas.microsoft.com/office/drawing/2014/main" id="{CB1177D9-48E4-436C-BD8F-35C3C74C9028}"/>
+                <a16:creationId xmlns:a16="http://schemas.microsoft.com/office/drawing/2014/main" id="{7BE6E6A9-F717-4B51-BB40-7C67E4FC8CE4}"/>
               </a:ext>
             </a:extLst>
           </p:cNvPr>
@@ -3856,7 +4216,7 @@
           <p:cNvPr id="12" name="cover-brand">
             <a:extLst xmlns:a="http://schemas.openxmlformats.org/drawingml/2006/main">
               <a:ext uri="{FF2B5EF4-FFF2-40B4-BE49-F238E27FC236}">
-                <a16:creationId xmlns:a16="http://schemas.microsoft.com/office/drawing/2014/main" id="{B6E62735-2727-4361-BDA6-970D0D5EE09B}"/>
+                <a16:creationId xmlns:a16="http://schemas.microsoft.com/office/drawing/2014/main" id="{A5337B93-ADDE-4706-9129-69F765134DAF}"/>
               </a:ext>
             </a:extLst>
           </p:cNvPr>
@@ -3904,7 +4264,7 @@
     </p:spTree>
     <p:extLst>
       <p:ext uri="{BB962C8B-B14F-4D97-AF65-F5344CB8AC3E}">
-        <p14:creationId xmlns:p14="http://schemas.microsoft.com/office/powerpoint/2010/main" val="1947416467"/>
+        <p14:creationId xmlns:p14="http://schemas.microsoft.com/office/powerpoint/2010/main" val="999600701"/>
       </p:ext>
     </p:extLst>
   </p:cSld>
@@ -3935,7 +4295,7 @@
           <p:cNvPr id="61" name="rule-60-45">
             <a:extLst xmlns:a="http://schemas.openxmlformats.org/drawingml/2006/main">
               <a:ext uri="{FF2B5EF4-FFF2-40B4-BE49-F238E27FC236}">
-                <a16:creationId xmlns:a16="http://schemas.microsoft.com/office/drawing/2014/main" id="{9523ACBD-86D3-469F-A841-C5829BC773AC}"/>
+                <a16:creationId xmlns:a16="http://schemas.microsoft.com/office/drawing/2014/main" id="{A07DCCAF-C620-4438-A44A-AE97AD423D5A}"/>
               </a:ext>
             </a:extLst>
           </p:cNvPr>
@@ -3966,7 +4326,7 @@
           <p:cNvPr id="2" name="chapter-accent">
             <a:extLst xmlns:a="http://schemas.openxmlformats.org/drawingml/2006/main">
               <a:ext uri="{FF2B5EF4-FFF2-40B4-BE49-F238E27FC236}">
-                <a16:creationId xmlns:a16="http://schemas.microsoft.com/office/drawing/2014/main" id="{089DD85E-9244-45DB-B4BF-740609DCDEB2}"/>
+                <a16:creationId xmlns:a16="http://schemas.microsoft.com/office/drawing/2014/main" id="{F116B04A-79D8-4B16-B1C9-C2A205167CDD}"/>
               </a:ext>
             </a:extLst>
           </p:cNvPr>
@@ -3997,7 +4357,7 @@
           <p:cNvPr id="3" name="chapter">
             <a:extLst xmlns:a="http://schemas.openxmlformats.org/drawingml/2006/main">
               <a:ext uri="{FF2B5EF4-FFF2-40B4-BE49-F238E27FC236}">
-                <a16:creationId xmlns:a16="http://schemas.microsoft.com/office/drawing/2014/main" id="{EC4BAA31-8798-42D6-A7AB-8BD25713CF64}"/>
+                <a16:creationId xmlns:a16="http://schemas.microsoft.com/office/drawing/2014/main" id="{A9AB00EC-B795-4E8A-856D-2FDBBE8C7311}"/>
               </a:ext>
             </a:extLst>
           </p:cNvPr>
@@ -4047,7 +4407,7 @@
           <p:cNvPr id="4" name="page-number">
             <a:extLst xmlns:a="http://schemas.openxmlformats.org/drawingml/2006/main">
               <a:ext uri="{FF2B5EF4-FFF2-40B4-BE49-F238E27FC236}">
-                <a16:creationId xmlns:a16="http://schemas.microsoft.com/office/drawing/2014/main" id="{C566CAE4-ECC6-44AA-8156-DCBA683A7D32}"/>
+                <a16:creationId xmlns:a16="http://schemas.microsoft.com/office/drawing/2014/main" id="{546CB9E1-4E65-4E36-BDD0-E2577B2FC878}"/>
               </a:ext>
             </a:extLst>
           </p:cNvPr>
@@ -4097,7 +4457,7 @@
           <p:cNvPr id="5" name="rule-60-674">
             <a:extLst xmlns:a="http://schemas.openxmlformats.org/drawingml/2006/main">
               <a:ext uri="{FF2B5EF4-FFF2-40B4-BE49-F238E27FC236}">
-                <a16:creationId xmlns:a16="http://schemas.microsoft.com/office/drawing/2014/main" id="{B10C2988-5923-4100-AC20-36289E903807}"/>
+                <a16:creationId xmlns:a16="http://schemas.microsoft.com/office/drawing/2014/main" id="{386A4475-BCD1-4AA5-A65A-C3199D681CA3}"/>
               </a:ext>
             </a:extLst>
           </p:cNvPr>
@@ -4128,7 +4488,7 @@
           <p:cNvPr id="6" name="brand">
             <a:extLst xmlns:a="http://schemas.openxmlformats.org/drawingml/2006/main">
               <a:ext uri="{FF2B5EF4-FFF2-40B4-BE49-F238E27FC236}">
-                <a16:creationId xmlns:a16="http://schemas.microsoft.com/office/drawing/2014/main" id="{A9EAF1CD-0EC4-42B2-A3C4-BDDBB063D119}"/>
+                <a16:creationId xmlns:a16="http://schemas.microsoft.com/office/drawing/2014/main" id="{D1EC4F7F-E38A-4A50-9067-B04974E9F739}"/>
               </a:ext>
             </a:extLst>
           </p:cNvPr>
@@ -4178,7 +4538,7 @@
           <p:cNvPr id="7" name="source">
             <a:extLst xmlns:a="http://schemas.openxmlformats.org/drawingml/2006/main">
               <a:ext uri="{FF2B5EF4-FFF2-40B4-BE49-F238E27FC236}">
-                <a16:creationId xmlns:a16="http://schemas.microsoft.com/office/drawing/2014/main" id="{0BC860E5-EF04-4639-9F8D-7476DEC9DC16}"/>
+                <a16:creationId xmlns:a16="http://schemas.microsoft.com/office/drawing/2014/main" id="{F54C8C60-EEBC-4DCD-B163-95A9F0F7C56C}"/>
               </a:ext>
             </a:extLst>
           </p:cNvPr>
@@ -4228,7 +4588,7 @@
           <p:cNvPr id="8" name="footer-page">
             <a:extLst xmlns:a="http://schemas.openxmlformats.org/drawingml/2006/main">
               <a:ext uri="{FF2B5EF4-FFF2-40B4-BE49-F238E27FC236}">
-                <a16:creationId xmlns:a16="http://schemas.microsoft.com/office/drawing/2014/main" id="{629CF282-2432-4BCE-A932-173923396C8D}"/>
+                <a16:creationId xmlns:a16="http://schemas.microsoft.com/office/drawing/2014/main" id="{F18E889F-F381-46E8-BF41-0F998F17A909}"/>
               </a:ext>
             </a:extLst>
           </p:cNvPr>
@@ -4268,7 +4628,7 @@
                   <a:srgbClr val="69766F"/>
                 </a:solidFill>
               </a:rPr>
-              <a:t>10 / 15</a:t>
+              <a:t>10 / 18</a:t>
             </a:r>
           </a:p>
         </p:txBody>
@@ -4278,7 +4638,7 @@
           <p:cNvPr id="9" name="page-title">
             <a:extLst xmlns:a="http://schemas.openxmlformats.org/drawingml/2006/main">
               <a:ext uri="{FF2B5EF4-FFF2-40B4-BE49-F238E27FC236}">
-                <a16:creationId xmlns:a16="http://schemas.microsoft.com/office/drawing/2014/main" id="{6EE229A1-6771-44EF-A450-3596600F11A2}"/>
+                <a16:creationId xmlns:a16="http://schemas.microsoft.com/office/drawing/2014/main" id="{CBC70552-6723-4BE5-9DE4-D72899FDB099}"/>
               </a:ext>
             </a:extLst>
           </p:cNvPr>
@@ -4328,7 +4688,7 @@
           <p:cNvPr id="10" name="page-lead">
             <a:extLst xmlns:a="http://schemas.openxmlformats.org/drawingml/2006/main">
               <a:ext uri="{FF2B5EF4-FFF2-40B4-BE49-F238E27FC236}">
-                <a16:creationId xmlns:a16="http://schemas.microsoft.com/office/drawing/2014/main" id="{B2498191-FEDD-410D-8F91-853ED46EB258}"/>
+                <a16:creationId xmlns:a16="http://schemas.microsoft.com/office/drawing/2014/main" id="{554528BA-7AA8-4A37-94A2-E0811A8BDA07}"/>
               </a:ext>
             </a:extLst>
           </p:cNvPr>
@@ -4378,7 +4738,7 @@
           <p:cNvPr id="11" name="th-0">
             <a:extLst xmlns:a="http://schemas.openxmlformats.org/drawingml/2006/main">
               <a:ext uri="{FF2B5EF4-FFF2-40B4-BE49-F238E27FC236}">
-                <a16:creationId xmlns:a16="http://schemas.microsoft.com/office/drawing/2014/main" id="{84F2A2D3-EAAD-401F-9019-E5F0E49AAEC7}"/>
+                <a16:creationId xmlns:a16="http://schemas.microsoft.com/office/drawing/2014/main" id="{DE3AEEFD-EF2D-4794-9344-1499C8BCE5CA}"/>
               </a:ext>
             </a:extLst>
           </p:cNvPr>
@@ -4409,7 +4769,7 @@
           <p:cNvPr id="12" name="th-text-0">
             <a:extLst xmlns:a="http://schemas.openxmlformats.org/drawingml/2006/main">
               <a:ext uri="{FF2B5EF4-FFF2-40B4-BE49-F238E27FC236}">
-                <a16:creationId xmlns:a16="http://schemas.microsoft.com/office/drawing/2014/main" id="{A4FC64EF-80B2-4400-BA22-DAFF437EFF9C}"/>
+                <a16:creationId xmlns:a16="http://schemas.microsoft.com/office/drawing/2014/main" id="{D0A859C3-0DA1-47EA-9D9E-8770CD72949E}"/>
               </a:ext>
             </a:extLst>
           </p:cNvPr>
@@ -4459,7 +4819,7 @@
           <p:cNvPr id="13" name="th-1">
             <a:extLst xmlns:a="http://schemas.openxmlformats.org/drawingml/2006/main">
               <a:ext uri="{FF2B5EF4-FFF2-40B4-BE49-F238E27FC236}">
-                <a16:creationId xmlns:a16="http://schemas.microsoft.com/office/drawing/2014/main" id="{5FCDCB59-10EB-44C5-910F-29790C916DAA}"/>
+                <a16:creationId xmlns:a16="http://schemas.microsoft.com/office/drawing/2014/main" id="{38401FB6-A034-46FF-9F9B-6B762E76BD91}"/>
               </a:ext>
             </a:extLst>
           </p:cNvPr>
@@ -4490,7 +4850,7 @@
           <p:cNvPr id="14" name="th-text-1">
             <a:extLst xmlns:a="http://schemas.openxmlformats.org/drawingml/2006/main">
               <a:ext uri="{FF2B5EF4-FFF2-40B4-BE49-F238E27FC236}">
-                <a16:creationId xmlns:a16="http://schemas.microsoft.com/office/drawing/2014/main" id="{92C26ADE-72BB-43F9-91BB-5B6D1ED28E84}"/>
+                <a16:creationId xmlns:a16="http://schemas.microsoft.com/office/drawing/2014/main" id="{1F1086DB-49E0-4B37-A412-B7C5DAEAAA3F}"/>
               </a:ext>
             </a:extLst>
           </p:cNvPr>
@@ -4540,7 +4900,7 @@
           <p:cNvPr id="15" name="th-2">
             <a:extLst xmlns:a="http://schemas.openxmlformats.org/drawingml/2006/main">
               <a:ext uri="{FF2B5EF4-FFF2-40B4-BE49-F238E27FC236}">
-                <a16:creationId xmlns:a16="http://schemas.microsoft.com/office/drawing/2014/main" id="{B127C81D-04AF-48FC-AD47-4BA6B3809B55}"/>
+                <a16:creationId xmlns:a16="http://schemas.microsoft.com/office/drawing/2014/main" id="{AF5054CE-0014-4683-827F-8908AB5D51B0}"/>
               </a:ext>
             </a:extLst>
           </p:cNvPr>
@@ -4571,7 +4931,7 @@
           <p:cNvPr id="16" name="th-text-2">
             <a:extLst xmlns:a="http://schemas.openxmlformats.org/drawingml/2006/main">
               <a:ext uri="{FF2B5EF4-FFF2-40B4-BE49-F238E27FC236}">
-                <a16:creationId xmlns:a16="http://schemas.microsoft.com/office/drawing/2014/main" id="{C3A7385F-EB25-4B16-BA8E-69BC01FDB136}"/>
+                <a16:creationId xmlns:a16="http://schemas.microsoft.com/office/drawing/2014/main" id="{0CCD6191-FC55-4379-877C-AF715173EABE}"/>
               </a:ext>
             </a:extLst>
           </p:cNvPr>
@@ -4621,7 +4981,7 @@
           <p:cNvPr id="17" name="th-3">
             <a:extLst xmlns:a="http://schemas.openxmlformats.org/drawingml/2006/main">
               <a:ext uri="{FF2B5EF4-FFF2-40B4-BE49-F238E27FC236}">
-                <a16:creationId xmlns:a16="http://schemas.microsoft.com/office/drawing/2014/main" id="{DB16E2CE-B644-4436-B4EA-45D3173740CB}"/>
+                <a16:creationId xmlns:a16="http://schemas.microsoft.com/office/drawing/2014/main" id="{DF83EDA4-1C59-4E02-BBD8-C23CC31DB729}"/>
               </a:ext>
             </a:extLst>
           </p:cNvPr>
@@ -4652,7 +5012,7 @@
           <p:cNvPr id="18" name="th-text-3">
             <a:extLst xmlns:a="http://schemas.openxmlformats.org/drawingml/2006/main">
               <a:ext uri="{FF2B5EF4-FFF2-40B4-BE49-F238E27FC236}">
-                <a16:creationId xmlns:a16="http://schemas.microsoft.com/office/drawing/2014/main" id="{BB6781D8-1CA0-44F9-A187-41D4F02D9EAC}"/>
+                <a16:creationId xmlns:a16="http://schemas.microsoft.com/office/drawing/2014/main" id="{9433084A-000D-456E-B821-0A4E27D05A35}"/>
               </a:ext>
             </a:extLst>
           </p:cNvPr>
@@ -4702,7 +5062,7 @@
           <p:cNvPr id="19" name="th-4">
             <a:extLst xmlns:a="http://schemas.openxmlformats.org/drawingml/2006/main">
               <a:ext uri="{FF2B5EF4-FFF2-40B4-BE49-F238E27FC236}">
-                <a16:creationId xmlns:a16="http://schemas.microsoft.com/office/drawing/2014/main" id="{F187E242-98A9-4A9C-B933-300317A5EB1B}"/>
+                <a16:creationId xmlns:a16="http://schemas.microsoft.com/office/drawing/2014/main" id="{919A9D35-45C0-4FEB-8248-19C840D816A1}"/>
               </a:ext>
             </a:extLst>
           </p:cNvPr>
@@ -4733,7 +5093,7 @@
           <p:cNvPr id="20" name="th-text-4">
             <a:extLst xmlns:a="http://schemas.openxmlformats.org/drawingml/2006/main">
               <a:ext uri="{FF2B5EF4-FFF2-40B4-BE49-F238E27FC236}">
-                <a16:creationId xmlns:a16="http://schemas.microsoft.com/office/drawing/2014/main" id="{39AFECFE-15DC-47BA-AC87-ACCA8B76E6EB}"/>
+                <a16:creationId xmlns:a16="http://schemas.microsoft.com/office/drawing/2014/main" id="{4F1A1820-BF03-457E-B9E0-A53D42A717BA}"/>
               </a:ext>
             </a:extLst>
           </p:cNvPr>
@@ -4783,7 +5143,7 @@
           <p:cNvPr id="21" name="td-0-0">
             <a:extLst xmlns:a="http://schemas.openxmlformats.org/drawingml/2006/main">
               <a:ext uri="{FF2B5EF4-FFF2-40B4-BE49-F238E27FC236}">
-                <a16:creationId xmlns:a16="http://schemas.microsoft.com/office/drawing/2014/main" id="{53B73BA2-D170-4415-8BD5-D471D253318C}"/>
+                <a16:creationId xmlns:a16="http://schemas.microsoft.com/office/drawing/2014/main" id="{C29B162D-7F4C-4099-B0DA-AF4448247C59}"/>
               </a:ext>
             </a:extLst>
           </p:cNvPr>
@@ -4816,7 +5176,7 @@
           <p:cNvPr id="22" name="td-text-0-0">
             <a:extLst xmlns:a="http://schemas.openxmlformats.org/drawingml/2006/main">
               <a:ext uri="{FF2B5EF4-FFF2-40B4-BE49-F238E27FC236}">
-                <a16:creationId xmlns:a16="http://schemas.microsoft.com/office/drawing/2014/main" id="{1ECDDE81-5436-469E-B900-BE0BB125D327}"/>
+                <a16:creationId xmlns:a16="http://schemas.microsoft.com/office/drawing/2014/main" id="{697AAA4E-B397-4CCA-B8B2-D6D9236CDDC3}"/>
               </a:ext>
             </a:extLst>
           </p:cNvPr>
@@ -4866,7 +5226,7 @@
           <p:cNvPr id="23" name="td-0-1">
             <a:extLst xmlns:a="http://schemas.openxmlformats.org/drawingml/2006/main">
               <a:ext uri="{FF2B5EF4-FFF2-40B4-BE49-F238E27FC236}">
-                <a16:creationId xmlns:a16="http://schemas.microsoft.com/office/drawing/2014/main" id="{A4D1FD20-A29E-4A25-BA5B-9CD0EEBEB841}"/>
+                <a16:creationId xmlns:a16="http://schemas.microsoft.com/office/drawing/2014/main" id="{01555573-D6C9-4865-A1EF-D40CEB37C370}"/>
               </a:ext>
             </a:extLst>
           </p:cNvPr>
@@ -4899,7 +5259,7 @@
           <p:cNvPr id="24" name="td-text-0-1">
             <a:extLst xmlns:a="http://schemas.openxmlformats.org/drawingml/2006/main">
               <a:ext uri="{FF2B5EF4-FFF2-40B4-BE49-F238E27FC236}">
-                <a16:creationId xmlns:a16="http://schemas.microsoft.com/office/drawing/2014/main" id="{5AF5373D-3901-4F4C-B51A-FCD5BAD55C08}"/>
+                <a16:creationId xmlns:a16="http://schemas.microsoft.com/office/drawing/2014/main" id="{4147817D-0297-41E2-B7E7-2FE5BC5278CA}"/>
               </a:ext>
             </a:extLst>
           </p:cNvPr>
@@ -4949,7 +5309,7 @@
           <p:cNvPr id="25" name="td-0-2">
             <a:extLst xmlns:a="http://schemas.openxmlformats.org/drawingml/2006/main">
               <a:ext uri="{FF2B5EF4-FFF2-40B4-BE49-F238E27FC236}">
-                <a16:creationId xmlns:a16="http://schemas.microsoft.com/office/drawing/2014/main" id="{604392CA-9FBE-43A8-8B8B-4F270C698BC1}"/>
+                <a16:creationId xmlns:a16="http://schemas.microsoft.com/office/drawing/2014/main" id="{FE1660E6-FD9B-4DF9-BE25-46FDFE4D6A95}"/>
               </a:ext>
             </a:extLst>
           </p:cNvPr>
@@ -4982,7 +5342,7 @@
           <p:cNvPr id="26" name="td-text-0-2">
             <a:extLst xmlns:a="http://schemas.openxmlformats.org/drawingml/2006/main">
               <a:ext uri="{FF2B5EF4-FFF2-40B4-BE49-F238E27FC236}">
-                <a16:creationId xmlns:a16="http://schemas.microsoft.com/office/drawing/2014/main" id="{918711E2-A223-4D5A-955F-D5B2D7E296E2}"/>
+                <a16:creationId xmlns:a16="http://schemas.microsoft.com/office/drawing/2014/main" id="{A080B44D-5B7F-4683-844B-1966B87AA948}"/>
               </a:ext>
             </a:extLst>
           </p:cNvPr>
@@ -5032,7 +5392,7 @@
           <p:cNvPr id="27" name="td-0-3">
             <a:extLst xmlns:a="http://schemas.openxmlformats.org/drawingml/2006/main">
               <a:ext uri="{FF2B5EF4-FFF2-40B4-BE49-F238E27FC236}">
-                <a16:creationId xmlns:a16="http://schemas.microsoft.com/office/drawing/2014/main" id="{4DF33A7B-FD99-486F-BEE4-9AF6C7857A72}"/>
+                <a16:creationId xmlns:a16="http://schemas.microsoft.com/office/drawing/2014/main" id="{BD7AF5CD-F278-4970-9D84-939F72FEDF00}"/>
               </a:ext>
             </a:extLst>
           </p:cNvPr>
@@ -5065,7 +5425,7 @@
           <p:cNvPr id="28" name="td-text-0-3">
             <a:extLst xmlns:a="http://schemas.openxmlformats.org/drawingml/2006/main">
               <a:ext uri="{FF2B5EF4-FFF2-40B4-BE49-F238E27FC236}">
-                <a16:creationId xmlns:a16="http://schemas.microsoft.com/office/drawing/2014/main" id="{138A20D0-F0AC-4B52-913E-5A599382E2ED}"/>
+                <a16:creationId xmlns:a16="http://schemas.microsoft.com/office/drawing/2014/main" id="{F7746DD5-919C-4821-95E1-045150151083}"/>
               </a:ext>
             </a:extLst>
           </p:cNvPr>
@@ -5115,7 +5475,7 @@
           <p:cNvPr id="29" name="td-0-4">
             <a:extLst xmlns:a="http://schemas.openxmlformats.org/drawingml/2006/main">
               <a:ext uri="{FF2B5EF4-FFF2-40B4-BE49-F238E27FC236}">
-                <a16:creationId xmlns:a16="http://schemas.microsoft.com/office/drawing/2014/main" id="{4DB4F0A7-8CB0-419F-8155-6F7AE92B5B17}"/>
+                <a16:creationId xmlns:a16="http://schemas.microsoft.com/office/drawing/2014/main" id="{746E8995-DBE6-4E0E-BD6C-7574D06BF378}"/>
               </a:ext>
             </a:extLst>
           </p:cNvPr>
@@ -5148,7 +5508,7 @@
           <p:cNvPr id="30" name="td-text-0-4">
             <a:extLst xmlns:a="http://schemas.openxmlformats.org/drawingml/2006/main">
               <a:ext uri="{FF2B5EF4-FFF2-40B4-BE49-F238E27FC236}">
-                <a16:creationId xmlns:a16="http://schemas.microsoft.com/office/drawing/2014/main" id="{5FB6620F-52A3-4728-93AF-76AAC71A51BE}"/>
+                <a16:creationId xmlns:a16="http://schemas.microsoft.com/office/drawing/2014/main" id="{D80DF036-C9C2-4662-8405-E3EBE181B48F}"/>
               </a:ext>
             </a:extLst>
           </p:cNvPr>
@@ -5198,7 +5558,7 @@
           <p:cNvPr id="31" name="td-1-0">
             <a:extLst xmlns:a="http://schemas.openxmlformats.org/drawingml/2006/main">
               <a:ext uri="{FF2B5EF4-FFF2-40B4-BE49-F238E27FC236}">
-                <a16:creationId xmlns:a16="http://schemas.microsoft.com/office/drawing/2014/main" id="{024EC879-91EA-4CF2-A613-781569F8BA39}"/>
+                <a16:creationId xmlns:a16="http://schemas.microsoft.com/office/drawing/2014/main" id="{17C2918C-E9A1-4B75-AECC-E0D3AB3E6C18}"/>
               </a:ext>
             </a:extLst>
           </p:cNvPr>
@@ -5231,7 +5591,7 @@
           <p:cNvPr id="32" name="td-text-1-0">
             <a:extLst xmlns:a="http://schemas.openxmlformats.org/drawingml/2006/main">
               <a:ext uri="{FF2B5EF4-FFF2-40B4-BE49-F238E27FC236}">
-                <a16:creationId xmlns:a16="http://schemas.microsoft.com/office/drawing/2014/main" id="{B40056AA-3B72-4410-9913-5068E2470580}"/>
+                <a16:creationId xmlns:a16="http://schemas.microsoft.com/office/drawing/2014/main" id="{F65C043F-3907-4E87-A230-B50014D46514}"/>
               </a:ext>
             </a:extLst>
           </p:cNvPr>
@@ -5281,7 +5641,7 @@
           <p:cNvPr id="33" name="td-1-1">
             <a:extLst xmlns:a="http://schemas.openxmlformats.org/drawingml/2006/main">
               <a:ext uri="{FF2B5EF4-FFF2-40B4-BE49-F238E27FC236}">
-                <a16:creationId xmlns:a16="http://schemas.microsoft.com/office/drawing/2014/main" id="{44D5E13A-2B5D-4F1E-BD39-62ED98CC81F5}"/>
+                <a16:creationId xmlns:a16="http://schemas.microsoft.com/office/drawing/2014/main" id="{A963C266-A27C-4FD1-A0DB-2BC35DB736CD}"/>
               </a:ext>
             </a:extLst>
           </p:cNvPr>
@@ -5314,7 +5674,7 @@
           <p:cNvPr id="34" name="td-text-1-1">
             <a:extLst xmlns:a="http://schemas.openxmlformats.org/drawingml/2006/main">
               <a:ext uri="{FF2B5EF4-FFF2-40B4-BE49-F238E27FC236}">
-                <a16:creationId xmlns:a16="http://schemas.microsoft.com/office/drawing/2014/main" id="{84BC938A-073B-473C-8988-4DAFBA4AEF97}"/>
+                <a16:creationId xmlns:a16="http://schemas.microsoft.com/office/drawing/2014/main" id="{D24889B9-803A-47C1-A1EA-B3F756823543}"/>
               </a:ext>
             </a:extLst>
           </p:cNvPr>
@@ -5364,7 +5724,7 @@
           <p:cNvPr id="35" name="td-1-2">
             <a:extLst xmlns:a="http://schemas.openxmlformats.org/drawingml/2006/main">
               <a:ext uri="{FF2B5EF4-FFF2-40B4-BE49-F238E27FC236}">
-                <a16:creationId xmlns:a16="http://schemas.microsoft.com/office/drawing/2014/main" id="{B1795416-2BC6-495A-AE96-91BDA6A498E0}"/>
+                <a16:creationId xmlns:a16="http://schemas.microsoft.com/office/drawing/2014/main" id="{A1C9F1CD-EF37-4A4F-B90E-1D14C3ED1C94}"/>
               </a:ext>
             </a:extLst>
           </p:cNvPr>
@@ -5397,7 +5757,7 @@
           <p:cNvPr id="36" name="td-text-1-2">
             <a:extLst xmlns:a="http://schemas.openxmlformats.org/drawingml/2006/main">
               <a:ext uri="{FF2B5EF4-FFF2-40B4-BE49-F238E27FC236}">
-                <a16:creationId xmlns:a16="http://schemas.microsoft.com/office/drawing/2014/main" id="{D510513A-48D8-4EBF-B5E4-C74CFE027A5E}"/>
+                <a16:creationId xmlns:a16="http://schemas.microsoft.com/office/drawing/2014/main" id="{B4CFDF96-C95F-47CF-8FFB-242C82AFBC38}"/>
               </a:ext>
             </a:extLst>
           </p:cNvPr>
@@ -5447,7 +5807,7 @@
           <p:cNvPr id="37" name="td-1-3">
             <a:extLst xmlns:a="http://schemas.openxmlformats.org/drawingml/2006/main">
               <a:ext uri="{FF2B5EF4-FFF2-40B4-BE49-F238E27FC236}">
-                <a16:creationId xmlns:a16="http://schemas.microsoft.com/office/drawing/2014/main" id="{B7325EF2-E89B-40EE-A88D-56194436E53F}"/>
+                <a16:creationId xmlns:a16="http://schemas.microsoft.com/office/drawing/2014/main" id="{BEC2961F-4790-403C-8C45-4B0A30870770}"/>
               </a:ext>
             </a:extLst>
           </p:cNvPr>
@@ -5480,7 +5840,7 @@
           <p:cNvPr id="38" name="td-text-1-3">
             <a:extLst xmlns:a="http://schemas.openxmlformats.org/drawingml/2006/main">
               <a:ext uri="{FF2B5EF4-FFF2-40B4-BE49-F238E27FC236}">
-                <a16:creationId xmlns:a16="http://schemas.microsoft.com/office/drawing/2014/main" id="{A07FCDE8-3A37-4634-8AF6-CE5AA4D7776C}"/>
+                <a16:creationId xmlns:a16="http://schemas.microsoft.com/office/drawing/2014/main" id="{7DEDF157-F93D-4770-A5F9-252014AF79A5}"/>
               </a:ext>
             </a:extLst>
           </p:cNvPr>
@@ -5530,7 +5890,7 @@
           <p:cNvPr id="39" name="td-1-4">
             <a:extLst xmlns:a="http://schemas.openxmlformats.org/drawingml/2006/main">
               <a:ext uri="{FF2B5EF4-FFF2-40B4-BE49-F238E27FC236}">
-                <a16:creationId xmlns:a16="http://schemas.microsoft.com/office/drawing/2014/main" id="{06D8E1D2-98F3-4D61-ACB7-EE0470EE49CA}"/>
+                <a16:creationId xmlns:a16="http://schemas.microsoft.com/office/drawing/2014/main" id="{CA05ACD1-93E7-4209-AEDD-15E2C0B492E6}"/>
               </a:ext>
             </a:extLst>
           </p:cNvPr>
@@ -5563,7 +5923,7 @@
           <p:cNvPr id="40" name="td-text-1-4">
             <a:extLst xmlns:a="http://schemas.openxmlformats.org/drawingml/2006/main">
               <a:ext uri="{FF2B5EF4-FFF2-40B4-BE49-F238E27FC236}">
-                <a16:creationId xmlns:a16="http://schemas.microsoft.com/office/drawing/2014/main" id="{52072196-27F8-4A5A-9471-485A12BFF8CD}"/>
+                <a16:creationId xmlns:a16="http://schemas.microsoft.com/office/drawing/2014/main" id="{084FA8AC-085C-4E76-83EE-2BFBE43853B2}"/>
               </a:ext>
             </a:extLst>
           </p:cNvPr>
@@ -5613,7 +5973,7 @@
           <p:cNvPr id="41" name="td-2-0">
             <a:extLst xmlns:a="http://schemas.openxmlformats.org/drawingml/2006/main">
               <a:ext uri="{FF2B5EF4-FFF2-40B4-BE49-F238E27FC236}">
-                <a16:creationId xmlns:a16="http://schemas.microsoft.com/office/drawing/2014/main" id="{C016C591-E0CA-4B33-B083-45682048B6D9}"/>
+                <a16:creationId xmlns:a16="http://schemas.microsoft.com/office/drawing/2014/main" id="{DE24B201-0CA3-4251-8AFC-EE8E28787EAB}"/>
               </a:ext>
             </a:extLst>
           </p:cNvPr>
@@ -5646,7 +6006,7 @@
           <p:cNvPr id="42" name="td-text-2-0">
             <a:extLst xmlns:a="http://schemas.openxmlformats.org/drawingml/2006/main">
               <a:ext uri="{FF2B5EF4-FFF2-40B4-BE49-F238E27FC236}">
-                <a16:creationId xmlns:a16="http://schemas.microsoft.com/office/drawing/2014/main" id="{48A4EA39-2867-4AEA-B9AD-1EC5814F03D3}"/>
+                <a16:creationId xmlns:a16="http://schemas.microsoft.com/office/drawing/2014/main" id="{F85AE627-A4DC-4970-9813-58F80A905F00}"/>
               </a:ext>
             </a:extLst>
           </p:cNvPr>
@@ -5696,7 +6056,7 @@
           <p:cNvPr id="43" name="td-2-1">
             <a:extLst xmlns:a="http://schemas.openxmlformats.org/drawingml/2006/main">
               <a:ext uri="{FF2B5EF4-FFF2-40B4-BE49-F238E27FC236}">
-                <a16:creationId xmlns:a16="http://schemas.microsoft.com/office/drawing/2014/main" id="{78E6429A-35C0-44BF-8AAB-79F6D9202453}"/>
+                <a16:creationId xmlns:a16="http://schemas.microsoft.com/office/drawing/2014/main" id="{2320FD5D-799E-43E7-BB42-8F4557EDE4C7}"/>
               </a:ext>
             </a:extLst>
           </p:cNvPr>
@@ -5729,7 +6089,7 @@
           <p:cNvPr id="44" name="td-text-2-1">
             <a:extLst xmlns:a="http://schemas.openxmlformats.org/drawingml/2006/main">
               <a:ext uri="{FF2B5EF4-FFF2-40B4-BE49-F238E27FC236}">
-                <a16:creationId xmlns:a16="http://schemas.microsoft.com/office/drawing/2014/main" id="{512206BE-0283-4B7C-B642-6EE2DCD8B8B5}"/>
+                <a16:creationId xmlns:a16="http://schemas.microsoft.com/office/drawing/2014/main" id="{719521DC-9DFD-455A-817E-1F9A65211255}"/>
               </a:ext>
             </a:extLst>
           </p:cNvPr>
@@ -5779,7 +6139,7 @@
           <p:cNvPr id="45" name="td-2-2">
             <a:extLst xmlns:a="http://schemas.openxmlformats.org/drawingml/2006/main">
               <a:ext uri="{FF2B5EF4-FFF2-40B4-BE49-F238E27FC236}">
-                <a16:creationId xmlns:a16="http://schemas.microsoft.com/office/drawing/2014/main" id="{0C97CD0E-1228-4181-BF09-9DBB90F69F2A}"/>
+                <a16:creationId xmlns:a16="http://schemas.microsoft.com/office/drawing/2014/main" id="{96375C3A-AAD5-4CA4-A542-488518FB2D4E}"/>
               </a:ext>
             </a:extLst>
           </p:cNvPr>
@@ -5812,7 +6172,7 @@
           <p:cNvPr id="46" name="td-text-2-2">
             <a:extLst xmlns:a="http://schemas.openxmlformats.org/drawingml/2006/main">
               <a:ext uri="{FF2B5EF4-FFF2-40B4-BE49-F238E27FC236}">
-                <a16:creationId xmlns:a16="http://schemas.microsoft.com/office/drawing/2014/main" id="{E5E73AE8-EF44-4C75-A617-47AA09963950}"/>
+                <a16:creationId xmlns:a16="http://schemas.microsoft.com/office/drawing/2014/main" id="{17B49E8B-CBF4-4FE4-A619-C1732ADAABA9}"/>
               </a:ext>
             </a:extLst>
           </p:cNvPr>
@@ -5862,7 +6222,7 @@
           <p:cNvPr id="47" name="td-2-3">
             <a:extLst xmlns:a="http://schemas.openxmlformats.org/drawingml/2006/main">
               <a:ext uri="{FF2B5EF4-FFF2-40B4-BE49-F238E27FC236}">
-                <a16:creationId xmlns:a16="http://schemas.microsoft.com/office/drawing/2014/main" id="{35BA619D-59C9-4454-940F-99141B857C79}"/>
+                <a16:creationId xmlns:a16="http://schemas.microsoft.com/office/drawing/2014/main" id="{3F3D9ACF-32C1-42FE-A494-EB3E98FF9BDC}"/>
               </a:ext>
             </a:extLst>
           </p:cNvPr>
@@ -5895,7 +6255,7 @@
           <p:cNvPr id="48" name="td-text-2-3">
             <a:extLst xmlns:a="http://schemas.openxmlformats.org/drawingml/2006/main">
               <a:ext uri="{FF2B5EF4-FFF2-40B4-BE49-F238E27FC236}">
-                <a16:creationId xmlns:a16="http://schemas.microsoft.com/office/drawing/2014/main" id="{4010D1BC-3915-4449-89B5-636B8DF8761D}"/>
+                <a16:creationId xmlns:a16="http://schemas.microsoft.com/office/drawing/2014/main" id="{86B48304-40DA-4A58-92F8-C83B1F59A339}"/>
               </a:ext>
             </a:extLst>
           </p:cNvPr>
@@ -5945,7 +6305,7 @@
           <p:cNvPr id="49" name="td-2-4">
             <a:extLst xmlns:a="http://schemas.openxmlformats.org/drawingml/2006/main">
               <a:ext uri="{FF2B5EF4-FFF2-40B4-BE49-F238E27FC236}">
-                <a16:creationId xmlns:a16="http://schemas.microsoft.com/office/drawing/2014/main" id="{17735A85-0910-441D-95A7-0DFB0765B666}"/>
+                <a16:creationId xmlns:a16="http://schemas.microsoft.com/office/drawing/2014/main" id="{399F1B64-83BD-43F2-9B03-B3181FBAA670}"/>
               </a:ext>
             </a:extLst>
           </p:cNvPr>
@@ -5978,7 +6338,7 @@
           <p:cNvPr id="50" name="td-text-2-4">
             <a:extLst xmlns:a="http://schemas.openxmlformats.org/drawingml/2006/main">
               <a:ext uri="{FF2B5EF4-FFF2-40B4-BE49-F238E27FC236}">
-                <a16:creationId xmlns:a16="http://schemas.microsoft.com/office/drawing/2014/main" id="{712F8750-3A10-4081-9F33-BC1B6A05A2D6}"/>
+                <a16:creationId xmlns:a16="http://schemas.microsoft.com/office/drawing/2014/main" id="{EB5DBE7C-C26A-44F8-B0A5-250D6B6475F1}"/>
               </a:ext>
             </a:extLst>
           </p:cNvPr>
@@ -6028,7 +6388,7 @@
           <p:cNvPr id="51" name="td-3-0">
             <a:extLst xmlns:a="http://schemas.openxmlformats.org/drawingml/2006/main">
               <a:ext uri="{FF2B5EF4-FFF2-40B4-BE49-F238E27FC236}">
-                <a16:creationId xmlns:a16="http://schemas.microsoft.com/office/drawing/2014/main" id="{CE338022-B72C-4A3E-A308-A7CC778DA424}"/>
+                <a16:creationId xmlns:a16="http://schemas.microsoft.com/office/drawing/2014/main" id="{20101EDF-9CB4-49D4-85DD-4DC01CCD6495}"/>
               </a:ext>
             </a:extLst>
           </p:cNvPr>
@@ -6061,7 +6421,7 @@
           <p:cNvPr id="52" name="td-text-3-0">
             <a:extLst xmlns:a="http://schemas.openxmlformats.org/drawingml/2006/main">
               <a:ext uri="{FF2B5EF4-FFF2-40B4-BE49-F238E27FC236}">
-                <a16:creationId xmlns:a16="http://schemas.microsoft.com/office/drawing/2014/main" id="{A1B75320-979E-4D26-855C-1F0088DDFBD9}"/>
+                <a16:creationId xmlns:a16="http://schemas.microsoft.com/office/drawing/2014/main" id="{368B2EEF-A9D6-40D2-BE68-AF44C312FF2A}"/>
               </a:ext>
             </a:extLst>
           </p:cNvPr>
@@ -6111,7 +6471,7 @@
           <p:cNvPr id="53" name="td-3-1">
             <a:extLst xmlns:a="http://schemas.openxmlformats.org/drawingml/2006/main">
               <a:ext uri="{FF2B5EF4-FFF2-40B4-BE49-F238E27FC236}">
-                <a16:creationId xmlns:a16="http://schemas.microsoft.com/office/drawing/2014/main" id="{68FFB893-B6C1-4211-A4B8-08108E611F14}"/>
+                <a16:creationId xmlns:a16="http://schemas.microsoft.com/office/drawing/2014/main" id="{C00F130E-8703-4EF7-A00E-929B690436DE}"/>
               </a:ext>
             </a:extLst>
           </p:cNvPr>
@@ -6144,7 +6504,7 @@
           <p:cNvPr id="54" name="td-text-3-1">
             <a:extLst xmlns:a="http://schemas.openxmlformats.org/drawingml/2006/main">
               <a:ext uri="{FF2B5EF4-FFF2-40B4-BE49-F238E27FC236}">
-                <a16:creationId xmlns:a16="http://schemas.microsoft.com/office/drawing/2014/main" id="{6228A7F7-0CE3-4A2D-A8A3-9C7C0C2FA53B}"/>
+                <a16:creationId xmlns:a16="http://schemas.microsoft.com/office/drawing/2014/main" id="{E0986D92-5D27-45FA-81CE-BFEA70F76880}"/>
               </a:ext>
             </a:extLst>
           </p:cNvPr>
@@ -6194,7 +6554,7 @@
           <p:cNvPr id="55" name="td-3-2">
             <a:extLst xmlns:a="http://schemas.openxmlformats.org/drawingml/2006/main">
               <a:ext uri="{FF2B5EF4-FFF2-40B4-BE49-F238E27FC236}">
-                <a16:creationId xmlns:a16="http://schemas.microsoft.com/office/drawing/2014/main" id="{17AE36D3-163F-4D4F-A7AC-1D48E95C3E00}"/>
+                <a16:creationId xmlns:a16="http://schemas.microsoft.com/office/drawing/2014/main" id="{E268C5E6-0576-4963-9EC8-FD7291CD4099}"/>
               </a:ext>
             </a:extLst>
           </p:cNvPr>
@@ -6227,7 +6587,7 @@
           <p:cNvPr id="56" name="td-text-3-2">
             <a:extLst xmlns:a="http://schemas.openxmlformats.org/drawingml/2006/main">
               <a:ext uri="{FF2B5EF4-FFF2-40B4-BE49-F238E27FC236}">
-                <a16:creationId xmlns:a16="http://schemas.microsoft.com/office/drawing/2014/main" id="{64AE6096-0A16-44C7-AAB0-90F1C9A3E1F1}"/>
+                <a16:creationId xmlns:a16="http://schemas.microsoft.com/office/drawing/2014/main" id="{27AAB208-7D1F-448D-BB55-0D83443976C0}"/>
               </a:ext>
             </a:extLst>
           </p:cNvPr>
@@ -6277,7 +6637,7 @@
           <p:cNvPr id="57" name="td-3-3">
             <a:extLst xmlns:a="http://schemas.openxmlformats.org/drawingml/2006/main">
               <a:ext uri="{FF2B5EF4-FFF2-40B4-BE49-F238E27FC236}">
-                <a16:creationId xmlns:a16="http://schemas.microsoft.com/office/drawing/2014/main" id="{52EF8621-4A0B-4994-9B6B-60B00377A137}"/>
+                <a16:creationId xmlns:a16="http://schemas.microsoft.com/office/drawing/2014/main" id="{CFA9A844-40D9-467C-9399-86B7DA684EAC}"/>
               </a:ext>
             </a:extLst>
           </p:cNvPr>
@@ -6310,7 +6670,7 @@
           <p:cNvPr id="58" name="td-text-3-3">
             <a:extLst xmlns:a="http://schemas.openxmlformats.org/drawingml/2006/main">
               <a:ext uri="{FF2B5EF4-FFF2-40B4-BE49-F238E27FC236}">
-                <a16:creationId xmlns:a16="http://schemas.microsoft.com/office/drawing/2014/main" id="{50DC8E0A-9225-4D62-8E2C-FA43F6692991}"/>
+                <a16:creationId xmlns:a16="http://schemas.microsoft.com/office/drawing/2014/main" id="{F3BFFFAE-961E-4A0A-82A3-8797F6592ED7}"/>
               </a:ext>
             </a:extLst>
           </p:cNvPr>
@@ -6360,7 +6720,7 @@
           <p:cNvPr id="59" name="td-3-4">
             <a:extLst xmlns:a="http://schemas.openxmlformats.org/drawingml/2006/main">
               <a:ext uri="{FF2B5EF4-FFF2-40B4-BE49-F238E27FC236}">
-                <a16:creationId xmlns:a16="http://schemas.microsoft.com/office/drawing/2014/main" id="{EE95C0C3-7B40-48D2-A3B1-1C563647C3B8}"/>
+                <a16:creationId xmlns:a16="http://schemas.microsoft.com/office/drawing/2014/main" id="{C1C4A9E8-CFFE-448C-A07B-791F2645D1CA}"/>
               </a:ext>
             </a:extLst>
           </p:cNvPr>
@@ -6393,7 +6753,7 @@
           <p:cNvPr id="60" name="td-text-3-4">
             <a:extLst xmlns:a="http://schemas.openxmlformats.org/drawingml/2006/main">
               <a:ext uri="{FF2B5EF4-FFF2-40B4-BE49-F238E27FC236}">
-                <a16:creationId xmlns:a16="http://schemas.microsoft.com/office/drawing/2014/main" id="{C401C163-EFDA-4E9E-B652-4B8A1D69B595}"/>
+                <a16:creationId xmlns:a16="http://schemas.microsoft.com/office/drawing/2014/main" id="{C94AA53E-B73D-49CB-91AE-6619EABC1F49}"/>
               </a:ext>
             </a:extLst>
           </p:cNvPr>
@@ -6441,7 +6801,7 @@
     </p:spTree>
     <p:extLst>
       <p:ext uri="{BB962C8B-B14F-4D97-AF65-F5344CB8AC3E}">
-        <p14:creationId xmlns:p14="http://schemas.microsoft.com/office/powerpoint/2010/main" val="85410723"/>
+        <p14:creationId xmlns:p14="http://schemas.microsoft.com/office/powerpoint/2010/main" val="679605204"/>
       </p:ext>
     </p:extLst>
   </p:cSld>
@@ -6472,7 +6832,7 @@
           <p:cNvPr id="14" name="rule-60-45">
             <a:extLst xmlns:a="http://schemas.openxmlformats.org/drawingml/2006/main">
               <a:ext uri="{FF2B5EF4-FFF2-40B4-BE49-F238E27FC236}">
-                <a16:creationId xmlns:a16="http://schemas.microsoft.com/office/drawing/2014/main" id="{C811AF27-D036-4F77-946E-10829FACCE6B}"/>
+                <a16:creationId xmlns:a16="http://schemas.microsoft.com/office/drawing/2014/main" id="{33FB1E4C-B96F-49E1-92FD-05C84AAE772F}"/>
               </a:ext>
             </a:extLst>
           </p:cNvPr>
@@ -6503,7 +6863,7 @@
           <p:cNvPr id="2" name="chapter-accent">
             <a:extLst xmlns:a="http://schemas.openxmlformats.org/drawingml/2006/main">
               <a:ext uri="{FF2B5EF4-FFF2-40B4-BE49-F238E27FC236}">
-                <a16:creationId xmlns:a16="http://schemas.microsoft.com/office/drawing/2014/main" id="{EF10BA4B-13F3-4687-B2A4-C131A3A8D22C}"/>
+                <a16:creationId xmlns:a16="http://schemas.microsoft.com/office/drawing/2014/main" id="{BC215AA5-73C3-45DC-BA90-312156DD11BE}"/>
               </a:ext>
             </a:extLst>
           </p:cNvPr>
@@ -6534,7 +6894,7 @@
           <p:cNvPr id="3" name="chapter">
             <a:extLst xmlns:a="http://schemas.openxmlformats.org/drawingml/2006/main">
               <a:ext uri="{FF2B5EF4-FFF2-40B4-BE49-F238E27FC236}">
-                <a16:creationId xmlns:a16="http://schemas.microsoft.com/office/drawing/2014/main" id="{B09E863F-ABCD-4A82-B0DF-7016D974D620}"/>
+                <a16:creationId xmlns:a16="http://schemas.microsoft.com/office/drawing/2014/main" id="{0AEAAA07-9111-41E3-BA71-9B3C9A6BF6CF}"/>
               </a:ext>
             </a:extLst>
           </p:cNvPr>
@@ -6584,7 +6944,7 @@
           <p:cNvPr id="4" name="page-number">
             <a:extLst xmlns:a="http://schemas.openxmlformats.org/drawingml/2006/main">
               <a:ext uri="{FF2B5EF4-FFF2-40B4-BE49-F238E27FC236}">
-                <a16:creationId xmlns:a16="http://schemas.microsoft.com/office/drawing/2014/main" id="{4DB831B6-4A8A-4E05-870B-FB3481286901}"/>
+                <a16:creationId xmlns:a16="http://schemas.microsoft.com/office/drawing/2014/main" id="{2F92D097-5E0D-443B-BFA2-024C1204837D}"/>
               </a:ext>
             </a:extLst>
           </p:cNvPr>
@@ -6634,7 +6994,7 @@
           <p:cNvPr id="5" name="rule-60-674">
             <a:extLst xmlns:a="http://schemas.openxmlformats.org/drawingml/2006/main">
               <a:ext uri="{FF2B5EF4-FFF2-40B4-BE49-F238E27FC236}">
-                <a16:creationId xmlns:a16="http://schemas.microsoft.com/office/drawing/2014/main" id="{574D39E5-4071-4CAA-88A3-6FA27C6AC244}"/>
+                <a16:creationId xmlns:a16="http://schemas.microsoft.com/office/drawing/2014/main" id="{DDD4A99A-4508-40D2-9D2D-FA8103455E8E}"/>
               </a:ext>
             </a:extLst>
           </p:cNvPr>
@@ -6665,7 +7025,7 @@
           <p:cNvPr id="6" name="brand">
             <a:extLst xmlns:a="http://schemas.openxmlformats.org/drawingml/2006/main">
               <a:ext uri="{FF2B5EF4-FFF2-40B4-BE49-F238E27FC236}">
-                <a16:creationId xmlns:a16="http://schemas.microsoft.com/office/drawing/2014/main" id="{C42B68F8-7C51-4CB5-A428-85AC9356D323}"/>
+                <a16:creationId xmlns:a16="http://schemas.microsoft.com/office/drawing/2014/main" id="{3AD975E9-46E5-4E99-B046-8B467C33CC7B}"/>
               </a:ext>
             </a:extLst>
           </p:cNvPr>
@@ -6715,7 +7075,7 @@
           <p:cNvPr id="7" name="source">
             <a:extLst xmlns:a="http://schemas.openxmlformats.org/drawingml/2006/main">
               <a:ext uri="{FF2B5EF4-FFF2-40B4-BE49-F238E27FC236}">
-                <a16:creationId xmlns:a16="http://schemas.microsoft.com/office/drawing/2014/main" id="{60D0D552-33D7-474C-B309-033499105A25}"/>
+                <a16:creationId xmlns:a16="http://schemas.microsoft.com/office/drawing/2014/main" id="{72D9A65E-4F16-471C-ADC3-3A8C926BC47B}"/>
               </a:ext>
             </a:extLst>
           </p:cNvPr>
@@ -6765,7 +7125,7 @@
           <p:cNvPr id="8" name="footer-page">
             <a:extLst xmlns:a="http://schemas.openxmlformats.org/drawingml/2006/main">
               <a:ext uri="{FF2B5EF4-FFF2-40B4-BE49-F238E27FC236}">
-                <a16:creationId xmlns:a16="http://schemas.microsoft.com/office/drawing/2014/main" id="{961118A1-342C-4BAB-AF6B-777334E3D48F}"/>
+                <a16:creationId xmlns:a16="http://schemas.microsoft.com/office/drawing/2014/main" id="{9811E7DA-6D33-4995-813B-86FC1AE2B59B}"/>
               </a:ext>
             </a:extLst>
           </p:cNvPr>
@@ -6805,7 +7165,7 @@
                   <a:srgbClr val="69766F"/>
                 </a:solidFill>
               </a:rPr>
-              <a:t>11 / 15</a:t>
+              <a:t>11 / 18</a:t>
             </a:r>
           </a:p>
         </p:txBody>
@@ -6815,7 +7175,7 @@
           <p:cNvPr id="9" name="page-title">
             <a:extLst xmlns:a="http://schemas.openxmlformats.org/drawingml/2006/main">
               <a:ext uri="{FF2B5EF4-FFF2-40B4-BE49-F238E27FC236}">
-                <a16:creationId xmlns:a16="http://schemas.microsoft.com/office/drawing/2014/main" id="{CD771452-01DA-4A2F-9BBF-E2A3499E5D20}"/>
+                <a16:creationId xmlns:a16="http://schemas.microsoft.com/office/drawing/2014/main" id="{82C33EF3-ED9B-4EFA-B661-EC43E5CFB070}"/>
               </a:ext>
             </a:extLst>
           </p:cNvPr>
@@ -6865,7 +7225,7 @@
           <p:cNvPr id="10" name="page-lead">
             <a:extLst xmlns:a="http://schemas.openxmlformats.org/drawingml/2006/main">
               <a:ext uri="{FF2B5EF4-FFF2-40B4-BE49-F238E27FC236}">
-                <a16:creationId xmlns:a16="http://schemas.microsoft.com/office/drawing/2014/main" id="{785E45F1-6DEF-425E-80D4-6EB1497C1FAD}"/>
+                <a16:creationId xmlns:a16="http://schemas.microsoft.com/office/drawing/2014/main" id="{37218E42-CC53-4123-852C-A51A66A62297}"/>
               </a:ext>
             </a:extLst>
           </p:cNvPr>
@@ -6922,7 +7282,7 @@
         </p:xfrm>
         <a:graphic xmlns:a="http://schemas.openxmlformats.org/drawingml/2006/main">
           <a:graphicData uri="http://schemas.openxmlformats.org/drawingml/2006/chart">
-            <c:chart xmlns:r="http://schemas.openxmlformats.org/officeDocument/2006/relationships" xmlns:c="http://schemas.openxmlformats.org/drawingml/2006/chart" r:id="R9430e67c5127473d"/>
+            <c:chart xmlns:r="http://schemas.openxmlformats.org/officeDocument/2006/relationships" xmlns:c="http://schemas.openxmlformats.org/drawingml/2006/chart" r:id="R6c2bb07c54104123"/>
           </a:graphicData>
         </a:graphic>
       </p:graphicFrame>
@@ -6938,7 +7298,7 @@
         </p:xfrm>
         <a:graphic xmlns:a="http://schemas.openxmlformats.org/drawingml/2006/main">
           <a:graphicData uri="http://schemas.openxmlformats.org/drawingml/2006/chart">
-            <c:chart xmlns:r="http://schemas.openxmlformats.org/officeDocument/2006/relationships" xmlns:c="http://schemas.openxmlformats.org/drawingml/2006/chart" r:id="R38697a646c8648b0"/>
+            <c:chart xmlns:r="http://schemas.openxmlformats.org/officeDocument/2006/relationships" xmlns:c="http://schemas.openxmlformats.org/drawingml/2006/chart" r:id="R3d476b33a8e3445b"/>
           </a:graphicData>
         </a:graphic>
       </p:graphicFrame>
@@ -6947,7 +7307,7 @@
           <p:cNvPr id="13" name="chart-note">
             <a:extLst xmlns:a="http://schemas.openxmlformats.org/drawingml/2006/main">
               <a:ext uri="{FF2B5EF4-FFF2-40B4-BE49-F238E27FC236}">
-                <a16:creationId xmlns:a16="http://schemas.microsoft.com/office/drawing/2014/main" id="{97215E14-A513-4A5C-B5F9-E0ECB4835695}"/>
+                <a16:creationId xmlns:a16="http://schemas.microsoft.com/office/drawing/2014/main" id="{E65D9D3F-B312-4C22-AECB-8B4BAEEF8C58}"/>
               </a:ext>
             </a:extLst>
           </p:cNvPr>
@@ -6995,7 +7355,7 @@
     </p:spTree>
     <p:extLst>
       <p:ext uri="{BB962C8B-B14F-4D97-AF65-F5344CB8AC3E}">
-        <p14:creationId xmlns:p14="http://schemas.microsoft.com/office/powerpoint/2010/main" val="1370386495"/>
+        <p14:creationId xmlns:p14="http://schemas.microsoft.com/office/powerpoint/2010/main" val="2051447069"/>
       </p:ext>
     </p:extLst>
   </p:cSld>
@@ -7026,7 +7386,7 @@
           <p:cNvPr id="43" name="rule-60-45">
             <a:extLst xmlns:a="http://schemas.openxmlformats.org/drawingml/2006/main">
               <a:ext uri="{FF2B5EF4-FFF2-40B4-BE49-F238E27FC236}">
-                <a16:creationId xmlns:a16="http://schemas.microsoft.com/office/drawing/2014/main" id="{82DADF74-69AE-484B-BCB0-1F588625632F}"/>
+                <a16:creationId xmlns:a16="http://schemas.microsoft.com/office/drawing/2014/main" id="{FE9BBD48-DC33-47FF-B946-F16B41CB20C7}"/>
               </a:ext>
             </a:extLst>
           </p:cNvPr>
@@ -7057,7 +7417,7 @@
           <p:cNvPr id="2" name="chapter-accent">
             <a:extLst xmlns:a="http://schemas.openxmlformats.org/drawingml/2006/main">
               <a:ext uri="{FF2B5EF4-FFF2-40B4-BE49-F238E27FC236}">
-                <a16:creationId xmlns:a16="http://schemas.microsoft.com/office/drawing/2014/main" id="{FBDD64A4-4252-4DF1-B76D-D83DCF6AEA37}"/>
+                <a16:creationId xmlns:a16="http://schemas.microsoft.com/office/drawing/2014/main" id="{408E2029-2267-4DC4-AA95-0C0A9350D981}"/>
               </a:ext>
             </a:extLst>
           </p:cNvPr>
@@ -7088,7 +7448,7 @@
           <p:cNvPr id="3" name="chapter">
             <a:extLst xmlns:a="http://schemas.openxmlformats.org/drawingml/2006/main">
               <a:ext uri="{FF2B5EF4-FFF2-40B4-BE49-F238E27FC236}">
-                <a16:creationId xmlns:a16="http://schemas.microsoft.com/office/drawing/2014/main" id="{F3EB29F9-AFB2-4D3A-95FF-686F8F07530B}"/>
+                <a16:creationId xmlns:a16="http://schemas.microsoft.com/office/drawing/2014/main" id="{58393463-68EC-4C35-95A1-2F324DBC1AF0}"/>
               </a:ext>
             </a:extLst>
           </p:cNvPr>
@@ -7138,7 +7498,7 @@
           <p:cNvPr id="4" name="page-number">
             <a:extLst xmlns:a="http://schemas.openxmlformats.org/drawingml/2006/main">
               <a:ext uri="{FF2B5EF4-FFF2-40B4-BE49-F238E27FC236}">
-                <a16:creationId xmlns:a16="http://schemas.microsoft.com/office/drawing/2014/main" id="{48A949BA-3F42-40F1-B05B-ABB58B880439}"/>
+                <a16:creationId xmlns:a16="http://schemas.microsoft.com/office/drawing/2014/main" id="{48FD317F-D38E-46CB-8F0B-9CE4A2DFC767}"/>
               </a:ext>
             </a:extLst>
           </p:cNvPr>
@@ -7188,7 +7548,7 @@
           <p:cNvPr id="5" name="rule-60-674">
             <a:extLst xmlns:a="http://schemas.openxmlformats.org/drawingml/2006/main">
               <a:ext uri="{FF2B5EF4-FFF2-40B4-BE49-F238E27FC236}">
-                <a16:creationId xmlns:a16="http://schemas.microsoft.com/office/drawing/2014/main" id="{F8CCBAC4-9652-4382-9483-361839383459}"/>
+                <a16:creationId xmlns:a16="http://schemas.microsoft.com/office/drawing/2014/main" id="{224404F5-EE4A-4768-A3FD-3A331C63C037}"/>
               </a:ext>
             </a:extLst>
           </p:cNvPr>
@@ -7219,7 +7579,7 @@
           <p:cNvPr id="6" name="brand">
             <a:extLst xmlns:a="http://schemas.openxmlformats.org/drawingml/2006/main">
               <a:ext uri="{FF2B5EF4-FFF2-40B4-BE49-F238E27FC236}">
-                <a16:creationId xmlns:a16="http://schemas.microsoft.com/office/drawing/2014/main" id="{E225BD35-05EE-40C8-BA6D-16C03225834B}"/>
+                <a16:creationId xmlns:a16="http://schemas.microsoft.com/office/drawing/2014/main" id="{FE47CAA3-2F95-485C-8253-091C9F5804B5}"/>
               </a:ext>
             </a:extLst>
           </p:cNvPr>
@@ -7269,7 +7629,7 @@
           <p:cNvPr id="7" name="source">
             <a:extLst xmlns:a="http://schemas.openxmlformats.org/drawingml/2006/main">
               <a:ext uri="{FF2B5EF4-FFF2-40B4-BE49-F238E27FC236}">
-                <a16:creationId xmlns:a16="http://schemas.microsoft.com/office/drawing/2014/main" id="{760D1E8A-A527-4898-905D-3B799FA83E7F}"/>
+                <a16:creationId xmlns:a16="http://schemas.microsoft.com/office/drawing/2014/main" id="{AD935244-D3AB-498D-916E-F1B0902EB704}"/>
               </a:ext>
             </a:extLst>
           </p:cNvPr>
@@ -7319,7 +7679,7 @@
           <p:cNvPr id="8" name="footer-page">
             <a:extLst xmlns:a="http://schemas.openxmlformats.org/drawingml/2006/main">
               <a:ext uri="{FF2B5EF4-FFF2-40B4-BE49-F238E27FC236}">
-                <a16:creationId xmlns:a16="http://schemas.microsoft.com/office/drawing/2014/main" id="{F1A08C69-85D8-4AE8-8E20-00C5FD6040E5}"/>
+                <a16:creationId xmlns:a16="http://schemas.microsoft.com/office/drawing/2014/main" id="{758FB9DA-9D7A-4064-ACFD-BD8F3B2FE613}"/>
               </a:ext>
             </a:extLst>
           </p:cNvPr>
@@ -7359,7 +7719,7 @@
                   <a:srgbClr val="69766F"/>
                 </a:solidFill>
               </a:rPr>
-              <a:t>12 / 15</a:t>
+              <a:t>12 / 18</a:t>
             </a:r>
           </a:p>
         </p:txBody>
@@ -7369,7 +7729,7 @@
           <p:cNvPr id="9" name="page-title">
             <a:extLst xmlns:a="http://schemas.openxmlformats.org/drawingml/2006/main">
               <a:ext uri="{FF2B5EF4-FFF2-40B4-BE49-F238E27FC236}">
-                <a16:creationId xmlns:a16="http://schemas.microsoft.com/office/drawing/2014/main" id="{26B42495-38DB-4BD2-9383-EE1227037ECA}"/>
+                <a16:creationId xmlns:a16="http://schemas.microsoft.com/office/drawing/2014/main" id="{12ACE756-FFE7-41AD-8307-AE4E6C978C3C}"/>
               </a:ext>
             </a:extLst>
           </p:cNvPr>
@@ -7419,7 +7779,7 @@
           <p:cNvPr id="10" name="page-lead">
             <a:extLst xmlns:a="http://schemas.openxmlformats.org/drawingml/2006/main">
               <a:ext uri="{FF2B5EF4-FFF2-40B4-BE49-F238E27FC236}">
-                <a16:creationId xmlns:a16="http://schemas.microsoft.com/office/drawing/2014/main" id="{B3DF584F-7827-456A-AC74-FF43C9079027}"/>
+                <a16:creationId xmlns:a16="http://schemas.microsoft.com/office/drawing/2014/main" id="{84BC6C2E-9690-49CF-A1DF-192D758346AE}"/>
               </a:ext>
             </a:extLst>
           </p:cNvPr>
@@ -7469,7 +7829,7 @@
           <p:cNvPr id="11" name="risk-head-0">
             <a:extLst xmlns:a="http://schemas.openxmlformats.org/drawingml/2006/main">
               <a:ext uri="{FF2B5EF4-FFF2-40B4-BE49-F238E27FC236}">
-                <a16:creationId xmlns:a16="http://schemas.microsoft.com/office/drawing/2014/main" id="{12368659-8A0C-4726-A3BE-5CC547A2E740}"/>
+                <a16:creationId xmlns:a16="http://schemas.microsoft.com/office/drawing/2014/main" id="{9D504D99-EA14-4532-AC49-D6DB3CBF1E1E}"/>
               </a:ext>
             </a:extLst>
           </p:cNvPr>
@@ -7500,7 +7860,7 @@
           <p:cNvPr id="12" name="risk-head-text-0">
             <a:extLst xmlns:a="http://schemas.openxmlformats.org/drawingml/2006/main">
               <a:ext uri="{FF2B5EF4-FFF2-40B4-BE49-F238E27FC236}">
-                <a16:creationId xmlns:a16="http://schemas.microsoft.com/office/drawing/2014/main" id="{C91C922E-3950-4255-AF7A-74B911F940A5}"/>
+                <a16:creationId xmlns:a16="http://schemas.microsoft.com/office/drawing/2014/main" id="{9C4246EF-F225-4C34-BD28-4D2529FEF7F9}"/>
               </a:ext>
             </a:extLst>
           </p:cNvPr>
@@ -7550,7 +7910,7 @@
           <p:cNvPr id="13" name="risk-head-1">
             <a:extLst xmlns:a="http://schemas.openxmlformats.org/drawingml/2006/main">
               <a:ext uri="{FF2B5EF4-FFF2-40B4-BE49-F238E27FC236}">
-                <a16:creationId xmlns:a16="http://schemas.microsoft.com/office/drawing/2014/main" id="{E175A776-D061-43F5-B91A-42C69BBDEB1A}"/>
+                <a16:creationId xmlns:a16="http://schemas.microsoft.com/office/drawing/2014/main" id="{9BE60988-5C61-4EA9-9F8E-44EB9F9FB944}"/>
               </a:ext>
             </a:extLst>
           </p:cNvPr>
@@ -7581,7 +7941,7 @@
           <p:cNvPr id="14" name="risk-head-text-1">
             <a:extLst xmlns:a="http://schemas.openxmlformats.org/drawingml/2006/main">
               <a:ext uri="{FF2B5EF4-FFF2-40B4-BE49-F238E27FC236}">
-                <a16:creationId xmlns:a16="http://schemas.microsoft.com/office/drawing/2014/main" id="{BBAD0519-4C0D-4EF1-8462-97B8BE298855}"/>
+                <a16:creationId xmlns:a16="http://schemas.microsoft.com/office/drawing/2014/main" id="{441BE68D-C3C5-4A07-9E2E-7385DD0BA3B2}"/>
               </a:ext>
             </a:extLst>
           </p:cNvPr>
@@ -7631,7 +7991,7 @@
           <p:cNvPr id="15" name="risk-head-2">
             <a:extLst xmlns:a="http://schemas.openxmlformats.org/drawingml/2006/main">
               <a:ext uri="{FF2B5EF4-FFF2-40B4-BE49-F238E27FC236}">
-                <a16:creationId xmlns:a16="http://schemas.microsoft.com/office/drawing/2014/main" id="{98A4D25C-6552-4FF1-8EC1-276FAA71B4EE}"/>
+                <a16:creationId xmlns:a16="http://schemas.microsoft.com/office/drawing/2014/main" id="{4CD01B95-DC74-4E1B-A8C3-7432532D448D}"/>
               </a:ext>
             </a:extLst>
           </p:cNvPr>
@@ -7662,7 +8022,7 @@
           <p:cNvPr id="16" name="risk-head-text-2">
             <a:extLst xmlns:a="http://schemas.openxmlformats.org/drawingml/2006/main">
               <a:ext uri="{FF2B5EF4-FFF2-40B4-BE49-F238E27FC236}">
-                <a16:creationId xmlns:a16="http://schemas.microsoft.com/office/drawing/2014/main" id="{784B6107-6799-4883-9977-476F807151BF}"/>
+                <a16:creationId xmlns:a16="http://schemas.microsoft.com/office/drawing/2014/main" id="{AEC8A92B-42EC-43CB-A901-75EB2994F5EC}"/>
               </a:ext>
             </a:extLst>
           </p:cNvPr>
@@ -7712,7 +8072,7 @@
           <p:cNvPr id="17" name="risk-head-3">
             <a:extLst xmlns:a="http://schemas.openxmlformats.org/drawingml/2006/main">
               <a:ext uri="{FF2B5EF4-FFF2-40B4-BE49-F238E27FC236}">
-                <a16:creationId xmlns:a16="http://schemas.microsoft.com/office/drawing/2014/main" id="{4E16BE85-CC01-4B40-98D3-5FDBAF6FDA8B}"/>
+                <a16:creationId xmlns:a16="http://schemas.microsoft.com/office/drawing/2014/main" id="{B34B1D90-C5F9-40F3-A8DC-B5861391384D}"/>
               </a:ext>
             </a:extLst>
           </p:cNvPr>
@@ -7743,7 +8103,7 @@
           <p:cNvPr id="18" name="risk-head-text-3">
             <a:extLst xmlns:a="http://schemas.openxmlformats.org/drawingml/2006/main">
               <a:ext uri="{FF2B5EF4-FFF2-40B4-BE49-F238E27FC236}">
-                <a16:creationId xmlns:a16="http://schemas.microsoft.com/office/drawing/2014/main" id="{461D46B2-BBD2-43B1-86F3-2BFF8F1547F1}"/>
+                <a16:creationId xmlns:a16="http://schemas.microsoft.com/office/drawing/2014/main" id="{D1126EF8-710B-4D66-9CCC-3B0105A28EDD}"/>
               </a:ext>
             </a:extLst>
           </p:cNvPr>
@@ -7793,7 +8153,7 @@
           <p:cNvPr id="19" name="risk-0-0">
             <a:extLst xmlns:a="http://schemas.openxmlformats.org/drawingml/2006/main">
               <a:ext uri="{FF2B5EF4-FFF2-40B4-BE49-F238E27FC236}">
-                <a16:creationId xmlns:a16="http://schemas.microsoft.com/office/drawing/2014/main" id="{7560475C-8AAE-47C4-9B26-BC0DBF44E181}"/>
+                <a16:creationId xmlns:a16="http://schemas.microsoft.com/office/drawing/2014/main" id="{10D72A89-4139-4656-818B-3614ECA9BB82}"/>
               </a:ext>
             </a:extLst>
           </p:cNvPr>
@@ -7826,7 +8186,7 @@
           <p:cNvPr id="20" name="risk-text-0-0">
             <a:extLst xmlns:a="http://schemas.openxmlformats.org/drawingml/2006/main">
               <a:ext uri="{FF2B5EF4-FFF2-40B4-BE49-F238E27FC236}">
-                <a16:creationId xmlns:a16="http://schemas.microsoft.com/office/drawing/2014/main" id="{8D9987FD-F680-4E39-B085-476988689D69}"/>
+                <a16:creationId xmlns:a16="http://schemas.microsoft.com/office/drawing/2014/main" id="{75D57B93-B7FC-43B8-919F-3D3B333EB8E5}"/>
               </a:ext>
             </a:extLst>
           </p:cNvPr>
@@ -7876,7 +8236,7 @@
           <p:cNvPr id="21" name="risk-0-1">
             <a:extLst xmlns:a="http://schemas.openxmlformats.org/drawingml/2006/main">
               <a:ext uri="{FF2B5EF4-FFF2-40B4-BE49-F238E27FC236}">
-                <a16:creationId xmlns:a16="http://schemas.microsoft.com/office/drawing/2014/main" id="{3DCC4147-1E7A-4273-9A56-9F43B72DD5DD}"/>
+                <a16:creationId xmlns:a16="http://schemas.microsoft.com/office/drawing/2014/main" id="{01112DFC-A7B2-4231-B126-A7F690AAE75A}"/>
               </a:ext>
             </a:extLst>
           </p:cNvPr>
@@ -7909,7 +8269,7 @@
           <p:cNvPr id="22" name="risk-text-0-1">
             <a:extLst xmlns:a="http://schemas.openxmlformats.org/drawingml/2006/main">
               <a:ext uri="{FF2B5EF4-FFF2-40B4-BE49-F238E27FC236}">
-                <a16:creationId xmlns:a16="http://schemas.microsoft.com/office/drawing/2014/main" id="{A2670E35-9D85-4854-9DC6-9F3242A475F5}"/>
+                <a16:creationId xmlns:a16="http://schemas.microsoft.com/office/drawing/2014/main" id="{D50938D0-4E84-4EB6-94E7-8209A5D9902D}"/>
               </a:ext>
             </a:extLst>
           </p:cNvPr>
@@ -7959,7 +8319,7 @@
           <p:cNvPr id="23" name="risk-0-2">
             <a:extLst xmlns:a="http://schemas.openxmlformats.org/drawingml/2006/main">
               <a:ext uri="{FF2B5EF4-FFF2-40B4-BE49-F238E27FC236}">
-                <a16:creationId xmlns:a16="http://schemas.microsoft.com/office/drawing/2014/main" id="{1F0AEADF-8BC6-4678-9A2B-D0CB0AD1E4AC}"/>
+                <a16:creationId xmlns:a16="http://schemas.microsoft.com/office/drawing/2014/main" id="{A2369188-15D0-4798-8EE4-12E770EA6C8F}"/>
               </a:ext>
             </a:extLst>
           </p:cNvPr>
@@ -7992,7 +8352,7 @@
           <p:cNvPr id="24" name="risk-text-0-2">
             <a:extLst xmlns:a="http://schemas.openxmlformats.org/drawingml/2006/main">
               <a:ext uri="{FF2B5EF4-FFF2-40B4-BE49-F238E27FC236}">
-                <a16:creationId xmlns:a16="http://schemas.microsoft.com/office/drawing/2014/main" id="{E3067F7E-91CF-4A09-B307-A691A4492A08}"/>
+                <a16:creationId xmlns:a16="http://schemas.microsoft.com/office/drawing/2014/main" id="{833A89CA-F7B6-4FF4-B502-4CDDA8C1FA39}"/>
               </a:ext>
             </a:extLst>
           </p:cNvPr>
@@ -8042,7 +8402,7 @@
           <p:cNvPr id="25" name="risk-0-3">
             <a:extLst xmlns:a="http://schemas.openxmlformats.org/drawingml/2006/main">
               <a:ext uri="{FF2B5EF4-FFF2-40B4-BE49-F238E27FC236}">
-                <a16:creationId xmlns:a16="http://schemas.microsoft.com/office/drawing/2014/main" id="{0DA37E00-9CD4-4F1A-A127-E0931E6B9B75}"/>
+                <a16:creationId xmlns:a16="http://schemas.microsoft.com/office/drawing/2014/main" id="{47F8130C-C8EA-41DA-8247-FC73E462DD54}"/>
               </a:ext>
             </a:extLst>
           </p:cNvPr>
@@ -8075,7 +8435,7 @@
           <p:cNvPr id="26" name="risk-text-0-3">
             <a:extLst xmlns:a="http://schemas.openxmlformats.org/drawingml/2006/main">
               <a:ext uri="{FF2B5EF4-FFF2-40B4-BE49-F238E27FC236}">
-                <a16:creationId xmlns:a16="http://schemas.microsoft.com/office/drawing/2014/main" id="{FAAAC689-C88F-485B-A06C-5CCB33989DE4}"/>
+                <a16:creationId xmlns:a16="http://schemas.microsoft.com/office/drawing/2014/main" id="{AD726AE1-9F6D-4357-95EC-33F61586D897}"/>
               </a:ext>
             </a:extLst>
           </p:cNvPr>
@@ -8125,7 +8485,7 @@
           <p:cNvPr id="27" name="risk-1-0">
             <a:extLst xmlns:a="http://schemas.openxmlformats.org/drawingml/2006/main">
               <a:ext uri="{FF2B5EF4-FFF2-40B4-BE49-F238E27FC236}">
-                <a16:creationId xmlns:a16="http://schemas.microsoft.com/office/drawing/2014/main" id="{64958417-930E-43CD-A1D6-29BEB9DD3E9F}"/>
+                <a16:creationId xmlns:a16="http://schemas.microsoft.com/office/drawing/2014/main" id="{071AF351-5003-4F29-A099-2615D1A32CDC}"/>
               </a:ext>
             </a:extLst>
           </p:cNvPr>
@@ -8158,7 +8518,7 @@
           <p:cNvPr id="28" name="risk-text-1-0">
             <a:extLst xmlns:a="http://schemas.openxmlformats.org/drawingml/2006/main">
               <a:ext uri="{FF2B5EF4-FFF2-40B4-BE49-F238E27FC236}">
-                <a16:creationId xmlns:a16="http://schemas.microsoft.com/office/drawing/2014/main" id="{4705FA50-AAE9-4CD3-B5C3-0E0776446E81}"/>
+                <a16:creationId xmlns:a16="http://schemas.microsoft.com/office/drawing/2014/main" id="{5DC52BDF-C375-4486-B8E3-0D9E5647A5FD}"/>
               </a:ext>
             </a:extLst>
           </p:cNvPr>
@@ -8208,7 +8568,7 @@
           <p:cNvPr id="29" name="risk-1-1">
             <a:extLst xmlns:a="http://schemas.openxmlformats.org/drawingml/2006/main">
               <a:ext uri="{FF2B5EF4-FFF2-40B4-BE49-F238E27FC236}">
-                <a16:creationId xmlns:a16="http://schemas.microsoft.com/office/drawing/2014/main" id="{43576CB5-12EB-4FF2-9C6B-4FBDB3A8146D}"/>
+                <a16:creationId xmlns:a16="http://schemas.microsoft.com/office/drawing/2014/main" id="{F05C1489-236B-41A6-9F9F-29AB87F73DB1}"/>
               </a:ext>
             </a:extLst>
           </p:cNvPr>
@@ -8241,7 +8601,7 @@
           <p:cNvPr id="30" name="risk-text-1-1">
             <a:extLst xmlns:a="http://schemas.openxmlformats.org/drawingml/2006/main">
               <a:ext uri="{FF2B5EF4-FFF2-40B4-BE49-F238E27FC236}">
-                <a16:creationId xmlns:a16="http://schemas.microsoft.com/office/drawing/2014/main" id="{AD912BE7-8B05-4A7A-9D19-099A073582C9}"/>
+                <a16:creationId xmlns:a16="http://schemas.microsoft.com/office/drawing/2014/main" id="{0DCA0A82-EBF0-4769-B33C-FC9591594B76}"/>
               </a:ext>
             </a:extLst>
           </p:cNvPr>
@@ -8291,7 +8651,7 @@
           <p:cNvPr id="31" name="risk-1-2">
             <a:extLst xmlns:a="http://schemas.openxmlformats.org/drawingml/2006/main">
               <a:ext uri="{FF2B5EF4-FFF2-40B4-BE49-F238E27FC236}">
-                <a16:creationId xmlns:a16="http://schemas.microsoft.com/office/drawing/2014/main" id="{04AFB70D-960D-4B0C-9872-4E8E107B07AC}"/>
+                <a16:creationId xmlns:a16="http://schemas.microsoft.com/office/drawing/2014/main" id="{A961E07E-5DA5-457C-A3A6-6FDDD83A503B}"/>
               </a:ext>
             </a:extLst>
           </p:cNvPr>
@@ -8324,7 +8684,7 @@
           <p:cNvPr id="32" name="risk-text-1-2">
             <a:extLst xmlns:a="http://schemas.openxmlformats.org/drawingml/2006/main">
               <a:ext uri="{FF2B5EF4-FFF2-40B4-BE49-F238E27FC236}">
-                <a16:creationId xmlns:a16="http://schemas.microsoft.com/office/drawing/2014/main" id="{576C5B06-DA53-483A-9B80-1262AC3E36EA}"/>
+                <a16:creationId xmlns:a16="http://schemas.microsoft.com/office/drawing/2014/main" id="{BB21E154-266E-4FAA-997B-9F93BE6D64B9}"/>
               </a:ext>
             </a:extLst>
           </p:cNvPr>
@@ -8374,7 +8734,7 @@
           <p:cNvPr id="33" name="risk-1-3">
             <a:extLst xmlns:a="http://schemas.openxmlformats.org/drawingml/2006/main">
               <a:ext uri="{FF2B5EF4-FFF2-40B4-BE49-F238E27FC236}">
-                <a16:creationId xmlns:a16="http://schemas.microsoft.com/office/drawing/2014/main" id="{34B95B5A-B3BD-4555-ABB7-155BCA4DBEBA}"/>
+                <a16:creationId xmlns:a16="http://schemas.microsoft.com/office/drawing/2014/main" id="{174E23D7-FBCD-49DA-88F7-CC1FEBE7A14E}"/>
               </a:ext>
             </a:extLst>
           </p:cNvPr>
@@ -8407,7 +8767,7 @@
           <p:cNvPr id="34" name="risk-text-1-3">
             <a:extLst xmlns:a="http://schemas.openxmlformats.org/drawingml/2006/main">
               <a:ext uri="{FF2B5EF4-FFF2-40B4-BE49-F238E27FC236}">
-                <a16:creationId xmlns:a16="http://schemas.microsoft.com/office/drawing/2014/main" id="{C177DA74-368D-47F9-996B-C68A333058EE}"/>
+                <a16:creationId xmlns:a16="http://schemas.microsoft.com/office/drawing/2014/main" id="{FF257D45-9C90-4655-9D06-B031A295DC78}"/>
               </a:ext>
             </a:extLst>
           </p:cNvPr>
@@ -8457,7 +8817,7 @@
           <p:cNvPr id="35" name="risk-2-0">
             <a:extLst xmlns:a="http://schemas.openxmlformats.org/drawingml/2006/main">
               <a:ext uri="{FF2B5EF4-FFF2-40B4-BE49-F238E27FC236}">
-                <a16:creationId xmlns:a16="http://schemas.microsoft.com/office/drawing/2014/main" id="{EAD6896D-7782-44CC-B2FB-83C5AAD4D379}"/>
+                <a16:creationId xmlns:a16="http://schemas.microsoft.com/office/drawing/2014/main" id="{9BA7C42E-9D76-4DAE-995D-9C4626E8A0A2}"/>
               </a:ext>
             </a:extLst>
           </p:cNvPr>
@@ -8490,7 +8850,7 @@
           <p:cNvPr id="36" name="risk-text-2-0">
             <a:extLst xmlns:a="http://schemas.openxmlformats.org/drawingml/2006/main">
               <a:ext uri="{FF2B5EF4-FFF2-40B4-BE49-F238E27FC236}">
-                <a16:creationId xmlns:a16="http://schemas.microsoft.com/office/drawing/2014/main" id="{A6DE6F56-9D15-4D93-B218-FBA6FEA2449C}"/>
+                <a16:creationId xmlns:a16="http://schemas.microsoft.com/office/drawing/2014/main" id="{7736313D-7572-443F-A877-C81CB2BD1759}"/>
               </a:ext>
             </a:extLst>
           </p:cNvPr>
@@ -8540,7 +8900,7 @@
           <p:cNvPr id="37" name="risk-2-1">
             <a:extLst xmlns:a="http://schemas.openxmlformats.org/drawingml/2006/main">
               <a:ext uri="{FF2B5EF4-FFF2-40B4-BE49-F238E27FC236}">
-                <a16:creationId xmlns:a16="http://schemas.microsoft.com/office/drawing/2014/main" id="{CDB98777-4587-4BBA-AE8A-181AD0F894BF}"/>
+                <a16:creationId xmlns:a16="http://schemas.microsoft.com/office/drawing/2014/main" id="{1722DA79-B2BF-4123-8799-93B88F2B620B}"/>
               </a:ext>
             </a:extLst>
           </p:cNvPr>
@@ -8573,7 +8933,7 @@
           <p:cNvPr id="38" name="risk-text-2-1">
             <a:extLst xmlns:a="http://schemas.openxmlformats.org/drawingml/2006/main">
               <a:ext uri="{FF2B5EF4-FFF2-40B4-BE49-F238E27FC236}">
-                <a16:creationId xmlns:a16="http://schemas.microsoft.com/office/drawing/2014/main" id="{E2E4C926-5069-465D-9DF8-BC9C4E37CD37}"/>
+                <a16:creationId xmlns:a16="http://schemas.microsoft.com/office/drawing/2014/main" id="{7B5EFC0D-456C-45FD-B46A-DE4A50AB4F09}"/>
               </a:ext>
             </a:extLst>
           </p:cNvPr>
@@ -8623,7 +8983,7 @@
           <p:cNvPr id="39" name="risk-2-2">
             <a:extLst xmlns:a="http://schemas.openxmlformats.org/drawingml/2006/main">
               <a:ext uri="{FF2B5EF4-FFF2-40B4-BE49-F238E27FC236}">
-                <a16:creationId xmlns:a16="http://schemas.microsoft.com/office/drawing/2014/main" id="{582052C3-EFCE-4579-8B8B-9EEE095C1EEE}"/>
+                <a16:creationId xmlns:a16="http://schemas.microsoft.com/office/drawing/2014/main" id="{0237E5CB-F9A9-4074-97ED-6F22C41F4FBA}"/>
               </a:ext>
             </a:extLst>
           </p:cNvPr>
@@ -8656,7 +9016,7 @@
           <p:cNvPr id="40" name="risk-text-2-2">
             <a:extLst xmlns:a="http://schemas.openxmlformats.org/drawingml/2006/main">
               <a:ext uri="{FF2B5EF4-FFF2-40B4-BE49-F238E27FC236}">
-                <a16:creationId xmlns:a16="http://schemas.microsoft.com/office/drawing/2014/main" id="{B3F86AA6-EC66-447A-8AAE-F093A5FE356F}"/>
+                <a16:creationId xmlns:a16="http://schemas.microsoft.com/office/drawing/2014/main" id="{DEE31F39-8ECB-4BB7-BC58-797A9EBCDC0F}"/>
               </a:ext>
             </a:extLst>
           </p:cNvPr>
@@ -8706,7 +9066,7 @@
           <p:cNvPr id="41" name="risk-2-3">
             <a:extLst xmlns:a="http://schemas.openxmlformats.org/drawingml/2006/main">
               <a:ext uri="{FF2B5EF4-FFF2-40B4-BE49-F238E27FC236}">
-                <a16:creationId xmlns:a16="http://schemas.microsoft.com/office/drawing/2014/main" id="{6BCC50F8-3C91-4494-B79B-3ADEB83D58E3}"/>
+                <a16:creationId xmlns:a16="http://schemas.microsoft.com/office/drawing/2014/main" id="{A662E978-D7E1-4EDE-AF0B-DE0329FF06E7}"/>
               </a:ext>
             </a:extLst>
           </p:cNvPr>
@@ -8739,7 +9099,7 @@
           <p:cNvPr id="42" name="risk-text-2-3">
             <a:extLst xmlns:a="http://schemas.openxmlformats.org/drawingml/2006/main">
               <a:ext uri="{FF2B5EF4-FFF2-40B4-BE49-F238E27FC236}">
-                <a16:creationId xmlns:a16="http://schemas.microsoft.com/office/drawing/2014/main" id="{15F0F8D9-B33D-4F48-B825-993B61635995}"/>
+                <a16:creationId xmlns:a16="http://schemas.microsoft.com/office/drawing/2014/main" id="{163CF5CF-3989-43CD-BFE2-63883994C3D9}"/>
               </a:ext>
             </a:extLst>
           </p:cNvPr>
@@ -8787,7 +9147,7 @@
     </p:spTree>
     <p:extLst>
       <p:ext uri="{BB962C8B-B14F-4D97-AF65-F5344CB8AC3E}">
-        <p14:creationId xmlns:p14="http://schemas.microsoft.com/office/powerpoint/2010/main" val="1127300654"/>
+        <p14:creationId xmlns:p14="http://schemas.microsoft.com/office/powerpoint/2010/main" val="1928471871"/>
       </p:ext>
     </p:extLst>
   </p:cSld>
@@ -8818,7 +9178,7 @@
           <p:cNvPr id="27" name="rule-60-45">
             <a:extLst xmlns:a="http://schemas.openxmlformats.org/drawingml/2006/main">
               <a:ext uri="{FF2B5EF4-FFF2-40B4-BE49-F238E27FC236}">
-                <a16:creationId xmlns:a16="http://schemas.microsoft.com/office/drawing/2014/main" id="{4539BF5F-401D-458E-B93C-35F133C10CF5}"/>
+                <a16:creationId xmlns:a16="http://schemas.microsoft.com/office/drawing/2014/main" id="{B9165233-E986-4A5F-BC0B-BB541D70D471}"/>
               </a:ext>
             </a:extLst>
           </p:cNvPr>
@@ -8849,7 +9209,7 @@
           <p:cNvPr id="2" name="chapter-accent">
             <a:extLst xmlns:a="http://schemas.openxmlformats.org/drawingml/2006/main">
               <a:ext uri="{FF2B5EF4-FFF2-40B4-BE49-F238E27FC236}">
-                <a16:creationId xmlns:a16="http://schemas.microsoft.com/office/drawing/2014/main" id="{33538871-DE8C-46AF-9A69-4C7816F3A4FE}"/>
+                <a16:creationId xmlns:a16="http://schemas.microsoft.com/office/drawing/2014/main" id="{535279E7-307D-4CA1-B1E0-3A0461A09F1B}"/>
               </a:ext>
             </a:extLst>
           </p:cNvPr>
@@ -8880,7 +9240,7 @@
           <p:cNvPr id="3" name="chapter">
             <a:extLst xmlns:a="http://schemas.openxmlformats.org/drawingml/2006/main">
               <a:ext uri="{FF2B5EF4-FFF2-40B4-BE49-F238E27FC236}">
-                <a16:creationId xmlns:a16="http://schemas.microsoft.com/office/drawing/2014/main" id="{59C546B2-2C1C-4098-BF5B-4E8753A152F5}"/>
+                <a16:creationId xmlns:a16="http://schemas.microsoft.com/office/drawing/2014/main" id="{ABA28397-910B-419B-A7D4-FD7F29B422D4}"/>
               </a:ext>
             </a:extLst>
           </p:cNvPr>
@@ -8930,7 +9290,7 @@
           <p:cNvPr id="4" name="page-number">
             <a:extLst xmlns:a="http://schemas.openxmlformats.org/drawingml/2006/main">
               <a:ext uri="{FF2B5EF4-FFF2-40B4-BE49-F238E27FC236}">
-                <a16:creationId xmlns:a16="http://schemas.microsoft.com/office/drawing/2014/main" id="{4A69AD19-DE01-43B4-AE6C-064BF2FDC1C6}"/>
+                <a16:creationId xmlns:a16="http://schemas.microsoft.com/office/drawing/2014/main" id="{80F7CFBC-062F-46DA-AFE9-AEDF5B9DDD95}"/>
               </a:ext>
             </a:extLst>
           </p:cNvPr>
@@ -8980,7 +9340,7 @@
           <p:cNvPr id="5" name="rule-60-674">
             <a:extLst xmlns:a="http://schemas.openxmlformats.org/drawingml/2006/main">
               <a:ext uri="{FF2B5EF4-FFF2-40B4-BE49-F238E27FC236}">
-                <a16:creationId xmlns:a16="http://schemas.microsoft.com/office/drawing/2014/main" id="{C5A7EA51-D7AC-4CA8-B582-A49D4C924EF3}"/>
+                <a16:creationId xmlns:a16="http://schemas.microsoft.com/office/drawing/2014/main" id="{B65D255A-5AEC-4ABD-ABC5-BE43A28405C2}"/>
               </a:ext>
             </a:extLst>
           </p:cNvPr>
@@ -9011,7 +9371,7 @@
           <p:cNvPr id="6" name="brand">
             <a:extLst xmlns:a="http://schemas.openxmlformats.org/drawingml/2006/main">
               <a:ext uri="{FF2B5EF4-FFF2-40B4-BE49-F238E27FC236}">
-                <a16:creationId xmlns:a16="http://schemas.microsoft.com/office/drawing/2014/main" id="{993C6780-345F-4815-A4DB-D7207E98333A}"/>
+                <a16:creationId xmlns:a16="http://schemas.microsoft.com/office/drawing/2014/main" id="{9B679202-7B75-438E-9EB7-4CF9C58F18A6}"/>
               </a:ext>
             </a:extLst>
           </p:cNvPr>
@@ -9061,7 +9421,7 @@
           <p:cNvPr id="7" name="source">
             <a:extLst xmlns:a="http://schemas.openxmlformats.org/drawingml/2006/main">
               <a:ext uri="{FF2B5EF4-FFF2-40B4-BE49-F238E27FC236}">
-                <a16:creationId xmlns:a16="http://schemas.microsoft.com/office/drawing/2014/main" id="{7E4BF128-97E3-43AE-83EF-07735FF67E33}"/>
+                <a16:creationId xmlns:a16="http://schemas.microsoft.com/office/drawing/2014/main" id="{A955DF02-BCF7-4CF4-8884-BF05C2337C05}"/>
               </a:ext>
             </a:extLst>
           </p:cNvPr>
@@ -9111,7 +9471,7 @@
           <p:cNvPr id="8" name="footer-page">
             <a:extLst xmlns:a="http://schemas.openxmlformats.org/drawingml/2006/main">
               <a:ext uri="{FF2B5EF4-FFF2-40B4-BE49-F238E27FC236}">
-                <a16:creationId xmlns:a16="http://schemas.microsoft.com/office/drawing/2014/main" id="{2D2A3A64-7536-4DBE-9558-06130D5F9EB9}"/>
+                <a16:creationId xmlns:a16="http://schemas.microsoft.com/office/drawing/2014/main" id="{C9EA78A7-260A-4D86-B111-579E972BD33F}"/>
               </a:ext>
             </a:extLst>
           </p:cNvPr>
@@ -9151,7 +9511,7 @@
                   <a:srgbClr val="69766F"/>
                 </a:solidFill>
               </a:rPr>
-              <a:t>13 / 15</a:t>
+              <a:t>13 / 18</a:t>
             </a:r>
           </a:p>
         </p:txBody>
@@ -9161,7 +9521,7 @@
           <p:cNvPr id="9" name="page-title">
             <a:extLst xmlns:a="http://schemas.openxmlformats.org/drawingml/2006/main">
               <a:ext uri="{FF2B5EF4-FFF2-40B4-BE49-F238E27FC236}">
-                <a16:creationId xmlns:a16="http://schemas.microsoft.com/office/drawing/2014/main" id="{98B883C5-95BF-42B2-89EB-826288C72D3B}"/>
+                <a16:creationId xmlns:a16="http://schemas.microsoft.com/office/drawing/2014/main" id="{ADB61496-9DA0-40CC-B368-C51BFA060A7D}"/>
               </a:ext>
             </a:extLst>
           </p:cNvPr>
@@ -9211,7 +9571,7 @@
           <p:cNvPr id="10" name="page-lead">
             <a:extLst xmlns:a="http://schemas.openxmlformats.org/drawingml/2006/main">
               <a:ext uri="{FF2B5EF4-FFF2-40B4-BE49-F238E27FC236}">
-                <a16:creationId xmlns:a16="http://schemas.microsoft.com/office/drawing/2014/main" id="{E45EDDA9-D663-482E-8880-524A0B3E7922}"/>
+                <a16:creationId xmlns:a16="http://schemas.microsoft.com/office/drawing/2014/main" id="{C3A878C6-1AB5-43DB-A1EB-F6195C1CC1C9}"/>
               </a:ext>
             </a:extLst>
           </p:cNvPr>
@@ -9261,7 +9621,7 @@
           <p:cNvPr id="11" name="decision-main">
             <a:extLst xmlns:a="http://schemas.openxmlformats.org/drawingml/2006/main">
               <a:ext uri="{FF2B5EF4-FFF2-40B4-BE49-F238E27FC236}">
-                <a16:creationId xmlns:a16="http://schemas.microsoft.com/office/drawing/2014/main" id="{A6291A4B-5DE8-4362-87DD-61ED87AEFFC0}"/>
+                <a16:creationId xmlns:a16="http://schemas.microsoft.com/office/drawing/2014/main" id="{BF5D28F5-6998-4011-A250-2EFDBEB49296}"/>
               </a:ext>
             </a:extLst>
           </p:cNvPr>
@@ -9292,7 +9652,7 @@
           <p:cNvPr id="12" name="label-95-220">
             <a:extLst xmlns:a="http://schemas.openxmlformats.org/drawingml/2006/main">
               <a:ext uri="{FF2B5EF4-FFF2-40B4-BE49-F238E27FC236}">
-                <a16:creationId xmlns:a16="http://schemas.microsoft.com/office/drawing/2014/main" id="{5DF12B13-E1F8-4389-A7B7-6D956DB6CF85}"/>
+                <a16:creationId xmlns:a16="http://schemas.microsoft.com/office/drawing/2014/main" id="{480DBD59-7DA8-43AE-B365-3AFCDD98149C}"/>
               </a:ext>
             </a:extLst>
           </p:cNvPr>
@@ -9342,7 +9702,7 @@
           <p:cNvPr id="13" name="decision-copy">
             <a:extLst xmlns:a="http://schemas.openxmlformats.org/drawingml/2006/main">
               <a:ext uri="{FF2B5EF4-FFF2-40B4-BE49-F238E27FC236}">
-                <a16:creationId xmlns:a16="http://schemas.microsoft.com/office/drawing/2014/main" id="{CB8144BB-897B-420A-88BE-4F5F4D247D38}"/>
+                <a16:creationId xmlns:a16="http://schemas.microsoft.com/office/drawing/2014/main" id="{1D48118D-D9F2-4F44-B449-7E2385E81A70}"/>
               </a:ext>
             </a:extLst>
           </p:cNvPr>
@@ -9392,7 +9752,7 @@
           <p:cNvPr id="14" name="decision-reason">
             <a:extLst xmlns:a="http://schemas.openxmlformats.org/drawingml/2006/main">
               <a:ext uri="{FF2B5EF4-FFF2-40B4-BE49-F238E27FC236}">
-                <a16:creationId xmlns:a16="http://schemas.microsoft.com/office/drawing/2014/main" id="{696A6280-6DF1-44B2-9208-DC5E8BF3E27A}"/>
+                <a16:creationId xmlns:a16="http://schemas.microsoft.com/office/drawing/2014/main" id="{9618AE3F-FD17-4EE9-BDC3-95722B91F866}"/>
               </a:ext>
             </a:extLst>
           </p:cNvPr>
@@ -9459,7 +9819,7 @@
           <p:cNvPr id="15" name="decision-action-0-bg">
             <a:extLst xmlns:a="http://schemas.openxmlformats.org/drawingml/2006/main">
               <a:ext uri="{FF2B5EF4-FFF2-40B4-BE49-F238E27FC236}">
-                <a16:creationId xmlns:a16="http://schemas.microsoft.com/office/drawing/2014/main" id="{7A9C8C4B-2B8F-4D74-8BCB-E2894ABB7468}"/>
+                <a16:creationId xmlns:a16="http://schemas.microsoft.com/office/drawing/2014/main" id="{623A3E9E-9F09-491A-9360-56FE840ED6C6}"/>
               </a:ext>
             </a:extLst>
           </p:cNvPr>
@@ -9492,7 +9852,7 @@
           <p:cNvPr id="16" name="decision-action-0-accent">
             <a:extLst xmlns:a="http://schemas.openxmlformats.org/drawingml/2006/main">
               <a:ext uri="{FF2B5EF4-FFF2-40B4-BE49-F238E27FC236}">
-                <a16:creationId xmlns:a16="http://schemas.microsoft.com/office/drawing/2014/main" id="{CD0E17B1-82D5-4061-B957-05AB751A253B}"/>
+                <a16:creationId xmlns:a16="http://schemas.microsoft.com/office/drawing/2014/main" id="{4DDDCF20-3D5F-4DB4-8823-672F20BD188A}"/>
               </a:ext>
             </a:extLst>
           </p:cNvPr>
@@ -9523,7 +9883,7 @@
           <p:cNvPr id="17" name="decision-action-0-title">
             <a:extLst xmlns:a="http://schemas.openxmlformats.org/drawingml/2006/main">
               <a:ext uri="{FF2B5EF4-FFF2-40B4-BE49-F238E27FC236}">
-                <a16:creationId xmlns:a16="http://schemas.microsoft.com/office/drawing/2014/main" id="{8E15E5C0-CB56-4063-8C2C-8670A31D0796}"/>
+                <a16:creationId xmlns:a16="http://schemas.microsoft.com/office/drawing/2014/main" id="{310629F0-7854-4A55-AAEB-0F6653ED7E59}"/>
               </a:ext>
             </a:extLst>
           </p:cNvPr>
@@ -9573,7 +9933,7 @@
           <p:cNvPr id="18" name="decision-action-0-detail">
             <a:extLst xmlns:a="http://schemas.openxmlformats.org/drawingml/2006/main">
               <a:ext uri="{FF2B5EF4-FFF2-40B4-BE49-F238E27FC236}">
-                <a16:creationId xmlns:a16="http://schemas.microsoft.com/office/drawing/2014/main" id="{6379C47E-60A1-4309-A8D5-6DD0A607329F}"/>
+                <a16:creationId xmlns:a16="http://schemas.microsoft.com/office/drawing/2014/main" id="{88010784-74C8-48B0-AFE0-A47F6A222872}"/>
               </a:ext>
             </a:extLst>
           </p:cNvPr>
@@ -9623,7 +9983,7 @@
           <p:cNvPr id="19" name="decision-action-1-bg">
             <a:extLst xmlns:a="http://schemas.openxmlformats.org/drawingml/2006/main">
               <a:ext uri="{FF2B5EF4-FFF2-40B4-BE49-F238E27FC236}">
-                <a16:creationId xmlns:a16="http://schemas.microsoft.com/office/drawing/2014/main" id="{46E4C5EB-F176-4795-8206-D6EAB95CA1BE}"/>
+                <a16:creationId xmlns:a16="http://schemas.microsoft.com/office/drawing/2014/main" id="{FE26BCE3-AB20-426D-AACD-533A1FB8ACBE}"/>
               </a:ext>
             </a:extLst>
           </p:cNvPr>
@@ -9656,7 +10016,7 @@
           <p:cNvPr id="20" name="decision-action-1-accent">
             <a:extLst xmlns:a="http://schemas.openxmlformats.org/drawingml/2006/main">
               <a:ext uri="{FF2B5EF4-FFF2-40B4-BE49-F238E27FC236}">
-                <a16:creationId xmlns:a16="http://schemas.microsoft.com/office/drawing/2014/main" id="{7266FAA1-AA20-4121-956C-40769B0A908E}"/>
+                <a16:creationId xmlns:a16="http://schemas.microsoft.com/office/drawing/2014/main" id="{B8C171E5-B44E-4E87-AF16-9401FFB381B1}"/>
               </a:ext>
             </a:extLst>
           </p:cNvPr>
@@ -9687,7 +10047,7 @@
           <p:cNvPr id="21" name="decision-action-1-title">
             <a:extLst xmlns:a="http://schemas.openxmlformats.org/drawingml/2006/main">
               <a:ext uri="{FF2B5EF4-FFF2-40B4-BE49-F238E27FC236}">
-                <a16:creationId xmlns:a16="http://schemas.microsoft.com/office/drawing/2014/main" id="{46F1F938-F203-40EA-B329-DF4D2DA5CD71}"/>
+                <a16:creationId xmlns:a16="http://schemas.microsoft.com/office/drawing/2014/main" id="{BA509C71-7D95-4481-8A2B-087281A716C4}"/>
               </a:ext>
             </a:extLst>
           </p:cNvPr>
@@ -9737,7 +10097,7 @@
           <p:cNvPr id="22" name="decision-action-1-detail">
             <a:extLst xmlns:a="http://schemas.openxmlformats.org/drawingml/2006/main">
               <a:ext uri="{FF2B5EF4-FFF2-40B4-BE49-F238E27FC236}">
-                <a16:creationId xmlns:a16="http://schemas.microsoft.com/office/drawing/2014/main" id="{EE706D20-7FBB-482C-AF58-57D8C88715DE}"/>
+                <a16:creationId xmlns:a16="http://schemas.microsoft.com/office/drawing/2014/main" id="{A70C0E1F-F119-49DD-B6EB-041E5F46CB8F}"/>
               </a:ext>
             </a:extLst>
           </p:cNvPr>
@@ -9787,7 +10147,7 @@
           <p:cNvPr id="23" name="decision-action-2-bg">
             <a:extLst xmlns:a="http://schemas.openxmlformats.org/drawingml/2006/main">
               <a:ext uri="{FF2B5EF4-FFF2-40B4-BE49-F238E27FC236}">
-                <a16:creationId xmlns:a16="http://schemas.microsoft.com/office/drawing/2014/main" id="{DE689EC0-250F-4AFD-8B35-38124D5F35EE}"/>
+                <a16:creationId xmlns:a16="http://schemas.microsoft.com/office/drawing/2014/main" id="{3D7CEB1F-2D61-4953-B3E3-CD3B579023A4}"/>
               </a:ext>
             </a:extLst>
           </p:cNvPr>
@@ -9820,7 +10180,7 @@
           <p:cNvPr id="24" name="decision-action-2-accent">
             <a:extLst xmlns:a="http://schemas.openxmlformats.org/drawingml/2006/main">
               <a:ext uri="{FF2B5EF4-FFF2-40B4-BE49-F238E27FC236}">
-                <a16:creationId xmlns:a16="http://schemas.microsoft.com/office/drawing/2014/main" id="{9FA610EB-22F0-4764-B778-396E1780E627}"/>
+                <a16:creationId xmlns:a16="http://schemas.microsoft.com/office/drawing/2014/main" id="{A9224872-DAF9-4A27-8940-86902CB33689}"/>
               </a:ext>
             </a:extLst>
           </p:cNvPr>
@@ -9851,7 +10211,7 @@
           <p:cNvPr id="25" name="decision-action-2-title">
             <a:extLst xmlns:a="http://schemas.openxmlformats.org/drawingml/2006/main">
               <a:ext uri="{FF2B5EF4-FFF2-40B4-BE49-F238E27FC236}">
-                <a16:creationId xmlns:a16="http://schemas.microsoft.com/office/drawing/2014/main" id="{D41DF0F8-E0D6-450F-9D89-962556D0356B}"/>
+                <a16:creationId xmlns:a16="http://schemas.microsoft.com/office/drawing/2014/main" id="{B4BC851B-164F-4BA8-AD35-24E1D4A41A0C}"/>
               </a:ext>
             </a:extLst>
           </p:cNvPr>
@@ -9901,7 +10261,7 @@
           <p:cNvPr id="26" name="decision-action-2-detail">
             <a:extLst xmlns:a="http://schemas.openxmlformats.org/drawingml/2006/main">
               <a:ext uri="{FF2B5EF4-FFF2-40B4-BE49-F238E27FC236}">
-                <a16:creationId xmlns:a16="http://schemas.microsoft.com/office/drawing/2014/main" id="{FC7D6D23-C9EE-4802-880B-E1A91E86CC83}"/>
+                <a16:creationId xmlns:a16="http://schemas.microsoft.com/office/drawing/2014/main" id="{F9467F06-E9CB-4B33-8F02-B9030E8B183D}"/>
               </a:ext>
             </a:extLst>
           </p:cNvPr>
@@ -9949,7 +10309,7 @@
     </p:spTree>
     <p:extLst>
       <p:ext uri="{BB962C8B-B14F-4D97-AF65-F5344CB8AC3E}">
-        <p14:creationId xmlns:p14="http://schemas.microsoft.com/office/powerpoint/2010/main" val="96370222"/>
+        <p14:creationId xmlns:p14="http://schemas.microsoft.com/office/powerpoint/2010/main" val="1531879335"/>
       </p:ext>
     </p:extLst>
   </p:cSld>
@@ -9962,7 +10322,7 @@
     <p:bg>
       <p:bgPr>
         <a:solidFill xmlns:a="http://schemas.openxmlformats.org/drawingml/2006/main">
-          <a:srgbClr val="1C7866"/>
+          <a:srgbClr val="F5F0E6"/>
         </a:solidFill>
       </p:bgPr>
     </p:bg>
@@ -9977,231 +10337,1858 @@
       </p:grpSpPr>
       <p:sp>
         <p:nvSpPr>
-          <p:cNvPr id="6" name="section-number">
-            <a:extLst xmlns:a="http://schemas.openxmlformats.org/drawingml/2006/main">
-              <a:ext uri="{FF2B5EF4-FFF2-40B4-BE49-F238E27FC236}">
-                <a16:creationId xmlns:a16="http://schemas.microsoft.com/office/drawing/2014/main" id="{104A7661-5191-4940-939A-D86A18CCBD43}"/>
-              </a:ext>
-            </a:extLst>
-          </p:cNvPr>
-          <p:cNvSpPr>
-            <a:spLocks xmlns:a="http://schemas.openxmlformats.org/drawingml/2006/main" noGrp="1"/>
-          </p:cNvSpPr>
-          <p:nvPr/>
-        </p:nvSpPr>
-        <p:spPr>
-          <a:xfrm xmlns:a="http://schemas.openxmlformats.org/drawingml/2006/main">
-            <a:off x="666750" y="952500"/>
-            <a:ext cx="2286000" cy="1333500"/>
-          </a:xfrm>
-          <a:prstGeom xmlns:a="http://schemas.openxmlformats.org/drawingml/2006/main" prst="rect">
-            <a:avLst/>
-          </a:prstGeom>
-          <a:noFill xmlns:a="http://schemas.openxmlformats.org/drawingml/2006/main"/>
-          <a:ln xmlns:a="http://schemas.openxmlformats.org/drawingml/2006/main" w="0">
-            <a:noFill/>
-            <a:prstDash val="solid"/>
-          </a:ln>
-        </p:spPr>
-        <p:txBody>
-          <a:bodyPr xmlns:a="http://schemas.openxmlformats.org/drawingml/2006/main" anchor="ctr"/>
-          <a:lstStyle xmlns:a="http://schemas.openxmlformats.org/drawingml/2006/main"/>
-          <a:p xmlns:a="http://schemas.openxmlformats.org/drawingml/2006/main">
-            <a:pPr algn="l">
-              <a:defRPr sz="5250" b="0">
+          <p:cNvPr id="42" name="rule-60-45">
+            <a:extLst xmlns:a="http://schemas.openxmlformats.org/drawingml/2006/main">
+              <a:ext uri="{FF2B5EF4-FFF2-40B4-BE49-F238E27FC236}">
+                <a16:creationId xmlns:a16="http://schemas.microsoft.com/office/drawing/2014/main" id="{89EC54D7-40BC-4583-8C00-46A4082D4641}"/>
+              </a:ext>
+            </a:extLst>
+          </p:cNvPr>
+          <p:cNvSpPr>
+            <a:spLocks xmlns:a="http://schemas.openxmlformats.org/drawingml/2006/main" noGrp="1"/>
+          </p:cNvSpPr>
+          <p:nvPr/>
+        </p:nvSpPr>
+        <p:spPr>
+          <a:xfrm xmlns:a="http://schemas.openxmlformats.org/drawingml/2006/main">
+            <a:off x="571500" y="428625"/>
+            <a:ext cx="11049000" cy="9525"/>
+          </a:xfrm>
+          <a:prstGeom xmlns:a="http://schemas.openxmlformats.org/drawingml/2006/main" prst="rect">
+            <a:avLst/>
+          </a:prstGeom>
+          <a:solidFill xmlns:a="http://schemas.openxmlformats.org/drawingml/2006/main">
+            <a:srgbClr val="CBD3CE"/>
+          </a:solidFill>
+          <a:ln xmlns:a="http://schemas.openxmlformats.org/drawingml/2006/main" w="0">
+            <a:noFill/>
+            <a:prstDash val="solid"/>
+          </a:ln>
+        </p:spPr>
+      </p:sp>
+      <p:sp>
+        <p:nvSpPr>
+          <p:cNvPr id="2" name="chapter-accent">
+            <a:extLst xmlns:a="http://schemas.openxmlformats.org/drawingml/2006/main">
+              <a:ext uri="{FF2B5EF4-FFF2-40B4-BE49-F238E27FC236}">
+                <a16:creationId xmlns:a16="http://schemas.microsoft.com/office/drawing/2014/main" id="{1866C5F7-AD01-460B-BF67-D4832E5BFE3D}"/>
+              </a:ext>
+            </a:extLst>
+          </p:cNvPr>
+          <p:cNvSpPr>
+            <a:spLocks xmlns:a="http://schemas.openxmlformats.org/drawingml/2006/main" noGrp="1"/>
+          </p:cNvSpPr>
+          <p:nvPr/>
+        </p:nvSpPr>
+        <p:spPr>
+          <a:xfrm xmlns:a="http://schemas.openxmlformats.org/drawingml/2006/main">
+            <a:off x="571500" y="266700"/>
+            <a:ext cx="266700" cy="28575"/>
+          </a:xfrm>
+          <a:prstGeom xmlns:a="http://schemas.openxmlformats.org/drawingml/2006/main" prst="rect">
+            <a:avLst/>
+          </a:prstGeom>
+          <a:solidFill xmlns:a="http://schemas.openxmlformats.org/drawingml/2006/main">
+            <a:srgbClr val="BC794D"/>
+          </a:solidFill>
+          <a:ln xmlns:a="http://schemas.openxmlformats.org/drawingml/2006/main" w="0">
+            <a:noFill/>
+            <a:prstDash val="solid"/>
+          </a:ln>
+        </p:spPr>
+      </p:sp>
+      <p:sp>
+        <p:nvSpPr>
+          <p:cNvPr id="3" name="chapter">
+            <a:extLst xmlns:a="http://schemas.openxmlformats.org/drawingml/2006/main">
+              <a:ext uri="{FF2B5EF4-FFF2-40B4-BE49-F238E27FC236}">
+                <a16:creationId xmlns:a16="http://schemas.microsoft.com/office/drawing/2014/main" id="{75EA7778-DD13-4C70-87C1-25A02AD22346}"/>
+              </a:ext>
+            </a:extLst>
+          </p:cNvPr>
+          <p:cNvSpPr>
+            <a:spLocks xmlns:a="http://schemas.openxmlformats.org/drawingml/2006/main" noGrp="1"/>
+          </p:cNvSpPr>
+          <p:nvPr/>
+        </p:nvSpPr>
+        <p:spPr>
+          <a:xfrm xmlns:a="http://schemas.openxmlformats.org/drawingml/2006/main">
+            <a:off x="933450" y="171450"/>
+            <a:ext cx="3048000" cy="247650"/>
+          </a:xfrm>
+          <a:prstGeom xmlns:a="http://schemas.openxmlformats.org/drawingml/2006/main" prst="rect">
+            <a:avLst/>
+          </a:prstGeom>
+          <a:noFill xmlns:a="http://schemas.openxmlformats.org/drawingml/2006/main"/>
+          <a:ln xmlns:a="http://schemas.openxmlformats.org/drawingml/2006/main" w="0">
+            <a:noFill/>
+            <a:prstDash val="solid"/>
+          </a:ln>
+        </p:spPr>
+        <p:txBody>
+          <a:bodyPr xmlns:a="http://schemas.openxmlformats.org/drawingml/2006/main" anchor="ctr"/>
+          <a:lstStyle xmlns:a="http://schemas.openxmlformats.org/drawingml/2006/main"/>
+          <a:p xmlns:a="http://schemas.openxmlformats.org/drawingml/2006/main">
+            <a:pPr algn="l">
+              <a:defRPr sz="900" b="1">
+                <a:solidFill>
+                  <a:srgbClr val="1C7866"/>
+                </a:solidFill>
+              </a:defRPr>
+            </a:pPr>
+            <a:r>
+              <a:rPr sz="900" b="1">
+                <a:solidFill>
+                  <a:srgbClr val="1C7866"/>
+                </a:solidFill>
+              </a:rPr>
+              <a:t>业务能力链路</a:t>
+            </a:r>
+          </a:p>
+        </p:txBody>
+      </p:sp>
+      <p:sp>
+        <p:nvSpPr>
+          <p:cNvPr id="4" name="page-number">
+            <a:extLst xmlns:a="http://schemas.openxmlformats.org/drawingml/2006/main">
+              <a:ext uri="{FF2B5EF4-FFF2-40B4-BE49-F238E27FC236}">
+                <a16:creationId xmlns:a16="http://schemas.microsoft.com/office/drawing/2014/main" id="{19028263-35A1-45BB-AA83-A3121CF8CFE4}"/>
+              </a:ext>
+            </a:extLst>
+          </p:cNvPr>
+          <p:cNvSpPr>
+            <a:spLocks xmlns:a="http://schemas.openxmlformats.org/drawingml/2006/main" noGrp="1"/>
+          </p:cNvSpPr>
+          <p:nvPr/>
+        </p:nvSpPr>
+        <p:spPr>
+          <a:xfrm xmlns:a="http://schemas.openxmlformats.org/drawingml/2006/main">
+            <a:off x="11163300" y="171450"/>
+            <a:ext cx="457200" cy="247650"/>
+          </a:xfrm>
+          <a:prstGeom xmlns:a="http://schemas.openxmlformats.org/drawingml/2006/main" prst="rect">
+            <a:avLst/>
+          </a:prstGeom>
+          <a:noFill xmlns:a="http://schemas.openxmlformats.org/drawingml/2006/main"/>
+          <a:ln xmlns:a="http://schemas.openxmlformats.org/drawingml/2006/main" w="0">
+            <a:noFill/>
+            <a:prstDash val="solid"/>
+          </a:ln>
+        </p:spPr>
+        <p:txBody>
+          <a:bodyPr xmlns:a="http://schemas.openxmlformats.org/drawingml/2006/main" anchor="ctr"/>
+          <a:lstStyle xmlns:a="http://schemas.openxmlformats.org/drawingml/2006/main"/>
+          <a:p xmlns:a="http://schemas.openxmlformats.org/drawingml/2006/main">
+            <a:pPr algn="r">
+              <a:defRPr sz="825" b="1">
+                <a:solidFill>
+                  <a:srgbClr val="69766F"/>
+                </a:solidFill>
+              </a:defRPr>
+            </a:pPr>
+            <a:r>
+              <a:rPr sz="825" b="1">
+                <a:solidFill>
+                  <a:srgbClr val="69766F"/>
+                </a:solidFill>
+              </a:rPr>
+              <a:t>14</a:t>
+            </a:r>
+          </a:p>
+        </p:txBody>
+      </p:sp>
+      <p:sp>
+        <p:nvSpPr>
+          <p:cNvPr id="5" name="rule-60-674">
+            <a:extLst xmlns:a="http://schemas.openxmlformats.org/drawingml/2006/main">
+              <a:ext uri="{FF2B5EF4-FFF2-40B4-BE49-F238E27FC236}">
+                <a16:creationId xmlns:a16="http://schemas.microsoft.com/office/drawing/2014/main" id="{B0162AEE-CFEF-459C-A226-37E050FAE0B2}"/>
+              </a:ext>
+            </a:extLst>
+          </p:cNvPr>
+          <p:cNvSpPr>
+            <a:spLocks xmlns:a="http://schemas.openxmlformats.org/drawingml/2006/main" noGrp="1"/>
+          </p:cNvSpPr>
+          <p:nvPr/>
+        </p:nvSpPr>
+        <p:spPr>
+          <a:xfrm xmlns:a="http://schemas.openxmlformats.org/drawingml/2006/main">
+            <a:off x="571500" y="6419850"/>
+            <a:ext cx="11049000" cy="9525"/>
+          </a:xfrm>
+          <a:prstGeom xmlns:a="http://schemas.openxmlformats.org/drawingml/2006/main" prst="rect">
+            <a:avLst/>
+          </a:prstGeom>
+          <a:solidFill xmlns:a="http://schemas.openxmlformats.org/drawingml/2006/main">
+            <a:srgbClr val="CBD3CE"/>
+          </a:solidFill>
+          <a:ln xmlns:a="http://schemas.openxmlformats.org/drawingml/2006/main" w="0">
+            <a:noFill/>
+            <a:prstDash val="solid"/>
+          </a:ln>
+        </p:spPr>
+      </p:sp>
+      <p:sp>
+        <p:nvSpPr>
+          <p:cNvPr id="6" name="brand">
+            <a:extLst xmlns:a="http://schemas.openxmlformats.org/drawingml/2006/main">
+              <a:ext uri="{FF2B5EF4-FFF2-40B4-BE49-F238E27FC236}">
+                <a16:creationId xmlns:a16="http://schemas.microsoft.com/office/drawing/2014/main" id="{4F1E6DC7-9A04-45AF-8AA1-676BBBDD0AB0}"/>
+              </a:ext>
+            </a:extLst>
+          </p:cNvPr>
+          <p:cNvSpPr>
+            <a:spLocks xmlns:a="http://schemas.openxmlformats.org/drawingml/2006/main" noGrp="1"/>
+          </p:cNvSpPr>
+          <p:nvPr/>
+        </p:nvSpPr>
+        <p:spPr>
+          <a:xfrm xmlns:a="http://schemas.openxmlformats.org/drawingml/2006/main">
+            <a:off x="571500" y="6477000"/>
+            <a:ext cx="857250" cy="228600"/>
+          </a:xfrm>
+          <a:prstGeom xmlns:a="http://schemas.openxmlformats.org/drawingml/2006/main" prst="rect">
+            <a:avLst/>
+          </a:prstGeom>
+          <a:noFill xmlns:a="http://schemas.openxmlformats.org/drawingml/2006/main"/>
+          <a:ln xmlns:a="http://schemas.openxmlformats.org/drawingml/2006/main" w="0">
+            <a:noFill/>
+            <a:prstDash val="solid"/>
+          </a:ln>
+        </p:spPr>
+        <p:txBody>
+          <a:bodyPr xmlns:a="http://schemas.openxmlformats.org/drawingml/2006/main" anchor="ctr"/>
+          <a:lstStyle xmlns:a="http://schemas.openxmlformats.org/drawingml/2006/main"/>
+          <a:p xmlns:a="http://schemas.openxmlformats.org/drawingml/2006/main">
+            <a:pPr algn="l">
+              <a:defRPr sz="1200" b="1">
+                <a:solidFill>
+                  <a:srgbClr val="42B879"/>
+                </a:solidFill>
+              </a:defRPr>
+            </a:pPr>
+            <a:r>
+              <a:rPr sz="1200" b="1">
+                <a:solidFill>
+                  <a:srgbClr val="42B879"/>
+                </a:solidFill>
+              </a:rPr>
+              <a:t>mint</a:t>
+            </a:r>
+          </a:p>
+        </p:txBody>
+      </p:sp>
+      <p:sp>
+        <p:nvSpPr>
+          <p:cNvPr id="7" name="source">
+            <a:extLst xmlns:a="http://schemas.openxmlformats.org/drawingml/2006/main">
+              <a:ext uri="{FF2B5EF4-FFF2-40B4-BE49-F238E27FC236}">
+                <a16:creationId xmlns:a16="http://schemas.microsoft.com/office/drawing/2014/main" id="{54F9AF66-23EB-4893-8F73-18EBC6BF5281}"/>
+              </a:ext>
+            </a:extLst>
+          </p:cNvPr>
+          <p:cNvSpPr>
+            <a:spLocks xmlns:a="http://schemas.openxmlformats.org/drawingml/2006/main" noGrp="1"/>
+          </p:cNvSpPr>
+          <p:nvPr/>
+        </p:nvSpPr>
+        <p:spPr>
+          <a:xfrm xmlns:a="http://schemas.openxmlformats.org/drawingml/2006/main">
+            <a:off x="4095750" y="6477000"/>
+            <a:ext cx="4095750" cy="209550"/>
+          </a:xfrm>
+          <a:prstGeom xmlns:a="http://schemas.openxmlformats.org/drawingml/2006/main" prst="rect">
+            <a:avLst/>
+          </a:prstGeom>
+          <a:noFill xmlns:a="http://schemas.openxmlformats.org/drawingml/2006/main"/>
+          <a:ln xmlns:a="http://schemas.openxmlformats.org/drawingml/2006/main" w="0">
+            <a:noFill/>
+            <a:prstDash val="solid"/>
+          </a:ln>
+        </p:spPr>
+        <p:txBody>
+          <a:bodyPr xmlns:a="http://schemas.openxmlformats.org/drawingml/2006/main" anchor="ctr"/>
+          <a:lstStyle xmlns:a="http://schemas.openxmlformats.org/drawingml/2006/main"/>
+          <a:p xmlns:a="http://schemas.openxmlformats.org/drawingml/2006/main">
+            <a:pPr algn="ctr">
+              <a:defRPr sz="675" b="0">
+                <a:solidFill>
+                  <a:srgbClr val="69766F"/>
+                </a:solidFill>
+              </a:defRPr>
+            </a:pPr>
+            <a:r>
+              <a:rPr sz="675" b="0">
+                <a:solidFill>
+                  <a:srgbClr val="69766F"/>
+                </a:solidFill>
+              </a:rPr>
+              <a:t>来源：组件母版示例，生成材料时替换</a:t>
+            </a:r>
+          </a:p>
+        </p:txBody>
+      </p:sp>
+      <p:sp>
+        <p:nvSpPr>
+          <p:cNvPr id="8" name="footer-page">
+            <a:extLst xmlns:a="http://schemas.openxmlformats.org/drawingml/2006/main">
+              <a:ext uri="{FF2B5EF4-FFF2-40B4-BE49-F238E27FC236}">
+                <a16:creationId xmlns:a16="http://schemas.microsoft.com/office/drawing/2014/main" id="{68A33E17-E72A-4E5D-B064-C3FCD6B3F1F0}"/>
+              </a:ext>
+            </a:extLst>
+          </p:cNvPr>
+          <p:cNvSpPr>
+            <a:spLocks xmlns:a="http://schemas.openxmlformats.org/drawingml/2006/main" noGrp="1"/>
+          </p:cNvSpPr>
+          <p:nvPr/>
+        </p:nvSpPr>
+        <p:spPr>
+          <a:xfrm xmlns:a="http://schemas.openxmlformats.org/drawingml/2006/main">
+            <a:off x="10763250" y="6477000"/>
+            <a:ext cx="857250" cy="209550"/>
+          </a:xfrm>
+          <a:prstGeom xmlns:a="http://schemas.openxmlformats.org/drawingml/2006/main" prst="rect">
+            <a:avLst/>
+          </a:prstGeom>
+          <a:noFill xmlns:a="http://schemas.openxmlformats.org/drawingml/2006/main"/>
+          <a:ln xmlns:a="http://schemas.openxmlformats.org/drawingml/2006/main" w="0">
+            <a:noFill/>
+            <a:prstDash val="solid"/>
+          </a:ln>
+        </p:spPr>
+        <p:txBody>
+          <a:bodyPr xmlns:a="http://schemas.openxmlformats.org/drawingml/2006/main" anchor="ctr"/>
+          <a:lstStyle xmlns:a="http://schemas.openxmlformats.org/drawingml/2006/main"/>
+          <a:p xmlns:a="http://schemas.openxmlformats.org/drawingml/2006/main">
+            <a:pPr algn="r">
+              <a:defRPr sz="675" b="0">
+                <a:solidFill>
+                  <a:srgbClr val="69766F"/>
+                </a:solidFill>
+              </a:defRPr>
+            </a:pPr>
+            <a:r>
+              <a:rPr sz="675" b="0">
+                <a:solidFill>
+                  <a:srgbClr val="69766F"/>
+                </a:solidFill>
+              </a:rPr>
+              <a:t>14 / 18</a:t>
+            </a:r>
+          </a:p>
+        </p:txBody>
+      </p:sp>
+      <p:sp>
+        <p:nvSpPr>
+          <p:cNvPr id="9" name="page-title">
+            <a:extLst xmlns:a="http://schemas.openxmlformats.org/drawingml/2006/main">
+              <a:ext uri="{FF2B5EF4-FFF2-40B4-BE49-F238E27FC236}">
+                <a16:creationId xmlns:a16="http://schemas.microsoft.com/office/drawing/2014/main" id="{8B8F0EC9-D3C3-4273-9570-CE13E01A7996}"/>
+              </a:ext>
+            </a:extLst>
+          </p:cNvPr>
+          <p:cNvSpPr>
+            <a:spLocks xmlns:a="http://schemas.openxmlformats.org/drawingml/2006/main" noGrp="1"/>
+          </p:cNvSpPr>
+          <p:nvPr/>
+        </p:nvSpPr>
+        <p:spPr>
+          <a:xfrm xmlns:a="http://schemas.openxmlformats.org/drawingml/2006/main">
+            <a:off x="571500" y="666750"/>
+            <a:ext cx="11049000" cy="628650"/>
+          </a:xfrm>
+          <a:prstGeom xmlns:a="http://schemas.openxmlformats.org/drawingml/2006/main" prst="rect">
+            <a:avLst/>
+          </a:prstGeom>
+          <a:noFill xmlns:a="http://schemas.openxmlformats.org/drawingml/2006/main"/>
+          <a:ln xmlns:a="http://schemas.openxmlformats.org/drawingml/2006/main" w="0">
+            <a:noFill/>
+            <a:prstDash val="solid"/>
+          </a:ln>
+        </p:spPr>
+        <p:txBody>
+          <a:bodyPr xmlns:a="http://schemas.openxmlformats.org/drawingml/2006/main" anchor="ctr"/>
+          <a:lstStyle xmlns:a="http://schemas.openxmlformats.org/drawingml/2006/main"/>
+          <a:p xmlns:a="http://schemas.openxmlformats.org/drawingml/2006/main">
+            <a:pPr algn="l">
+              <a:defRPr sz="2250" b="1">
+                <a:solidFill>
+                  <a:srgbClr val="162A24"/>
+                </a:solidFill>
+              </a:defRPr>
+            </a:pPr>
+            <a:r>
+              <a:rPr sz="2250" b="1">
+                <a:solidFill>
+                  <a:srgbClr val="162A24"/>
+                </a:solidFill>
+              </a:rPr>
+              <a:t>入口、能力与服务承接形成一条完整链路</a:t>
+            </a:r>
+          </a:p>
+        </p:txBody>
+      </p:sp>
+      <p:sp>
+        <p:nvSpPr>
+          <p:cNvPr id="10" name="page-lead">
+            <a:extLst xmlns:a="http://schemas.openxmlformats.org/drawingml/2006/main">
+              <a:ext uri="{FF2B5EF4-FFF2-40B4-BE49-F238E27FC236}">
+                <a16:creationId xmlns:a16="http://schemas.microsoft.com/office/drawing/2014/main" id="{20E3EC1F-B9FD-4784-B752-A86C449888BF}"/>
+              </a:ext>
+            </a:extLst>
+          </p:cNvPr>
+          <p:cNvSpPr>
+            <a:spLocks xmlns:a="http://schemas.openxmlformats.org/drawingml/2006/main" noGrp="1"/>
+          </p:cNvSpPr>
+          <p:nvPr/>
+        </p:nvSpPr>
+        <p:spPr>
+          <a:xfrm xmlns:a="http://schemas.openxmlformats.org/drawingml/2006/main">
+            <a:off x="571500" y="1257300"/>
+            <a:ext cx="11049000" cy="323850"/>
+          </a:xfrm>
+          <a:prstGeom xmlns:a="http://schemas.openxmlformats.org/drawingml/2006/main" prst="rect">
+            <a:avLst/>
+          </a:prstGeom>
+          <a:noFill xmlns:a="http://schemas.openxmlformats.org/drawingml/2006/main"/>
+          <a:ln xmlns:a="http://schemas.openxmlformats.org/drawingml/2006/main" w="0">
+            <a:noFill/>
+            <a:prstDash val="solid"/>
+          </a:ln>
+        </p:spPr>
+        <p:txBody>
+          <a:bodyPr xmlns:a="http://schemas.openxmlformats.org/drawingml/2006/main" anchor="ctr"/>
+          <a:lstStyle xmlns:a="http://schemas.openxmlformats.org/drawingml/2006/main"/>
+          <a:p xmlns:a="http://schemas.openxmlformats.org/drawingml/2006/main">
+            <a:pPr algn="l">
+              <a:defRPr sz="1050" b="0">
+                <a:solidFill>
+                  <a:srgbClr val="69766F"/>
+                </a:solidFill>
+              </a:defRPr>
+            </a:pPr>
+            <a:r>
+              <a:rPr sz="1050" b="0">
+                <a:solidFill>
+                  <a:srgbClr val="69766F"/>
+                </a:solidFill>
+              </a:rPr>
+              <a:t>重要主体作为视觉锚点，说明文字保持辅助地位。若有重大决策，可使用右侧强调模块。</a:t>
+            </a:r>
+          </a:p>
+        </p:txBody>
+      </p:sp>
+      <p:sp>
+        <p:nvSpPr>
+          <p:cNvPr id="11" name="rule-120-397">
+            <a:extLst xmlns:a="http://schemas.openxmlformats.org/drawingml/2006/main">
+              <a:ext uri="{FF2B5EF4-FFF2-40B4-BE49-F238E27FC236}">
+                <a16:creationId xmlns:a16="http://schemas.microsoft.com/office/drawing/2014/main" id="{EFCD183E-A6ED-44DD-A449-334ACFF276D8}"/>
+              </a:ext>
+            </a:extLst>
+          </p:cNvPr>
+          <p:cNvSpPr>
+            <a:spLocks xmlns:a="http://schemas.openxmlformats.org/drawingml/2006/main" noGrp="1"/>
+          </p:cNvSpPr>
+          <p:nvPr/>
+        </p:nvSpPr>
+        <p:spPr>
+          <a:xfrm xmlns:a="http://schemas.openxmlformats.org/drawingml/2006/main">
+            <a:off x="1143000" y="3781425"/>
+            <a:ext cx="7191375" cy="38100"/>
+          </a:xfrm>
+          <a:prstGeom xmlns:a="http://schemas.openxmlformats.org/drawingml/2006/main" prst="rect">
+            <a:avLst/>
+          </a:prstGeom>
+          <a:solidFill xmlns:a="http://schemas.openxmlformats.org/drawingml/2006/main">
+            <a:srgbClr val="1C7866"/>
+          </a:solidFill>
+          <a:ln xmlns:a="http://schemas.openxmlformats.org/drawingml/2006/main" w="0">
+            <a:noFill/>
+            <a:prstDash val="solid"/>
+          </a:ln>
+        </p:spPr>
+      </p:sp>
+      <p:sp>
+        <p:nvSpPr>
+          <p:cNvPr id="12" name="chain-arrow-1">
+            <a:extLst xmlns:a="http://schemas.openxmlformats.org/drawingml/2006/main">
+              <a:ext uri="{FF2B5EF4-FFF2-40B4-BE49-F238E27FC236}">
+                <a16:creationId xmlns:a16="http://schemas.microsoft.com/office/drawing/2014/main" id="{61FCBDAC-FAF5-45D0-BAB0-EAD8A574AF03}"/>
+              </a:ext>
+            </a:extLst>
+          </p:cNvPr>
+          <p:cNvSpPr>
+            <a:spLocks xmlns:a="http://schemas.openxmlformats.org/drawingml/2006/main" noGrp="1"/>
+          </p:cNvSpPr>
+          <p:nvPr/>
+        </p:nvSpPr>
+        <p:spPr>
+          <a:xfrm xmlns:a="http://schemas.openxmlformats.org/drawingml/2006/main">
+            <a:off x="3143250" y="3619500"/>
+            <a:ext cx="400050" cy="323850"/>
+          </a:xfrm>
+          <a:prstGeom xmlns:a="http://schemas.openxmlformats.org/drawingml/2006/main" prst="rect">
+            <a:avLst/>
+          </a:prstGeom>
+          <a:noFill xmlns:a="http://schemas.openxmlformats.org/drawingml/2006/main"/>
+          <a:ln xmlns:a="http://schemas.openxmlformats.org/drawingml/2006/main" w="0">
+            <a:noFill/>
+            <a:prstDash val="solid"/>
+          </a:ln>
+        </p:spPr>
+        <p:txBody>
+          <a:bodyPr xmlns:a="http://schemas.openxmlformats.org/drawingml/2006/main" anchor="ctr"/>
+          <a:lstStyle xmlns:a="http://schemas.openxmlformats.org/drawingml/2006/main"/>
+          <a:p xmlns:a="http://schemas.openxmlformats.org/drawingml/2006/main">
+            <a:pPr algn="ctr">
+              <a:defRPr sz="1875" b="1">
+                <a:solidFill>
+                  <a:srgbClr val="BC794D"/>
+                </a:solidFill>
+              </a:defRPr>
+            </a:pPr>
+            <a:r>
+              <a:rPr sz="1875" b="1">
+                <a:solidFill>
+                  <a:srgbClr val="BC794D"/>
+                </a:solidFill>
+              </a:rPr>
+              <a:t>→</a:t>
+            </a:r>
+          </a:p>
+        </p:txBody>
+      </p:sp>
+      <p:sp>
+        <p:nvSpPr>
+          <p:cNvPr id="13" name="chain-arrow-2">
+            <a:extLst xmlns:a="http://schemas.openxmlformats.org/drawingml/2006/main">
+              <a:ext uri="{FF2B5EF4-FFF2-40B4-BE49-F238E27FC236}">
+                <a16:creationId xmlns:a16="http://schemas.microsoft.com/office/drawing/2014/main" id="{8C9B31D0-F399-413A-9C1D-723F92A65C14}"/>
+              </a:ext>
+            </a:extLst>
+          </p:cNvPr>
+          <p:cNvSpPr>
+            <a:spLocks xmlns:a="http://schemas.openxmlformats.org/drawingml/2006/main" noGrp="1"/>
+          </p:cNvSpPr>
+          <p:nvPr/>
+        </p:nvSpPr>
+        <p:spPr>
+          <a:xfrm xmlns:a="http://schemas.openxmlformats.org/drawingml/2006/main">
+            <a:off x="5572125" y="3619500"/>
+            <a:ext cx="400050" cy="323850"/>
+          </a:xfrm>
+          <a:prstGeom xmlns:a="http://schemas.openxmlformats.org/drawingml/2006/main" prst="rect">
+            <a:avLst/>
+          </a:prstGeom>
+          <a:noFill xmlns:a="http://schemas.openxmlformats.org/drawingml/2006/main"/>
+          <a:ln xmlns:a="http://schemas.openxmlformats.org/drawingml/2006/main" w="0">
+            <a:noFill/>
+            <a:prstDash val="solid"/>
+          </a:ln>
+        </p:spPr>
+        <p:txBody>
+          <a:bodyPr xmlns:a="http://schemas.openxmlformats.org/drawingml/2006/main" anchor="ctr"/>
+          <a:lstStyle xmlns:a="http://schemas.openxmlformats.org/drawingml/2006/main"/>
+          <a:p xmlns:a="http://schemas.openxmlformats.org/drawingml/2006/main">
+            <a:pPr algn="ctr">
+              <a:defRPr sz="1875" b="1">
+                <a:solidFill>
+                  <a:srgbClr val="BC794D"/>
+                </a:solidFill>
+              </a:defRPr>
+            </a:pPr>
+            <a:r>
+              <a:rPr sz="1875" b="1">
+                <a:solidFill>
+                  <a:srgbClr val="BC794D"/>
+                </a:solidFill>
+              </a:rPr>
+              <a:t>→</a:t>
+            </a:r>
+          </a:p>
+        </p:txBody>
+      </p:sp>
+      <p:sp>
+        <p:nvSpPr>
+          <p:cNvPr id="14" name="chain-node-0">
+            <a:extLst xmlns:a="http://schemas.openxmlformats.org/drawingml/2006/main">
+              <a:ext uri="{FF2B5EF4-FFF2-40B4-BE49-F238E27FC236}">
+                <a16:creationId xmlns:a16="http://schemas.microsoft.com/office/drawing/2014/main" id="{482CA0AE-1090-4FB7-BB75-998BBE807994}"/>
+              </a:ext>
+            </a:extLst>
+          </p:cNvPr>
+          <p:cNvSpPr>
+            <a:spLocks xmlns:a="http://schemas.openxmlformats.org/drawingml/2006/main" noGrp="1"/>
+          </p:cNvSpPr>
+          <p:nvPr/>
+        </p:nvSpPr>
+        <p:spPr>
+          <a:xfrm xmlns:a="http://schemas.openxmlformats.org/drawingml/2006/main">
+            <a:off x="619125" y="2000250"/>
+            <a:ext cx="2095500" cy="3476625"/>
+          </a:xfrm>
+          <a:prstGeom xmlns:a="http://schemas.openxmlformats.org/drawingml/2006/main" prst="rect">
+            <a:avLst/>
+          </a:prstGeom>
+          <a:solidFill xmlns:a="http://schemas.openxmlformats.org/drawingml/2006/main">
+            <a:srgbClr val="FFFDF8"/>
+          </a:solidFill>
+          <a:ln xmlns:a="http://schemas.openxmlformats.org/drawingml/2006/main" w="9525">
+            <a:solidFill>
+              <a:srgbClr val="CBD3CE"/>
+            </a:solidFill>
+            <a:prstDash val="solid"/>
+          </a:ln>
+        </p:spPr>
+      </p:sp>
+      <p:sp>
+        <p:nvSpPr>
+          <p:cNvPr id="15" name="chain-node-accent-0">
+            <a:extLst xmlns:a="http://schemas.openxmlformats.org/drawingml/2006/main">
+              <a:ext uri="{FF2B5EF4-FFF2-40B4-BE49-F238E27FC236}">
+                <a16:creationId xmlns:a16="http://schemas.microsoft.com/office/drawing/2014/main" id="{5601820C-D4CB-4C1B-B370-CB75A7338155}"/>
+              </a:ext>
+            </a:extLst>
+          </p:cNvPr>
+          <p:cNvSpPr>
+            <a:spLocks xmlns:a="http://schemas.openxmlformats.org/drawingml/2006/main" noGrp="1"/>
+          </p:cNvSpPr>
+          <p:nvPr/>
+        </p:nvSpPr>
+        <p:spPr>
+          <a:xfrm xmlns:a="http://schemas.openxmlformats.org/drawingml/2006/main">
+            <a:off x="619125" y="2000250"/>
+            <a:ext cx="2095500" cy="66675"/>
+          </a:xfrm>
+          <a:prstGeom xmlns:a="http://schemas.openxmlformats.org/drawingml/2006/main" prst="rect">
+            <a:avLst/>
+          </a:prstGeom>
+          <a:solidFill xmlns:a="http://schemas.openxmlformats.org/drawingml/2006/main">
+            <a:srgbClr val="BC794D"/>
+          </a:solidFill>
+          <a:ln xmlns:a="http://schemas.openxmlformats.org/drawingml/2006/main" w="0">
+            <a:noFill/>
+            <a:prstDash val="solid"/>
+          </a:ln>
+        </p:spPr>
+      </p:sp>
+      <p:sp>
+        <p:nvSpPr>
+          <p:cNvPr id="16" name="chain-no-0">
+            <a:extLst xmlns:a="http://schemas.openxmlformats.org/drawingml/2006/main">
+              <a:ext uri="{FF2B5EF4-FFF2-40B4-BE49-F238E27FC236}">
+                <a16:creationId xmlns:a16="http://schemas.microsoft.com/office/drawing/2014/main" id="{CB817A5A-9635-469B-B365-F4286AB158B2}"/>
+              </a:ext>
+            </a:extLst>
+          </p:cNvPr>
+          <p:cNvSpPr>
+            <a:spLocks xmlns:a="http://schemas.openxmlformats.org/drawingml/2006/main" noGrp="1"/>
+          </p:cNvSpPr>
+          <p:nvPr/>
+        </p:nvSpPr>
+        <p:spPr>
+          <a:xfrm xmlns:a="http://schemas.openxmlformats.org/drawingml/2006/main">
+            <a:off x="847725" y="2266950"/>
+            <a:ext cx="523875" cy="238125"/>
+          </a:xfrm>
+          <a:prstGeom xmlns:a="http://schemas.openxmlformats.org/drawingml/2006/main" prst="rect">
+            <a:avLst/>
+          </a:prstGeom>
+          <a:noFill xmlns:a="http://schemas.openxmlformats.org/drawingml/2006/main"/>
+          <a:ln xmlns:a="http://schemas.openxmlformats.org/drawingml/2006/main" w="0">
+            <a:noFill/>
+            <a:prstDash val="solid"/>
+          </a:ln>
+        </p:spPr>
+        <p:txBody>
+          <a:bodyPr xmlns:a="http://schemas.openxmlformats.org/drawingml/2006/main" anchor="ctr"/>
+          <a:lstStyle xmlns:a="http://schemas.openxmlformats.org/drawingml/2006/main"/>
+          <a:p xmlns:a="http://schemas.openxmlformats.org/drawingml/2006/main">
+            <a:pPr algn="l">
+              <a:defRPr sz="900" b="1">
+                <a:solidFill>
+                  <a:srgbClr val="BC794D"/>
+                </a:solidFill>
+              </a:defRPr>
+            </a:pPr>
+            <a:r>
+              <a:rPr sz="900" b="1">
+                <a:solidFill>
+                  <a:srgbClr val="BC794D"/>
+                </a:solidFill>
+              </a:rPr>
+              <a:t>01</a:t>
+            </a:r>
+          </a:p>
+        </p:txBody>
+      </p:sp>
+      <p:sp>
+        <p:nvSpPr>
+          <p:cNvPr id="17" name="chain-role-0">
+            <a:extLst xmlns:a="http://schemas.openxmlformats.org/drawingml/2006/main">
+              <a:ext uri="{FF2B5EF4-FFF2-40B4-BE49-F238E27FC236}">
+                <a16:creationId xmlns:a16="http://schemas.microsoft.com/office/drawing/2014/main" id="{1012F5A5-D419-44F9-9193-D9AF1AEAB598}"/>
+              </a:ext>
+            </a:extLst>
+          </p:cNvPr>
+          <p:cNvSpPr>
+            <a:spLocks xmlns:a="http://schemas.openxmlformats.org/drawingml/2006/main" noGrp="1"/>
+          </p:cNvSpPr>
+          <p:nvPr/>
+        </p:nvSpPr>
+        <p:spPr>
+          <a:xfrm xmlns:a="http://schemas.openxmlformats.org/drawingml/2006/main">
+            <a:off x="847725" y="2647950"/>
+            <a:ext cx="1619250" cy="228600"/>
+          </a:xfrm>
+          <a:prstGeom xmlns:a="http://schemas.openxmlformats.org/drawingml/2006/main" prst="rect">
+            <a:avLst/>
+          </a:prstGeom>
+          <a:noFill xmlns:a="http://schemas.openxmlformats.org/drawingml/2006/main"/>
+          <a:ln xmlns:a="http://schemas.openxmlformats.org/drawingml/2006/main" w="0">
+            <a:noFill/>
+            <a:prstDash val="solid"/>
+          </a:ln>
+        </p:spPr>
+        <p:txBody>
+          <a:bodyPr xmlns:a="http://schemas.openxmlformats.org/drawingml/2006/main" anchor="ctr"/>
+          <a:lstStyle xmlns:a="http://schemas.openxmlformats.org/drawingml/2006/main"/>
+          <a:p xmlns:a="http://schemas.openxmlformats.org/drawingml/2006/main">
+            <a:pPr algn="l">
+              <a:defRPr sz="825" b="1">
+                <a:solidFill>
+                  <a:srgbClr val="69766F"/>
+                </a:solidFill>
+              </a:defRPr>
+            </a:pPr>
+            <a:r>
+              <a:rPr sz="825" b="1">
+                <a:solidFill>
+                  <a:srgbClr val="69766F"/>
+                </a:solidFill>
+              </a:rPr>
+              <a:t>客户触达</a:t>
+            </a:r>
+          </a:p>
+        </p:txBody>
+      </p:sp>
+      <p:sp>
+        <p:nvSpPr>
+          <p:cNvPr id="18" name="chain-name-0">
+            <a:extLst xmlns:a="http://schemas.openxmlformats.org/drawingml/2006/main">
+              <a:ext uri="{FF2B5EF4-FFF2-40B4-BE49-F238E27FC236}">
+                <a16:creationId xmlns:a16="http://schemas.microsoft.com/office/drawing/2014/main" id="{73BCA1CB-3FF5-4EB6-A277-23B7467B58AB}"/>
+              </a:ext>
+            </a:extLst>
+          </p:cNvPr>
+          <p:cNvSpPr>
+            <a:spLocks xmlns:a="http://schemas.openxmlformats.org/drawingml/2006/main" noGrp="1"/>
+          </p:cNvSpPr>
+          <p:nvPr/>
+        </p:nvSpPr>
+        <p:spPr>
+          <a:xfrm xmlns:a="http://schemas.openxmlformats.org/drawingml/2006/main">
+            <a:off x="847725" y="2962275"/>
+            <a:ext cx="1666875" cy="457200"/>
+          </a:xfrm>
+          <a:prstGeom xmlns:a="http://schemas.openxmlformats.org/drawingml/2006/main" prst="rect">
+            <a:avLst/>
+          </a:prstGeom>
+          <a:noFill xmlns:a="http://schemas.openxmlformats.org/drawingml/2006/main"/>
+          <a:ln xmlns:a="http://schemas.openxmlformats.org/drawingml/2006/main" w="0">
+            <a:noFill/>
+            <a:prstDash val="solid"/>
+          </a:ln>
+        </p:spPr>
+        <p:txBody>
+          <a:bodyPr xmlns:a="http://schemas.openxmlformats.org/drawingml/2006/main" anchor="ctr"/>
+          <a:lstStyle xmlns:a="http://schemas.openxmlformats.org/drawingml/2006/main"/>
+          <a:p xmlns:a="http://schemas.openxmlformats.org/drawingml/2006/main">
+            <a:pPr algn="l">
+              <a:defRPr sz="1875" b="1">
+                <a:solidFill>
+                  <a:srgbClr val="162A24"/>
+                </a:solidFill>
+              </a:defRPr>
+            </a:pPr>
+            <a:r>
+              <a:rPr sz="1875" b="1">
+                <a:solidFill>
+                  <a:srgbClr val="162A24"/>
+                </a:solidFill>
+              </a:rPr>
+              <a:t>前台入口</a:t>
+            </a:r>
+          </a:p>
+        </p:txBody>
+      </p:sp>
+      <p:sp>
+        <p:nvSpPr>
+          <p:cNvPr id="19" name="chain-entities-0">
+            <a:extLst xmlns:a="http://schemas.openxmlformats.org/drawingml/2006/main">
+              <a:ext uri="{FF2B5EF4-FFF2-40B4-BE49-F238E27FC236}">
+                <a16:creationId xmlns:a16="http://schemas.microsoft.com/office/drawing/2014/main" id="{441A5E7D-EC10-4F56-9A97-6A61467CAD06}"/>
+              </a:ext>
+            </a:extLst>
+          </p:cNvPr>
+          <p:cNvSpPr>
+            <a:spLocks xmlns:a="http://schemas.openxmlformats.org/drawingml/2006/main" noGrp="1"/>
+          </p:cNvSpPr>
+          <p:nvPr/>
+        </p:nvSpPr>
+        <p:spPr>
+          <a:xfrm xmlns:a="http://schemas.openxmlformats.org/drawingml/2006/main">
+            <a:off x="847725" y="3619500"/>
+            <a:ext cx="1666875" cy="685800"/>
+          </a:xfrm>
+          <a:prstGeom xmlns:a="http://schemas.openxmlformats.org/drawingml/2006/main" prst="rect">
+            <a:avLst/>
+          </a:prstGeom>
+          <a:noFill xmlns:a="http://schemas.openxmlformats.org/drawingml/2006/main"/>
+          <a:ln xmlns:a="http://schemas.openxmlformats.org/drawingml/2006/main" w="0">
+            <a:noFill/>
+            <a:prstDash val="solid"/>
+          </a:ln>
+        </p:spPr>
+        <p:txBody>
+          <a:bodyPr xmlns:a="http://schemas.openxmlformats.org/drawingml/2006/main" anchor="ctr"/>
+          <a:lstStyle xmlns:a="http://schemas.openxmlformats.org/drawingml/2006/main"/>
+          <a:p xmlns:a="http://schemas.openxmlformats.org/drawingml/2006/main">
+            <a:pPr algn="l">
+              <a:defRPr sz="1425" b="1">
+                <a:solidFill>
+                  <a:srgbClr val="0E453A"/>
+                </a:solidFill>
+              </a:defRPr>
+            </a:pPr>
+            <a:r>
+              <a:rPr sz="1425" b="1">
+                <a:solidFill>
+                  <a:srgbClr val="0E453A"/>
+                </a:solidFill>
+              </a:rPr>
+              <a:t>M-PESA</a:t>
+            </a:r>
+          </a:p>
+          <a:p xmlns:a="http://schemas.openxmlformats.org/drawingml/2006/main">
+            <a:pPr algn="l">
+              <a:defRPr sz="1425" b="1">
+                <a:solidFill>
+                  <a:srgbClr val="0E453A"/>
+                </a:solidFill>
+              </a:defRPr>
+            </a:pPr>
+            <a:r>
+              <a:rPr sz="1425" b="1">
+                <a:solidFill>
+                  <a:srgbClr val="0E453A"/>
+                </a:solidFill>
+              </a:rPr>
+              <a:t>Mint APP</a:t>
+            </a:r>
+          </a:p>
+        </p:txBody>
+      </p:sp>
+      <p:sp>
+        <p:nvSpPr>
+          <p:cNvPr id="20" name="rule-89-474">
+            <a:extLst xmlns:a="http://schemas.openxmlformats.org/drawingml/2006/main">
+              <a:ext uri="{FF2B5EF4-FFF2-40B4-BE49-F238E27FC236}">
+                <a16:creationId xmlns:a16="http://schemas.microsoft.com/office/drawing/2014/main" id="{CA600395-630C-4B65-AD26-18A9452EC573}"/>
+              </a:ext>
+            </a:extLst>
+          </p:cNvPr>
+          <p:cNvSpPr>
+            <a:spLocks xmlns:a="http://schemas.openxmlformats.org/drawingml/2006/main" noGrp="1"/>
+          </p:cNvSpPr>
+          <p:nvPr/>
+        </p:nvSpPr>
+        <p:spPr>
+          <a:xfrm xmlns:a="http://schemas.openxmlformats.org/drawingml/2006/main">
+            <a:off x="847725" y="4514850"/>
+            <a:ext cx="1638300" cy="9525"/>
+          </a:xfrm>
+          <a:prstGeom xmlns:a="http://schemas.openxmlformats.org/drawingml/2006/main" prst="rect">
+            <a:avLst/>
+          </a:prstGeom>
+          <a:solidFill xmlns:a="http://schemas.openxmlformats.org/drawingml/2006/main">
+            <a:srgbClr val="CBD3CE"/>
+          </a:solidFill>
+          <a:ln xmlns:a="http://schemas.openxmlformats.org/drawingml/2006/main" w="0">
+            <a:noFill/>
+            <a:prstDash val="solid"/>
+          </a:ln>
+        </p:spPr>
+      </p:sp>
+      <p:sp>
+        <p:nvSpPr>
+          <p:cNvPr id="21" name="chain-capability-0">
+            <a:extLst xmlns:a="http://schemas.openxmlformats.org/drawingml/2006/main">
+              <a:ext uri="{FF2B5EF4-FFF2-40B4-BE49-F238E27FC236}">
+                <a16:creationId xmlns:a16="http://schemas.microsoft.com/office/drawing/2014/main" id="{A2B4E6CF-1E3E-4CAF-9FAB-F2EBA1D5428A}"/>
+              </a:ext>
+            </a:extLst>
+          </p:cNvPr>
+          <p:cNvSpPr>
+            <a:spLocks xmlns:a="http://schemas.openxmlformats.org/drawingml/2006/main" noGrp="1"/>
+          </p:cNvSpPr>
+          <p:nvPr/>
+        </p:nvSpPr>
+        <p:spPr>
+          <a:xfrm xmlns:a="http://schemas.openxmlformats.org/drawingml/2006/main">
+            <a:off x="847725" y="4686300"/>
+            <a:ext cx="1666875" cy="419100"/>
+          </a:xfrm>
+          <a:prstGeom xmlns:a="http://schemas.openxmlformats.org/drawingml/2006/main" prst="rect">
+            <a:avLst/>
+          </a:prstGeom>
+          <a:noFill xmlns:a="http://schemas.openxmlformats.org/drawingml/2006/main"/>
+          <a:ln xmlns:a="http://schemas.openxmlformats.org/drawingml/2006/main" w="0">
+            <a:noFill/>
+            <a:prstDash val="solid"/>
+          </a:ln>
+        </p:spPr>
+        <p:txBody>
+          <a:bodyPr xmlns:a="http://schemas.openxmlformats.org/drawingml/2006/main" anchor="ctr"/>
+          <a:lstStyle xmlns:a="http://schemas.openxmlformats.org/drawingml/2006/main"/>
+          <a:p xmlns:a="http://schemas.openxmlformats.org/drawingml/2006/main">
+            <a:pPr algn="l">
+              <a:defRPr sz="1200" b="1">
+                <a:solidFill>
+                  <a:srgbClr val="162A24"/>
+                </a:solidFill>
+              </a:defRPr>
+            </a:pPr>
+            <a:r>
+              <a:rPr sz="1200" b="1">
+                <a:solidFill>
+                  <a:srgbClr val="162A24"/>
+                </a:solidFill>
+              </a:rPr>
+              <a:t>形成双入口</a:t>
+            </a:r>
+          </a:p>
+        </p:txBody>
+      </p:sp>
+      <p:sp>
+        <p:nvSpPr>
+          <p:cNvPr id="22" name="chain-node-1">
+            <a:extLst xmlns:a="http://schemas.openxmlformats.org/drawingml/2006/main">
+              <a:ext uri="{FF2B5EF4-FFF2-40B4-BE49-F238E27FC236}">
+                <a16:creationId xmlns:a16="http://schemas.microsoft.com/office/drawing/2014/main" id="{0D05FE94-59EF-409B-891C-19BA235405E3}"/>
+              </a:ext>
+            </a:extLst>
+          </p:cNvPr>
+          <p:cNvSpPr>
+            <a:spLocks xmlns:a="http://schemas.openxmlformats.org/drawingml/2006/main" noGrp="1"/>
+          </p:cNvSpPr>
+          <p:nvPr/>
+        </p:nvSpPr>
+        <p:spPr>
+          <a:xfrm xmlns:a="http://schemas.openxmlformats.org/drawingml/2006/main">
+            <a:off x="3095625" y="2000250"/>
+            <a:ext cx="2095500" cy="3476625"/>
+          </a:xfrm>
+          <a:prstGeom xmlns:a="http://schemas.openxmlformats.org/drawingml/2006/main" prst="rect">
+            <a:avLst/>
+          </a:prstGeom>
+          <a:solidFill xmlns:a="http://schemas.openxmlformats.org/drawingml/2006/main">
+            <a:srgbClr val="FFFDF8"/>
+          </a:solidFill>
+          <a:ln xmlns:a="http://schemas.openxmlformats.org/drawingml/2006/main" w="9525">
+            <a:solidFill>
+              <a:srgbClr val="CBD3CE"/>
+            </a:solidFill>
+            <a:prstDash val="solid"/>
+          </a:ln>
+        </p:spPr>
+      </p:sp>
+      <p:sp>
+        <p:nvSpPr>
+          <p:cNvPr id="23" name="chain-node-accent-1">
+            <a:extLst xmlns:a="http://schemas.openxmlformats.org/drawingml/2006/main">
+              <a:ext uri="{FF2B5EF4-FFF2-40B4-BE49-F238E27FC236}">
+                <a16:creationId xmlns:a16="http://schemas.microsoft.com/office/drawing/2014/main" id="{011EA969-4BBA-42D4-AEF8-44CCD8F23F96}"/>
+              </a:ext>
+            </a:extLst>
+          </p:cNvPr>
+          <p:cNvSpPr>
+            <a:spLocks xmlns:a="http://schemas.openxmlformats.org/drawingml/2006/main" noGrp="1"/>
+          </p:cNvSpPr>
+          <p:nvPr/>
+        </p:nvSpPr>
+        <p:spPr>
+          <a:xfrm xmlns:a="http://schemas.openxmlformats.org/drawingml/2006/main">
+            <a:off x="3095625" y="2000250"/>
+            <a:ext cx="2095500" cy="66675"/>
+          </a:xfrm>
+          <a:prstGeom xmlns:a="http://schemas.openxmlformats.org/drawingml/2006/main" prst="rect">
+            <a:avLst/>
+          </a:prstGeom>
+          <a:solidFill xmlns:a="http://schemas.openxmlformats.org/drawingml/2006/main">
+            <a:srgbClr val="1C7866"/>
+          </a:solidFill>
+          <a:ln xmlns:a="http://schemas.openxmlformats.org/drawingml/2006/main" w="0">
+            <a:noFill/>
+            <a:prstDash val="solid"/>
+          </a:ln>
+        </p:spPr>
+      </p:sp>
+      <p:sp>
+        <p:nvSpPr>
+          <p:cNvPr id="24" name="chain-no-1">
+            <a:extLst xmlns:a="http://schemas.openxmlformats.org/drawingml/2006/main">
+              <a:ext uri="{FF2B5EF4-FFF2-40B4-BE49-F238E27FC236}">
+                <a16:creationId xmlns:a16="http://schemas.microsoft.com/office/drawing/2014/main" id="{31165C98-954C-4751-A247-0F64FAB2F4B6}"/>
+              </a:ext>
+            </a:extLst>
+          </p:cNvPr>
+          <p:cNvSpPr>
+            <a:spLocks xmlns:a="http://schemas.openxmlformats.org/drawingml/2006/main" noGrp="1"/>
+          </p:cNvSpPr>
+          <p:nvPr/>
+        </p:nvSpPr>
+        <p:spPr>
+          <a:xfrm xmlns:a="http://schemas.openxmlformats.org/drawingml/2006/main">
+            <a:off x="3324225" y="2266950"/>
+            <a:ext cx="523875" cy="238125"/>
+          </a:xfrm>
+          <a:prstGeom xmlns:a="http://schemas.openxmlformats.org/drawingml/2006/main" prst="rect">
+            <a:avLst/>
+          </a:prstGeom>
+          <a:noFill xmlns:a="http://schemas.openxmlformats.org/drawingml/2006/main"/>
+          <a:ln xmlns:a="http://schemas.openxmlformats.org/drawingml/2006/main" w="0">
+            <a:noFill/>
+            <a:prstDash val="solid"/>
+          </a:ln>
+        </p:spPr>
+        <p:txBody>
+          <a:bodyPr xmlns:a="http://schemas.openxmlformats.org/drawingml/2006/main" anchor="ctr"/>
+          <a:lstStyle xmlns:a="http://schemas.openxmlformats.org/drawingml/2006/main"/>
+          <a:p xmlns:a="http://schemas.openxmlformats.org/drawingml/2006/main">
+            <a:pPr algn="l">
+              <a:defRPr sz="900" b="1">
+                <a:solidFill>
+                  <a:srgbClr val="1C7866"/>
+                </a:solidFill>
+              </a:defRPr>
+            </a:pPr>
+            <a:r>
+              <a:rPr sz="900" b="1">
+                <a:solidFill>
+                  <a:srgbClr val="1C7866"/>
+                </a:solidFill>
+              </a:rPr>
+              <a:t>02</a:t>
+            </a:r>
+          </a:p>
+        </p:txBody>
+      </p:sp>
+      <p:sp>
+        <p:nvSpPr>
+          <p:cNvPr id="25" name="chain-role-1">
+            <a:extLst xmlns:a="http://schemas.openxmlformats.org/drawingml/2006/main">
+              <a:ext uri="{FF2B5EF4-FFF2-40B4-BE49-F238E27FC236}">
+                <a16:creationId xmlns:a16="http://schemas.microsoft.com/office/drawing/2014/main" id="{626B487E-4581-4CEA-91B5-8B18D5C6B44E}"/>
+              </a:ext>
+            </a:extLst>
+          </p:cNvPr>
+          <p:cNvSpPr>
+            <a:spLocks xmlns:a="http://schemas.openxmlformats.org/drawingml/2006/main" noGrp="1"/>
+          </p:cNvSpPr>
+          <p:nvPr/>
+        </p:nvSpPr>
+        <p:spPr>
+          <a:xfrm xmlns:a="http://schemas.openxmlformats.org/drawingml/2006/main">
+            <a:off x="3324225" y="2647950"/>
+            <a:ext cx="1619250" cy="228600"/>
+          </a:xfrm>
+          <a:prstGeom xmlns:a="http://schemas.openxmlformats.org/drawingml/2006/main" prst="rect">
+            <a:avLst/>
+          </a:prstGeom>
+          <a:noFill xmlns:a="http://schemas.openxmlformats.org/drawingml/2006/main"/>
+          <a:ln xmlns:a="http://schemas.openxmlformats.org/drawingml/2006/main" w="0">
+            <a:noFill/>
+            <a:prstDash val="solid"/>
+          </a:ln>
+        </p:spPr>
+        <p:txBody>
+          <a:bodyPr xmlns:a="http://schemas.openxmlformats.org/drawingml/2006/main" anchor="ctr"/>
+          <a:lstStyle xmlns:a="http://schemas.openxmlformats.org/drawingml/2006/main"/>
+          <a:p xmlns:a="http://schemas.openxmlformats.org/drawingml/2006/main">
+            <a:pPr algn="l">
+              <a:defRPr sz="825" b="1">
+                <a:solidFill>
+                  <a:srgbClr val="69766F"/>
+                </a:solidFill>
+              </a:defRPr>
+            </a:pPr>
+            <a:r>
+              <a:rPr sz="825" b="1">
+                <a:solidFill>
+                  <a:srgbClr val="69766F"/>
+                </a:solidFill>
+              </a:rPr>
+              <a:t>流量与风险</a:t>
+            </a:r>
+          </a:p>
+        </p:txBody>
+      </p:sp>
+      <p:sp>
+        <p:nvSpPr>
+          <p:cNvPr id="26" name="chain-name-1">
+            <a:extLst xmlns:a="http://schemas.openxmlformats.org/drawingml/2006/main">
+              <a:ext uri="{FF2B5EF4-FFF2-40B4-BE49-F238E27FC236}">
+                <a16:creationId xmlns:a16="http://schemas.microsoft.com/office/drawing/2014/main" id="{B46DF76B-686E-48BE-A91C-2D6BC3A7B8C0}"/>
+              </a:ext>
+            </a:extLst>
+          </p:cNvPr>
+          <p:cNvSpPr>
+            <a:spLocks xmlns:a="http://schemas.openxmlformats.org/drawingml/2006/main" noGrp="1"/>
+          </p:cNvSpPr>
+          <p:nvPr/>
+        </p:nvSpPr>
+        <p:spPr>
+          <a:xfrm xmlns:a="http://schemas.openxmlformats.org/drawingml/2006/main">
+            <a:off x="3324225" y="2962275"/>
+            <a:ext cx="1666875" cy="457200"/>
+          </a:xfrm>
+          <a:prstGeom xmlns:a="http://schemas.openxmlformats.org/drawingml/2006/main" prst="rect">
+            <a:avLst/>
+          </a:prstGeom>
+          <a:noFill xmlns:a="http://schemas.openxmlformats.org/drawingml/2006/main"/>
+          <a:ln xmlns:a="http://schemas.openxmlformats.org/drawingml/2006/main" w="0">
+            <a:noFill/>
+            <a:prstDash val="solid"/>
+          </a:ln>
+        </p:spPr>
+        <p:txBody>
+          <a:bodyPr xmlns:a="http://schemas.openxmlformats.org/drawingml/2006/main" anchor="ctr"/>
+          <a:lstStyle xmlns:a="http://schemas.openxmlformats.org/drawingml/2006/main"/>
+          <a:p xmlns:a="http://schemas.openxmlformats.org/drawingml/2006/main">
+            <a:pPr algn="l">
+              <a:defRPr sz="1875" b="1">
+                <a:solidFill>
+                  <a:srgbClr val="162A24"/>
+                </a:solidFill>
+              </a:defRPr>
+            </a:pPr>
+            <a:r>
+              <a:rPr sz="1875" b="1">
+                <a:solidFill>
+                  <a:srgbClr val="162A24"/>
+                </a:solidFill>
+              </a:rPr>
+              <a:t>能力协同</a:t>
+            </a:r>
+          </a:p>
+        </p:txBody>
+      </p:sp>
+      <p:sp>
+        <p:nvSpPr>
+          <p:cNvPr id="27" name="chain-entities-1">
+            <a:extLst xmlns:a="http://schemas.openxmlformats.org/drawingml/2006/main">
+              <a:ext uri="{FF2B5EF4-FFF2-40B4-BE49-F238E27FC236}">
+                <a16:creationId xmlns:a16="http://schemas.microsoft.com/office/drawing/2014/main" id="{3AE3DB01-7FC2-4341-94BE-3DAD132D531A}"/>
+              </a:ext>
+            </a:extLst>
+          </p:cNvPr>
+          <p:cNvSpPr>
+            <a:spLocks xmlns:a="http://schemas.openxmlformats.org/drawingml/2006/main" noGrp="1"/>
+          </p:cNvSpPr>
+          <p:nvPr/>
+        </p:nvSpPr>
+        <p:spPr>
+          <a:xfrm xmlns:a="http://schemas.openxmlformats.org/drawingml/2006/main">
+            <a:off x="3324225" y="3619500"/>
+            <a:ext cx="1666875" cy="685800"/>
+          </a:xfrm>
+          <a:prstGeom xmlns:a="http://schemas.openxmlformats.org/drawingml/2006/main" prst="rect">
+            <a:avLst/>
+          </a:prstGeom>
+          <a:noFill xmlns:a="http://schemas.openxmlformats.org/drawingml/2006/main"/>
+          <a:ln xmlns:a="http://schemas.openxmlformats.org/drawingml/2006/main" w="0">
+            <a:noFill/>
+            <a:prstDash val="solid"/>
+          </a:ln>
+        </p:spPr>
+        <p:txBody>
+          <a:bodyPr xmlns:a="http://schemas.openxmlformats.org/drawingml/2006/main" anchor="ctr"/>
+          <a:lstStyle xmlns:a="http://schemas.openxmlformats.org/drawingml/2006/main"/>
+          <a:p xmlns:a="http://schemas.openxmlformats.org/drawingml/2006/main">
+            <a:pPr algn="l">
+              <a:defRPr sz="1425" b="1">
+                <a:solidFill>
+                  <a:srgbClr val="0E453A"/>
+                </a:solidFill>
+              </a:defRPr>
+            </a:pPr>
+            <a:r>
+              <a:rPr sz="1425" b="1">
+                <a:solidFill>
+                  <a:srgbClr val="0E453A"/>
+                </a:solidFill>
+              </a:rPr>
+              <a:t>Transsion</a:t>
+            </a:r>
+          </a:p>
+          <a:p xmlns:a="http://schemas.openxmlformats.org/drawingml/2006/main">
+            <a:pPr algn="l">
+              <a:defRPr sz="1425" b="1">
+                <a:solidFill>
+                  <a:srgbClr val="0E453A"/>
+                </a:solidFill>
+              </a:defRPr>
+            </a:pPr>
+            <a:r>
+              <a:rPr sz="1425" b="1">
+                <a:solidFill>
+                  <a:srgbClr val="0E453A"/>
+                </a:solidFill>
+              </a:rPr>
+              <a:t>微众</a:t>
+            </a:r>
+          </a:p>
+        </p:txBody>
+      </p:sp>
+      <p:sp>
+        <p:nvSpPr>
+          <p:cNvPr id="28" name="rule-349-474">
+            <a:extLst xmlns:a="http://schemas.openxmlformats.org/drawingml/2006/main">
+              <a:ext uri="{FF2B5EF4-FFF2-40B4-BE49-F238E27FC236}">
+                <a16:creationId xmlns:a16="http://schemas.microsoft.com/office/drawing/2014/main" id="{C766CAE8-18AD-49C9-8A0F-B411F2BC7E22}"/>
+              </a:ext>
+            </a:extLst>
+          </p:cNvPr>
+          <p:cNvSpPr>
+            <a:spLocks xmlns:a="http://schemas.openxmlformats.org/drawingml/2006/main" noGrp="1"/>
+          </p:cNvSpPr>
+          <p:nvPr/>
+        </p:nvSpPr>
+        <p:spPr>
+          <a:xfrm xmlns:a="http://schemas.openxmlformats.org/drawingml/2006/main">
+            <a:off x="3324225" y="4514850"/>
+            <a:ext cx="1638300" cy="9525"/>
+          </a:xfrm>
+          <a:prstGeom xmlns:a="http://schemas.openxmlformats.org/drawingml/2006/main" prst="rect">
+            <a:avLst/>
+          </a:prstGeom>
+          <a:solidFill xmlns:a="http://schemas.openxmlformats.org/drawingml/2006/main">
+            <a:srgbClr val="CBD3CE"/>
+          </a:solidFill>
+          <a:ln xmlns:a="http://schemas.openxmlformats.org/drawingml/2006/main" w="0">
+            <a:noFill/>
+            <a:prstDash val="solid"/>
+          </a:ln>
+        </p:spPr>
+      </p:sp>
+      <p:sp>
+        <p:nvSpPr>
+          <p:cNvPr id="29" name="chain-capability-1">
+            <a:extLst xmlns:a="http://schemas.openxmlformats.org/drawingml/2006/main">
+              <a:ext uri="{FF2B5EF4-FFF2-40B4-BE49-F238E27FC236}">
+                <a16:creationId xmlns:a16="http://schemas.microsoft.com/office/drawing/2014/main" id="{DD9F142B-15B2-4DBB-B806-EBFEB725FD05}"/>
+              </a:ext>
+            </a:extLst>
+          </p:cNvPr>
+          <p:cNvSpPr>
+            <a:spLocks xmlns:a="http://schemas.openxmlformats.org/drawingml/2006/main" noGrp="1"/>
+          </p:cNvSpPr>
+          <p:nvPr/>
+        </p:nvSpPr>
+        <p:spPr>
+          <a:xfrm xmlns:a="http://schemas.openxmlformats.org/drawingml/2006/main">
+            <a:off x="3324225" y="4686300"/>
+            <a:ext cx="1666875" cy="419100"/>
+          </a:xfrm>
+          <a:prstGeom xmlns:a="http://schemas.openxmlformats.org/drawingml/2006/main" prst="rect">
+            <a:avLst/>
+          </a:prstGeom>
+          <a:noFill xmlns:a="http://schemas.openxmlformats.org/drawingml/2006/main"/>
+          <a:ln xmlns:a="http://schemas.openxmlformats.org/drawingml/2006/main" w="0">
+            <a:noFill/>
+            <a:prstDash val="solid"/>
+          </a:ln>
+        </p:spPr>
+        <p:txBody>
+          <a:bodyPr xmlns:a="http://schemas.openxmlformats.org/drawingml/2006/main" anchor="ctr"/>
+          <a:lstStyle xmlns:a="http://schemas.openxmlformats.org/drawingml/2006/main"/>
+          <a:p xmlns:a="http://schemas.openxmlformats.org/drawingml/2006/main">
+            <a:pPr algn="l">
+              <a:defRPr sz="1200" b="1">
+                <a:solidFill>
+                  <a:srgbClr val="162A24"/>
+                </a:solidFill>
+              </a:defRPr>
+            </a:pPr>
+            <a:r>
+              <a:rPr sz="1200" b="1">
+                <a:solidFill>
+                  <a:srgbClr val="162A24"/>
+                </a:solidFill>
+              </a:rPr>
+              <a:t>流量 + 风险能力</a:t>
+            </a:r>
+          </a:p>
+        </p:txBody>
+      </p:sp>
+      <p:sp>
+        <p:nvSpPr>
+          <p:cNvPr id="30" name="chain-node-2">
+            <a:extLst xmlns:a="http://schemas.openxmlformats.org/drawingml/2006/main">
+              <a:ext uri="{FF2B5EF4-FFF2-40B4-BE49-F238E27FC236}">
+                <a16:creationId xmlns:a16="http://schemas.microsoft.com/office/drawing/2014/main" id="{22A614D3-4054-492D-90AB-C75A5C93BBE5}"/>
+              </a:ext>
+            </a:extLst>
+          </p:cNvPr>
+          <p:cNvSpPr>
+            <a:spLocks xmlns:a="http://schemas.openxmlformats.org/drawingml/2006/main" noGrp="1"/>
+          </p:cNvSpPr>
+          <p:nvPr/>
+        </p:nvSpPr>
+        <p:spPr>
+          <a:xfrm xmlns:a="http://schemas.openxmlformats.org/drawingml/2006/main">
+            <a:off x="5572125" y="2000250"/>
+            <a:ext cx="2095500" cy="3476625"/>
+          </a:xfrm>
+          <a:prstGeom xmlns:a="http://schemas.openxmlformats.org/drawingml/2006/main" prst="rect">
+            <a:avLst/>
+          </a:prstGeom>
+          <a:solidFill xmlns:a="http://schemas.openxmlformats.org/drawingml/2006/main">
+            <a:srgbClr val="FFFDF8"/>
+          </a:solidFill>
+          <a:ln xmlns:a="http://schemas.openxmlformats.org/drawingml/2006/main" w="9525">
+            <a:solidFill>
+              <a:srgbClr val="CBD3CE"/>
+            </a:solidFill>
+            <a:prstDash val="solid"/>
+          </a:ln>
+        </p:spPr>
+      </p:sp>
+      <p:sp>
+        <p:nvSpPr>
+          <p:cNvPr id="31" name="chain-node-accent-2">
+            <a:extLst xmlns:a="http://schemas.openxmlformats.org/drawingml/2006/main">
+              <a:ext uri="{FF2B5EF4-FFF2-40B4-BE49-F238E27FC236}">
+                <a16:creationId xmlns:a16="http://schemas.microsoft.com/office/drawing/2014/main" id="{9081AB6E-47B4-4189-8A62-7F9EB6475829}"/>
+              </a:ext>
+            </a:extLst>
+          </p:cNvPr>
+          <p:cNvSpPr>
+            <a:spLocks xmlns:a="http://schemas.openxmlformats.org/drawingml/2006/main" noGrp="1"/>
+          </p:cNvSpPr>
+          <p:nvPr/>
+        </p:nvSpPr>
+        <p:spPr>
+          <a:xfrm xmlns:a="http://schemas.openxmlformats.org/drawingml/2006/main">
+            <a:off x="5572125" y="2000250"/>
+            <a:ext cx="2095500" cy="66675"/>
+          </a:xfrm>
+          <a:prstGeom xmlns:a="http://schemas.openxmlformats.org/drawingml/2006/main" prst="rect">
+            <a:avLst/>
+          </a:prstGeom>
+          <a:solidFill xmlns:a="http://schemas.openxmlformats.org/drawingml/2006/main">
+            <a:srgbClr val="547E89"/>
+          </a:solidFill>
+          <a:ln xmlns:a="http://schemas.openxmlformats.org/drawingml/2006/main" w="0">
+            <a:noFill/>
+            <a:prstDash val="solid"/>
+          </a:ln>
+        </p:spPr>
+      </p:sp>
+      <p:sp>
+        <p:nvSpPr>
+          <p:cNvPr id="32" name="chain-no-2">
+            <a:extLst xmlns:a="http://schemas.openxmlformats.org/drawingml/2006/main">
+              <a:ext uri="{FF2B5EF4-FFF2-40B4-BE49-F238E27FC236}">
+                <a16:creationId xmlns:a16="http://schemas.microsoft.com/office/drawing/2014/main" id="{A6FF98B1-837C-40B9-8343-74C82A0EE061}"/>
+              </a:ext>
+            </a:extLst>
+          </p:cNvPr>
+          <p:cNvSpPr>
+            <a:spLocks xmlns:a="http://schemas.openxmlformats.org/drawingml/2006/main" noGrp="1"/>
+          </p:cNvSpPr>
+          <p:nvPr/>
+        </p:nvSpPr>
+        <p:spPr>
+          <a:xfrm xmlns:a="http://schemas.openxmlformats.org/drawingml/2006/main">
+            <a:off x="5800725" y="2266950"/>
+            <a:ext cx="523875" cy="238125"/>
+          </a:xfrm>
+          <a:prstGeom xmlns:a="http://schemas.openxmlformats.org/drawingml/2006/main" prst="rect">
+            <a:avLst/>
+          </a:prstGeom>
+          <a:noFill xmlns:a="http://schemas.openxmlformats.org/drawingml/2006/main"/>
+          <a:ln xmlns:a="http://schemas.openxmlformats.org/drawingml/2006/main" w="0">
+            <a:noFill/>
+            <a:prstDash val="solid"/>
+          </a:ln>
+        </p:spPr>
+        <p:txBody>
+          <a:bodyPr xmlns:a="http://schemas.openxmlformats.org/drawingml/2006/main" anchor="ctr"/>
+          <a:lstStyle xmlns:a="http://schemas.openxmlformats.org/drawingml/2006/main"/>
+          <a:p xmlns:a="http://schemas.openxmlformats.org/drawingml/2006/main">
+            <a:pPr algn="l">
+              <a:defRPr sz="900" b="1">
+                <a:solidFill>
+                  <a:srgbClr val="547E89"/>
+                </a:solidFill>
+              </a:defRPr>
+            </a:pPr>
+            <a:r>
+              <a:rPr sz="900" b="1">
+                <a:solidFill>
+                  <a:srgbClr val="547E89"/>
+                </a:solidFill>
+              </a:rPr>
+              <a:t>03</a:t>
+            </a:r>
+          </a:p>
+        </p:txBody>
+      </p:sp>
+      <p:sp>
+        <p:nvSpPr>
+          <p:cNvPr id="33" name="chain-role-2">
+            <a:extLst xmlns:a="http://schemas.openxmlformats.org/drawingml/2006/main">
+              <a:ext uri="{FF2B5EF4-FFF2-40B4-BE49-F238E27FC236}">
+                <a16:creationId xmlns:a16="http://schemas.microsoft.com/office/drawing/2014/main" id="{CD046EDE-BE9D-4A18-AE44-AB6463A5F733}"/>
+              </a:ext>
+            </a:extLst>
+          </p:cNvPr>
+          <p:cNvSpPr>
+            <a:spLocks xmlns:a="http://schemas.openxmlformats.org/drawingml/2006/main" noGrp="1"/>
+          </p:cNvSpPr>
+          <p:nvPr/>
+        </p:nvSpPr>
+        <p:spPr>
+          <a:xfrm xmlns:a="http://schemas.openxmlformats.org/drawingml/2006/main">
+            <a:off x="5800725" y="2647950"/>
+            <a:ext cx="1619250" cy="228600"/>
+          </a:xfrm>
+          <a:prstGeom xmlns:a="http://schemas.openxmlformats.org/drawingml/2006/main" prst="rect">
+            <a:avLst/>
+          </a:prstGeom>
+          <a:noFill xmlns:a="http://schemas.openxmlformats.org/drawingml/2006/main"/>
+          <a:ln xmlns:a="http://schemas.openxmlformats.org/drawingml/2006/main" w="0">
+            <a:noFill/>
+            <a:prstDash val="solid"/>
+          </a:ln>
+        </p:spPr>
+        <p:txBody>
+          <a:bodyPr xmlns:a="http://schemas.openxmlformats.org/drawingml/2006/main" anchor="ctr"/>
+          <a:lstStyle xmlns:a="http://schemas.openxmlformats.org/drawingml/2006/main"/>
+          <a:p xmlns:a="http://schemas.openxmlformats.org/drawingml/2006/main">
+            <a:pPr algn="l">
+              <a:defRPr sz="825" b="1">
+                <a:solidFill>
+                  <a:srgbClr val="69766F"/>
+                </a:solidFill>
+              </a:defRPr>
+            </a:pPr>
+            <a:r>
+              <a:rPr sz="825" b="1">
+                <a:solidFill>
+                  <a:srgbClr val="69766F"/>
+                </a:solidFill>
+              </a:rPr>
+              <a:t>金融服务</a:t>
+            </a:r>
+          </a:p>
+        </p:txBody>
+      </p:sp>
+      <p:sp>
+        <p:nvSpPr>
+          <p:cNvPr id="34" name="chain-name-2">
+            <a:extLst xmlns:a="http://schemas.openxmlformats.org/drawingml/2006/main">
+              <a:ext uri="{FF2B5EF4-FFF2-40B4-BE49-F238E27FC236}">
+                <a16:creationId xmlns:a16="http://schemas.microsoft.com/office/drawing/2014/main" id="{BD33CCDD-2E24-4C11-961A-BF3C532BAE33}"/>
+              </a:ext>
+            </a:extLst>
+          </p:cNvPr>
+          <p:cNvSpPr>
+            <a:spLocks xmlns:a="http://schemas.openxmlformats.org/drawingml/2006/main" noGrp="1"/>
+          </p:cNvSpPr>
+          <p:nvPr/>
+        </p:nvSpPr>
+        <p:spPr>
+          <a:xfrm xmlns:a="http://schemas.openxmlformats.org/drawingml/2006/main">
+            <a:off x="5800725" y="2962275"/>
+            <a:ext cx="1666875" cy="457200"/>
+          </a:xfrm>
+          <a:prstGeom xmlns:a="http://schemas.openxmlformats.org/drawingml/2006/main" prst="rect">
+            <a:avLst/>
+          </a:prstGeom>
+          <a:noFill xmlns:a="http://schemas.openxmlformats.org/drawingml/2006/main"/>
+          <a:ln xmlns:a="http://schemas.openxmlformats.org/drawingml/2006/main" w="0">
+            <a:noFill/>
+            <a:prstDash val="solid"/>
+          </a:ln>
+        </p:spPr>
+        <p:txBody>
+          <a:bodyPr xmlns:a="http://schemas.openxmlformats.org/drawingml/2006/main" anchor="ctr"/>
+          <a:lstStyle xmlns:a="http://schemas.openxmlformats.org/drawingml/2006/main"/>
+          <a:p xmlns:a="http://schemas.openxmlformats.org/drawingml/2006/main">
+            <a:pPr algn="l">
+              <a:defRPr sz="1875" b="1">
+                <a:solidFill>
+                  <a:srgbClr val="162A24"/>
+                </a:solidFill>
+              </a:defRPr>
+            </a:pPr>
+            <a:r>
+              <a:rPr sz="1875" b="1">
+                <a:solidFill>
+                  <a:srgbClr val="162A24"/>
+                </a:solidFill>
+              </a:rPr>
+              <a:t>银行承接</a:t>
+            </a:r>
+          </a:p>
+        </p:txBody>
+      </p:sp>
+      <p:sp>
+        <p:nvSpPr>
+          <p:cNvPr id="35" name="chain-entities-2">
+            <a:extLst xmlns:a="http://schemas.openxmlformats.org/drawingml/2006/main">
+              <a:ext uri="{FF2B5EF4-FFF2-40B4-BE49-F238E27FC236}">
+                <a16:creationId xmlns:a16="http://schemas.microsoft.com/office/drawing/2014/main" id="{B9E2200F-493F-4031-9899-D7D266544952}"/>
+              </a:ext>
+            </a:extLst>
+          </p:cNvPr>
+          <p:cNvSpPr>
+            <a:spLocks xmlns:a="http://schemas.openxmlformats.org/drawingml/2006/main" noGrp="1"/>
+          </p:cNvSpPr>
+          <p:nvPr/>
+        </p:nvSpPr>
+        <p:spPr>
+          <a:xfrm xmlns:a="http://schemas.openxmlformats.org/drawingml/2006/main">
+            <a:off x="5800725" y="3619500"/>
+            <a:ext cx="1666875" cy="685800"/>
+          </a:xfrm>
+          <a:prstGeom xmlns:a="http://schemas.openxmlformats.org/drawingml/2006/main" prst="rect">
+            <a:avLst/>
+          </a:prstGeom>
+          <a:noFill xmlns:a="http://schemas.openxmlformats.org/drawingml/2006/main"/>
+          <a:ln xmlns:a="http://schemas.openxmlformats.org/drawingml/2006/main" w="0">
+            <a:noFill/>
+            <a:prstDash val="solid"/>
+          </a:ln>
+        </p:spPr>
+        <p:txBody>
+          <a:bodyPr xmlns:a="http://schemas.openxmlformats.org/drawingml/2006/main" anchor="ctr"/>
+          <a:lstStyle xmlns:a="http://schemas.openxmlformats.org/drawingml/2006/main"/>
+          <a:p xmlns:a="http://schemas.openxmlformats.org/drawingml/2006/main">
+            <a:pPr algn="l">
+              <a:defRPr sz="1425" b="1">
+                <a:solidFill>
+                  <a:srgbClr val="0E453A"/>
+                </a:solidFill>
+              </a:defRPr>
+            </a:pPr>
+            <a:r>
+              <a:rPr sz="1425" b="1">
+                <a:solidFill>
+                  <a:srgbClr val="0E453A"/>
+                </a:solidFill>
+              </a:rPr>
+              <a:t>传音银行</a:t>
+            </a:r>
+          </a:p>
+          <a:p xmlns:a="http://schemas.openxmlformats.org/drawingml/2006/main">
+            <a:pPr algn="l">
+              <a:defRPr sz="1425" b="1">
+                <a:solidFill>
+                  <a:srgbClr val="0E453A"/>
+                </a:solidFill>
+              </a:defRPr>
+            </a:pPr>
+            <a:r>
+              <a:rPr sz="1425" b="1">
+                <a:solidFill>
+                  <a:srgbClr val="0E453A"/>
+                </a:solidFill>
+              </a:rPr>
+              <a:t>接入银行</a:t>
+            </a:r>
+          </a:p>
+        </p:txBody>
+      </p:sp>
+      <p:sp>
+        <p:nvSpPr>
+          <p:cNvPr id="36" name="rule-609-474">
+            <a:extLst xmlns:a="http://schemas.openxmlformats.org/drawingml/2006/main">
+              <a:ext uri="{FF2B5EF4-FFF2-40B4-BE49-F238E27FC236}">
+                <a16:creationId xmlns:a16="http://schemas.microsoft.com/office/drawing/2014/main" id="{6F64F647-CE29-42EB-A4B0-9E1F9EB4A365}"/>
+              </a:ext>
+            </a:extLst>
+          </p:cNvPr>
+          <p:cNvSpPr>
+            <a:spLocks xmlns:a="http://schemas.openxmlformats.org/drawingml/2006/main" noGrp="1"/>
+          </p:cNvSpPr>
+          <p:nvPr/>
+        </p:nvSpPr>
+        <p:spPr>
+          <a:xfrm xmlns:a="http://schemas.openxmlformats.org/drawingml/2006/main">
+            <a:off x="5800725" y="4514850"/>
+            <a:ext cx="1638300" cy="9525"/>
+          </a:xfrm>
+          <a:prstGeom xmlns:a="http://schemas.openxmlformats.org/drawingml/2006/main" prst="rect">
+            <a:avLst/>
+          </a:prstGeom>
+          <a:solidFill xmlns:a="http://schemas.openxmlformats.org/drawingml/2006/main">
+            <a:srgbClr val="CBD3CE"/>
+          </a:solidFill>
+          <a:ln xmlns:a="http://schemas.openxmlformats.org/drawingml/2006/main" w="0">
+            <a:noFill/>
+            <a:prstDash val="solid"/>
+          </a:ln>
+        </p:spPr>
+      </p:sp>
+      <p:sp>
+        <p:nvSpPr>
+          <p:cNvPr id="37" name="chain-capability-2">
+            <a:extLst xmlns:a="http://schemas.openxmlformats.org/drawingml/2006/main">
+              <a:ext uri="{FF2B5EF4-FFF2-40B4-BE49-F238E27FC236}">
+                <a16:creationId xmlns:a16="http://schemas.microsoft.com/office/drawing/2014/main" id="{741C33DB-4972-40FA-8B88-33C8EF607BDC}"/>
+              </a:ext>
+            </a:extLst>
+          </p:cNvPr>
+          <p:cNvSpPr>
+            <a:spLocks xmlns:a="http://schemas.openxmlformats.org/drawingml/2006/main" noGrp="1"/>
+          </p:cNvSpPr>
+          <p:nvPr/>
+        </p:nvSpPr>
+        <p:spPr>
+          <a:xfrm xmlns:a="http://schemas.openxmlformats.org/drawingml/2006/main">
+            <a:off x="5800725" y="4686300"/>
+            <a:ext cx="1666875" cy="419100"/>
+          </a:xfrm>
+          <a:prstGeom xmlns:a="http://schemas.openxmlformats.org/drawingml/2006/main" prst="rect">
+            <a:avLst/>
+          </a:prstGeom>
+          <a:noFill xmlns:a="http://schemas.openxmlformats.org/drawingml/2006/main"/>
+          <a:ln xmlns:a="http://schemas.openxmlformats.org/drawingml/2006/main" w="0">
+            <a:noFill/>
+            <a:prstDash val="solid"/>
+          </a:ln>
+        </p:spPr>
+        <p:txBody>
+          <a:bodyPr xmlns:a="http://schemas.openxmlformats.org/drawingml/2006/main" anchor="ctr"/>
+          <a:lstStyle xmlns:a="http://schemas.openxmlformats.org/drawingml/2006/main"/>
+          <a:p xmlns:a="http://schemas.openxmlformats.org/drawingml/2006/main">
+            <a:pPr algn="l">
+              <a:defRPr sz="1200" b="1">
+                <a:solidFill>
+                  <a:srgbClr val="162A24"/>
+                </a:solidFill>
+              </a:defRPr>
+            </a:pPr>
+            <a:r>
+              <a:rPr sz="1200" b="1">
+                <a:solidFill>
+                  <a:srgbClr val="162A24"/>
+                </a:solidFill>
+              </a:rPr>
+              <a:t>承接银行业务</a:t>
+            </a:r>
+          </a:p>
+        </p:txBody>
+      </p:sp>
+      <p:sp>
+        <p:nvSpPr>
+          <p:cNvPr id="38" name="chain-callout">
+            <a:extLst xmlns:a="http://schemas.openxmlformats.org/drawingml/2006/main">
+              <a:ext uri="{FF2B5EF4-FFF2-40B4-BE49-F238E27FC236}">
+                <a16:creationId xmlns:a16="http://schemas.microsoft.com/office/drawing/2014/main" id="{0DD244C9-FBF4-442E-8CDC-647830B8989D}"/>
+              </a:ext>
+            </a:extLst>
+          </p:cNvPr>
+          <p:cNvSpPr>
+            <a:spLocks xmlns:a="http://schemas.openxmlformats.org/drawingml/2006/main" noGrp="1"/>
+          </p:cNvSpPr>
+          <p:nvPr/>
+        </p:nvSpPr>
+        <p:spPr>
+          <a:xfrm xmlns:a="http://schemas.openxmlformats.org/drawingml/2006/main">
+            <a:off x="8286750" y="2000250"/>
+            <a:ext cx="3333750" cy="3476625"/>
+          </a:xfrm>
+          <a:prstGeom xmlns:a="http://schemas.openxmlformats.org/drawingml/2006/main" prst="rect">
+            <a:avLst/>
+          </a:prstGeom>
+          <a:solidFill xmlns:a="http://schemas.openxmlformats.org/drawingml/2006/main">
+            <a:srgbClr val="0E453A"/>
+          </a:solidFill>
+          <a:ln xmlns:a="http://schemas.openxmlformats.org/drawingml/2006/main" w="0">
+            <a:noFill/>
+            <a:prstDash val="solid"/>
+          </a:ln>
+        </p:spPr>
+      </p:sp>
+      <p:sp>
+        <p:nvSpPr>
+          <p:cNvPr id="39" name="label-900-242">
+            <a:extLst xmlns:a="http://schemas.openxmlformats.org/drawingml/2006/main">
+              <a:ext uri="{FF2B5EF4-FFF2-40B4-BE49-F238E27FC236}">
+                <a16:creationId xmlns:a16="http://schemas.microsoft.com/office/drawing/2014/main" id="{61C53BF0-35F8-4B50-BEE0-A884C9C1A92A}"/>
+              </a:ext>
+            </a:extLst>
+          </p:cNvPr>
+          <p:cNvSpPr>
+            <a:spLocks xmlns:a="http://schemas.openxmlformats.org/drawingml/2006/main" noGrp="1"/>
+          </p:cNvSpPr>
+          <p:nvPr/>
+        </p:nvSpPr>
+        <p:spPr>
+          <a:xfrm xmlns:a="http://schemas.openxmlformats.org/drawingml/2006/main">
+            <a:off x="8572500" y="2305050"/>
+            <a:ext cx="1333500" cy="190500"/>
+          </a:xfrm>
+          <a:prstGeom xmlns:a="http://schemas.openxmlformats.org/drawingml/2006/main" prst="rect">
+            <a:avLst/>
+          </a:prstGeom>
+          <a:noFill xmlns:a="http://schemas.openxmlformats.org/drawingml/2006/main"/>
+          <a:ln xmlns:a="http://schemas.openxmlformats.org/drawingml/2006/main" w="0">
+            <a:noFill/>
+            <a:prstDash val="solid"/>
+          </a:ln>
+        </p:spPr>
+        <p:txBody>
+          <a:bodyPr xmlns:a="http://schemas.openxmlformats.org/drawingml/2006/main" anchor="ctr"/>
+          <a:lstStyle xmlns:a="http://schemas.openxmlformats.org/drawingml/2006/main"/>
+          <a:p xmlns:a="http://schemas.openxmlformats.org/drawingml/2006/main">
+            <a:pPr algn="l">
+              <a:defRPr sz="750" b="1">
+                <a:solidFill>
+                  <a:srgbClr val="8CCDB2"/>
+                </a:solidFill>
+              </a:defRPr>
+            </a:pPr>
+            <a:r>
+              <a:rPr sz="750" b="1">
+                <a:solidFill>
+                  <a:srgbClr val="8CCDB2"/>
+                </a:solidFill>
+              </a:rPr>
+              <a:t>讨论重点</a:t>
+            </a:r>
+          </a:p>
+        </p:txBody>
+      </p:sp>
+      <p:sp>
+        <p:nvSpPr>
+          <p:cNvPr id="40" name="chain-callout-title">
+            <a:extLst xmlns:a="http://schemas.openxmlformats.org/drawingml/2006/main">
+              <a:ext uri="{FF2B5EF4-FFF2-40B4-BE49-F238E27FC236}">
+                <a16:creationId xmlns:a16="http://schemas.microsoft.com/office/drawing/2014/main" id="{A047325A-CAB6-43EF-A082-31534CBCCB36}"/>
+              </a:ext>
+            </a:extLst>
+          </p:cNvPr>
+          <p:cNvSpPr>
+            <a:spLocks xmlns:a="http://schemas.openxmlformats.org/drawingml/2006/main" noGrp="1"/>
+          </p:cNvSpPr>
+          <p:nvPr/>
+        </p:nvSpPr>
+        <p:spPr>
+          <a:xfrm xmlns:a="http://schemas.openxmlformats.org/drawingml/2006/main">
+            <a:off x="8572500" y="2857500"/>
+            <a:ext cx="2714625" cy="952500"/>
+          </a:xfrm>
+          <a:prstGeom xmlns:a="http://schemas.openxmlformats.org/drawingml/2006/main" prst="rect">
+            <a:avLst/>
+          </a:prstGeom>
+          <a:noFill xmlns:a="http://schemas.openxmlformats.org/drawingml/2006/main"/>
+          <a:ln xmlns:a="http://schemas.openxmlformats.org/drawingml/2006/main" w="0">
+            <a:noFill/>
+            <a:prstDash val="solid"/>
+          </a:ln>
+        </p:spPr>
+        <p:txBody>
+          <a:bodyPr xmlns:a="http://schemas.openxmlformats.org/drawingml/2006/main" anchor="ctr"/>
+          <a:lstStyle xmlns:a="http://schemas.openxmlformats.org/drawingml/2006/main"/>
+          <a:p xmlns:a="http://schemas.openxmlformats.org/drawingml/2006/main">
+            <a:pPr algn="l">
+              <a:defRPr sz="2325" b="1">
                 <a:solidFill>
                   <a:srgbClr val="FFFDF8"/>
                 </a:solidFill>
               </a:defRPr>
             </a:pPr>
             <a:r>
-              <a:rPr sz="5250" b="0">
+              <a:rPr sz="2325" b="1">
                 <a:solidFill>
                   <a:srgbClr val="FFFDF8"/>
                 </a:solidFill>
               </a:rPr>
-              <a:t>01</a:t>
-            </a:r>
-          </a:p>
-        </p:txBody>
-      </p:sp>
-      <p:sp>
-        <p:nvSpPr>
-          <p:cNvPr id="2" name="section-title">
-            <a:extLst xmlns:a="http://schemas.openxmlformats.org/drawingml/2006/main">
-              <a:ext uri="{FF2B5EF4-FFF2-40B4-BE49-F238E27FC236}">
-                <a16:creationId xmlns:a16="http://schemas.microsoft.com/office/drawing/2014/main" id="{9FEF8B2D-B8B5-4D37-884B-7BB09BB2026D}"/>
-              </a:ext>
-            </a:extLst>
-          </p:cNvPr>
-          <p:cNvSpPr>
-            <a:spLocks xmlns:a="http://schemas.openxmlformats.org/drawingml/2006/main" noGrp="1"/>
-          </p:cNvSpPr>
-          <p:nvPr/>
-        </p:nvSpPr>
-        <p:spPr>
-          <a:xfrm xmlns:a="http://schemas.openxmlformats.org/drawingml/2006/main">
-            <a:off x="666750" y="2571750"/>
-            <a:ext cx="5715000" cy="666750"/>
-          </a:xfrm>
-          <a:prstGeom xmlns:a="http://schemas.openxmlformats.org/drawingml/2006/main" prst="rect">
-            <a:avLst/>
-          </a:prstGeom>
-          <a:noFill xmlns:a="http://schemas.openxmlformats.org/drawingml/2006/main"/>
-          <a:ln xmlns:a="http://schemas.openxmlformats.org/drawingml/2006/main" w="0">
-            <a:noFill/>
-            <a:prstDash val="solid"/>
-          </a:ln>
-        </p:spPr>
-        <p:txBody>
-          <a:bodyPr xmlns:a="http://schemas.openxmlformats.org/drawingml/2006/main" anchor="ctr"/>
-          <a:lstStyle xmlns:a="http://schemas.openxmlformats.org/drawingml/2006/main"/>
-          <a:p xmlns:a="http://schemas.openxmlformats.org/drawingml/2006/main">
-            <a:pPr algn="l">
-              <a:defRPr sz="2550" b="1">
+              <a:t>是否继续探索</a:t>
+            </a:r>
+          </a:p>
+          <a:p xmlns:a="http://schemas.openxmlformats.org/drawingml/2006/main">
+            <a:pPr algn="l">
+              <a:defRPr sz="2325" b="1">
                 <a:solidFill>
                   <a:srgbClr val="FFFDF8"/>
                 </a:solidFill>
               </a:defRPr>
             </a:pPr>
             <a:r>
-              <a:rPr sz="2550" b="1">
+              <a:rPr sz="2325" b="1">
                 <a:solidFill>
                   <a:srgbClr val="FFFDF8"/>
                 </a:solidFill>
               </a:rPr>
-              <a:t>战略与目标</a:t>
-            </a:r>
-          </a:p>
-        </p:txBody>
-      </p:sp>
-      <p:sp>
-        <p:nvSpPr>
-          <p:cNvPr id="3" name="section-en">
-            <a:extLst xmlns:a="http://schemas.openxmlformats.org/drawingml/2006/main">
-              <a:ext uri="{FF2B5EF4-FFF2-40B4-BE49-F238E27FC236}">
-                <a16:creationId xmlns:a16="http://schemas.microsoft.com/office/drawing/2014/main" id="{6FD1EF7D-3A3A-4848-A278-CEEC7992F78C}"/>
-              </a:ext>
-            </a:extLst>
-          </p:cNvPr>
-          <p:cNvSpPr>
-            <a:spLocks xmlns:a="http://schemas.openxmlformats.org/drawingml/2006/main" noGrp="1"/>
-          </p:cNvSpPr>
-          <p:nvPr/>
-        </p:nvSpPr>
-        <p:spPr>
-          <a:xfrm xmlns:a="http://schemas.openxmlformats.org/drawingml/2006/main">
-            <a:off x="666750" y="3238500"/>
-            <a:ext cx="4762500" cy="304800"/>
-          </a:xfrm>
-          <a:prstGeom xmlns:a="http://schemas.openxmlformats.org/drawingml/2006/main" prst="rect">
-            <a:avLst/>
-          </a:prstGeom>
-          <a:noFill xmlns:a="http://schemas.openxmlformats.org/drawingml/2006/main"/>
-          <a:ln xmlns:a="http://schemas.openxmlformats.org/drawingml/2006/main" w="0">
-            <a:noFill/>
-            <a:prstDash val="solid"/>
-          </a:ln>
-        </p:spPr>
-        <p:txBody>
-          <a:bodyPr xmlns:a="http://schemas.openxmlformats.org/drawingml/2006/main" anchor="ctr"/>
-          <a:lstStyle xmlns:a="http://schemas.openxmlformats.org/drawingml/2006/main"/>
-          <a:p xmlns:a="http://schemas.openxmlformats.org/drawingml/2006/main">
-            <a:pPr algn="l">
-              <a:defRPr sz="1125" b="1">
-                <a:solidFill>
-                  <a:srgbClr val="8CCDB2"/>
-                </a:solidFill>
-              </a:defRPr>
-            </a:pPr>
-            <a:r>
-              <a:rPr sz="1125" b="1">
-                <a:solidFill>
-                  <a:srgbClr val="8CCDB2"/>
-                </a:solidFill>
-              </a:rPr>
-              <a:t>STRATEGY &amp; DIRECTION</a:t>
-            </a:r>
-          </a:p>
-        </p:txBody>
-      </p:sp>
-      <p:sp>
-        <p:nvSpPr>
-          <p:cNvPr id="4" name="rule-70-630">
-            <a:extLst xmlns:a="http://schemas.openxmlformats.org/drawingml/2006/main">
-              <a:ext uri="{FF2B5EF4-FFF2-40B4-BE49-F238E27FC236}">
-                <a16:creationId xmlns:a16="http://schemas.microsoft.com/office/drawing/2014/main" id="{8F995CD6-82F9-4380-989F-6930BE3FE772}"/>
-              </a:ext>
-            </a:extLst>
-          </p:cNvPr>
-          <p:cNvSpPr>
-            <a:spLocks xmlns:a="http://schemas.openxmlformats.org/drawingml/2006/main" noGrp="1"/>
-          </p:cNvSpPr>
-          <p:nvPr/>
-        </p:nvSpPr>
-        <p:spPr>
-          <a:xfrm xmlns:a="http://schemas.openxmlformats.org/drawingml/2006/main">
-            <a:off x="666750" y="6000750"/>
-            <a:ext cx="10858500" cy="9525"/>
-          </a:xfrm>
-          <a:prstGeom xmlns:a="http://schemas.openxmlformats.org/drawingml/2006/main" prst="rect">
-            <a:avLst/>
-          </a:prstGeom>
-          <a:solidFill xmlns:a="http://schemas.openxmlformats.org/drawingml/2006/main">
-            <a:srgbClr val="58A28F"/>
-          </a:solidFill>
-          <a:ln xmlns:a="http://schemas.openxmlformats.org/drawingml/2006/main" w="0">
-            <a:noFill/>
-            <a:prstDash val="solid"/>
-          </a:ln>
-        </p:spPr>
-      </p:sp>
-      <p:sp>
-        <p:nvSpPr>
-          <p:cNvPr id="5" name="section-brand">
-            <a:extLst xmlns:a="http://schemas.openxmlformats.org/drawingml/2006/main">
-              <a:ext uri="{FF2B5EF4-FFF2-40B4-BE49-F238E27FC236}">
-                <a16:creationId xmlns:a16="http://schemas.microsoft.com/office/drawing/2014/main" id="{3541A59D-63F3-4DD7-8BAA-852B1165558F}"/>
-              </a:ext>
-            </a:extLst>
-          </p:cNvPr>
-          <p:cNvSpPr>
-            <a:spLocks xmlns:a="http://schemas.openxmlformats.org/drawingml/2006/main" noGrp="1"/>
-          </p:cNvSpPr>
-          <p:nvPr/>
-        </p:nvSpPr>
-        <p:spPr>
-          <a:xfrm xmlns:a="http://schemas.openxmlformats.org/drawingml/2006/main">
-            <a:off x="666750" y="6191250"/>
-            <a:ext cx="952500" cy="285750"/>
-          </a:xfrm>
-          <a:prstGeom xmlns:a="http://schemas.openxmlformats.org/drawingml/2006/main" prst="rect">
-            <a:avLst/>
-          </a:prstGeom>
-          <a:noFill xmlns:a="http://schemas.openxmlformats.org/drawingml/2006/main"/>
-          <a:ln xmlns:a="http://schemas.openxmlformats.org/drawingml/2006/main" w="0">
-            <a:noFill/>
-            <a:prstDash val="solid"/>
-          </a:ln>
-        </p:spPr>
-        <p:txBody>
-          <a:bodyPr xmlns:a="http://schemas.openxmlformats.org/drawingml/2006/main" anchor="ctr"/>
-          <a:lstStyle xmlns:a="http://schemas.openxmlformats.org/drawingml/2006/main"/>
-          <a:p xmlns:a="http://schemas.openxmlformats.org/drawingml/2006/main">
-            <a:pPr algn="l">
-              <a:defRPr sz="1200" b="1">
-                <a:solidFill>
-                  <a:srgbClr val="FFFDF8"/>
-                </a:solidFill>
-              </a:defRPr>
-            </a:pPr>
-            <a:r>
-              <a:rPr sz="1200" b="1">
-                <a:solidFill>
-                  <a:srgbClr val="FFFDF8"/>
-                </a:solidFill>
-              </a:rPr>
-              <a:t>mint</a:t>
+              <a:t>三层合作</a:t>
+            </a:r>
+          </a:p>
+        </p:txBody>
+      </p:sp>
+      <p:sp>
+        <p:nvSpPr>
+          <p:cNvPr id="41" name="chain-callout-detail">
+            <a:extLst xmlns:a="http://schemas.openxmlformats.org/drawingml/2006/main">
+              <a:ext uri="{FF2B5EF4-FFF2-40B4-BE49-F238E27FC236}">
+                <a16:creationId xmlns:a16="http://schemas.microsoft.com/office/drawing/2014/main" id="{DB621A89-C4A5-495D-A946-C8D626F2A180}"/>
+              </a:ext>
+            </a:extLst>
+          </p:cNvPr>
+          <p:cNvSpPr>
+            <a:spLocks xmlns:a="http://schemas.openxmlformats.org/drawingml/2006/main" noGrp="1"/>
+          </p:cNvSpPr>
+          <p:nvPr/>
+        </p:nvSpPr>
+        <p:spPr>
+          <a:xfrm xmlns:a="http://schemas.openxmlformats.org/drawingml/2006/main">
+            <a:off x="8572500" y="4191000"/>
+            <a:ext cx="2571750" cy="666750"/>
+          </a:xfrm>
+          <a:prstGeom xmlns:a="http://schemas.openxmlformats.org/drawingml/2006/main" prst="rect">
+            <a:avLst/>
+          </a:prstGeom>
+          <a:noFill xmlns:a="http://schemas.openxmlformats.org/drawingml/2006/main"/>
+          <a:ln xmlns:a="http://schemas.openxmlformats.org/drawingml/2006/main" w="0">
+            <a:noFill/>
+            <a:prstDash val="solid"/>
+          </a:ln>
+        </p:spPr>
+        <p:txBody>
+          <a:bodyPr xmlns:a="http://schemas.openxmlformats.org/drawingml/2006/main" anchor="ctr"/>
+          <a:lstStyle xmlns:a="http://schemas.openxmlformats.org/drawingml/2006/main"/>
+          <a:p xmlns:a="http://schemas.openxmlformats.org/drawingml/2006/main">
+            <a:pPr algn="l">
+              <a:defRPr sz="1050" b="0">
+                <a:solidFill>
+                  <a:srgbClr val="DCECE5"/>
+                </a:solidFill>
+              </a:defRPr>
+            </a:pPr>
+            <a:r>
+              <a:rPr sz="1050" b="0">
+                <a:solidFill>
+                  <a:srgbClr val="DCECE5"/>
+                </a:solidFill>
+              </a:rPr>
+              <a:t>围绕入口、能力协同与银行承接进一步确认</a:t>
             </a:r>
           </a:p>
         </p:txBody>
@@ -10209,7 +12196,7 @@
     </p:spTree>
     <p:extLst>
       <p:ext uri="{BB962C8B-B14F-4D97-AF65-F5344CB8AC3E}">
-        <p14:creationId xmlns:p14="http://schemas.microsoft.com/office/powerpoint/2010/main" val="991544314"/>
+        <p14:creationId xmlns:p14="http://schemas.microsoft.com/office/powerpoint/2010/main" val="59889492"/>
       </p:ext>
     </p:extLst>
   </p:cSld>
@@ -10237,10 +12224,2915 @@
       </p:grpSpPr>
       <p:sp>
         <p:nvSpPr>
+          <p:cNvPr id="28" name="rule-60-45">
+            <a:extLst xmlns:a="http://schemas.openxmlformats.org/drawingml/2006/main">
+              <a:ext uri="{FF2B5EF4-FFF2-40B4-BE49-F238E27FC236}">
+                <a16:creationId xmlns:a16="http://schemas.microsoft.com/office/drawing/2014/main" id="{1C1C86D2-664B-4727-853E-7B32DA253F49}"/>
+              </a:ext>
+            </a:extLst>
+          </p:cNvPr>
+          <p:cNvSpPr>
+            <a:spLocks xmlns:a="http://schemas.openxmlformats.org/drawingml/2006/main" noGrp="1"/>
+          </p:cNvSpPr>
+          <p:nvPr/>
+        </p:nvSpPr>
+        <p:spPr>
+          <a:xfrm xmlns:a="http://schemas.openxmlformats.org/drawingml/2006/main">
+            <a:off x="571500" y="428625"/>
+            <a:ext cx="11049000" cy="9525"/>
+          </a:xfrm>
+          <a:prstGeom xmlns:a="http://schemas.openxmlformats.org/drawingml/2006/main" prst="rect">
+            <a:avLst/>
+          </a:prstGeom>
+          <a:solidFill xmlns:a="http://schemas.openxmlformats.org/drawingml/2006/main">
+            <a:srgbClr val="CBD3CE"/>
+          </a:solidFill>
+          <a:ln xmlns:a="http://schemas.openxmlformats.org/drawingml/2006/main" w="0">
+            <a:noFill/>
+            <a:prstDash val="solid"/>
+          </a:ln>
+        </p:spPr>
+      </p:sp>
+      <p:sp>
+        <p:nvSpPr>
+          <p:cNvPr id="2" name="chapter-accent">
+            <a:extLst xmlns:a="http://schemas.openxmlformats.org/drawingml/2006/main">
+              <a:ext uri="{FF2B5EF4-FFF2-40B4-BE49-F238E27FC236}">
+                <a16:creationId xmlns:a16="http://schemas.microsoft.com/office/drawing/2014/main" id="{0CFBCACD-1925-43C6-BE0B-C12FCBC404AB}"/>
+              </a:ext>
+            </a:extLst>
+          </p:cNvPr>
+          <p:cNvSpPr>
+            <a:spLocks xmlns:a="http://schemas.openxmlformats.org/drawingml/2006/main" noGrp="1"/>
+          </p:cNvSpPr>
+          <p:nvPr/>
+        </p:nvSpPr>
+        <p:spPr>
+          <a:xfrm xmlns:a="http://schemas.openxmlformats.org/drawingml/2006/main">
+            <a:off x="571500" y="266700"/>
+            <a:ext cx="266700" cy="28575"/>
+          </a:xfrm>
+          <a:prstGeom xmlns:a="http://schemas.openxmlformats.org/drawingml/2006/main" prst="rect">
+            <a:avLst/>
+          </a:prstGeom>
+          <a:solidFill xmlns:a="http://schemas.openxmlformats.org/drawingml/2006/main">
+            <a:srgbClr val="BC794D"/>
+          </a:solidFill>
+          <a:ln xmlns:a="http://schemas.openxmlformats.org/drawingml/2006/main" w="0">
+            <a:noFill/>
+            <a:prstDash val="solid"/>
+          </a:ln>
+        </p:spPr>
+      </p:sp>
+      <p:sp>
+        <p:nvSpPr>
+          <p:cNvPr id="3" name="chapter">
+            <a:extLst xmlns:a="http://schemas.openxmlformats.org/drawingml/2006/main">
+              <a:ext uri="{FF2B5EF4-FFF2-40B4-BE49-F238E27FC236}">
+                <a16:creationId xmlns:a16="http://schemas.microsoft.com/office/drawing/2014/main" id="{A7FF70D7-76BC-43D6-976B-93DD4CBF55B5}"/>
+              </a:ext>
+            </a:extLst>
+          </p:cNvPr>
+          <p:cNvSpPr>
+            <a:spLocks xmlns:a="http://schemas.openxmlformats.org/drawingml/2006/main" noGrp="1"/>
+          </p:cNvSpPr>
+          <p:nvPr/>
+        </p:nvSpPr>
+        <p:spPr>
+          <a:xfrm xmlns:a="http://schemas.openxmlformats.org/drawingml/2006/main">
+            <a:off x="933450" y="171450"/>
+            <a:ext cx="3048000" cy="247650"/>
+          </a:xfrm>
+          <a:prstGeom xmlns:a="http://schemas.openxmlformats.org/drawingml/2006/main" prst="rect">
+            <a:avLst/>
+          </a:prstGeom>
+          <a:noFill xmlns:a="http://schemas.openxmlformats.org/drawingml/2006/main"/>
+          <a:ln xmlns:a="http://schemas.openxmlformats.org/drawingml/2006/main" w="0">
+            <a:noFill/>
+            <a:prstDash val="solid"/>
+          </a:ln>
+        </p:spPr>
+        <p:txBody>
+          <a:bodyPr xmlns:a="http://schemas.openxmlformats.org/drawingml/2006/main" anchor="ctr"/>
+          <a:lstStyle xmlns:a="http://schemas.openxmlformats.org/drawingml/2006/main"/>
+          <a:p xmlns:a="http://schemas.openxmlformats.org/drawingml/2006/main">
+            <a:pPr algn="l">
+              <a:defRPr sz="900" b="1">
+                <a:solidFill>
+                  <a:srgbClr val="1C7866"/>
+                </a:solidFill>
+              </a:defRPr>
+            </a:pPr>
+            <a:r>
+              <a:rPr sz="900" b="1">
+                <a:solidFill>
+                  <a:srgbClr val="1C7866"/>
+                </a:solidFill>
+              </a:rPr>
+              <a:t>关键风险判断</a:t>
+            </a:r>
+          </a:p>
+        </p:txBody>
+      </p:sp>
+      <p:sp>
+        <p:nvSpPr>
+          <p:cNvPr id="4" name="page-number">
+            <a:extLst xmlns:a="http://schemas.openxmlformats.org/drawingml/2006/main">
+              <a:ext uri="{FF2B5EF4-FFF2-40B4-BE49-F238E27FC236}">
+                <a16:creationId xmlns:a16="http://schemas.microsoft.com/office/drawing/2014/main" id="{2FDDD087-6CD7-4D99-B392-6285C4B491C8}"/>
+              </a:ext>
+            </a:extLst>
+          </p:cNvPr>
+          <p:cNvSpPr>
+            <a:spLocks xmlns:a="http://schemas.openxmlformats.org/drawingml/2006/main" noGrp="1"/>
+          </p:cNvSpPr>
+          <p:nvPr/>
+        </p:nvSpPr>
+        <p:spPr>
+          <a:xfrm xmlns:a="http://schemas.openxmlformats.org/drawingml/2006/main">
+            <a:off x="11163300" y="171450"/>
+            <a:ext cx="457200" cy="247650"/>
+          </a:xfrm>
+          <a:prstGeom xmlns:a="http://schemas.openxmlformats.org/drawingml/2006/main" prst="rect">
+            <a:avLst/>
+          </a:prstGeom>
+          <a:noFill xmlns:a="http://schemas.openxmlformats.org/drawingml/2006/main"/>
+          <a:ln xmlns:a="http://schemas.openxmlformats.org/drawingml/2006/main" w="0">
+            <a:noFill/>
+            <a:prstDash val="solid"/>
+          </a:ln>
+        </p:spPr>
+        <p:txBody>
+          <a:bodyPr xmlns:a="http://schemas.openxmlformats.org/drawingml/2006/main" anchor="ctr"/>
+          <a:lstStyle xmlns:a="http://schemas.openxmlformats.org/drawingml/2006/main"/>
+          <a:p xmlns:a="http://schemas.openxmlformats.org/drawingml/2006/main">
+            <a:pPr algn="r">
+              <a:defRPr sz="825" b="1">
+                <a:solidFill>
+                  <a:srgbClr val="69766F"/>
+                </a:solidFill>
+              </a:defRPr>
+            </a:pPr>
+            <a:r>
+              <a:rPr sz="825" b="1">
+                <a:solidFill>
+                  <a:srgbClr val="69766F"/>
+                </a:solidFill>
+              </a:rPr>
+              <a:t>15</a:t>
+            </a:r>
+          </a:p>
+        </p:txBody>
+      </p:sp>
+      <p:sp>
+        <p:nvSpPr>
+          <p:cNvPr id="5" name="rule-60-674">
+            <a:extLst xmlns:a="http://schemas.openxmlformats.org/drawingml/2006/main">
+              <a:ext uri="{FF2B5EF4-FFF2-40B4-BE49-F238E27FC236}">
+                <a16:creationId xmlns:a16="http://schemas.microsoft.com/office/drawing/2014/main" id="{A7E7B81A-3541-40E6-9326-1DD8D8B90673}"/>
+              </a:ext>
+            </a:extLst>
+          </p:cNvPr>
+          <p:cNvSpPr>
+            <a:spLocks xmlns:a="http://schemas.openxmlformats.org/drawingml/2006/main" noGrp="1"/>
+          </p:cNvSpPr>
+          <p:nvPr/>
+        </p:nvSpPr>
+        <p:spPr>
+          <a:xfrm xmlns:a="http://schemas.openxmlformats.org/drawingml/2006/main">
+            <a:off x="571500" y="6419850"/>
+            <a:ext cx="11049000" cy="9525"/>
+          </a:xfrm>
+          <a:prstGeom xmlns:a="http://schemas.openxmlformats.org/drawingml/2006/main" prst="rect">
+            <a:avLst/>
+          </a:prstGeom>
+          <a:solidFill xmlns:a="http://schemas.openxmlformats.org/drawingml/2006/main">
+            <a:srgbClr val="CBD3CE"/>
+          </a:solidFill>
+          <a:ln xmlns:a="http://schemas.openxmlformats.org/drawingml/2006/main" w="0">
+            <a:noFill/>
+            <a:prstDash val="solid"/>
+          </a:ln>
+        </p:spPr>
+      </p:sp>
+      <p:sp>
+        <p:nvSpPr>
+          <p:cNvPr id="6" name="brand">
+            <a:extLst xmlns:a="http://schemas.openxmlformats.org/drawingml/2006/main">
+              <a:ext uri="{FF2B5EF4-FFF2-40B4-BE49-F238E27FC236}">
+                <a16:creationId xmlns:a16="http://schemas.microsoft.com/office/drawing/2014/main" id="{772826D2-2321-4270-B166-3760653B75A6}"/>
+              </a:ext>
+            </a:extLst>
+          </p:cNvPr>
+          <p:cNvSpPr>
+            <a:spLocks xmlns:a="http://schemas.openxmlformats.org/drawingml/2006/main" noGrp="1"/>
+          </p:cNvSpPr>
+          <p:nvPr/>
+        </p:nvSpPr>
+        <p:spPr>
+          <a:xfrm xmlns:a="http://schemas.openxmlformats.org/drawingml/2006/main">
+            <a:off x="571500" y="6477000"/>
+            <a:ext cx="857250" cy="228600"/>
+          </a:xfrm>
+          <a:prstGeom xmlns:a="http://schemas.openxmlformats.org/drawingml/2006/main" prst="rect">
+            <a:avLst/>
+          </a:prstGeom>
+          <a:noFill xmlns:a="http://schemas.openxmlformats.org/drawingml/2006/main"/>
+          <a:ln xmlns:a="http://schemas.openxmlformats.org/drawingml/2006/main" w="0">
+            <a:noFill/>
+            <a:prstDash val="solid"/>
+          </a:ln>
+        </p:spPr>
+        <p:txBody>
+          <a:bodyPr xmlns:a="http://schemas.openxmlformats.org/drawingml/2006/main" anchor="ctr"/>
+          <a:lstStyle xmlns:a="http://schemas.openxmlformats.org/drawingml/2006/main"/>
+          <a:p xmlns:a="http://schemas.openxmlformats.org/drawingml/2006/main">
+            <a:pPr algn="l">
+              <a:defRPr sz="1200" b="1">
+                <a:solidFill>
+                  <a:srgbClr val="42B879"/>
+                </a:solidFill>
+              </a:defRPr>
+            </a:pPr>
+            <a:r>
+              <a:rPr sz="1200" b="1">
+                <a:solidFill>
+                  <a:srgbClr val="42B879"/>
+                </a:solidFill>
+              </a:rPr>
+              <a:t>mint</a:t>
+            </a:r>
+          </a:p>
+        </p:txBody>
+      </p:sp>
+      <p:sp>
+        <p:nvSpPr>
+          <p:cNvPr id="7" name="source">
+            <a:extLst xmlns:a="http://schemas.openxmlformats.org/drawingml/2006/main">
+              <a:ext uri="{FF2B5EF4-FFF2-40B4-BE49-F238E27FC236}">
+                <a16:creationId xmlns:a16="http://schemas.microsoft.com/office/drawing/2014/main" id="{1F926B83-31C8-43C5-8DA8-91F45A30E777}"/>
+              </a:ext>
+            </a:extLst>
+          </p:cNvPr>
+          <p:cNvSpPr>
+            <a:spLocks xmlns:a="http://schemas.openxmlformats.org/drawingml/2006/main" noGrp="1"/>
+          </p:cNvSpPr>
+          <p:nvPr/>
+        </p:nvSpPr>
+        <p:spPr>
+          <a:xfrm xmlns:a="http://schemas.openxmlformats.org/drawingml/2006/main">
+            <a:off x="4095750" y="6477000"/>
+            <a:ext cx="4095750" cy="209550"/>
+          </a:xfrm>
+          <a:prstGeom xmlns:a="http://schemas.openxmlformats.org/drawingml/2006/main" prst="rect">
+            <a:avLst/>
+          </a:prstGeom>
+          <a:noFill xmlns:a="http://schemas.openxmlformats.org/drawingml/2006/main"/>
+          <a:ln xmlns:a="http://schemas.openxmlformats.org/drawingml/2006/main" w="0">
+            <a:noFill/>
+            <a:prstDash val="solid"/>
+          </a:ln>
+        </p:spPr>
+        <p:txBody>
+          <a:bodyPr xmlns:a="http://schemas.openxmlformats.org/drawingml/2006/main" anchor="ctr"/>
+          <a:lstStyle xmlns:a="http://schemas.openxmlformats.org/drawingml/2006/main"/>
+          <a:p xmlns:a="http://schemas.openxmlformats.org/drawingml/2006/main">
+            <a:pPr algn="ctr">
+              <a:defRPr sz="675" b="0">
+                <a:solidFill>
+                  <a:srgbClr val="69766F"/>
+                </a:solidFill>
+              </a:defRPr>
+            </a:pPr>
+            <a:r>
+              <a:rPr sz="675" b="0">
+                <a:solidFill>
+                  <a:srgbClr val="69766F"/>
+                </a:solidFill>
+              </a:rPr>
+              <a:t>来源：组件母版示例，生成材料时替换</a:t>
+            </a:r>
+          </a:p>
+        </p:txBody>
+      </p:sp>
+      <p:sp>
+        <p:nvSpPr>
+          <p:cNvPr id="8" name="footer-page">
+            <a:extLst xmlns:a="http://schemas.openxmlformats.org/drawingml/2006/main">
+              <a:ext uri="{FF2B5EF4-FFF2-40B4-BE49-F238E27FC236}">
+                <a16:creationId xmlns:a16="http://schemas.microsoft.com/office/drawing/2014/main" id="{581DE01C-6024-4053-AA3F-DCF7B82C939A}"/>
+              </a:ext>
+            </a:extLst>
+          </p:cNvPr>
+          <p:cNvSpPr>
+            <a:spLocks xmlns:a="http://schemas.openxmlformats.org/drawingml/2006/main" noGrp="1"/>
+          </p:cNvSpPr>
+          <p:nvPr/>
+        </p:nvSpPr>
+        <p:spPr>
+          <a:xfrm xmlns:a="http://schemas.openxmlformats.org/drawingml/2006/main">
+            <a:off x="10763250" y="6477000"/>
+            <a:ext cx="857250" cy="209550"/>
+          </a:xfrm>
+          <a:prstGeom xmlns:a="http://schemas.openxmlformats.org/drawingml/2006/main" prst="rect">
+            <a:avLst/>
+          </a:prstGeom>
+          <a:noFill xmlns:a="http://schemas.openxmlformats.org/drawingml/2006/main"/>
+          <a:ln xmlns:a="http://schemas.openxmlformats.org/drawingml/2006/main" w="0">
+            <a:noFill/>
+            <a:prstDash val="solid"/>
+          </a:ln>
+        </p:spPr>
+        <p:txBody>
+          <a:bodyPr xmlns:a="http://schemas.openxmlformats.org/drawingml/2006/main" anchor="ctr"/>
+          <a:lstStyle xmlns:a="http://schemas.openxmlformats.org/drawingml/2006/main"/>
+          <a:p xmlns:a="http://schemas.openxmlformats.org/drawingml/2006/main">
+            <a:pPr algn="r">
+              <a:defRPr sz="675" b="0">
+                <a:solidFill>
+                  <a:srgbClr val="69766F"/>
+                </a:solidFill>
+              </a:defRPr>
+            </a:pPr>
+            <a:r>
+              <a:rPr sz="675" b="0">
+                <a:solidFill>
+                  <a:srgbClr val="69766F"/>
+                </a:solidFill>
+              </a:rPr>
+              <a:t>15 / 18</a:t>
+            </a:r>
+          </a:p>
+        </p:txBody>
+      </p:sp>
+      <p:sp>
+        <p:nvSpPr>
+          <p:cNvPr id="9" name="page-title">
+            <a:extLst xmlns:a="http://schemas.openxmlformats.org/drawingml/2006/main">
+              <a:ext uri="{FF2B5EF4-FFF2-40B4-BE49-F238E27FC236}">
+                <a16:creationId xmlns:a16="http://schemas.microsoft.com/office/drawing/2014/main" id="{FB9C484E-11CE-4A55-8D2C-1A471A12CC0B}"/>
+              </a:ext>
+            </a:extLst>
+          </p:cNvPr>
+          <p:cNvSpPr>
+            <a:spLocks xmlns:a="http://schemas.openxmlformats.org/drawingml/2006/main" noGrp="1"/>
+          </p:cNvSpPr>
+          <p:nvPr/>
+        </p:nvSpPr>
+        <p:spPr>
+          <a:xfrm xmlns:a="http://schemas.openxmlformats.org/drawingml/2006/main">
+            <a:off x="571500" y="666750"/>
+            <a:ext cx="11049000" cy="628650"/>
+          </a:xfrm>
+          <a:prstGeom xmlns:a="http://schemas.openxmlformats.org/drawingml/2006/main" prst="rect">
+            <a:avLst/>
+          </a:prstGeom>
+          <a:noFill xmlns:a="http://schemas.openxmlformats.org/drawingml/2006/main"/>
+          <a:ln xmlns:a="http://schemas.openxmlformats.org/drawingml/2006/main" w="0">
+            <a:noFill/>
+            <a:prstDash val="solid"/>
+          </a:ln>
+        </p:spPr>
+        <p:txBody>
+          <a:bodyPr xmlns:a="http://schemas.openxmlformats.org/drawingml/2006/main" anchor="ctr"/>
+          <a:lstStyle xmlns:a="http://schemas.openxmlformats.org/drawingml/2006/main"/>
+          <a:p xmlns:a="http://schemas.openxmlformats.org/drawingml/2006/main">
+            <a:pPr algn="l">
+              <a:defRPr sz="2250" b="1">
+                <a:solidFill>
+                  <a:srgbClr val="162A24"/>
+                </a:solidFill>
+              </a:defRPr>
+            </a:pPr>
+            <a:r>
+              <a:rPr sz="2250" b="1">
+                <a:solidFill>
+                  <a:srgbClr val="162A24"/>
+                </a:solidFill>
+              </a:rPr>
+              <a:t>正式合作证据不足，可能影响监管真实性审核</a:t>
+            </a:r>
+          </a:p>
+        </p:txBody>
+      </p:sp>
+      <p:sp>
+        <p:nvSpPr>
+          <p:cNvPr id="10" name="page-lead">
+            <a:extLst xmlns:a="http://schemas.openxmlformats.org/drawingml/2006/main">
+              <a:ext uri="{FF2B5EF4-FFF2-40B4-BE49-F238E27FC236}">
+                <a16:creationId xmlns:a16="http://schemas.microsoft.com/office/drawing/2014/main" id="{B7F15843-0250-47F4-A292-50CF9038B4E3}"/>
+              </a:ext>
+            </a:extLst>
+          </p:cNvPr>
+          <p:cNvSpPr>
+            <a:spLocks xmlns:a="http://schemas.openxmlformats.org/drawingml/2006/main" noGrp="1"/>
+          </p:cNvSpPr>
+          <p:nvPr/>
+        </p:nvSpPr>
+        <p:spPr>
+          <a:xfrm xmlns:a="http://schemas.openxmlformats.org/drawingml/2006/main">
+            <a:off x="571500" y="1257300"/>
+            <a:ext cx="11049000" cy="323850"/>
+          </a:xfrm>
+          <a:prstGeom xmlns:a="http://schemas.openxmlformats.org/drawingml/2006/main" prst="rect">
+            <a:avLst/>
+          </a:prstGeom>
+          <a:noFill xmlns:a="http://schemas.openxmlformats.org/drawingml/2006/main"/>
+          <a:ln xmlns:a="http://schemas.openxmlformats.org/drawingml/2006/main" w="0">
+            <a:noFill/>
+            <a:prstDash val="solid"/>
+          </a:ln>
+        </p:spPr>
+        <p:txBody>
+          <a:bodyPr xmlns:a="http://schemas.openxmlformats.org/drawingml/2006/main" anchor="ctr"/>
+          <a:lstStyle xmlns:a="http://schemas.openxmlformats.org/drawingml/2006/main"/>
+          <a:p xmlns:a="http://schemas.openxmlformats.org/drawingml/2006/main">
+            <a:pPr algn="l">
+              <a:defRPr sz="1050" b="0">
+                <a:solidFill>
+                  <a:srgbClr val="69766F"/>
+                </a:solidFill>
+              </a:defRPr>
+            </a:pPr>
+            <a:r>
+              <a:rPr sz="1050" b="0">
+                <a:solidFill>
+                  <a:srgbClr val="69766F"/>
+                </a:solidFill>
+              </a:rPr>
+              <a:t>风险页先给出判断，再说明证据、影响和需要推动的动作。</a:t>
+            </a:r>
+          </a:p>
+        </p:txBody>
+      </p:sp>
+      <p:sp>
+        <p:nvSpPr>
+          <p:cNvPr id="11" name="risk-judgment">
+            <a:extLst xmlns:a="http://schemas.openxmlformats.org/drawingml/2006/main">
+              <a:ext uri="{FF2B5EF4-FFF2-40B4-BE49-F238E27FC236}">
+                <a16:creationId xmlns:a16="http://schemas.microsoft.com/office/drawing/2014/main" id="{224714AE-DBAC-4FC1-9D92-BC609AAFA622}"/>
+              </a:ext>
+            </a:extLst>
+          </p:cNvPr>
+          <p:cNvSpPr>
+            <a:spLocks xmlns:a="http://schemas.openxmlformats.org/drawingml/2006/main" noGrp="1"/>
+          </p:cNvSpPr>
+          <p:nvPr/>
+        </p:nvSpPr>
+        <p:spPr>
+          <a:xfrm xmlns:a="http://schemas.openxmlformats.org/drawingml/2006/main">
+            <a:off x="571500" y="1809750"/>
+            <a:ext cx="6381750" cy="3905250"/>
+          </a:xfrm>
+          <a:prstGeom xmlns:a="http://schemas.openxmlformats.org/drawingml/2006/main" prst="rect">
+            <a:avLst/>
+          </a:prstGeom>
+          <a:solidFill xmlns:a="http://schemas.openxmlformats.org/drawingml/2006/main">
+            <a:srgbClr val="7B2427"/>
+          </a:solidFill>
+          <a:ln xmlns:a="http://schemas.openxmlformats.org/drawingml/2006/main" w="0">
+            <a:noFill/>
+            <a:prstDash val="solid"/>
+          </a:ln>
+        </p:spPr>
+      </p:sp>
+      <p:sp>
+        <p:nvSpPr>
+          <p:cNvPr id="12" name="label-95-225">
+            <a:extLst xmlns:a="http://schemas.openxmlformats.org/drawingml/2006/main">
+              <a:ext uri="{FF2B5EF4-FFF2-40B4-BE49-F238E27FC236}">
+                <a16:creationId xmlns:a16="http://schemas.microsoft.com/office/drawing/2014/main" id="{D0081C22-9EEC-4E8E-9807-98FB638934B9}"/>
+              </a:ext>
+            </a:extLst>
+          </p:cNvPr>
+          <p:cNvSpPr>
+            <a:spLocks xmlns:a="http://schemas.openxmlformats.org/drawingml/2006/main" noGrp="1"/>
+          </p:cNvSpPr>
+          <p:nvPr/>
+        </p:nvSpPr>
+        <p:spPr>
+          <a:xfrm xmlns:a="http://schemas.openxmlformats.org/drawingml/2006/main">
+            <a:off x="904875" y="2143125"/>
+            <a:ext cx="1428750" cy="190500"/>
+          </a:xfrm>
+          <a:prstGeom xmlns:a="http://schemas.openxmlformats.org/drawingml/2006/main" prst="rect">
+            <a:avLst/>
+          </a:prstGeom>
+          <a:noFill xmlns:a="http://schemas.openxmlformats.org/drawingml/2006/main"/>
+          <a:ln xmlns:a="http://schemas.openxmlformats.org/drawingml/2006/main" w="0">
+            <a:noFill/>
+            <a:prstDash val="solid"/>
+          </a:ln>
+        </p:spPr>
+        <p:txBody>
+          <a:bodyPr xmlns:a="http://schemas.openxmlformats.org/drawingml/2006/main" anchor="ctr"/>
+          <a:lstStyle xmlns:a="http://schemas.openxmlformats.org/drawingml/2006/main"/>
+          <a:p xmlns:a="http://schemas.openxmlformats.org/drawingml/2006/main">
+            <a:pPr algn="l">
+              <a:defRPr sz="750" b="1">
+                <a:solidFill>
+                  <a:srgbClr val="F0B5A1"/>
+                </a:solidFill>
+              </a:defRPr>
+            </a:pPr>
+            <a:r>
+              <a:rPr sz="750" b="1">
+                <a:solidFill>
+                  <a:srgbClr val="F0B5A1"/>
+                </a:solidFill>
+              </a:rPr>
+              <a:t>KEY RISK</a:t>
+            </a:r>
+          </a:p>
+        </p:txBody>
+      </p:sp>
+      <p:sp>
+        <p:nvSpPr>
+          <p:cNvPr id="13" name="risk-level">
+            <a:extLst xmlns:a="http://schemas.openxmlformats.org/drawingml/2006/main">
+              <a:ext uri="{FF2B5EF4-FFF2-40B4-BE49-F238E27FC236}">
+                <a16:creationId xmlns:a16="http://schemas.microsoft.com/office/drawing/2014/main" id="{E2F51736-7068-46B3-A313-7F923FF9CC59}"/>
+              </a:ext>
+            </a:extLst>
+          </p:cNvPr>
+          <p:cNvSpPr>
+            <a:spLocks xmlns:a="http://schemas.openxmlformats.org/drawingml/2006/main" noGrp="1"/>
+          </p:cNvSpPr>
+          <p:nvPr/>
+        </p:nvSpPr>
+        <p:spPr>
+          <a:xfrm xmlns:a="http://schemas.openxmlformats.org/drawingml/2006/main">
+            <a:off x="5619750" y="2095500"/>
+            <a:ext cx="952500" cy="304800"/>
+          </a:xfrm>
+          <a:prstGeom xmlns:a="http://schemas.openxmlformats.org/drawingml/2006/main" prst="rect">
+            <a:avLst/>
+          </a:prstGeom>
+          <a:noFill xmlns:a="http://schemas.openxmlformats.org/drawingml/2006/main"/>
+          <a:ln xmlns:a="http://schemas.openxmlformats.org/drawingml/2006/main" w="0">
+            <a:noFill/>
+            <a:prstDash val="solid"/>
+          </a:ln>
+        </p:spPr>
+        <p:txBody>
+          <a:bodyPr xmlns:a="http://schemas.openxmlformats.org/drawingml/2006/main" anchor="ctr"/>
+          <a:lstStyle xmlns:a="http://schemas.openxmlformats.org/drawingml/2006/main"/>
+          <a:p xmlns:a="http://schemas.openxmlformats.org/drawingml/2006/main">
+            <a:pPr algn="ctr">
+              <a:defRPr sz="975" b="1">
+                <a:solidFill>
+                  <a:srgbClr val="FFFDF8"/>
+                </a:solidFill>
+              </a:defRPr>
+            </a:pPr>
+            <a:r>
+              <a:rPr sz="975" b="1">
+                <a:solidFill>
+                  <a:srgbClr val="FFFDF8"/>
+                </a:solidFill>
+              </a:rPr>
+              <a:t>高影响</a:t>
+            </a:r>
+          </a:p>
+        </p:txBody>
+      </p:sp>
+      <p:sp>
+        <p:nvSpPr>
+          <p:cNvPr id="14" name="risk-title">
+            <a:extLst xmlns:a="http://schemas.openxmlformats.org/drawingml/2006/main">
+              <a:ext uri="{FF2B5EF4-FFF2-40B4-BE49-F238E27FC236}">
+                <a16:creationId xmlns:a16="http://schemas.microsoft.com/office/drawing/2014/main" id="{FAA52FBD-8E5D-4864-B530-1BD4FA52E43D}"/>
+              </a:ext>
+            </a:extLst>
+          </p:cNvPr>
+          <p:cNvSpPr>
+            <a:spLocks xmlns:a="http://schemas.openxmlformats.org/drawingml/2006/main" noGrp="1"/>
+          </p:cNvSpPr>
+          <p:nvPr/>
+        </p:nvSpPr>
+        <p:spPr>
+          <a:xfrm xmlns:a="http://schemas.openxmlformats.org/drawingml/2006/main">
+            <a:off x="904875" y="2857500"/>
+            <a:ext cx="5334000" cy="1095375"/>
+          </a:xfrm>
+          <a:prstGeom xmlns:a="http://schemas.openxmlformats.org/drawingml/2006/main" prst="rect">
+            <a:avLst/>
+          </a:prstGeom>
+          <a:noFill xmlns:a="http://schemas.openxmlformats.org/drawingml/2006/main"/>
+          <a:ln xmlns:a="http://schemas.openxmlformats.org/drawingml/2006/main" w="0">
+            <a:noFill/>
+            <a:prstDash val="solid"/>
+          </a:ln>
+        </p:spPr>
+        <p:txBody>
+          <a:bodyPr xmlns:a="http://schemas.openxmlformats.org/drawingml/2006/main" anchor="ctr"/>
+          <a:lstStyle xmlns:a="http://schemas.openxmlformats.org/drawingml/2006/main"/>
+          <a:p xmlns:a="http://schemas.openxmlformats.org/drawingml/2006/main">
+            <a:pPr algn="l">
+              <a:defRPr sz="2700" b="1">
+                <a:solidFill>
+                  <a:srgbClr val="FFFDF8"/>
+                </a:solidFill>
+              </a:defRPr>
+            </a:pPr>
+            <a:r>
+              <a:rPr sz="2700" b="1">
+                <a:solidFill>
+                  <a:srgbClr val="FFFDF8"/>
+                </a:solidFill>
+              </a:rPr>
+              <a:t>合作真实性证据</a:t>
+            </a:r>
+          </a:p>
+          <a:p xmlns:a="http://schemas.openxmlformats.org/drawingml/2006/main">
+            <a:pPr algn="l">
+              <a:defRPr sz="2700" b="1">
+                <a:solidFill>
+                  <a:srgbClr val="FFFDF8"/>
+                </a:solidFill>
+              </a:defRPr>
+            </a:pPr>
+            <a:r>
+              <a:rPr sz="2700" b="1">
+                <a:solidFill>
+                  <a:srgbClr val="FFFDF8"/>
+                </a:solidFill>
+              </a:rPr>
+              <a:t>仍不充分</a:t>
+            </a:r>
+          </a:p>
+        </p:txBody>
+      </p:sp>
+      <p:sp>
+        <p:nvSpPr>
+          <p:cNvPr id="15" name="risk-summary">
+            <a:extLst xmlns:a="http://schemas.openxmlformats.org/drawingml/2006/main">
+              <a:ext uri="{FF2B5EF4-FFF2-40B4-BE49-F238E27FC236}">
+                <a16:creationId xmlns:a16="http://schemas.microsoft.com/office/drawing/2014/main" id="{3EC06C23-261A-4EE7-BCE7-803C0D877828}"/>
+              </a:ext>
+            </a:extLst>
+          </p:cNvPr>
+          <p:cNvSpPr>
+            <a:spLocks xmlns:a="http://schemas.openxmlformats.org/drawingml/2006/main" noGrp="1"/>
+          </p:cNvSpPr>
+          <p:nvPr/>
+        </p:nvSpPr>
+        <p:spPr>
+          <a:xfrm xmlns:a="http://schemas.openxmlformats.org/drawingml/2006/main">
+            <a:off x="904875" y="4476750"/>
+            <a:ext cx="5143500" cy="666750"/>
+          </a:xfrm>
+          <a:prstGeom xmlns:a="http://schemas.openxmlformats.org/drawingml/2006/main" prst="rect">
+            <a:avLst/>
+          </a:prstGeom>
+          <a:noFill xmlns:a="http://schemas.openxmlformats.org/drawingml/2006/main"/>
+          <a:ln xmlns:a="http://schemas.openxmlformats.org/drawingml/2006/main" w="0">
+            <a:noFill/>
+            <a:prstDash val="solid"/>
+          </a:ln>
+        </p:spPr>
+        <p:txBody>
+          <a:bodyPr xmlns:a="http://schemas.openxmlformats.org/drawingml/2006/main" anchor="ctr"/>
+          <a:lstStyle xmlns:a="http://schemas.openxmlformats.org/drawingml/2006/main"/>
+          <a:p xmlns:a="http://schemas.openxmlformats.org/drawingml/2006/main">
+            <a:pPr algn="l">
+              <a:defRPr sz="1125" b="0">
+                <a:solidFill>
+                  <a:srgbClr val="F4D9CF"/>
+                </a:solidFill>
+              </a:defRPr>
+            </a:pPr>
+            <a:r>
+              <a:rPr sz="1125" b="0">
+                <a:solidFill>
+                  <a:srgbClr val="F4D9CF"/>
+                </a:solidFill>
+              </a:rPr>
+              <a:t>重要风险判断应独立成页或进入显著风险模块，不能埋在正文说明中。</a:t>
+            </a:r>
+          </a:p>
+        </p:txBody>
+      </p:sp>
+      <p:sp>
+        <p:nvSpPr>
+          <p:cNvPr id="16" name="risk-side-0">
+            <a:extLst xmlns:a="http://schemas.openxmlformats.org/drawingml/2006/main">
+              <a:ext uri="{FF2B5EF4-FFF2-40B4-BE49-F238E27FC236}">
+                <a16:creationId xmlns:a16="http://schemas.microsoft.com/office/drawing/2014/main" id="{F857CD3C-29D4-4540-90A4-C8A91456ADBD}"/>
+              </a:ext>
+            </a:extLst>
+          </p:cNvPr>
+          <p:cNvSpPr>
+            <a:spLocks xmlns:a="http://schemas.openxmlformats.org/drawingml/2006/main" noGrp="1"/>
+          </p:cNvSpPr>
+          <p:nvPr/>
+        </p:nvSpPr>
+        <p:spPr>
+          <a:xfrm xmlns:a="http://schemas.openxmlformats.org/drawingml/2006/main">
+            <a:off x="7191375" y="1809750"/>
+            <a:ext cx="4429125" cy="1123950"/>
+          </a:xfrm>
+          <a:prstGeom xmlns:a="http://schemas.openxmlformats.org/drawingml/2006/main" prst="rect">
+            <a:avLst/>
+          </a:prstGeom>
+          <a:solidFill xmlns:a="http://schemas.openxmlformats.org/drawingml/2006/main">
+            <a:srgbClr val="FFFDF8"/>
+          </a:solidFill>
+          <a:ln xmlns:a="http://schemas.openxmlformats.org/drawingml/2006/main" w="9525">
+            <a:solidFill>
+              <a:srgbClr val="CBD3CE"/>
+            </a:solidFill>
+            <a:prstDash val="solid"/>
+          </a:ln>
+        </p:spPr>
+      </p:sp>
+      <p:sp>
+        <p:nvSpPr>
+          <p:cNvPr id="17" name="risk-side-accent-0">
+            <a:extLst xmlns:a="http://schemas.openxmlformats.org/drawingml/2006/main">
+              <a:ext uri="{FF2B5EF4-FFF2-40B4-BE49-F238E27FC236}">
+                <a16:creationId xmlns:a16="http://schemas.microsoft.com/office/drawing/2014/main" id="{E7B00877-163F-46DD-BC01-C256A7D1C4E2}"/>
+              </a:ext>
+            </a:extLst>
+          </p:cNvPr>
+          <p:cNvSpPr>
+            <a:spLocks xmlns:a="http://schemas.openxmlformats.org/drawingml/2006/main" noGrp="1"/>
+          </p:cNvSpPr>
+          <p:nvPr/>
+        </p:nvSpPr>
+        <p:spPr>
+          <a:xfrm xmlns:a="http://schemas.openxmlformats.org/drawingml/2006/main">
+            <a:off x="7191375" y="1809750"/>
+            <a:ext cx="57150" cy="1123950"/>
+          </a:xfrm>
+          <a:prstGeom xmlns:a="http://schemas.openxmlformats.org/drawingml/2006/main" prst="rect">
+            <a:avLst/>
+          </a:prstGeom>
+          <a:solidFill xmlns:a="http://schemas.openxmlformats.org/drawingml/2006/main">
+            <a:srgbClr val="1C7866"/>
+          </a:solidFill>
+          <a:ln xmlns:a="http://schemas.openxmlformats.org/drawingml/2006/main" w="0">
+            <a:noFill/>
+            <a:prstDash val="solid"/>
+          </a:ln>
+        </p:spPr>
+      </p:sp>
+      <p:sp>
+        <p:nvSpPr>
+          <p:cNvPr id="18" name="risk-side-label-0">
+            <a:extLst xmlns:a="http://schemas.openxmlformats.org/drawingml/2006/main">
+              <a:ext uri="{FF2B5EF4-FFF2-40B4-BE49-F238E27FC236}">
+                <a16:creationId xmlns:a16="http://schemas.microsoft.com/office/drawing/2014/main" id="{57D6E522-5DEA-4AD2-87C9-3F75094D543E}"/>
+              </a:ext>
+            </a:extLst>
+          </p:cNvPr>
+          <p:cNvSpPr>
+            <a:spLocks xmlns:a="http://schemas.openxmlformats.org/drawingml/2006/main" noGrp="1"/>
+          </p:cNvSpPr>
+          <p:nvPr/>
+        </p:nvSpPr>
+        <p:spPr>
+          <a:xfrm xmlns:a="http://schemas.openxmlformats.org/drawingml/2006/main">
+            <a:off x="7477125" y="1981200"/>
+            <a:ext cx="1428750" cy="238125"/>
+          </a:xfrm>
+          <a:prstGeom xmlns:a="http://schemas.openxmlformats.org/drawingml/2006/main" prst="rect">
+            <a:avLst/>
+          </a:prstGeom>
+          <a:noFill xmlns:a="http://schemas.openxmlformats.org/drawingml/2006/main"/>
+          <a:ln xmlns:a="http://schemas.openxmlformats.org/drawingml/2006/main" w="0">
+            <a:noFill/>
+            <a:prstDash val="solid"/>
+          </a:ln>
+        </p:spPr>
+        <p:txBody>
+          <a:bodyPr xmlns:a="http://schemas.openxmlformats.org/drawingml/2006/main" anchor="ctr"/>
+          <a:lstStyle xmlns:a="http://schemas.openxmlformats.org/drawingml/2006/main"/>
+          <a:p xmlns:a="http://schemas.openxmlformats.org/drawingml/2006/main">
+            <a:pPr algn="l">
+              <a:defRPr sz="900" b="1">
+                <a:solidFill>
+                  <a:srgbClr val="1C7866"/>
+                </a:solidFill>
+              </a:defRPr>
+            </a:pPr>
+            <a:r>
+              <a:rPr sz="900" b="1">
+                <a:solidFill>
+                  <a:srgbClr val="1C7866"/>
+                </a:solidFill>
+              </a:rPr>
+              <a:t>判断依据</a:t>
+            </a:r>
+          </a:p>
+        </p:txBody>
+      </p:sp>
+      <p:sp>
+        <p:nvSpPr>
+          <p:cNvPr id="19" name="risk-side-value-0">
+            <a:extLst xmlns:a="http://schemas.openxmlformats.org/drawingml/2006/main">
+              <a:ext uri="{FF2B5EF4-FFF2-40B4-BE49-F238E27FC236}">
+                <a16:creationId xmlns:a16="http://schemas.microsoft.com/office/drawing/2014/main" id="{7482CA1B-C01E-4F30-AB1F-814DB94886F1}"/>
+              </a:ext>
+            </a:extLst>
+          </p:cNvPr>
+          <p:cNvSpPr>
+            <a:spLocks xmlns:a="http://schemas.openxmlformats.org/drawingml/2006/main" noGrp="1"/>
+          </p:cNvSpPr>
+          <p:nvPr/>
+        </p:nvSpPr>
+        <p:spPr>
+          <a:xfrm xmlns:a="http://schemas.openxmlformats.org/drawingml/2006/main">
+            <a:off x="7477125" y="2295525"/>
+            <a:ext cx="3714750" cy="428625"/>
+          </a:xfrm>
+          <a:prstGeom xmlns:a="http://schemas.openxmlformats.org/drawingml/2006/main" prst="rect">
+            <a:avLst/>
+          </a:prstGeom>
+          <a:noFill xmlns:a="http://schemas.openxmlformats.org/drawingml/2006/main"/>
+          <a:ln xmlns:a="http://schemas.openxmlformats.org/drawingml/2006/main" w="0">
+            <a:noFill/>
+            <a:prstDash val="solid"/>
+          </a:ln>
+        </p:spPr>
+        <p:txBody>
+          <a:bodyPr xmlns:a="http://schemas.openxmlformats.org/drawingml/2006/main" anchor="ctr"/>
+          <a:lstStyle xmlns:a="http://schemas.openxmlformats.org/drawingml/2006/main"/>
+          <a:p xmlns:a="http://schemas.openxmlformats.org/drawingml/2006/main">
+            <a:pPr algn="l">
+              <a:defRPr sz="1425" b="1">
+                <a:solidFill>
+                  <a:srgbClr val="162A24"/>
+                </a:solidFill>
+              </a:defRPr>
+            </a:pPr>
+            <a:r>
+              <a:rPr sz="1425" b="1">
+                <a:solidFill>
+                  <a:srgbClr val="162A24"/>
+                </a:solidFill>
+              </a:rPr>
+              <a:t>目前仅有意向材料</a:t>
+            </a:r>
+          </a:p>
+        </p:txBody>
+      </p:sp>
+      <p:sp>
+        <p:nvSpPr>
+          <p:cNvPr id="20" name="risk-side-1">
+            <a:extLst xmlns:a="http://schemas.openxmlformats.org/drawingml/2006/main">
+              <a:ext uri="{FF2B5EF4-FFF2-40B4-BE49-F238E27FC236}">
+                <a16:creationId xmlns:a16="http://schemas.microsoft.com/office/drawing/2014/main" id="{903FD6EB-3415-4088-AC9D-844C547BCF95}"/>
+              </a:ext>
+            </a:extLst>
+          </p:cNvPr>
+          <p:cNvSpPr>
+            <a:spLocks xmlns:a="http://schemas.openxmlformats.org/drawingml/2006/main" noGrp="1"/>
+          </p:cNvSpPr>
+          <p:nvPr/>
+        </p:nvSpPr>
+        <p:spPr>
+          <a:xfrm xmlns:a="http://schemas.openxmlformats.org/drawingml/2006/main">
+            <a:off x="7191375" y="3105150"/>
+            <a:ext cx="4429125" cy="1123950"/>
+          </a:xfrm>
+          <a:prstGeom xmlns:a="http://schemas.openxmlformats.org/drawingml/2006/main" prst="rect">
+            <a:avLst/>
+          </a:prstGeom>
+          <a:solidFill xmlns:a="http://schemas.openxmlformats.org/drawingml/2006/main">
+            <a:srgbClr val="FFFDF8"/>
+          </a:solidFill>
+          <a:ln xmlns:a="http://schemas.openxmlformats.org/drawingml/2006/main" w="9525">
+            <a:solidFill>
+              <a:srgbClr val="CBD3CE"/>
+            </a:solidFill>
+            <a:prstDash val="solid"/>
+          </a:ln>
+        </p:spPr>
+      </p:sp>
+      <p:sp>
+        <p:nvSpPr>
+          <p:cNvPr id="21" name="risk-side-accent-1">
+            <a:extLst xmlns:a="http://schemas.openxmlformats.org/drawingml/2006/main">
+              <a:ext uri="{FF2B5EF4-FFF2-40B4-BE49-F238E27FC236}">
+                <a16:creationId xmlns:a16="http://schemas.microsoft.com/office/drawing/2014/main" id="{5155C2C9-BF86-4C89-AB11-8A26E7612B6D}"/>
+              </a:ext>
+            </a:extLst>
+          </p:cNvPr>
+          <p:cNvSpPr>
+            <a:spLocks xmlns:a="http://schemas.openxmlformats.org/drawingml/2006/main" noGrp="1"/>
+          </p:cNvSpPr>
+          <p:nvPr/>
+        </p:nvSpPr>
+        <p:spPr>
+          <a:xfrm xmlns:a="http://schemas.openxmlformats.org/drawingml/2006/main">
+            <a:off x="7191375" y="3105150"/>
+            <a:ext cx="57150" cy="1123950"/>
+          </a:xfrm>
+          <a:prstGeom xmlns:a="http://schemas.openxmlformats.org/drawingml/2006/main" prst="rect">
+            <a:avLst/>
+          </a:prstGeom>
+          <a:solidFill xmlns:a="http://schemas.openxmlformats.org/drawingml/2006/main">
+            <a:srgbClr val="BC794D"/>
+          </a:solidFill>
+          <a:ln xmlns:a="http://schemas.openxmlformats.org/drawingml/2006/main" w="0">
+            <a:noFill/>
+            <a:prstDash val="solid"/>
+          </a:ln>
+        </p:spPr>
+      </p:sp>
+      <p:sp>
+        <p:nvSpPr>
+          <p:cNvPr id="22" name="risk-side-label-1">
+            <a:extLst xmlns:a="http://schemas.openxmlformats.org/drawingml/2006/main">
+              <a:ext uri="{FF2B5EF4-FFF2-40B4-BE49-F238E27FC236}">
+                <a16:creationId xmlns:a16="http://schemas.microsoft.com/office/drawing/2014/main" id="{10965863-9873-46AA-9ADB-00FB3FD37F98}"/>
+              </a:ext>
+            </a:extLst>
+          </p:cNvPr>
+          <p:cNvSpPr>
+            <a:spLocks xmlns:a="http://schemas.openxmlformats.org/drawingml/2006/main" noGrp="1"/>
+          </p:cNvSpPr>
+          <p:nvPr/>
+        </p:nvSpPr>
+        <p:spPr>
+          <a:xfrm xmlns:a="http://schemas.openxmlformats.org/drawingml/2006/main">
+            <a:off x="7477125" y="3276600"/>
+            <a:ext cx="1428750" cy="238125"/>
+          </a:xfrm>
+          <a:prstGeom xmlns:a="http://schemas.openxmlformats.org/drawingml/2006/main" prst="rect">
+            <a:avLst/>
+          </a:prstGeom>
+          <a:noFill xmlns:a="http://schemas.openxmlformats.org/drawingml/2006/main"/>
+          <a:ln xmlns:a="http://schemas.openxmlformats.org/drawingml/2006/main" w="0">
+            <a:noFill/>
+            <a:prstDash val="solid"/>
+          </a:ln>
+        </p:spPr>
+        <p:txBody>
+          <a:bodyPr xmlns:a="http://schemas.openxmlformats.org/drawingml/2006/main" anchor="ctr"/>
+          <a:lstStyle xmlns:a="http://schemas.openxmlformats.org/drawingml/2006/main"/>
+          <a:p xmlns:a="http://schemas.openxmlformats.org/drawingml/2006/main">
+            <a:pPr algn="l">
+              <a:defRPr sz="900" b="1">
+                <a:solidFill>
+                  <a:srgbClr val="BC794D"/>
+                </a:solidFill>
+              </a:defRPr>
+            </a:pPr>
+            <a:r>
+              <a:rPr sz="900" b="1">
+                <a:solidFill>
+                  <a:srgbClr val="BC794D"/>
+                </a:solidFill>
+              </a:rPr>
+              <a:t>可能影响</a:t>
+            </a:r>
+          </a:p>
+        </p:txBody>
+      </p:sp>
+      <p:sp>
+        <p:nvSpPr>
+          <p:cNvPr id="23" name="risk-side-value-1">
+            <a:extLst xmlns:a="http://schemas.openxmlformats.org/drawingml/2006/main">
+              <a:ext uri="{FF2B5EF4-FFF2-40B4-BE49-F238E27FC236}">
+                <a16:creationId xmlns:a16="http://schemas.microsoft.com/office/drawing/2014/main" id="{A8F54D48-40A7-4F2D-9293-ABEA8BEE682C}"/>
+              </a:ext>
+            </a:extLst>
+          </p:cNvPr>
+          <p:cNvSpPr>
+            <a:spLocks xmlns:a="http://schemas.openxmlformats.org/drawingml/2006/main" noGrp="1"/>
+          </p:cNvSpPr>
+          <p:nvPr/>
+        </p:nvSpPr>
+        <p:spPr>
+          <a:xfrm xmlns:a="http://schemas.openxmlformats.org/drawingml/2006/main">
+            <a:off x="7477125" y="3590925"/>
+            <a:ext cx="3714750" cy="428625"/>
+          </a:xfrm>
+          <a:prstGeom xmlns:a="http://schemas.openxmlformats.org/drawingml/2006/main" prst="rect">
+            <a:avLst/>
+          </a:prstGeom>
+          <a:noFill xmlns:a="http://schemas.openxmlformats.org/drawingml/2006/main"/>
+          <a:ln xmlns:a="http://schemas.openxmlformats.org/drawingml/2006/main" w="0">
+            <a:noFill/>
+            <a:prstDash val="solid"/>
+          </a:ln>
+        </p:spPr>
+        <p:txBody>
+          <a:bodyPr xmlns:a="http://schemas.openxmlformats.org/drawingml/2006/main" anchor="ctr"/>
+          <a:lstStyle xmlns:a="http://schemas.openxmlformats.org/drawingml/2006/main"/>
+          <a:p xmlns:a="http://schemas.openxmlformats.org/drawingml/2006/main">
+            <a:pPr algn="l">
+              <a:defRPr sz="1425" b="1">
+                <a:solidFill>
+                  <a:srgbClr val="162A24"/>
+                </a:solidFill>
+              </a:defRPr>
+            </a:pPr>
+            <a:r>
+              <a:rPr sz="1425" b="1">
+                <a:solidFill>
+                  <a:srgbClr val="162A24"/>
+                </a:solidFill>
+              </a:rPr>
+              <a:t>影响监管真实性审核</a:t>
+            </a:r>
+          </a:p>
+        </p:txBody>
+      </p:sp>
+      <p:sp>
+        <p:nvSpPr>
+          <p:cNvPr id="24" name="risk-side-2">
+            <a:extLst xmlns:a="http://schemas.openxmlformats.org/drawingml/2006/main">
+              <a:ext uri="{FF2B5EF4-FFF2-40B4-BE49-F238E27FC236}">
+                <a16:creationId xmlns:a16="http://schemas.microsoft.com/office/drawing/2014/main" id="{42F090E9-E124-4E51-A499-C7A21BF63F4E}"/>
+              </a:ext>
+            </a:extLst>
+          </p:cNvPr>
+          <p:cNvSpPr>
+            <a:spLocks xmlns:a="http://schemas.openxmlformats.org/drawingml/2006/main" noGrp="1"/>
+          </p:cNvSpPr>
+          <p:nvPr/>
+        </p:nvSpPr>
+        <p:spPr>
+          <a:xfrm xmlns:a="http://schemas.openxmlformats.org/drawingml/2006/main">
+            <a:off x="7191375" y="4400550"/>
+            <a:ext cx="4429125" cy="1123950"/>
+          </a:xfrm>
+          <a:prstGeom xmlns:a="http://schemas.openxmlformats.org/drawingml/2006/main" prst="rect">
+            <a:avLst/>
+          </a:prstGeom>
+          <a:solidFill xmlns:a="http://schemas.openxmlformats.org/drawingml/2006/main">
+            <a:srgbClr val="FFFDF8"/>
+          </a:solidFill>
+          <a:ln xmlns:a="http://schemas.openxmlformats.org/drawingml/2006/main" w="9525">
+            <a:solidFill>
+              <a:srgbClr val="CBD3CE"/>
+            </a:solidFill>
+            <a:prstDash val="solid"/>
+          </a:ln>
+        </p:spPr>
+      </p:sp>
+      <p:sp>
+        <p:nvSpPr>
+          <p:cNvPr id="25" name="risk-side-accent-2">
+            <a:extLst xmlns:a="http://schemas.openxmlformats.org/drawingml/2006/main">
+              <a:ext uri="{FF2B5EF4-FFF2-40B4-BE49-F238E27FC236}">
+                <a16:creationId xmlns:a16="http://schemas.microsoft.com/office/drawing/2014/main" id="{C8475C4B-68B3-43D3-BA55-8A6E1F5DE0F8}"/>
+              </a:ext>
+            </a:extLst>
+          </p:cNvPr>
+          <p:cNvSpPr>
+            <a:spLocks xmlns:a="http://schemas.openxmlformats.org/drawingml/2006/main" noGrp="1"/>
+          </p:cNvSpPr>
+          <p:nvPr/>
+        </p:nvSpPr>
+        <p:spPr>
+          <a:xfrm xmlns:a="http://schemas.openxmlformats.org/drawingml/2006/main">
+            <a:off x="7191375" y="4400550"/>
+            <a:ext cx="57150" cy="1123950"/>
+          </a:xfrm>
+          <a:prstGeom xmlns:a="http://schemas.openxmlformats.org/drawingml/2006/main" prst="rect">
+            <a:avLst/>
+          </a:prstGeom>
+          <a:solidFill xmlns:a="http://schemas.openxmlformats.org/drawingml/2006/main">
+            <a:srgbClr val="547E89"/>
+          </a:solidFill>
+          <a:ln xmlns:a="http://schemas.openxmlformats.org/drawingml/2006/main" w="0">
+            <a:noFill/>
+            <a:prstDash val="solid"/>
+          </a:ln>
+        </p:spPr>
+      </p:sp>
+      <p:sp>
+        <p:nvSpPr>
+          <p:cNvPr id="26" name="risk-side-label-2">
+            <a:extLst xmlns:a="http://schemas.openxmlformats.org/drawingml/2006/main">
+              <a:ext uri="{FF2B5EF4-FFF2-40B4-BE49-F238E27FC236}">
+                <a16:creationId xmlns:a16="http://schemas.microsoft.com/office/drawing/2014/main" id="{B2E37772-1ABE-4543-B429-10D0C76B6315}"/>
+              </a:ext>
+            </a:extLst>
+          </p:cNvPr>
+          <p:cNvSpPr>
+            <a:spLocks xmlns:a="http://schemas.openxmlformats.org/drawingml/2006/main" noGrp="1"/>
+          </p:cNvSpPr>
+          <p:nvPr/>
+        </p:nvSpPr>
+        <p:spPr>
+          <a:xfrm xmlns:a="http://schemas.openxmlformats.org/drawingml/2006/main">
+            <a:off x="7477125" y="4572000"/>
+            <a:ext cx="1428750" cy="238125"/>
+          </a:xfrm>
+          <a:prstGeom xmlns:a="http://schemas.openxmlformats.org/drawingml/2006/main" prst="rect">
+            <a:avLst/>
+          </a:prstGeom>
+          <a:noFill xmlns:a="http://schemas.openxmlformats.org/drawingml/2006/main"/>
+          <a:ln xmlns:a="http://schemas.openxmlformats.org/drawingml/2006/main" w="0">
+            <a:noFill/>
+            <a:prstDash val="solid"/>
+          </a:ln>
+        </p:spPr>
+        <p:txBody>
+          <a:bodyPr xmlns:a="http://schemas.openxmlformats.org/drawingml/2006/main" anchor="ctr"/>
+          <a:lstStyle xmlns:a="http://schemas.openxmlformats.org/drawingml/2006/main"/>
+          <a:p xmlns:a="http://schemas.openxmlformats.org/drawingml/2006/main">
+            <a:pPr algn="l">
+              <a:defRPr sz="900" b="1">
+                <a:solidFill>
+                  <a:srgbClr val="547E89"/>
+                </a:solidFill>
+              </a:defRPr>
+            </a:pPr>
+            <a:r>
+              <a:rPr sz="900" b="1">
+                <a:solidFill>
+                  <a:srgbClr val="547E89"/>
+                </a:solidFill>
+              </a:rPr>
+              <a:t>需要推动</a:t>
+            </a:r>
+          </a:p>
+        </p:txBody>
+      </p:sp>
+      <p:sp>
+        <p:nvSpPr>
+          <p:cNvPr id="27" name="risk-side-value-2">
+            <a:extLst xmlns:a="http://schemas.openxmlformats.org/drawingml/2006/main">
+              <a:ext uri="{FF2B5EF4-FFF2-40B4-BE49-F238E27FC236}">
+                <a16:creationId xmlns:a16="http://schemas.microsoft.com/office/drawing/2014/main" id="{786135F2-51D9-400B-848A-A78878119231}"/>
+              </a:ext>
+            </a:extLst>
+          </p:cNvPr>
+          <p:cNvSpPr>
+            <a:spLocks xmlns:a="http://schemas.openxmlformats.org/drawingml/2006/main" noGrp="1"/>
+          </p:cNvSpPr>
+          <p:nvPr/>
+        </p:nvSpPr>
+        <p:spPr>
+          <a:xfrm xmlns:a="http://schemas.openxmlformats.org/drawingml/2006/main">
+            <a:off x="7477125" y="4886325"/>
+            <a:ext cx="3714750" cy="428625"/>
+          </a:xfrm>
+          <a:prstGeom xmlns:a="http://schemas.openxmlformats.org/drawingml/2006/main" prst="rect">
+            <a:avLst/>
+          </a:prstGeom>
+          <a:noFill xmlns:a="http://schemas.openxmlformats.org/drawingml/2006/main"/>
+          <a:ln xmlns:a="http://schemas.openxmlformats.org/drawingml/2006/main" w="0">
+            <a:noFill/>
+            <a:prstDash val="solid"/>
+          </a:ln>
+        </p:spPr>
+        <p:txBody>
+          <a:bodyPr xmlns:a="http://schemas.openxmlformats.org/drawingml/2006/main" anchor="ctr"/>
+          <a:lstStyle xmlns:a="http://schemas.openxmlformats.org/drawingml/2006/main"/>
+          <a:p xmlns:a="http://schemas.openxmlformats.org/drawingml/2006/main">
+            <a:pPr algn="l">
+              <a:defRPr sz="1425" b="1">
+                <a:solidFill>
+                  <a:srgbClr val="162A24"/>
+                </a:solidFill>
+              </a:defRPr>
+            </a:pPr>
+            <a:r>
+              <a:rPr sz="1425" b="1">
+                <a:solidFill>
+                  <a:srgbClr val="162A24"/>
+                </a:solidFill>
+              </a:rPr>
+              <a:t>尽快签署正式协议</a:t>
+            </a:r>
+          </a:p>
+        </p:txBody>
+      </p:sp>
+    </p:spTree>
+    <p:extLst>
+      <p:ext uri="{BB962C8B-B14F-4D97-AF65-F5344CB8AC3E}">
+        <p14:creationId xmlns:p14="http://schemas.microsoft.com/office/powerpoint/2010/main" val="518096780"/>
+      </p:ext>
+    </p:extLst>
+  </p:cSld>
+</p:sld>
+</file>
+
+<file path=ppt/slides/slide16.xml><?xml version="1.0" encoding="utf-8"?>
+<p:sld xmlns:p="http://schemas.openxmlformats.org/presentationml/2006/main">
+  <p:cSld>
+    <p:bg>
+      <p:bgPr>
+        <a:solidFill xmlns:a="http://schemas.openxmlformats.org/drawingml/2006/main">
+          <a:srgbClr val="F5F0E6"/>
+        </a:solidFill>
+      </p:bgPr>
+    </p:bg>
+    <p:spTree>
+      <p:nvGrpSpPr>
+        <p:cNvPr id="1" name=""/>
+        <p:cNvGrpSpPr/>
+        <p:nvPr/>
+      </p:nvGrpSpPr>
+      <p:grpSpPr>
+        <a:xfrm xmlns:a="http://schemas.openxmlformats.org/drawingml/2006/main"/>
+      </p:grpSpPr>
+      <p:sp>
+        <p:nvSpPr>
+          <p:cNvPr id="31" name="rule-60-45">
+            <a:extLst xmlns:a="http://schemas.openxmlformats.org/drawingml/2006/main">
+              <a:ext uri="{FF2B5EF4-FFF2-40B4-BE49-F238E27FC236}">
+                <a16:creationId xmlns:a16="http://schemas.microsoft.com/office/drawing/2014/main" id="{5CE59334-257A-425C-AE8F-79466E49E780}"/>
+              </a:ext>
+            </a:extLst>
+          </p:cNvPr>
+          <p:cNvSpPr>
+            <a:spLocks xmlns:a="http://schemas.openxmlformats.org/drawingml/2006/main" noGrp="1"/>
+          </p:cNvSpPr>
+          <p:nvPr/>
+        </p:nvSpPr>
+        <p:spPr>
+          <a:xfrm xmlns:a="http://schemas.openxmlformats.org/drawingml/2006/main">
+            <a:off x="571500" y="428625"/>
+            <a:ext cx="11049000" cy="9525"/>
+          </a:xfrm>
+          <a:prstGeom xmlns:a="http://schemas.openxmlformats.org/drawingml/2006/main" prst="rect">
+            <a:avLst/>
+          </a:prstGeom>
+          <a:solidFill xmlns:a="http://schemas.openxmlformats.org/drawingml/2006/main">
+            <a:srgbClr val="CBD3CE"/>
+          </a:solidFill>
+          <a:ln xmlns:a="http://schemas.openxmlformats.org/drawingml/2006/main" w="0">
+            <a:noFill/>
+            <a:prstDash val="solid"/>
+          </a:ln>
+        </p:spPr>
+      </p:sp>
+      <p:sp>
+        <p:nvSpPr>
+          <p:cNvPr id="2" name="chapter-accent">
+            <a:extLst xmlns:a="http://schemas.openxmlformats.org/drawingml/2006/main">
+              <a:ext uri="{FF2B5EF4-FFF2-40B4-BE49-F238E27FC236}">
+                <a16:creationId xmlns:a16="http://schemas.microsoft.com/office/drawing/2014/main" id="{91F1A488-3838-4474-8FC3-00892636C27D}"/>
+              </a:ext>
+            </a:extLst>
+          </p:cNvPr>
+          <p:cNvSpPr>
+            <a:spLocks xmlns:a="http://schemas.openxmlformats.org/drawingml/2006/main" noGrp="1"/>
+          </p:cNvSpPr>
+          <p:nvPr/>
+        </p:nvSpPr>
+        <p:spPr>
+          <a:xfrm xmlns:a="http://schemas.openxmlformats.org/drawingml/2006/main">
+            <a:off x="571500" y="266700"/>
+            <a:ext cx="266700" cy="28575"/>
+          </a:xfrm>
+          <a:prstGeom xmlns:a="http://schemas.openxmlformats.org/drawingml/2006/main" prst="rect">
+            <a:avLst/>
+          </a:prstGeom>
+          <a:solidFill xmlns:a="http://schemas.openxmlformats.org/drawingml/2006/main">
+            <a:srgbClr val="BC794D"/>
+          </a:solidFill>
+          <a:ln xmlns:a="http://schemas.openxmlformats.org/drawingml/2006/main" w="0">
+            <a:noFill/>
+            <a:prstDash val="solid"/>
+          </a:ln>
+        </p:spPr>
+      </p:sp>
+      <p:sp>
+        <p:nvSpPr>
+          <p:cNvPr id="3" name="chapter">
+            <a:extLst xmlns:a="http://schemas.openxmlformats.org/drawingml/2006/main">
+              <a:ext uri="{FF2B5EF4-FFF2-40B4-BE49-F238E27FC236}">
+                <a16:creationId xmlns:a16="http://schemas.microsoft.com/office/drawing/2014/main" id="{96A894BD-CA03-4AD6-BC5E-DB034FD2CC30}"/>
+              </a:ext>
+            </a:extLst>
+          </p:cNvPr>
+          <p:cNvSpPr>
+            <a:spLocks xmlns:a="http://schemas.openxmlformats.org/drawingml/2006/main" noGrp="1"/>
+          </p:cNvSpPr>
+          <p:nvPr/>
+        </p:nvSpPr>
+        <p:spPr>
+          <a:xfrm xmlns:a="http://schemas.openxmlformats.org/drawingml/2006/main">
+            <a:off x="933450" y="171450"/>
+            <a:ext cx="3048000" cy="247650"/>
+          </a:xfrm>
+          <a:prstGeom xmlns:a="http://schemas.openxmlformats.org/drawingml/2006/main" prst="rect">
+            <a:avLst/>
+          </a:prstGeom>
+          <a:noFill xmlns:a="http://schemas.openxmlformats.org/drawingml/2006/main"/>
+          <a:ln xmlns:a="http://schemas.openxmlformats.org/drawingml/2006/main" w="0">
+            <a:noFill/>
+            <a:prstDash val="solid"/>
+          </a:ln>
+        </p:spPr>
+        <p:txBody>
+          <a:bodyPr xmlns:a="http://schemas.openxmlformats.org/drawingml/2006/main" anchor="ctr"/>
+          <a:lstStyle xmlns:a="http://schemas.openxmlformats.org/drawingml/2006/main"/>
+          <a:p xmlns:a="http://schemas.openxmlformats.org/drawingml/2006/main">
+            <a:pPr algn="l">
+              <a:defRPr sz="900" b="1">
+                <a:solidFill>
+                  <a:srgbClr val="1C7866"/>
+                </a:solidFill>
+              </a:defRPr>
+            </a:pPr>
+            <a:r>
+              <a:rPr sz="900" b="1">
+                <a:solidFill>
+                  <a:srgbClr val="1C7866"/>
+                </a:solidFill>
+              </a:rPr>
+              <a:t>资本与决策</a:t>
+            </a:r>
+          </a:p>
+        </p:txBody>
+      </p:sp>
+      <p:sp>
+        <p:nvSpPr>
+          <p:cNvPr id="4" name="page-number">
+            <a:extLst xmlns:a="http://schemas.openxmlformats.org/drawingml/2006/main">
+              <a:ext uri="{FF2B5EF4-FFF2-40B4-BE49-F238E27FC236}">
+                <a16:creationId xmlns:a16="http://schemas.microsoft.com/office/drawing/2014/main" id="{54A254F0-2435-491F-A70A-DB2121DCA147}"/>
+              </a:ext>
+            </a:extLst>
+          </p:cNvPr>
+          <p:cNvSpPr>
+            <a:spLocks xmlns:a="http://schemas.openxmlformats.org/drawingml/2006/main" noGrp="1"/>
+          </p:cNvSpPr>
+          <p:nvPr/>
+        </p:nvSpPr>
+        <p:spPr>
+          <a:xfrm xmlns:a="http://schemas.openxmlformats.org/drawingml/2006/main">
+            <a:off x="11163300" y="171450"/>
+            <a:ext cx="457200" cy="247650"/>
+          </a:xfrm>
+          <a:prstGeom xmlns:a="http://schemas.openxmlformats.org/drawingml/2006/main" prst="rect">
+            <a:avLst/>
+          </a:prstGeom>
+          <a:noFill xmlns:a="http://schemas.openxmlformats.org/drawingml/2006/main"/>
+          <a:ln xmlns:a="http://schemas.openxmlformats.org/drawingml/2006/main" w="0">
+            <a:noFill/>
+            <a:prstDash val="solid"/>
+          </a:ln>
+        </p:spPr>
+        <p:txBody>
+          <a:bodyPr xmlns:a="http://schemas.openxmlformats.org/drawingml/2006/main" anchor="ctr"/>
+          <a:lstStyle xmlns:a="http://schemas.openxmlformats.org/drawingml/2006/main"/>
+          <a:p xmlns:a="http://schemas.openxmlformats.org/drawingml/2006/main">
+            <a:pPr algn="r">
+              <a:defRPr sz="825" b="1">
+                <a:solidFill>
+                  <a:srgbClr val="69766F"/>
+                </a:solidFill>
+              </a:defRPr>
+            </a:pPr>
+            <a:r>
+              <a:rPr sz="825" b="1">
+                <a:solidFill>
+                  <a:srgbClr val="69766F"/>
+                </a:solidFill>
+              </a:rPr>
+              <a:t>16</a:t>
+            </a:r>
+          </a:p>
+        </p:txBody>
+      </p:sp>
+      <p:sp>
+        <p:nvSpPr>
+          <p:cNvPr id="5" name="rule-60-674">
+            <a:extLst xmlns:a="http://schemas.openxmlformats.org/drawingml/2006/main">
+              <a:ext uri="{FF2B5EF4-FFF2-40B4-BE49-F238E27FC236}">
+                <a16:creationId xmlns:a16="http://schemas.microsoft.com/office/drawing/2014/main" id="{22F949DE-9729-4D0D-9B69-4BFD78430764}"/>
+              </a:ext>
+            </a:extLst>
+          </p:cNvPr>
+          <p:cNvSpPr>
+            <a:spLocks xmlns:a="http://schemas.openxmlformats.org/drawingml/2006/main" noGrp="1"/>
+          </p:cNvSpPr>
+          <p:nvPr/>
+        </p:nvSpPr>
+        <p:spPr>
+          <a:xfrm xmlns:a="http://schemas.openxmlformats.org/drawingml/2006/main">
+            <a:off x="571500" y="6419850"/>
+            <a:ext cx="11049000" cy="9525"/>
+          </a:xfrm>
+          <a:prstGeom xmlns:a="http://schemas.openxmlformats.org/drawingml/2006/main" prst="rect">
+            <a:avLst/>
+          </a:prstGeom>
+          <a:solidFill xmlns:a="http://schemas.openxmlformats.org/drawingml/2006/main">
+            <a:srgbClr val="CBD3CE"/>
+          </a:solidFill>
+          <a:ln xmlns:a="http://schemas.openxmlformats.org/drawingml/2006/main" w="0">
+            <a:noFill/>
+            <a:prstDash val="solid"/>
+          </a:ln>
+        </p:spPr>
+      </p:sp>
+      <p:sp>
+        <p:nvSpPr>
+          <p:cNvPr id="6" name="brand">
+            <a:extLst xmlns:a="http://schemas.openxmlformats.org/drawingml/2006/main">
+              <a:ext uri="{FF2B5EF4-FFF2-40B4-BE49-F238E27FC236}">
+                <a16:creationId xmlns:a16="http://schemas.microsoft.com/office/drawing/2014/main" id="{E614BED5-8256-4767-A9AC-410A8E234955}"/>
+              </a:ext>
+            </a:extLst>
+          </p:cNvPr>
+          <p:cNvSpPr>
+            <a:spLocks xmlns:a="http://schemas.openxmlformats.org/drawingml/2006/main" noGrp="1"/>
+          </p:cNvSpPr>
+          <p:nvPr/>
+        </p:nvSpPr>
+        <p:spPr>
+          <a:xfrm xmlns:a="http://schemas.openxmlformats.org/drawingml/2006/main">
+            <a:off x="571500" y="6477000"/>
+            <a:ext cx="857250" cy="228600"/>
+          </a:xfrm>
+          <a:prstGeom xmlns:a="http://schemas.openxmlformats.org/drawingml/2006/main" prst="rect">
+            <a:avLst/>
+          </a:prstGeom>
+          <a:noFill xmlns:a="http://schemas.openxmlformats.org/drawingml/2006/main"/>
+          <a:ln xmlns:a="http://schemas.openxmlformats.org/drawingml/2006/main" w="0">
+            <a:noFill/>
+            <a:prstDash val="solid"/>
+          </a:ln>
+        </p:spPr>
+        <p:txBody>
+          <a:bodyPr xmlns:a="http://schemas.openxmlformats.org/drawingml/2006/main" anchor="ctr"/>
+          <a:lstStyle xmlns:a="http://schemas.openxmlformats.org/drawingml/2006/main"/>
+          <a:p xmlns:a="http://schemas.openxmlformats.org/drawingml/2006/main">
+            <a:pPr algn="l">
+              <a:defRPr sz="1200" b="1">
+                <a:solidFill>
+                  <a:srgbClr val="42B879"/>
+                </a:solidFill>
+              </a:defRPr>
+            </a:pPr>
+            <a:r>
+              <a:rPr sz="1200" b="1">
+                <a:solidFill>
+                  <a:srgbClr val="42B879"/>
+                </a:solidFill>
+              </a:rPr>
+              <a:t>mint</a:t>
+            </a:r>
+          </a:p>
+        </p:txBody>
+      </p:sp>
+      <p:sp>
+        <p:nvSpPr>
+          <p:cNvPr id="7" name="source">
+            <a:extLst xmlns:a="http://schemas.openxmlformats.org/drawingml/2006/main">
+              <a:ext uri="{FF2B5EF4-FFF2-40B4-BE49-F238E27FC236}">
+                <a16:creationId xmlns:a16="http://schemas.microsoft.com/office/drawing/2014/main" id="{557DEA83-5DDD-4B31-B35F-145026293252}"/>
+              </a:ext>
+            </a:extLst>
+          </p:cNvPr>
+          <p:cNvSpPr>
+            <a:spLocks xmlns:a="http://schemas.openxmlformats.org/drawingml/2006/main" noGrp="1"/>
+          </p:cNvSpPr>
+          <p:nvPr/>
+        </p:nvSpPr>
+        <p:spPr>
+          <a:xfrm xmlns:a="http://schemas.openxmlformats.org/drawingml/2006/main">
+            <a:off x="4095750" y="6477000"/>
+            <a:ext cx="4095750" cy="209550"/>
+          </a:xfrm>
+          <a:prstGeom xmlns:a="http://schemas.openxmlformats.org/drawingml/2006/main" prst="rect">
+            <a:avLst/>
+          </a:prstGeom>
+          <a:noFill xmlns:a="http://schemas.openxmlformats.org/drawingml/2006/main"/>
+          <a:ln xmlns:a="http://schemas.openxmlformats.org/drawingml/2006/main" w="0">
+            <a:noFill/>
+            <a:prstDash val="solid"/>
+          </a:ln>
+        </p:spPr>
+        <p:txBody>
+          <a:bodyPr xmlns:a="http://schemas.openxmlformats.org/drawingml/2006/main" anchor="ctr"/>
+          <a:lstStyle xmlns:a="http://schemas.openxmlformats.org/drawingml/2006/main"/>
+          <a:p xmlns:a="http://schemas.openxmlformats.org/drawingml/2006/main">
+            <a:pPr algn="ctr">
+              <a:defRPr sz="675" b="0">
+                <a:solidFill>
+                  <a:srgbClr val="69766F"/>
+                </a:solidFill>
+              </a:defRPr>
+            </a:pPr>
+            <a:r>
+              <a:rPr sz="675" b="0">
+                <a:solidFill>
+                  <a:srgbClr val="69766F"/>
+                </a:solidFill>
+              </a:rPr>
+              <a:t>来源：组件母版示例，生成材料时替换</a:t>
+            </a:r>
+          </a:p>
+        </p:txBody>
+      </p:sp>
+      <p:sp>
+        <p:nvSpPr>
+          <p:cNvPr id="8" name="footer-page">
+            <a:extLst xmlns:a="http://schemas.openxmlformats.org/drawingml/2006/main">
+              <a:ext uri="{FF2B5EF4-FFF2-40B4-BE49-F238E27FC236}">
+                <a16:creationId xmlns:a16="http://schemas.microsoft.com/office/drawing/2014/main" id="{6C14DB82-11C1-496D-8D85-11815EEE1816}"/>
+              </a:ext>
+            </a:extLst>
+          </p:cNvPr>
+          <p:cNvSpPr>
+            <a:spLocks xmlns:a="http://schemas.openxmlformats.org/drawingml/2006/main" noGrp="1"/>
+          </p:cNvSpPr>
+          <p:nvPr/>
+        </p:nvSpPr>
+        <p:spPr>
+          <a:xfrm xmlns:a="http://schemas.openxmlformats.org/drawingml/2006/main">
+            <a:off x="10763250" y="6477000"/>
+            <a:ext cx="857250" cy="209550"/>
+          </a:xfrm>
+          <a:prstGeom xmlns:a="http://schemas.openxmlformats.org/drawingml/2006/main" prst="rect">
+            <a:avLst/>
+          </a:prstGeom>
+          <a:noFill xmlns:a="http://schemas.openxmlformats.org/drawingml/2006/main"/>
+          <a:ln xmlns:a="http://schemas.openxmlformats.org/drawingml/2006/main" w="0">
+            <a:noFill/>
+            <a:prstDash val="solid"/>
+          </a:ln>
+        </p:spPr>
+        <p:txBody>
+          <a:bodyPr xmlns:a="http://schemas.openxmlformats.org/drawingml/2006/main" anchor="ctr"/>
+          <a:lstStyle xmlns:a="http://schemas.openxmlformats.org/drawingml/2006/main"/>
+          <a:p xmlns:a="http://schemas.openxmlformats.org/drawingml/2006/main">
+            <a:pPr algn="r">
+              <a:defRPr sz="675" b="0">
+                <a:solidFill>
+                  <a:srgbClr val="69766F"/>
+                </a:solidFill>
+              </a:defRPr>
+            </a:pPr>
+            <a:r>
+              <a:rPr sz="675" b="0">
+                <a:solidFill>
+                  <a:srgbClr val="69766F"/>
+                </a:solidFill>
+              </a:rPr>
+              <a:t>16 / 18</a:t>
+            </a:r>
+          </a:p>
+        </p:txBody>
+      </p:sp>
+      <p:sp>
+        <p:nvSpPr>
+          <p:cNvPr id="9" name="page-title">
+            <a:extLst xmlns:a="http://schemas.openxmlformats.org/drawingml/2006/main">
+              <a:ext uri="{FF2B5EF4-FFF2-40B4-BE49-F238E27FC236}">
+                <a16:creationId xmlns:a16="http://schemas.microsoft.com/office/drawing/2014/main" id="{1AFC81E0-D7D8-45B3-A889-468C08B46480}"/>
+              </a:ext>
+            </a:extLst>
+          </p:cNvPr>
+          <p:cNvSpPr>
+            <a:spLocks xmlns:a="http://schemas.openxmlformats.org/drawingml/2006/main" noGrp="1"/>
+          </p:cNvSpPr>
+          <p:nvPr/>
+        </p:nvSpPr>
+        <p:spPr>
+          <a:xfrm xmlns:a="http://schemas.openxmlformats.org/drawingml/2006/main">
+            <a:off x="571500" y="666750"/>
+            <a:ext cx="11049000" cy="628650"/>
+          </a:xfrm>
+          <a:prstGeom xmlns:a="http://schemas.openxmlformats.org/drawingml/2006/main" prst="rect">
+            <a:avLst/>
+          </a:prstGeom>
+          <a:noFill xmlns:a="http://schemas.openxmlformats.org/drawingml/2006/main"/>
+          <a:ln xmlns:a="http://schemas.openxmlformats.org/drawingml/2006/main" w="0">
+            <a:noFill/>
+            <a:prstDash val="solid"/>
+          </a:ln>
+        </p:spPr>
+        <p:txBody>
+          <a:bodyPr xmlns:a="http://schemas.openxmlformats.org/drawingml/2006/main" anchor="ctr"/>
+          <a:lstStyle xmlns:a="http://schemas.openxmlformats.org/drawingml/2006/main"/>
+          <a:p xmlns:a="http://schemas.openxmlformats.org/drawingml/2006/main">
+            <a:pPr algn="l">
+              <a:defRPr sz="2250" b="1">
+                <a:solidFill>
+                  <a:srgbClr val="162A24"/>
+                </a:solidFill>
+              </a:defRPr>
+            </a:pPr>
+            <a:r>
+              <a:rPr sz="2250" b="1">
+                <a:solidFill>
+                  <a:srgbClr val="162A24"/>
+                </a:solidFill>
+              </a:rPr>
+              <a:t>启动资金约 5,000 万美元，股权及出资安排仍待明确</a:t>
+            </a:r>
+          </a:p>
+        </p:txBody>
+      </p:sp>
+      <p:sp>
+        <p:nvSpPr>
+          <p:cNvPr id="10" name="page-lead">
+            <a:extLst xmlns:a="http://schemas.openxmlformats.org/drawingml/2006/main">
+              <a:ext uri="{FF2B5EF4-FFF2-40B4-BE49-F238E27FC236}">
+                <a16:creationId xmlns:a16="http://schemas.microsoft.com/office/drawing/2014/main" id="{286D00B2-CD94-483B-8255-EF97EEFA99C5}"/>
+              </a:ext>
+            </a:extLst>
+          </p:cNvPr>
+          <p:cNvSpPr>
+            <a:spLocks xmlns:a="http://schemas.openxmlformats.org/drawingml/2006/main" noGrp="1"/>
+          </p:cNvSpPr>
+          <p:nvPr/>
+        </p:nvSpPr>
+        <p:spPr>
+          <a:xfrm xmlns:a="http://schemas.openxmlformats.org/drawingml/2006/main">
+            <a:off x="571500" y="1257300"/>
+            <a:ext cx="11049000" cy="323850"/>
+          </a:xfrm>
+          <a:prstGeom xmlns:a="http://schemas.openxmlformats.org/drawingml/2006/main" prst="rect">
+            <a:avLst/>
+          </a:prstGeom>
+          <a:noFill xmlns:a="http://schemas.openxmlformats.org/drawingml/2006/main"/>
+          <a:ln xmlns:a="http://schemas.openxmlformats.org/drawingml/2006/main" w="0">
+            <a:noFill/>
+            <a:prstDash val="solid"/>
+          </a:ln>
+        </p:spPr>
+        <p:txBody>
+          <a:bodyPr xmlns:a="http://schemas.openxmlformats.org/drawingml/2006/main" anchor="ctr"/>
+          <a:lstStyle xmlns:a="http://schemas.openxmlformats.org/drawingml/2006/main"/>
+          <a:p xmlns:a="http://schemas.openxmlformats.org/drawingml/2006/main">
+            <a:pPr algn="l">
+              <a:defRPr sz="1050" b="0">
+                <a:solidFill>
+                  <a:srgbClr val="69766F"/>
+                </a:solidFill>
+              </a:defRPr>
+            </a:pPr>
+            <a:r>
+              <a:rPr sz="1050" b="0">
+                <a:solidFill>
+                  <a:srgbClr val="69766F"/>
+                </a:solidFill>
+              </a:rPr>
+              <a:t>资金、规模和审批条件必须从普通说明中单独拎出。</a:t>
+            </a:r>
+          </a:p>
+        </p:txBody>
+      </p:sp>
+      <p:sp>
+        <p:nvSpPr>
+          <p:cNvPr id="11" name="capital-main">
+            <a:extLst xmlns:a="http://schemas.openxmlformats.org/drawingml/2006/main">
+              <a:ext uri="{FF2B5EF4-FFF2-40B4-BE49-F238E27FC236}">
+                <a16:creationId xmlns:a16="http://schemas.microsoft.com/office/drawing/2014/main" id="{8F4C29EF-CFF1-4B08-95FD-448D8B80FA13}"/>
+              </a:ext>
+            </a:extLst>
+          </p:cNvPr>
+          <p:cNvSpPr>
+            <a:spLocks xmlns:a="http://schemas.openxmlformats.org/drawingml/2006/main" noGrp="1"/>
+          </p:cNvSpPr>
+          <p:nvPr/>
+        </p:nvSpPr>
+        <p:spPr>
+          <a:xfrm xmlns:a="http://schemas.openxmlformats.org/drawingml/2006/main">
+            <a:off x="571500" y="1809750"/>
+            <a:ext cx="4857750" cy="3810000"/>
+          </a:xfrm>
+          <a:prstGeom xmlns:a="http://schemas.openxmlformats.org/drawingml/2006/main" prst="rect">
+            <a:avLst/>
+          </a:prstGeom>
+          <a:solidFill xmlns:a="http://schemas.openxmlformats.org/drawingml/2006/main">
+            <a:srgbClr val="BC794D"/>
+          </a:solidFill>
+          <a:ln xmlns:a="http://schemas.openxmlformats.org/drawingml/2006/main" w="0">
+            <a:noFill/>
+            <a:prstDash val="solid"/>
+          </a:ln>
+        </p:spPr>
+      </p:sp>
+      <p:sp>
+        <p:nvSpPr>
+          <p:cNvPr id="12" name="label-95-225">
+            <a:extLst xmlns:a="http://schemas.openxmlformats.org/drawingml/2006/main">
+              <a:ext uri="{FF2B5EF4-FFF2-40B4-BE49-F238E27FC236}">
+                <a16:creationId xmlns:a16="http://schemas.microsoft.com/office/drawing/2014/main" id="{12FFB201-EC16-434E-90C8-A4D6A5E54E16}"/>
+              </a:ext>
+            </a:extLst>
+          </p:cNvPr>
+          <p:cNvSpPr>
+            <a:spLocks xmlns:a="http://schemas.openxmlformats.org/drawingml/2006/main" noGrp="1"/>
+          </p:cNvSpPr>
+          <p:nvPr/>
+        </p:nvSpPr>
+        <p:spPr>
+          <a:xfrm xmlns:a="http://schemas.openxmlformats.org/drawingml/2006/main">
+            <a:off x="904875" y="2143125"/>
+            <a:ext cx="1238250" cy="190500"/>
+          </a:xfrm>
+          <a:prstGeom xmlns:a="http://schemas.openxmlformats.org/drawingml/2006/main" prst="rect">
+            <a:avLst/>
+          </a:prstGeom>
+          <a:noFill xmlns:a="http://schemas.openxmlformats.org/drawingml/2006/main"/>
+          <a:ln xmlns:a="http://schemas.openxmlformats.org/drawingml/2006/main" w="0">
+            <a:noFill/>
+            <a:prstDash val="solid"/>
+          </a:ln>
+        </p:spPr>
+        <p:txBody>
+          <a:bodyPr xmlns:a="http://schemas.openxmlformats.org/drawingml/2006/main" anchor="ctr"/>
+          <a:lstStyle xmlns:a="http://schemas.openxmlformats.org/drawingml/2006/main"/>
+          <a:p xmlns:a="http://schemas.openxmlformats.org/drawingml/2006/main">
+            <a:pPr algn="l">
+              <a:defRPr sz="750" b="1">
+                <a:solidFill>
+                  <a:srgbClr val="FFE3CF"/>
+                </a:solidFill>
+              </a:defRPr>
+            </a:pPr>
+            <a:r>
+              <a:rPr sz="750" b="1">
+                <a:solidFill>
+                  <a:srgbClr val="FFE3CF"/>
+                </a:solidFill>
+              </a:rPr>
+              <a:t>CAPITAL</a:t>
+            </a:r>
+          </a:p>
+        </p:txBody>
+      </p:sp>
+      <p:sp>
+        <p:nvSpPr>
+          <p:cNvPr id="13" name="capital-value">
+            <a:extLst xmlns:a="http://schemas.openxmlformats.org/drawingml/2006/main">
+              <a:ext uri="{FF2B5EF4-FFF2-40B4-BE49-F238E27FC236}">
+                <a16:creationId xmlns:a16="http://schemas.microsoft.com/office/drawing/2014/main" id="{9E926D6C-25E8-4BC8-905E-5BC0DE6F8EA4}"/>
+              </a:ext>
+            </a:extLst>
+          </p:cNvPr>
+          <p:cNvSpPr>
+            <a:spLocks xmlns:a="http://schemas.openxmlformats.org/drawingml/2006/main" noGrp="1"/>
+          </p:cNvSpPr>
+          <p:nvPr/>
+        </p:nvSpPr>
+        <p:spPr>
+          <a:xfrm xmlns:a="http://schemas.openxmlformats.org/drawingml/2006/main">
+            <a:off x="904875" y="2714625"/>
+            <a:ext cx="3429000" cy="952500"/>
+          </a:xfrm>
+          <a:prstGeom xmlns:a="http://schemas.openxmlformats.org/drawingml/2006/main" prst="rect">
+            <a:avLst/>
+          </a:prstGeom>
+          <a:noFill xmlns:a="http://schemas.openxmlformats.org/drawingml/2006/main"/>
+          <a:ln xmlns:a="http://schemas.openxmlformats.org/drawingml/2006/main" w="0">
+            <a:noFill/>
+            <a:prstDash val="solid"/>
+          </a:ln>
+        </p:spPr>
+        <p:txBody>
+          <a:bodyPr xmlns:a="http://schemas.openxmlformats.org/drawingml/2006/main" anchor="ctr"/>
+          <a:lstStyle xmlns:a="http://schemas.openxmlformats.org/drawingml/2006/main"/>
+          <a:p xmlns:a="http://schemas.openxmlformats.org/drawingml/2006/main">
+            <a:pPr algn="l">
+              <a:defRPr sz="4875" b="1">
+                <a:solidFill>
+                  <a:srgbClr val="FFFDF8"/>
+                </a:solidFill>
+              </a:defRPr>
+            </a:pPr>
+            <a:r>
+              <a:rPr sz="4875" b="1">
+                <a:solidFill>
+                  <a:srgbClr val="FFFDF8"/>
+                </a:solidFill>
+              </a:rPr>
+              <a:t>5,000</a:t>
+            </a:r>
+          </a:p>
+        </p:txBody>
+      </p:sp>
+      <p:sp>
+        <p:nvSpPr>
+          <p:cNvPr id="14" name="capital-unit">
+            <a:extLst xmlns:a="http://schemas.openxmlformats.org/drawingml/2006/main">
+              <a:ext uri="{FF2B5EF4-FFF2-40B4-BE49-F238E27FC236}">
+                <a16:creationId xmlns:a16="http://schemas.microsoft.com/office/drawing/2014/main" id="{2F4D878E-3A36-42E7-84A6-F63308F32FAF}"/>
+              </a:ext>
+            </a:extLst>
+          </p:cNvPr>
+          <p:cNvSpPr>
+            <a:spLocks xmlns:a="http://schemas.openxmlformats.org/drawingml/2006/main" noGrp="1"/>
+          </p:cNvSpPr>
+          <p:nvPr/>
+        </p:nvSpPr>
+        <p:spPr>
+          <a:xfrm xmlns:a="http://schemas.openxmlformats.org/drawingml/2006/main">
+            <a:off x="3619500" y="3143250"/>
+            <a:ext cx="1238250" cy="400050"/>
+          </a:xfrm>
+          <a:prstGeom xmlns:a="http://schemas.openxmlformats.org/drawingml/2006/main" prst="rect">
+            <a:avLst/>
+          </a:prstGeom>
+          <a:noFill xmlns:a="http://schemas.openxmlformats.org/drawingml/2006/main"/>
+          <a:ln xmlns:a="http://schemas.openxmlformats.org/drawingml/2006/main" w="0">
+            <a:noFill/>
+            <a:prstDash val="solid"/>
+          </a:ln>
+        </p:spPr>
+        <p:txBody>
+          <a:bodyPr xmlns:a="http://schemas.openxmlformats.org/drawingml/2006/main" anchor="ctr"/>
+          <a:lstStyle xmlns:a="http://schemas.openxmlformats.org/drawingml/2006/main"/>
+          <a:p xmlns:a="http://schemas.openxmlformats.org/drawingml/2006/main">
+            <a:pPr algn="l">
+              <a:defRPr sz="1650" b="1">
+                <a:solidFill>
+                  <a:srgbClr val="FFFDF8"/>
+                </a:solidFill>
+              </a:defRPr>
+            </a:pPr>
+            <a:r>
+              <a:rPr sz="1650" b="1">
+                <a:solidFill>
+                  <a:srgbClr val="FFFDF8"/>
+                </a:solidFill>
+              </a:rPr>
+              <a:t>万美元</a:t>
+            </a:r>
+          </a:p>
+        </p:txBody>
+      </p:sp>
+      <p:sp>
+        <p:nvSpPr>
+          <p:cNvPr id="15" name="capital-status">
+            <a:extLst xmlns:a="http://schemas.openxmlformats.org/drawingml/2006/main">
+              <a:ext uri="{FF2B5EF4-FFF2-40B4-BE49-F238E27FC236}">
+                <a16:creationId xmlns:a16="http://schemas.microsoft.com/office/drawing/2014/main" id="{89A72152-5E08-4E10-95F3-577225022A13}"/>
+              </a:ext>
+            </a:extLst>
+          </p:cNvPr>
+          <p:cNvSpPr>
+            <a:spLocks xmlns:a="http://schemas.openxmlformats.org/drawingml/2006/main" noGrp="1"/>
+          </p:cNvSpPr>
+          <p:nvPr/>
+        </p:nvSpPr>
+        <p:spPr>
+          <a:xfrm xmlns:a="http://schemas.openxmlformats.org/drawingml/2006/main">
+            <a:off x="904875" y="4238625"/>
+            <a:ext cx="3857625" cy="809625"/>
+          </a:xfrm>
+          <a:prstGeom xmlns:a="http://schemas.openxmlformats.org/drawingml/2006/main" prst="rect">
+            <a:avLst/>
+          </a:prstGeom>
+          <a:noFill xmlns:a="http://schemas.openxmlformats.org/drawingml/2006/main"/>
+          <a:ln xmlns:a="http://schemas.openxmlformats.org/drawingml/2006/main" w="0">
+            <a:noFill/>
+            <a:prstDash val="solid"/>
+          </a:ln>
+        </p:spPr>
+        <p:txBody>
+          <a:bodyPr xmlns:a="http://schemas.openxmlformats.org/drawingml/2006/main" anchor="ctr"/>
+          <a:lstStyle xmlns:a="http://schemas.openxmlformats.org/drawingml/2006/main"/>
+          <a:p xmlns:a="http://schemas.openxmlformats.org/drawingml/2006/main">
+            <a:pPr algn="l">
+              <a:defRPr sz="1125" b="0">
+                <a:solidFill>
+                  <a:srgbClr val="FFF0E6"/>
+                </a:solidFill>
+              </a:defRPr>
+            </a:pPr>
+            <a:r>
+              <a:rPr sz="1125" b="0">
+                <a:solidFill>
+                  <a:srgbClr val="FFF0E6"/>
+                </a:solidFill>
+              </a:rPr>
+              <a:t>当前状态｜启动资金规模已讨论，具体股权比例与出资安排待定</a:t>
+            </a:r>
+          </a:p>
+        </p:txBody>
+      </p:sp>
+      <p:sp>
+        <p:nvSpPr>
+          <p:cNvPr id="16" name="capital-decision-label">
+            <a:extLst xmlns:a="http://schemas.openxmlformats.org/drawingml/2006/main">
+              <a:ext uri="{FF2B5EF4-FFF2-40B4-BE49-F238E27FC236}">
+                <a16:creationId xmlns:a16="http://schemas.microsoft.com/office/drawing/2014/main" id="{0D0EFD00-4C59-401E-8360-06D41CE137AB}"/>
+              </a:ext>
+            </a:extLst>
+          </p:cNvPr>
+          <p:cNvSpPr>
+            <a:spLocks xmlns:a="http://schemas.openxmlformats.org/drawingml/2006/main" noGrp="1"/>
+          </p:cNvSpPr>
+          <p:nvPr/>
+        </p:nvSpPr>
+        <p:spPr>
+          <a:xfrm xmlns:a="http://schemas.openxmlformats.org/drawingml/2006/main">
+            <a:off x="5905500" y="1952625"/>
+            <a:ext cx="2857500" cy="266700"/>
+          </a:xfrm>
+          <a:prstGeom xmlns:a="http://schemas.openxmlformats.org/drawingml/2006/main" prst="rect">
+            <a:avLst/>
+          </a:prstGeom>
+          <a:noFill xmlns:a="http://schemas.openxmlformats.org/drawingml/2006/main"/>
+          <a:ln xmlns:a="http://schemas.openxmlformats.org/drawingml/2006/main" w="0">
+            <a:noFill/>
+            <a:prstDash val="solid"/>
+          </a:ln>
+        </p:spPr>
+        <p:txBody>
+          <a:bodyPr xmlns:a="http://schemas.openxmlformats.org/drawingml/2006/main" anchor="ctr"/>
+          <a:lstStyle xmlns:a="http://schemas.openxmlformats.org/drawingml/2006/main"/>
+          <a:p xmlns:a="http://schemas.openxmlformats.org/drawingml/2006/main">
+            <a:pPr algn="l">
+              <a:defRPr sz="975" b="1">
+                <a:solidFill>
+                  <a:srgbClr val="1C7866"/>
+                </a:solidFill>
+              </a:defRPr>
+            </a:pPr>
+            <a:r>
+              <a:rPr sz="975" b="1">
+                <a:solidFill>
+                  <a:srgbClr val="1C7866"/>
+                </a:solidFill>
+              </a:rPr>
+              <a:t>管理层需要推动</a:t>
+            </a:r>
+          </a:p>
+        </p:txBody>
+      </p:sp>
+      <p:sp>
+        <p:nvSpPr>
+          <p:cNvPr id="17" name="capital-action-0">
+            <a:extLst xmlns:a="http://schemas.openxmlformats.org/drawingml/2006/main">
+              <a:ext uri="{FF2B5EF4-FFF2-40B4-BE49-F238E27FC236}">
+                <a16:creationId xmlns:a16="http://schemas.microsoft.com/office/drawing/2014/main" id="{3C73CD74-0AB8-41F4-9078-116611690DED}"/>
+              </a:ext>
+            </a:extLst>
+          </p:cNvPr>
+          <p:cNvSpPr>
+            <a:spLocks xmlns:a="http://schemas.openxmlformats.org/drawingml/2006/main" noGrp="1"/>
+          </p:cNvSpPr>
+          <p:nvPr/>
+        </p:nvSpPr>
+        <p:spPr>
+          <a:xfrm xmlns:a="http://schemas.openxmlformats.org/drawingml/2006/main">
+            <a:off x="5905500" y="2428875"/>
+            <a:ext cx="5715000" cy="781050"/>
+          </a:xfrm>
+          <a:prstGeom xmlns:a="http://schemas.openxmlformats.org/drawingml/2006/main" prst="rect">
+            <a:avLst/>
+          </a:prstGeom>
+          <a:solidFill xmlns:a="http://schemas.openxmlformats.org/drawingml/2006/main">
+            <a:srgbClr val="FFFDF8"/>
+          </a:solidFill>
+          <a:ln xmlns:a="http://schemas.openxmlformats.org/drawingml/2006/main" w="9525">
+            <a:solidFill>
+              <a:srgbClr val="CBD3CE"/>
+            </a:solidFill>
+            <a:prstDash val="solid"/>
+          </a:ln>
+        </p:spPr>
+      </p:sp>
+      <p:sp>
+        <p:nvSpPr>
+          <p:cNvPr id="18" name="capital-action-no-0">
+            <a:extLst xmlns:a="http://schemas.openxmlformats.org/drawingml/2006/main">
+              <a:ext uri="{FF2B5EF4-FFF2-40B4-BE49-F238E27FC236}">
+                <a16:creationId xmlns:a16="http://schemas.microsoft.com/office/drawing/2014/main" id="{BFFE9652-F240-4951-9176-3F5B52E66A43}"/>
+              </a:ext>
+            </a:extLst>
+          </p:cNvPr>
+          <p:cNvSpPr>
+            <a:spLocks xmlns:a="http://schemas.openxmlformats.org/drawingml/2006/main" noGrp="1"/>
+          </p:cNvSpPr>
+          <p:nvPr/>
+        </p:nvSpPr>
+        <p:spPr>
+          <a:xfrm xmlns:a="http://schemas.openxmlformats.org/drawingml/2006/main">
+            <a:off x="6143625" y="2619375"/>
+            <a:ext cx="428625" cy="304800"/>
+          </a:xfrm>
+          <a:prstGeom xmlns:a="http://schemas.openxmlformats.org/drawingml/2006/main" prst="rect">
+            <a:avLst/>
+          </a:prstGeom>
+          <a:noFill xmlns:a="http://schemas.openxmlformats.org/drawingml/2006/main"/>
+          <a:ln xmlns:a="http://schemas.openxmlformats.org/drawingml/2006/main" w="0">
+            <a:noFill/>
+            <a:prstDash val="solid"/>
+          </a:ln>
+        </p:spPr>
+        <p:txBody>
+          <a:bodyPr xmlns:a="http://schemas.openxmlformats.org/drawingml/2006/main" anchor="ctr"/>
+          <a:lstStyle xmlns:a="http://schemas.openxmlformats.org/drawingml/2006/main"/>
+          <a:p xmlns:a="http://schemas.openxmlformats.org/drawingml/2006/main">
+            <a:pPr algn="l">
+              <a:defRPr sz="975" b="1">
+                <a:solidFill>
+                  <a:srgbClr val="BC794D"/>
+                </a:solidFill>
+              </a:defRPr>
+            </a:pPr>
+            <a:r>
+              <a:rPr sz="975" b="1">
+                <a:solidFill>
+                  <a:srgbClr val="BC794D"/>
+                </a:solidFill>
+              </a:rPr>
+              <a:t>01</a:t>
+            </a:r>
+          </a:p>
+        </p:txBody>
+      </p:sp>
+      <p:sp>
+        <p:nvSpPr>
+          <p:cNvPr id="19" name="capital-action-title-0">
+            <a:extLst xmlns:a="http://schemas.openxmlformats.org/drawingml/2006/main">
+              <a:ext uri="{FF2B5EF4-FFF2-40B4-BE49-F238E27FC236}">
+                <a16:creationId xmlns:a16="http://schemas.microsoft.com/office/drawing/2014/main" id="{541AC322-C590-4C3D-A624-BA7E6613BDC6}"/>
+              </a:ext>
+            </a:extLst>
+          </p:cNvPr>
+          <p:cNvSpPr>
+            <a:spLocks xmlns:a="http://schemas.openxmlformats.org/drawingml/2006/main" noGrp="1"/>
+          </p:cNvSpPr>
+          <p:nvPr/>
+        </p:nvSpPr>
+        <p:spPr>
+          <a:xfrm xmlns:a="http://schemas.openxmlformats.org/drawingml/2006/main">
+            <a:off x="6762750" y="2581275"/>
+            <a:ext cx="2381250" cy="361950"/>
+          </a:xfrm>
+          <a:prstGeom xmlns:a="http://schemas.openxmlformats.org/drawingml/2006/main" prst="rect">
+            <a:avLst/>
+          </a:prstGeom>
+          <a:noFill xmlns:a="http://schemas.openxmlformats.org/drawingml/2006/main"/>
+          <a:ln xmlns:a="http://schemas.openxmlformats.org/drawingml/2006/main" w="0">
+            <a:noFill/>
+            <a:prstDash val="solid"/>
+          </a:ln>
+        </p:spPr>
+        <p:txBody>
+          <a:bodyPr xmlns:a="http://schemas.openxmlformats.org/drawingml/2006/main" anchor="ctr"/>
+          <a:lstStyle xmlns:a="http://schemas.openxmlformats.org/drawingml/2006/main"/>
+          <a:p xmlns:a="http://schemas.openxmlformats.org/drawingml/2006/main">
+            <a:pPr algn="l">
+              <a:defRPr sz="1575" b="1">
+                <a:solidFill>
+                  <a:srgbClr val="162A24"/>
+                </a:solidFill>
+              </a:defRPr>
+            </a:pPr>
+            <a:r>
+              <a:rPr sz="1575" b="1">
+                <a:solidFill>
+                  <a:srgbClr val="162A24"/>
+                </a:solidFill>
+              </a:rPr>
+              <a:t>明确资本方案</a:t>
+            </a:r>
+          </a:p>
+        </p:txBody>
+      </p:sp>
+      <p:sp>
+        <p:nvSpPr>
+          <p:cNvPr id="20" name="capital-action-detail-0">
+            <a:extLst xmlns:a="http://schemas.openxmlformats.org/drawingml/2006/main">
+              <a:ext uri="{FF2B5EF4-FFF2-40B4-BE49-F238E27FC236}">
+                <a16:creationId xmlns:a16="http://schemas.microsoft.com/office/drawing/2014/main" id="{08D1B931-3D14-4EA3-BC7E-8446099FC100}"/>
+              </a:ext>
+            </a:extLst>
+          </p:cNvPr>
+          <p:cNvSpPr>
+            <a:spLocks xmlns:a="http://schemas.openxmlformats.org/drawingml/2006/main" noGrp="1"/>
+          </p:cNvSpPr>
+          <p:nvPr/>
+        </p:nvSpPr>
+        <p:spPr>
+          <a:xfrm xmlns:a="http://schemas.openxmlformats.org/drawingml/2006/main">
+            <a:off x="9144000" y="2600325"/>
+            <a:ext cx="2143125" cy="333375"/>
+          </a:xfrm>
+          <a:prstGeom xmlns:a="http://schemas.openxmlformats.org/drawingml/2006/main" prst="rect">
+            <a:avLst/>
+          </a:prstGeom>
+          <a:noFill xmlns:a="http://schemas.openxmlformats.org/drawingml/2006/main"/>
+          <a:ln xmlns:a="http://schemas.openxmlformats.org/drawingml/2006/main" w="0">
+            <a:noFill/>
+            <a:prstDash val="solid"/>
+          </a:ln>
+        </p:spPr>
+        <p:txBody>
+          <a:bodyPr xmlns:a="http://schemas.openxmlformats.org/drawingml/2006/main" anchor="ctr"/>
+          <a:lstStyle xmlns:a="http://schemas.openxmlformats.org/drawingml/2006/main"/>
+          <a:p xmlns:a="http://schemas.openxmlformats.org/drawingml/2006/main">
+            <a:pPr algn="l">
+              <a:defRPr sz="900" b="0">
+                <a:solidFill>
+                  <a:srgbClr val="69766F"/>
+                </a:solidFill>
+              </a:defRPr>
+            </a:pPr>
+            <a:r>
+              <a:rPr sz="900" b="0">
+                <a:solidFill>
+                  <a:srgbClr val="69766F"/>
+                </a:solidFill>
+              </a:rPr>
+              <a:t>填写 Owner 与确认时间</a:t>
+            </a:r>
+          </a:p>
+        </p:txBody>
+      </p:sp>
+      <p:sp>
+        <p:nvSpPr>
+          <p:cNvPr id="21" name="capital-action-1">
+            <a:extLst xmlns:a="http://schemas.openxmlformats.org/drawingml/2006/main">
+              <a:ext uri="{FF2B5EF4-FFF2-40B4-BE49-F238E27FC236}">
+                <a16:creationId xmlns:a16="http://schemas.microsoft.com/office/drawing/2014/main" id="{67226664-106C-460A-9476-F6E269D7A72B}"/>
+              </a:ext>
+            </a:extLst>
+          </p:cNvPr>
+          <p:cNvSpPr>
+            <a:spLocks xmlns:a="http://schemas.openxmlformats.org/drawingml/2006/main" noGrp="1"/>
+          </p:cNvSpPr>
+          <p:nvPr/>
+        </p:nvSpPr>
+        <p:spPr>
+          <a:xfrm xmlns:a="http://schemas.openxmlformats.org/drawingml/2006/main">
+            <a:off x="5905500" y="3429000"/>
+            <a:ext cx="5715000" cy="781050"/>
+          </a:xfrm>
+          <a:prstGeom xmlns:a="http://schemas.openxmlformats.org/drawingml/2006/main" prst="rect">
+            <a:avLst/>
+          </a:prstGeom>
+          <a:solidFill xmlns:a="http://schemas.openxmlformats.org/drawingml/2006/main">
+            <a:srgbClr val="FFFDF8"/>
+          </a:solidFill>
+          <a:ln xmlns:a="http://schemas.openxmlformats.org/drawingml/2006/main" w="9525">
+            <a:solidFill>
+              <a:srgbClr val="CBD3CE"/>
+            </a:solidFill>
+            <a:prstDash val="solid"/>
+          </a:ln>
+        </p:spPr>
+      </p:sp>
+      <p:sp>
+        <p:nvSpPr>
+          <p:cNvPr id="22" name="capital-action-no-1">
+            <a:extLst xmlns:a="http://schemas.openxmlformats.org/drawingml/2006/main">
+              <a:ext uri="{FF2B5EF4-FFF2-40B4-BE49-F238E27FC236}">
+                <a16:creationId xmlns:a16="http://schemas.microsoft.com/office/drawing/2014/main" id="{646F8A97-7B08-41FE-A4CC-6411EE5082B4}"/>
+              </a:ext>
+            </a:extLst>
+          </p:cNvPr>
+          <p:cNvSpPr>
+            <a:spLocks xmlns:a="http://schemas.openxmlformats.org/drawingml/2006/main" noGrp="1"/>
+          </p:cNvSpPr>
+          <p:nvPr/>
+        </p:nvSpPr>
+        <p:spPr>
+          <a:xfrm xmlns:a="http://schemas.openxmlformats.org/drawingml/2006/main">
+            <a:off x="6143625" y="3619500"/>
+            <a:ext cx="428625" cy="304800"/>
+          </a:xfrm>
+          <a:prstGeom xmlns:a="http://schemas.openxmlformats.org/drawingml/2006/main" prst="rect">
+            <a:avLst/>
+          </a:prstGeom>
+          <a:noFill xmlns:a="http://schemas.openxmlformats.org/drawingml/2006/main"/>
+          <a:ln xmlns:a="http://schemas.openxmlformats.org/drawingml/2006/main" w="0">
+            <a:noFill/>
+            <a:prstDash val="solid"/>
+          </a:ln>
+        </p:spPr>
+        <p:txBody>
+          <a:bodyPr xmlns:a="http://schemas.openxmlformats.org/drawingml/2006/main" anchor="ctr"/>
+          <a:lstStyle xmlns:a="http://schemas.openxmlformats.org/drawingml/2006/main"/>
+          <a:p xmlns:a="http://schemas.openxmlformats.org/drawingml/2006/main">
+            <a:pPr algn="l">
+              <a:defRPr sz="975" b="1">
+                <a:solidFill>
+                  <a:srgbClr val="BC794D"/>
+                </a:solidFill>
+              </a:defRPr>
+            </a:pPr>
+            <a:r>
+              <a:rPr sz="975" b="1">
+                <a:solidFill>
+                  <a:srgbClr val="BC794D"/>
+                </a:solidFill>
+              </a:rPr>
+              <a:t>02</a:t>
+            </a:r>
+          </a:p>
+        </p:txBody>
+      </p:sp>
+      <p:sp>
+        <p:nvSpPr>
+          <p:cNvPr id="23" name="capital-action-title-1">
+            <a:extLst xmlns:a="http://schemas.openxmlformats.org/drawingml/2006/main">
+              <a:ext uri="{FF2B5EF4-FFF2-40B4-BE49-F238E27FC236}">
+                <a16:creationId xmlns:a16="http://schemas.microsoft.com/office/drawing/2014/main" id="{59B7B943-7332-4DB8-AC58-06D44D023CF6}"/>
+              </a:ext>
+            </a:extLst>
+          </p:cNvPr>
+          <p:cNvSpPr>
+            <a:spLocks xmlns:a="http://schemas.openxmlformats.org/drawingml/2006/main" noGrp="1"/>
+          </p:cNvSpPr>
+          <p:nvPr/>
+        </p:nvSpPr>
+        <p:spPr>
+          <a:xfrm xmlns:a="http://schemas.openxmlformats.org/drawingml/2006/main">
+            <a:off x="6762750" y="3581400"/>
+            <a:ext cx="2381250" cy="361950"/>
+          </a:xfrm>
+          <a:prstGeom xmlns:a="http://schemas.openxmlformats.org/drawingml/2006/main" prst="rect">
+            <a:avLst/>
+          </a:prstGeom>
+          <a:noFill xmlns:a="http://schemas.openxmlformats.org/drawingml/2006/main"/>
+          <a:ln xmlns:a="http://schemas.openxmlformats.org/drawingml/2006/main" w="0">
+            <a:noFill/>
+            <a:prstDash val="solid"/>
+          </a:ln>
+        </p:spPr>
+        <p:txBody>
+          <a:bodyPr xmlns:a="http://schemas.openxmlformats.org/drawingml/2006/main" anchor="ctr"/>
+          <a:lstStyle xmlns:a="http://schemas.openxmlformats.org/drawingml/2006/main"/>
+          <a:p xmlns:a="http://schemas.openxmlformats.org/drawingml/2006/main">
+            <a:pPr algn="l">
+              <a:defRPr sz="1575" b="1">
+                <a:solidFill>
+                  <a:srgbClr val="162A24"/>
+                </a:solidFill>
+              </a:defRPr>
+            </a:pPr>
+            <a:r>
+              <a:rPr sz="1575" b="1">
+                <a:solidFill>
+                  <a:srgbClr val="162A24"/>
+                </a:solidFill>
+              </a:rPr>
+              <a:t>确认股权结构</a:t>
+            </a:r>
+          </a:p>
+        </p:txBody>
+      </p:sp>
+      <p:sp>
+        <p:nvSpPr>
+          <p:cNvPr id="24" name="capital-action-detail-1">
+            <a:extLst xmlns:a="http://schemas.openxmlformats.org/drawingml/2006/main">
+              <a:ext uri="{FF2B5EF4-FFF2-40B4-BE49-F238E27FC236}">
+                <a16:creationId xmlns:a16="http://schemas.microsoft.com/office/drawing/2014/main" id="{A55C9017-EC6F-437B-B384-36CA98BD646E}"/>
+              </a:ext>
+            </a:extLst>
+          </p:cNvPr>
+          <p:cNvSpPr>
+            <a:spLocks xmlns:a="http://schemas.openxmlformats.org/drawingml/2006/main" noGrp="1"/>
+          </p:cNvSpPr>
+          <p:nvPr/>
+        </p:nvSpPr>
+        <p:spPr>
+          <a:xfrm xmlns:a="http://schemas.openxmlformats.org/drawingml/2006/main">
+            <a:off x="9144000" y="3600450"/>
+            <a:ext cx="2143125" cy="333375"/>
+          </a:xfrm>
+          <a:prstGeom xmlns:a="http://schemas.openxmlformats.org/drawingml/2006/main" prst="rect">
+            <a:avLst/>
+          </a:prstGeom>
+          <a:noFill xmlns:a="http://schemas.openxmlformats.org/drawingml/2006/main"/>
+          <a:ln xmlns:a="http://schemas.openxmlformats.org/drawingml/2006/main" w="0">
+            <a:noFill/>
+            <a:prstDash val="solid"/>
+          </a:ln>
+        </p:spPr>
+        <p:txBody>
+          <a:bodyPr xmlns:a="http://schemas.openxmlformats.org/drawingml/2006/main" anchor="ctr"/>
+          <a:lstStyle xmlns:a="http://schemas.openxmlformats.org/drawingml/2006/main"/>
+          <a:p xmlns:a="http://schemas.openxmlformats.org/drawingml/2006/main">
+            <a:pPr algn="l">
+              <a:defRPr sz="900" b="0">
+                <a:solidFill>
+                  <a:srgbClr val="69766F"/>
+                </a:solidFill>
+              </a:defRPr>
+            </a:pPr>
+            <a:r>
+              <a:rPr sz="900" b="0">
+                <a:solidFill>
+                  <a:srgbClr val="69766F"/>
+                </a:solidFill>
+              </a:rPr>
+              <a:t>填写 Owner 与确认时间</a:t>
+            </a:r>
+          </a:p>
+        </p:txBody>
+      </p:sp>
+      <p:sp>
+        <p:nvSpPr>
+          <p:cNvPr id="25" name="capital-action-2">
+            <a:extLst xmlns:a="http://schemas.openxmlformats.org/drawingml/2006/main">
+              <a:ext uri="{FF2B5EF4-FFF2-40B4-BE49-F238E27FC236}">
+                <a16:creationId xmlns:a16="http://schemas.microsoft.com/office/drawing/2014/main" id="{75BE9FE4-4EDA-4766-B6D9-F3FD2C87C85F}"/>
+              </a:ext>
+            </a:extLst>
+          </p:cNvPr>
+          <p:cNvSpPr>
+            <a:spLocks xmlns:a="http://schemas.openxmlformats.org/drawingml/2006/main" noGrp="1"/>
+          </p:cNvSpPr>
+          <p:nvPr/>
+        </p:nvSpPr>
+        <p:spPr>
+          <a:xfrm xmlns:a="http://schemas.openxmlformats.org/drawingml/2006/main">
+            <a:off x="5905500" y="4429125"/>
+            <a:ext cx="5715000" cy="781050"/>
+          </a:xfrm>
+          <a:prstGeom xmlns:a="http://schemas.openxmlformats.org/drawingml/2006/main" prst="rect">
+            <a:avLst/>
+          </a:prstGeom>
+          <a:solidFill xmlns:a="http://schemas.openxmlformats.org/drawingml/2006/main">
+            <a:srgbClr val="FFFDF8"/>
+          </a:solidFill>
+          <a:ln xmlns:a="http://schemas.openxmlformats.org/drawingml/2006/main" w="9525">
+            <a:solidFill>
+              <a:srgbClr val="CBD3CE"/>
+            </a:solidFill>
+            <a:prstDash val="solid"/>
+          </a:ln>
+        </p:spPr>
+      </p:sp>
+      <p:sp>
+        <p:nvSpPr>
+          <p:cNvPr id="26" name="capital-action-no-2">
+            <a:extLst xmlns:a="http://schemas.openxmlformats.org/drawingml/2006/main">
+              <a:ext uri="{FF2B5EF4-FFF2-40B4-BE49-F238E27FC236}">
+                <a16:creationId xmlns:a16="http://schemas.microsoft.com/office/drawing/2014/main" id="{D8F31BFF-E8C3-4AF0-8182-B74649EE56B9}"/>
+              </a:ext>
+            </a:extLst>
+          </p:cNvPr>
+          <p:cNvSpPr>
+            <a:spLocks xmlns:a="http://schemas.openxmlformats.org/drawingml/2006/main" noGrp="1"/>
+          </p:cNvSpPr>
+          <p:nvPr/>
+        </p:nvSpPr>
+        <p:spPr>
+          <a:xfrm xmlns:a="http://schemas.openxmlformats.org/drawingml/2006/main">
+            <a:off x="6143625" y="4619625"/>
+            <a:ext cx="428625" cy="304800"/>
+          </a:xfrm>
+          <a:prstGeom xmlns:a="http://schemas.openxmlformats.org/drawingml/2006/main" prst="rect">
+            <a:avLst/>
+          </a:prstGeom>
+          <a:noFill xmlns:a="http://schemas.openxmlformats.org/drawingml/2006/main"/>
+          <a:ln xmlns:a="http://schemas.openxmlformats.org/drawingml/2006/main" w="0">
+            <a:noFill/>
+            <a:prstDash val="solid"/>
+          </a:ln>
+        </p:spPr>
+        <p:txBody>
+          <a:bodyPr xmlns:a="http://schemas.openxmlformats.org/drawingml/2006/main" anchor="ctr"/>
+          <a:lstStyle xmlns:a="http://schemas.openxmlformats.org/drawingml/2006/main"/>
+          <a:p xmlns:a="http://schemas.openxmlformats.org/drawingml/2006/main">
+            <a:pPr algn="l">
+              <a:defRPr sz="975" b="1">
+                <a:solidFill>
+                  <a:srgbClr val="BC794D"/>
+                </a:solidFill>
+              </a:defRPr>
+            </a:pPr>
+            <a:r>
+              <a:rPr sz="975" b="1">
+                <a:solidFill>
+                  <a:srgbClr val="BC794D"/>
+                </a:solidFill>
+              </a:rPr>
+              <a:t>03</a:t>
+            </a:r>
+          </a:p>
+        </p:txBody>
+      </p:sp>
+      <p:sp>
+        <p:nvSpPr>
+          <p:cNvPr id="27" name="capital-action-title-2">
+            <a:extLst xmlns:a="http://schemas.openxmlformats.org/drawingml/2006/main">
+              <a:ext uri="{FF2B5EF4-FFF2-40B4-BE49-F238E27FC236}">
+                <a16:creationId xmlns:a16="http://schemas.microsoft.com/office/drawing/2014/main" id="{7B88A87D-6DCC-4FBC-B780-940659C7B2C4}"/>
+              </a:ext>
+            </a:extLst>
+          </p:cNvPr>
+          <p:cNvSpPr>
+            <a:spLocks xmlns:a="http://schemas.openxmlformats.org/drawingml/2006/main" noGrp="1"/>
+          </p:cNvSpPr>
+          <p:nvPr/>
+        </p:nvSpPr>
+        <p:spPr>
+          <a:xfrm xmlns:a="http://schemas.openxmlformats.org/drawingml/2006/main">
+            <a:off x="6762750" y="4581525"/>
+            <a:ext cx="2381250" cy="361950"/>
+          </a:xfrm>
+          <a:prstGeom xmlns:a="http://schemas.openxmlformats.org/drawingml/2006/main" prst="rect">
+            <a:avLst/>
+          </a:prstGeom>
+          <a:noFill xmlns:a="http://schemas.openxmlformats.org/drawingml/2006/main"/>
+          <a:ln xmlns:a="http://schemas.openxmlformats.org/drawingml/2006/main" w="0">
+            <a:noFill/>
+            <a:prstDash val="solid"/>
+          </a:ln>
+        </p:spPr>
+        <p:txBody>
+          <a:bodyPr xmlns:a="http://schemas.openxmlformats.org/drawingml/2006/main" anchor="ctr"/>
+          <a:lstStyle xmlns:a="http://schemas.openxmlformats.org/drawingml/2006/main"/>
+          <a:p xmlns:a="http://schemas.openxmlformats.org/drawingml/2006/main">
+            <a:pPr algn="l">
+              <a:defRPr sz="1575" b="1">
+                <a:solidFill>
+                  <a:srgbClr val="162A24"/>
+                </a:solidFill>
+              </a:defRPr>
+            </a:pPr>
+            <a:r>
+              <a:rPr sz="1575" b="1">
+                <a:solidFill>
+                  <a:srgbClr val="162A24"/>
+                </a:solidFill>
+              </a:rPr>
+              <a:t>锁定出资安排</a:t>
+            </a:r>
+          </a:p>
+        </p:txBody>
+      </p:sp>
+      <p:sp>
+        <p:nvSpPr>
+          <p:cNvPr id="28" name="capital-action-detail-2">
+            <a:extLst xmlns:a="http://schemas.openxmlformats.org/drawingml/2006/main">
+              <a:ext uri="{FF2B5EF4-FFF2-40B4-BE49-F238E27FC236}">
+                <a16:creationId xmlns:a16="http://schemas.microsoft.com/office/drawing/2014/main" id="{CD421C0C-6255-4424-BA01-B413DBCF43BE}"/>
+              </a:ext>
+            </a:extLst>
+          </p:cNvPr>
+          <p:cNvSpPr>
+            <a:spLocks xmlns:a="http://schemas.openxmlformats.org/drawingml/2006/main" noGrp="1"/>
+          </p:cNvSpPr>
+          <p:nvPr/>
+        </p:nvSpPr>
+        <p:spPr>
+          <a:xfrm xmlns:a="http://schemas.openxmlformats.org/drawingml/2006/main">
+            <a:off x="9144000" y="4600575"/>
+            <a:ext cx="2143125" cy="333375"/>
+          </a:xfrm>
+          <a:prstGeom xmlns:a="http://schemas.openxmlformats.org/drawingml/2006/main" prst="rect">
+            <a:avLst/>
+          </a:prstGeom>
+          <a:noFill xmlns:a="http://schemas.openxmlformats.org/drawingml/2006/main"/>
+          <a:ln xmlns:a="http://schemas.openxmlformats.org/drawingml/2006/main" w="0">
+            <a:noFill/>
+            <a:prstDash val="solid"/>
+          </a:ln>
+        </p:spPr>
+        <p:txBody>
+          <a:bodyPr xmlns:a="http://schemas.openxmlformats.org/drawingml/2006/main" anchor="ctr"/>
+          <a:lstStyle xmlns:a="http://schemas.openxmlformats.org/drawingml/2006/main"/>
+          <a:p xmlns:a="http://schemas.openxmlformats.org/drawingml/2006/main">
+            <a:pPr algn="l">
+              <a:defRPr sz="900" b="0">
+                <a:solidFill>
+                  <a:srgbClr val="69766F"/>
+                </a:solidFill>
+              </a:defRPr>
+            </a:pPr>
+            <a:r>
+              <a:rPr sz="900" b="0">
+                <a:solidFill>
+                  <a:srgbClr val="69766F"/>
+                </a:solidFill>
+              </a:rPr>
+              <a:t>填写 Owner 与确认时间</a:t>
+            </a:r>
+          </a:p>
+        </p:txBody>
+      </p:sp>
+      <p:sp>
+        <p:nvSpPr>
+          <p:cNvPr id="29" name="capital-decision">
+            <a:extLst xmlns:a="http://schemas.openxmlformats.org/drawingml/2006/main">
+              <a:ext uri="{FF2B5EF4-FFF2-40B4-BE49-F238E27FC236}">
+                <a16:creationId xmlns:a16="http://schemas.microsoft.com/office/drawing/2014/main" id="{082FF47E-0F8E-4666-9EC9-C97DA39EFCA1}"/>
+              </a:ext>
+            </a:extLst>
+          </p:cNvPr>
+          <p:cNvSpPr>
+            <a:spLocks xmlns:a="http://schemas.openxmlformats.org/drawingml/2006/main" noGrp="1"/>
+          </p:cNvSpPr>
+          <p:nvPr/>
+        </p:nvSpPr>
+        <p:spPr>
+          <a:xfrm xmlns:a="http://schemas.openxmlformats.org/drawingml/2006/main">
+            <a:off x="5905500" y="5476875"/>
+            <a:ext cx="5715000" cy="523875"/>
+          </a:xfrm>
+          <a:prstGeom xmlns:a="http://schemas.openxmlformats.org/drawingml/2006/main" prst="rect">
+            <a:avLst/>
+          </a:prstGeom>
+          <a:solidFill xmlns:a="http://schemas.openxmlformats.org/drawingml/2006/main">
+            <a:srgbClr val="0E453A"/>
+          </a:solidFill>
+          <a:ln xmlns:a="http://schemas.openxmlformats.org/drawingml/2006/main" w="0">
+            <a:noFill/>
+            <a:prstDash val="solid"/>
+          </a:ln>
+        </p:spPr>
+      </p:sp>
+      <p:sp>
+        <p:nvSpPr>
+          <p:cNvPr id="30" name="capital-decision-text">
+            <a:extLst xmlns:a="http://schemas.openxmlformats.org/drawingml/2006/main">
+              <a:ext uri="{FF2B5EF4-FFF2-40B4-BE49-F238E27FC236}">
+                <a16:creationId xmlns:a16="http://schemas.microsoft.com/office/drawing/2014/main" id="{F7FF2F72-4173-4707-9ED1-E1380BA4FE38}"/>
+              </a:ext>
+            </a:extLst>
+          </p:cNvPr>
+          <p:cNvSpPr>
+            <a:spLocks xmlns:a="http://schemas.openxmlformats.org/drawingml/2006/main" noGrp="1"/>
+          </p:cNvSpPr>
+          <p:nvPr/>
+        </p:nvSpPr>
+        <p:spPr>
+          <a:xfrm xmlns:a="http://schemas.openxmlformats.org/drawingml/2006/main">
+            <a:off x="6143625" y="5572125"/>
+            <a:ext cx="5238750" cy="323850"/>
+          </a:xfrm>
+          <a:prstGeom xmlns:a="http://schemas.openxmlformats.org/drawingml/2006/main" prst="rect">
+            <a:avLst/>
+          </a:prstGeom>
+          <a:noFill xmlns:a="http://schemas.openxmlformats.org/drawingml/2006/main"/>
+          <a:ln xmlns:a="http://schemas.openxmlformats.org/drawingml/2006/main" w="0">
+            <a:noFill/>
+            <a:prstDash val="solid"/>
+          </a:ln>
+        </p:spPr>
+        <p:txBody>
+          <a:bodyPr xmlns:a="http://schemas.openxmlformats.org/drawingml/2006/main" anchor="ctr"/>
+          <a:lstStyle xmlns:a="http://schemas.openxmlformats.org/drawingml/2006/main"/>
+          <a:p xmlns:a="http://schemas.openxmlformats.org/drawingml/2006/main">
+            <a:pPr algn="l">
+              <a:defRPr sz="1200" b="1">
+                <a:solidFill>
+                  <a:srgbClr val="FFFDF8"/>
+                </a:solidFill>
+              </a:defRPr>
+            </a:pPr>
+            <a:r>
+              <a:rPr sz="1200" b="1">
+                <a:solidFill>
+                  <a:srgbClr val="FFFDF8"/>
+                </a:solidFill>
+              </a:rPr>
+              <a:t>决策｜是否按该规模继续细化资本与股权方案</a:t>
+            </a:r>
+          </a:p>
+        </p:txBody>
+      </p:sp>
+    </p:spTree>
+    <p:extLst>
+      <p:ext uri="{BB962C8B-B14F-4D97-AF65-F5344CB8AC3E}">
+        <p14:creationId xmlns:p14="http://schemas.microsoft.com/office/powerpoint/2010/main" val="812931839"/>
+      </p:ext>
+    </p:extLst>
+  </p:cSld>
+</p:sld>
+</file>
+
+<file path=ppt/slides/slide17.xml><?xml version="1.0" encoding="utf-8"?>
+<p:sld xmlns:p="http://schemas.openxmlformats.org/presentationml/2006/main">
+  <p:cSld>
+    <p:bg>
+      <p:bgPr>
+        <a:solidFill xmlns:a="http://schemas.openxmlformats.org/drawingml/2006/main">
+          <a:srgbClr val="1C7866"/>
+        </a:solidFill>
+      </p:bgPr>
+    </p:bg>
+    <p:spTree>
+      <p:nvGrpSpPr>
+        <p:cNvPr id="1" name=""/>
+        <p:cNvGrpSpPr/>
+        <p:nvPr/>
+      </p:nvGrpSpPr>
+      <p:grpSpPr>
+        <a:xfrm xmlns:a="http://schemas.openxmlformats.org/drawingml/2006/main"/>
+      </p:grpSpPr>
+      <p:sp>
+        <p:nvSpPr>
+          <p:cNvPr id="7" name="section-number">
+            <a:extLst xmlns:a="http://schemas.openxmlformats.org/drawingml/2006/main">
+              <a:ext uri="{FF2B5EF4-FFF2-40B4-BE49-F238E27FC236}">
+                <a16:creationId xmlns:a16="http://schemas.microsoft.com/office/drawing/2014/main" id="{261B552E-D962-417F-8197-4EDEFABFC966}"/>
+              </a:ext>
+            </a:extLst>
+          </p:cNvPr>
+          <p:cNvSpPr>
+            <a:spLocks xmlns:a="http://schemas.openxmlformats.org/drawingml/2006/main" noGrp="1"/>
+          </p:cNvSpPr>
+          <p:nvPr/>
+        </p:nvSpPr>
+        <p:spPr>
+          <a:xfrm xmlns:a="http://schemas.openxmlformats.org/drawingml/2006/main">
+            <a:off x="666750" y="952500"/>
+            <a:ext cx="2286000" cy="1333500"/>
+          </a:xfrm>
+          <a:prstGeom xmlns:a="http://schemas.openxmlformats.org/drawingml/2006/main" prst="rect">
+            <a:avLst/>
+          </a:prstGeom>
+          <a:noFill xmlns:a="http://schemas.openxmlformats.org/drawingml/2006/main"/>
+          <a:ln xmlns:a="http://schemas.openxmlformats.org/drawingml/2006/main" w="0">
+            <a:noFill/>
+            <a:prstDash val="solid"/>
+          </a:ln>
+        </p:spPr>
+        <p:txBody>
+          <a:bodyPr xmlns:a="http://schemas.openxmlformats.org/drawingml/2006/main" anchor="ctr"/>
+          <a:lstStyle xmlns:a="http://schemas.openxmlformats.org/drawingml/2006/main"/>
+          <a:p xmlns:a="http://schemas.openxmlformats.org/drawingml/2006/main">
+            <a:pPr algn="l">
+              <a:defRPr sz="5250" b="0">
+                <a:solidFill>
+                  <a:srgbClr val="FFFDF8"/>
+                </a:solidFill>
+              </a:defRPr>
+            </a:pPr>
+            <a:r>
+              <a:rPr sz="5250" b="0">
+                <a:solidFill>
+                  <a:srgbClr val="FFFDF8"/>
+                </a:solidFill>
+              </a:rPr>
+              <a:t>01</a:t>
+            </a:r>
+          </a:p>
+        </p:txBody>
+      </p:sp>
+      <p:sp>
+        <p:nvSpPr>
+          <p:cNvPr id="2" name="section-title">
+            <a:extLst xmlns:a="http://schemas.openxmlformats.org/drawingml/2006/main">
+              <a:ext uri="{FF2B5EF4-FFF2-40B4-BE49-F238E27FC236}">
+                <a16:creationId xmlns:a16="http://schemas.microsoft.com/office/drawing/2014/main" id="{32C253EF-8DE3-4C3E-A55D-7E81202FB623}"/>
+              </a:ext>
+            </a:extLst>
+          </p:cNvPr>
+          <p:cNvSpPr>
+            <a:spLocks xmlns:a="http://schemas.openxmlformats.org/drawingml/2006/main" noGrp="1"/>
+          </p:cNvSpPr>
+          <p:nvPr/>
+        </p:nvSpPr>
+        <p:spPr>
+          <a:xfrm xmlns:a="http://schemas.openxmlformats.org/drawingml/2006/main">
+            <a:off x="666750" y="2571750"/>
+            <a:ext cx="5715000" cy="666750"/>
+          </a:xfrm>
+          <a:prstGeom xmlns:a="http://schemas.openxmlformats.org/drawingml/2006/main" prst="rect">
+            <a:avLst/>
+          </a:prstGeom>
+          <a:noFill xmlns:a="http://schemas.openxmlformats.org/drawingml/2006/main"/>
+          <a:ln xmlns:a="http://schemas.openxmlformats.org/drawingml/2006/main" w="0">
+            <a:noFill/>
+            <a:prstDash val="solid"/>
+          </a:ln>
+        </p:spPr>
+        <p:txBody>
+          <a:bodyPr xmlns:a="http://schemas.openxmlformats.org/drawingml/2006/main" anchor="ctr"/>
+          <a:lstStyle xmlns:a="http://schemas.openxmlformats.org/drawingml/2006/main"/>
+          <a:p xmlns:a="http://schemas.openxmlformats.org/drawingml/2006/main">
+            <a:pPr algn="l">
+              <a:defRPr sz="2550" b="1">
+                <a:solidFill>
+                  <a:srgbClr val="FFFDF8"/>
+                </a:solidFill>
+              </a:defRPr>
+            </a:pPr>
+            <a:r>
+              <a:rPr sz="2550" b="1">
+                <a:solidFill>
+                  <a:srgbClr val="FFFDF8"/>
+                </a:solidFill>
+              </a:rPr>
+              <a:t>战略与目标</a:t>
+            </a:r>
+          </a:p>
+        </p:txBody>
+      </p:sp>
+      <p:sp>
+        <p:nvSpPr>
+          <p:cNvPr id="3" name="section-claim">
+            <a:extLst xmlns:a="http://schemas.openxmlformats.org/drawingml/2006/main">
+              <a:ext uri="{FF2B5EF4-FFF2-40B4-BE49-F238E27FC236}">
+                <a16:creationId xmlns:a16="http://schemas.microsoft.com/office/drawing/2014/main" id="{718EEB6D-0D66-435E-9E85-A5C55AD41218}"/>
+              </a:ext>
+            </a:extLst>
+          </p:cNvPr>
+          <p:cNvSpPr>
+            <a:spLocks xmlns:a="http://schemas.openxmlformats.org/drawingml/2006/main" noGrp="1"/>
+          </p:cNvSpPr>
+          <p:nvPr/>
+        </p:nvSpPr>
+        <p:spPr>
+          <a:xfrm xmlns:a="http://schemas.openxmlformats.org/drawingml/2006/main">
+            <a:off x="666750" y="3333750"/>
+            <a:ext cx="6858000" cy="523875"/>
+          </a:xfrm>
+          <a:prstGeom xmlns:a="http://schemas.openxmlformats.org/drawingml/2006/main" prst="rect">
+            <a:avLst/>
+          </a:prstGeom>
+          <a:noFill xmlns:a="http://schemas.openxmlformats.org/drawingml/2006/main"/>
+          <a:ln xmlns:a="http://schemas.openxmlformats.org/drawingml/2006/main" w="0">
+            <a:noFill/>
+            <a:prstDash val="solid"/>
+          </a:ln>
+        </p:spPr>
+        <p:txBody>
+          <a:bodyPr xmlns:a="http://schemas.openxmlformats.org/drawingml/2006/main" anchor="ctr"/>
+          <a:lstStyle xmlns:a="http://schemas.openxmlformats.org/drawingml/2006/main"/>
+          <a:p xmlns:a="http://schemas.openxmlformats.org/drawingml/2006/main">
+            <a:pPr algn="l">
+              <a:defRPr sz="1500" b="0">
+                <a:solidFill>
+                  <a:srgbClr val="DCECE5"/>
+                </a:solidFill>
+              </a:defRPr>
+            </a:pPr>
+            <a:r>
+              <a:rPr sz="1500" b="0">
+                <a:solidFill>
+                  <a:srgbClr val="DCECE5"/>
+                </a:solidFill>
+              </a:rPr>
+              <a:t>先明确本章节需要回答的问题，再进入证据与行动</a:t>
+            </a:r>
+          </a:p>
+        </p:txBody>
+      </p:sp>
+      <p:sp>
+        <p:nvSpPr>
+          <p:cNvPr id="4" name="section-en">
+            <a:extLst xmlns:a="http://schemas.openxmlformats.org/drawingml/2006/main">
+              <a:ext uri="{FF2B5EF4-FFF2-40B4-BE49-F238E27FC236}">
+                <a16:creationId xmlns:a16="http://schemas.microsoft.com/office/drawing/2014/main" id="{2CBAD0AB-754D-47ED-A335-0A70350BB0AF}"/>
+              </a:ext>
+            </a:extLst>
+          </p:cNvPr>
+          <p:cNvSpPr>
+            <a:spLocks xmlns:a="http://schemas.openxmlformats.org/drawingml/2006/main" noGrp="1"/>
+          </p:cNvSpPr>
+          <p:nvPr/>
+        </p:nvSpPr>
+        <p:spPr>
+          <a:xfrm xmlns:a="http://schemas.openxmlformats.org/drawingml/2006/main">
+            <a:off x="666750" y="4095750"/>
+            <a:ext cx="4762500" cy="304800"/>
+          </a:xfrm>
+          <a:prstGeom xmlns:a="http://schemas.openxmlformats.org/drawingml/2006/main" prst="rect">
+            <a:avLst/>
+          </a:prstGeom>
+          <a:noFill xmlns:a="http://schemas.openxmlformats.org/drawingml/2006/main"/>
+          <a:ln xmlns:a="http://schemas.openxmlformats.org/drawingml/2006/main" w="0">
+            <a:noFill/>
+            <a:prstDash val="solid"/>
+          </a:ln>
+        </p:spPr>
+        <p:txBody>
+          <a:bodyPr xmlns:a="http://schemas.openxmlformats.org/drawingml/2006/main" anchor="ctr"/>
+          <a:lstStyle xmlns:a="http://schemas.openxmlformats.org/drawingml/2006/main"/>
+          <a:p xmlns:a="http://schemas.openxmlformats.org/drawingml/2006/main">
+            <a:pPr algn="l">
+              <a:defRPr sz="1125" b="1">
+                <a:solidFill>
+                  <a:srgbClr val="8CCDB2"/>
+                </a:solidFill>
+              </a:defRPr>
+            </a:pPr>
+            <a:r>
+              <a:rPr sz="1125" b="1">
+                <a:solidFill>
+                  <a:srgbClr val="8CCDB2"/>
+                </a:solidFill>
+              </a:rPr>
+              <a:t>STRATEGY &amp; DIRECTION</a:t>
+            </a:r>
+          </a:p>
+        </p:txBody>
+      </p:sp>
+      <p:sp>
+        <p:nvSpPr>
+          <p:cNvPr id="5" name="rule-70-630">
+            <a:extLst xmlns:a="http://schemas.openxmlformats.org/drawingml/2006/main">
+              <a:ext uri="{FF2B5EF4-FFF2-40B4-BE49-F238E27FC236}">
+                <a16:creationId xmlns:a16="http://schemas.microsoft.com/office/drawing/2014/main" id="{6BFD7EAA-3665-43AA-AE23-74FF8AB3900F}"/>
+              </a:ext>
+            </a:extLst>
+          </p:cNvPr>
+          <p:cNvSpPr>
+            <a:spLocks xmlns:a="http://schemas.openxmlformats.org/drawingml/2006/main" noGrp="1"/>
+          </p:cNvSpPr>
+          <p:nvPr/>
+        </p:nvSpPr>
+        <p:spPr>
+          <a:xfrm xmlns:a="http://schemas.openxmlformats.org/drawingml/2006/main">
+            <a:off x="666750" y="6000750"/>
+            <a:ext cx="10858500" cy="9525"/>
+          </a:xfrm>
+          <a:prstGeom xmlns:a="http://schemas.openxmlformats.org/drawingml/2006/main" prst="rect">
+            <a:avLst/>
+          </a:prstGeom>
+          <a:solidFill xmlns:a="http://schemas.openxmlformats.org/drawingml/2006/main">
+            <a:srgbClr val="58A28F"/>
+          </a:solidFill>
+          <a:ln xmlns:a="http://schemas.openxmlformats.org/drawingml/2006/main" w="0">
+            <a:noFill/>
+            <a:prstDash val="solid"/>
+          </a:ln>
+        </p:spPr>
+      </p:sp>
+      <p:sp>
+        <p:nvSpPr>
+          <p:cNvPr id="6" name="section-brand">
+            <a:extLst xmlns:a="http://schemas.openxmlformats.org/drawingml/2006/main">
+              <a:ext uri="{FF2B5EF4-FFF2-40B4-BE49-F238E27FC236}">
+                <a16:creationId xmlns:a16="http://schemas.microsoft.com/office/drawing/2014/main" id="{8D8F3104-56EC-405D-AE98-1D08AFF4F622}"/>
+              </a:ext>
+            </a:extLst>
+          </p:cNvPr>
+          <p:cNvSpPr>
+            <a:spLocks xmlns:a="http://schemas.openxmlformats.org/drawingml/2006/main" noGrp="1"/>
+          </p:cNvSpPr>
+          <p:nvPr/>
+        </p:nvSpPr>
+        <p:spPr>
+          <a:xfrm xmlns:a="http://schemas.openxmlformats.org/drawingml/2006/main">
+            <a:off x="666750" y="6191250"/>
+            <a:ext cx="952500" cy="285750"/>
+          </a:xfrm>
+          <a:prstGeom xmlns:a="http://schemas.openxmlformats.org/drawingml/2006/main" prst="rect">
+            <a:avLst/>
+          </a:prstGeom>
+          <a:noFill xmlns:a="http://schemas.openxmlformats.org/drawingml/2006/main"/>
+          <a:ln xmlns:a="http://schemas.openxmlformats.org/drawingml/2006/main" w="0">
+            <a:noFill/>
+            <a:prstDash val="solid"/>
+          </a:ln>
+        </p:spPr>
+        <p:txBody>
+          <a:bodyPr xmlns:a="http://schemas.openxmlformats.org/drawingml/2006/main" anchor="ctr"/>
+          <a:lstStyle xmlns:a="http://schemas.openxmlformats.org/drawingml/2006/main"/>
+          <a:p xmlns:a="http://schemas.openxmlformats.org/drawingml/2006/main">
+            <a:pPr algn="l">
+              <a:defRPr sz="1200" b="1">
+                <a:solidFill>
+                  <a:srgbClr val="FFFDF8"/>
+                </a:solidFill>
+              </a:defRPr>
+            </a:pPr>
+            <a:r>
+              <a:rPr sz="1200" b="1">
+                <a:solidFill>
+                  <a:srgbClr val="FFFDF8"/>
+                </a:solidFill>
+              </a:rPr>
+              <a:t>mint</a:t>
+            </a:r>
+          </a:p>
+        </p:txBody>
+      </p:sp>
+    </p:spTree>
+    <p:extLst>
+      <p:ext uri="{BB962C8B-B14F-4D97-AF65-F5344CB8AC3E}">
+        <p14:creationId xmlns:p14="http://schemas.microsoft.com/office/powerpoint/2010/main" val="2095430287"/>
+      </p:ext>
+    </p:extLst>
+  </p:cSld>
+</p:sld>
+</file>
+
+<file path=ppt/slides/slide18.xml><?xml version="1.0" encoding="utf-8"?>
+<p:sld xmlns:p="http://schemas.openxmlformats.org/presentationml/2006/main">
+  <p:cSld>
+    <p:bg>
+      <p:bgPr>
+        <a:solidFill xmlns:a="http://schemas.openxmlformats.org/drawingml/2006/main">
+          <a:srgbClr val="F5F0E6"/>
+        </a:solidFill>
+      </p:bgPr>
+    </p:bg>
+    <p:spTree>
+      <p:nvGrpSpPr>
+        <p:cNvPr id="1" name=""/>
+        <p:cNvGrpSpPr/>
+        <p:nvPr/>
+      </p:nvGrpSpPr>
+      <p:grpSpPr>
+        <a:xfrm xmlns:a="http://schemas.openxmlformats.org/drawingml/2006/main"/>
+      </p:grpSpPr>
+      <p:sp>
+        <p:nvSpPr>
           <p:cNvPr id="8" name="closing-brand">
             <a:extLst xmlns:a="http://schemas.openxmlformats.org/drawingml/2006/main">
               <a:ext uri="{FF2B5EF4-FFF2-40B4-BE49-F238E27FC236}">
-                <a16:creationId xmlns:a16="http://schemas.microsoft.com/office/drawing/2014/main" id="{6BDF605B-61BA-459B-82F1-1FCCE97E2809}"/>
+                <a16:creationId xmlns:a16="http://schemas.microsoft.com/office/drawing/2014/main" id="{EED0DA42-8DF2-46CB-BB2E-79AB0B11E3B1}"/>
               </a:ext>
             </a:extLst>
           </p:cNvPr>
@@ -10290,7 +15182,7 @@
           <p:cNvPr id="2" name="closing-title">
             <a:extLst xmlns:a="http://schemas.openxmlformats.org/drawingml/2006/main">
               <a:ext uri="{FF2B5EF4-FFF2-40B4-BE49-F238E27FC236}">
-                <a16:creationId xmlns:a16="http://schemas.microsoft.com/office/drawing/2014/main" id="{1A256088-6F83-4572-9A79-B0E3970041DE}"/>
+                <a16:creationId xmlns:a16="http://schemas.microsoft.com/office/drawing/2014/main" id="{A155BC28-F8D0-491A-A74E-DF885CA0ECBA}"/>
               </a:ext>
             </a:extLst>
           </p:cNvPr>
@@ -10340,7 +15232,7 @@
           <p:cNvPr id="3" name="closing-en">
             <a:extLst xmlns:a="http://schemas.openxmlformats.org/drawingml/2006/main">
               <a:ext uri="{FF2B5EF4-FFF2-40B4-BE49-F238E27FC236}">
-                <a16:creationId xmlns:a16="http://schemas.microsoft.com/office/drawing/2014/main" id="{9A1F98C4-1D85-4113-AB88-38C2D6087BFE}"/>
+                <a16:creationId xmlns:a16="http://schemas.microsoft.com/office/drawing/2014/main" id="{779B86A2-CF25-44C9-AFF3-20962EAC401B}"/>
               </a:ext>
             </a:extLst>
           </p:cNvPr>
@@ -10390,7 +15282,7 @@
           <p:cNvPr id="4" name="closing-wave-0">
             <a:extLst xmlns:a="http://schemas.openxmlformats.org/drawingml/2006/main">
               <a:ext uri="{FF2B5EF4-FFF2-40B4-BE49-F238E27FC236}">
-                <a16:creationId xmlns:a16="http://schemas.microsoft.com/office/drawing/2014/main" id="{8DC9343A-E033-4427-9D6D-218A18B8120B}"/>
+                <a16:creationId xmlns:a16="http://schemas.microsoft.com/office/drawing/2014/main" id="{3D4100E0-7E13-40F5-9F4A-CD2CE52E1D86}"/>
               </a:ext>
             </a:extLst>
           </p:cNvPr>
@@ -10421,7 +15313,7 @@
           <p:cNvPr id="5" name="closing-wave-1">
             <a:extLst xmlns:a="http://schemas.openxmlformats.org/drawingml/2006/main">
               <a:ext uri="{FF2B5EF4-FFF2-40B4-BE49-F238E27FC236}">
-                <a16:creationId xmlns:a16="http://schemas.microsoft.com/office/drawing/2014/main" id="{6D60EB7D-6C88-4639-81A2-2939FE69543D}"/>
+                <a16:creationId xmlns:a16="http://schemas.microsoft.com/office/drawing/2014/main" id="{677E0195-E888-45B0-856C-63F6BF3A2B99}"/>
               </a:ext>
             </a:extLst>
           </p:cNvPr>
@@ -10452,7 +15344,7 @@
           <p:cNvPr id="6" name="closing-wave-2">
             <a:extLst xmlns:a="http://schemas.openxmlformats.org/drawingml/2006/main">
               <a:ext uri="{FF2B5EF4-FFF2-40B4-BE49-F238E27FC236}">
-                <a16:creationId xmlns:a16="http://schemas.microsoft.com/office/drawing/2014/main" id="{EF964B6F-B968-40A3-9D29-CC24200A8660}"/>
+                <a16:creationId xmlns:a16="http://schemas.microsoft.com/office/drawing/2014/main" id="{999D8606-22B4-4AC4-81D4-AAB123E396D1}"/>
               </a:ext>
             </a:extLst>
           </p:cNvPr>
@@ -10483,7 +15375,7 @@
           <p:cNvPr id="7" name="closing-wave-3">
             <a:extLst xmlns:a="http://schemas.openxmlformats.org/drawingml/2006/main">
               <a:ext uri="{FF2B5EF4-FFF2-40B4-BE49-F238E27FC236}">
-                <a16:creationId xmlns:a16="http://schemas.microsoft.com/office/drawing/2014/main" id="{FB796F25-DBE7-4E43-A087-D1F465AF3B90}"/>
+                <a16:creationId xmlns:a16="http://schemas.microsoft.com/office/drawing/2014/main" id="{28DE44A6-1F95-4E33-B7A4-5CE6324133A7}"/>
               </a:ext>
             </a:extLst>
           </p:cNvPr>
@@ -10514,7 +15406,7 @@
     </p:spTree>
     <p:extLst>
       <p:ext uri="{BB962C8B-B14F-4D97-AF65-F5344CB8AC3E}">
-        <p14:creationId xmlns:p14="http://schemas.microsoft.com/office/powerpoint/2010/main" val="460726603"/>
+        <p14:creationId xmlns:p14="http://schemas.microsoft.com/office/powerpoint/2010/main" val="97978770"/>
       </p:ext>
     </p:extLst>
   </p:cSld>
@@ -10545,7 +15437,7 @@
           <p:cNvPr id="26" name="rule-60-45">
             <a:extLst xmlns:a="http://schemas.openxmlformats.org/drawingml/2006/main">
               <a:ext uri="{FF2B5EF4-FFF2-40B4-BE49-F238E27FC236}">
-                <a16:creationId xmlns:a16="http://schemas.microsoft.com/office/drawing/2014/main" id="{41BA48DA-D648-48A1-AFDF-8466CBFEB2FB}"/>
+                <a16:creationId xmlns:a16="http://schemas.microsoft.com/office/drawing/2014/main" id="{1C1F0F96-6B7B-4857-B2C3-9B0B0B831177}"/>
               </a:ext>
             </a:extLst>
           </p:cNvPr>
@@ -10576,7 +15468,7 @@
           <p:cNvPr id="2" name="chapter-accent">
             <a:extLst xmlns:a="http://schemas.openxmlformats.org/drawingml/2006/main">
               <a:ext uri="{FF2B5EF4-FFF2-40B4-BE49-F238E27FC236}">
-                <a16:creationId xmlns:a16="http://schemas.microsoft.com/office/drawing/2014/main" id="{7057432D-D34D-4B09-9A8C-C40645352CB2}"/>
+                <a16:creationId xmlns:a16="http://schemas.microsoft.com/office/drawing/2014/main" id="{DFCD6311-071B-4F45-AE3E-A699880183C9}"/>
               </a:ext>
             </a:extLst>
           </p:cNvPr>
@@ -10607,7 +15499,7 @@
           <p:cNvPr id="3" name="chapter">
             <a:extLst xmlns:a="http://schemas.openxmlformats.org/drawingml/2006/main">
               <a:ext uri="{FF2B5EF4-FFF2-40B4-BE49-F238E27FC236}">
-                <a16:creationId xmlns:a16="http://schemas.microsoft.com/office/drawing/2014/main" id="{2D9ABA10-31CF-47EA-BF44-AB0F8850F70F}"/>
+                <a16:creationId xmlns:a16="http://schemas.microsoft.com/office/drawing/2014/main" id="{B0D09D80-75A4-4CDC-8CD6-244E2B928982}"/>
               </a:ext>
             </a:extLst>
           </p:cNvPr>
@@ -10657,7 +15549,7 @@
           <p:cNvPr id="4" name="page-number">
             <a:extLst xmlns:a="http://schemas.openxmlformats.org/drawingml/2006/main">
               <a:ext uri="{FF2B5EF4-FFF2-40B4-BE49-F238E27FC236}">
-                <a16:creationId xmlns:a16="http://schemas.microsoft.com/office/drawing/2014/main" id="{ECDDF1F4-A206-466A-A41C-4CF2F56A575B}"/>
+                <a16:creationId xmlns:a16="http://schemas.microsoft.com/office/drawing/2014/main" id="{E8C58A04-2CDA-4252-860A-40F8AAB2B162}"/>
               </a:ext>
             </a:extLst>
           </p:cNvPr>
@@ -10707,7 +15599,7 @@
           <p:cNvPr id="5" name="rule-60-674">
             <a:extLst xmlns:a="http://schemas.openxmlformats.org/drawingml/2006/main">
               <a:ext uri="{FF2B5EF4-FFF2-40B4-BE49-F238E27FC236}">
-                <a16:creationId xmlns:a16="http://schemas.microsoft.com/office/drawing/2014/main" id="{15B0F70F-B888-4EFB-9716-37B854F5EBA6}"/>
+                <a16:creationId xmlns:a16="http://schemas.microsoft.com/office/drawing/2014/main" id="{85752627-6958-419D-857D-BBE7EB21DE69}"/>
               </a:ext>
             </a:extLst>
           </p:cNvPr>
@@ -10738,7 +15630,7 @@
           <p:cNvPr id="6" name="brand">
             <a:extLst xmlns:a="http://schemas.openxmlformats.org/drawingml/2006/main">
               <a:ext uri="{FF2B5EF4-FFF2-40B4-BE49-F238E27FC236}">
-                <a16:creationId xmlns:a16="http://schemas.microsoft.com/office/drawing/2014/main" id="{9FD30889-D2CD-4A92-9D04-6B02554B4EC3}"/>
+                <a16:creationId xmlns:a16="http://schemas.microsoft.com/office/drawing/2014/main" id="{C3536ABF-C026-42AA-A570-A94460D8752C}"/>
               </a:ext>
             </a:extLst>
           </p:cNvPr>
@@ -10788,7 +15680,7 @@
           <p:cNvPr id="7" name="source">
             <a:extLst xmlns:a="http://schemas.openxmlformats.org/drawingml/2006/main">
               <a:ext uri="{FF2B5EF4-FFF2-40B4-BE49-F238E27FC236}">
-                <a16:creationId xmlns:a16="http://schemas.microsoft.com/office/drawing/2014/main" id="{323C3EE6-6AD5-410F-9E0C-6C515701EA71}"/>
+                <a16:creationId xmlns:a16="http://schemas.microsoft.com/office/drawing/2014/main" id="{90EA2B7F-593F-47D4-8C83-07A0942528FC}"/>
               </a:ext>
             </a:extLst>
           </p:cNvPr>
@@ -10838,7 +15730,7 @@
           <p:cNvPr id="8" name="footer-page">
             <a:extLst xmlns:a="http://schemas.openxmlformats.org/drawingml/2006/main">
               <a:ext uri="{FF2B5EF4-FFF2-40B4-BE49-F238E27FC236}">
-                <a16:creationId xmlns:a16="http://schemas.microsoft.com/office/drawing/2014/main" id="{82D28C11-9075-45BE-A112-42EE68EB720B}"/>
+                <a16:creationId xmlns:a16="http://schemas.microsoft.com/office/drawing/2014/main" id="{47C0A191-453A-4886-BEC5-C9819DB79584}"/>
               </a:ext>
             </a:extLst>
           </p:cNvPr>
@@ -10878,7 +15770,7 @@
                   <a:srgbClr val="69766F"/>
                 </a:solidFill>
               </a:rPr>
-              <a:t>02 / 15</a:t>
+              <a:t>02 / 18</a:t>
             </a:r>
           </a:p>
         </p:txBody>
@@ -10888,7 +15780,7 @@
           <p:cNvPr id="9" name="page-title">
             <a:extLst xmlns:a="http://schemas.openxmlformats.org/drawingml/2006/main">
               <a:ext uri="{FF2B5EF4-FFF2-40B4-BE49-F238E27FC236}">
-                <a16:creationId xmlns:a16="http://schemas.microsoft.com/office/drawing/2014/main" id="{2304AB21-28AA-4CAC-9DFE-2D4A6C89C379}"/>
+                <a16:creationId xmlns:a16="http://schemas.microsoft.com/office/drawing/2014/main" id="{B4A2C5FF-CCAF-4313-9A14-1CE03BFCD998}"/>
               </a:ext>
             </a:extLst>
           </p:cNvPr>
@@ -10938,7 +15830,7 @@
           <p:cNvPr id="10" name="page-lead">
             <a:extLst xmlns:a="http://schemas.openxmlformats.org/drawingml/2006/main">
               <a:ext uri="{FF2B5EF4-FFF2-40B4-BE49-F238E27FC236}">
-                <a16:creationId xmlns:a16="http://schemas.microsoft.com/office/drawing/2014/main" id="{061DE304-B577-4002-B98F-CBE892F9A920}"/>
+                <a16:creationId xmlns:a16="http://schemas.microsoft.com/office/drawing/2014/main" id="{8BD8B389-A23A-4375-9C48-C8FB27B2F7E0}"/>
               </a:ext>
             </a:extLst>
           </p:cNvPr>
@@ -10988,7 +15880,7 @@
           <p:cNvPr id="11" name="takeaway">
             <a:extLst xmlns:a="http://schemas.openxmlformats.org/drawingml/2006/main">
               <a:ext uri="{FF2B5EF4-FFF2-40B4-BE49-F238E27FC236}">
-                <a16:creationId xmlns:a16="http://schemas.microsoft.com/office/drawing/2014/main" id="{A8AEE87A-ECFC-452F-9A55-30875E7D0217}"/>
+                <a16:creationId xmlns:a16="http://schemas.microsoft.com/office/drawing/2014/main" id="{79052089-700E-4F3C-9935-CD70B5AC1DF2}"/>
               </a:ext>
             </a:extLst>
           </p:cNvPr>
@@ -11019,7 +15911,7 @@
           <p:cNvPr id="12" name="label-88-210">
             <a:extLst xmlns:a="http://schemas.openxmlformats.org/drawingml/2006/main">
               <a:ext uri="{FF2B5EF4-FFF2-40B4-BE49-F238E27FC236}">
-                <a16:creationId xmlns:a16="http://schemas.microsoft.com/office/drawing/2014/main" id="{6FF32435-62FE-4913-B6AA-6ABB6CC8CFEC}"/>
+                <a16:creationId xmlns:a16="http://schemas.microsoft.com/office/drawing/2014/main" id="{D9E08A99-A608-4CEB-9D4D-2645003B9DC3}"/>
               </a:ext>
             </a:extLst>
           </p:cNvPr>
@@ -11069,7 +15961,7 @@
           <p:cNvPr id="13" name="takeaway-copy">
             <a:extLst xmlns:a="http://schemas.openxmlformats.org/drawingml/2006/main">
               <a:ext uri="{FF2B5EF4-FFF2-40B4-BE49-F238E27FC236}">
-                <a16:creationId xmlns:a16="http://schemas.microsoft.com/office/drawing/2014/main" id="{EA60CF12-64E6-4C27-9932-B47C99B8A250}"/>
+                <a16:creationId xmlns:a16="http://schemas.microsoft.com/office/drawing/2014/main" id="{EB3FA0EF-48A5-4449-8699-D2BFA14FD7B5}"/>
               </a:ext>
             </a:extLst>
           </p:cNvPr>
@@ -11119,7 +16011,7 @@
           <p:cNvPr id="14" name="evidence-bg">
             <a:extLst xmlns:a="http://schemas.openxmlformats.org/drawingml/2006/main">
               <a:ext uri="{FF2B5EF4-FFF2-40B4-BE49-F238E27FC236}">
-                <a16:creationId xmlns:a16="http://schemas.microsoft.com/office/drawing/2014/main" id="{98FFFE16-E67D-41C4-B0C2-E414C2C8A0F8}"/>
+                <a16:creationId xmlns:a16="http://schemas.microsoft.com/office/drawing/2014/main" id="{00C3239B-AE34-4590-A87F-B1FFEA25D500}"/>
               </a:ext>
             </a:extLst>
           </p:cNvPr>
@@ -11152,7 +16044,7 @@
           <p:cNvPr id="15" name="evidence-accent">
             <a:extLst xmlns:a="http://schemas.openxmlformats.org/drawingml/2006/main">
               <a:ext uri="{FF2B5EF4-FFF2-40B4-BE49-F238E27FC236}">
-                <a16:creationId xmlns:a16="http://schemas.microsoft.com/office/drawing/2014/main" id="{31B5FF1E-C65D-4EFF-A076-7B103DA5D5D0}"/>
+                <a16:creationId xmlns:a16="http://schemas.microsoft.com/office/drawing/2014/main" id="{802E9842-C2FD-43FE-948A-807921813D49}"/>
               </a:ext>
             </a:extLst>
           </p:cNvPr>
@@ -11183,7 +16075,7 @@
           <p:cNvPr id="16" name="evidence-title">
             <a:extLst xmlns:a="http://schemas.openxmlformats.org/drawingml/2006/main">
               <a:ext uri="{FF2B5EF4-FFF2-40B4-BE49-F238E27FC236}">
-                <a16:creationId xmlns:a16="http://schemas.microsoft.com/office/drawing/2014/main" id="{D9DCB01B-FA98-4CEE-89C1-8BED7938B9C6}"/>
+                <a16:creationId xmlns:a16="http://schemas.microsoft.com/office/drawing/2014/main" id="{AF73E255-3E87-471A-970C-F304A4AEE899}"/>
               </a:ext>
             </a:extLst>
           </p:cNvPr>
@@ -11233,7 +16125,7 @@
           <p:cNvPr id="17" name="evidence-detail">
             <a:extLst xmlns:a="http://schemas.openxmlformats.org/drawingml/2006/main">
               <a:ext uri="{FF2B5EF4-FFF2-40B4-BE49-F238E27FC236}">
-                <a16:creationId xmlns:a16="http://schemas.microsoft.com/office/drawing/2014/main" id="{0940D02D-38E0-4A35-8B85-509D8FC8A72D}"/>
+                <a16:creationId xmlns:a16="http://schemas.microsoft.com/office/drawing/2014/main" id="{E5DA6C5B-6A31-4A06-9F7F-8D03BD07D30A}"/>
               </a:ext>
             </a:extLst>
           </p:cNvPr>
@@ -11283,7 +16175,7 @@
           <p:cNvPr id="18" name="risk-bg">
             <a:extLst xmlns:a="http://schemas.openxmlformats.org/drawingml/2006/main">
               <a:ext uri="{FF2B5EF4-FFF2-40B4-BE49-F238E27FC236}">
-                <a16:creationId xmlns:a16="http://schemas.microsoft.com/office/drawing/2014/main" id="{A90CDDEA-BFEF-4674-8EF2-4F8F1A483DDF}"/>
+                <a16:creationId xmlns:a16="http://schemas.microsoft.com/office/drawing/2014/main" id="{2C03A23C-6765-4835-B3A2-56ECDE8B84A6}"/>
               </a:ext>
             </a:extLst>
           </p:cNvPr>
@@ -11316,7 +16208,7 @@
           <p:cNvPr id="19" name="risk-accent">
             <a:extLst xmlns:a="http://schemas.openxmlformats.org/drawingml/2006/main">
               <a:ext uri="{FF2B5EF4-FFF2-40B4-BE49-F238E27FC236}">
-                <a16:creationId xmlns:a16="http://schemas.microsoft.com/office/drawing/2014/main" id="{5E2DF90C-A92A-4EC2-9562-19E6610A0656}"/>
+                <a16:creationId xmlns:a16="http://schemas.microsoft.com/office/drawing/2014/main" id="{FDA29901-D20B-45CC-86C2-D8B441DD7D88}"/>
               </a:ext>
             </a:extLst>
           </p:cNvPr>
@@ -11347,7 +16239,7 @@
           <p:cNvPr id="20" name="risk-title">
             <a:extLst xmlns:a="http://schemas.openxmlformats.org/drawingml/2006/main">
               <a:ext uri="{FF2B5EF4-FFF2-40B4-BE49-F238E27FC236}">
-                <a16:creationId xmlns:a16="http://schemas.microsoft.com/office/drawing/2014/main" id="{569A3EAE-AC99-49D8-96FA-9938D3604408}"/>
+                <a16:creationId xmlns:a16="http://schemas.microsoft.com/office/drawing/2014/main" id="{0F79D5C6-986C-48D6-9356-FD7274620228}"/>
               </a:ext>
             </a:extLst>
           </p:cNvPr>
@@ -11397,7 +16289,7 @@
           <p:cNvPr id="21" name="risk-detail">
             <a:extLst xmlns:a="http://schemas.openxmlformats.org/drawingml/2006/main">
               <a:ext uri="{FF2B5EF4-FFF2-40B4-BE49-F238E27FC236}">
-                <a16:creationId xmlns:a16="http://schemas.microsoft.com/office/drawing/2014/main" id="{F2F06D77-3AEB-47C9-A936-0B3CA63239D7}"/>
+                <a16:creationId xmlns:a16="http://schemas.microsoft.com/office/drawing/2014/main" id="{20587FC8-EAC4-4015-941F-D1521EFF8F1C}"/>
               </a:ext>
             </a:extLst>
           </p:cNvPr>
@@ -11447,7 +16339,7 @@
           <p:cNvPr id="22" name="action-bg">
             <a:extLst xmlns:a="http://schemas.openxmlformats.org/drawingml/2006/main">
               <a:ext uri="{FF2B5EF4-FFF2-40B4-BE49-F238E27FC236}">
-                <a16:creationId xmlns:a16="http://schemas.microsoft.com/office/drawing/2014/main" id="{D9CE3BFD-44AA-4EAC-8240-B50318F437F6}"/>
+                <a16:creationId xmlns:a16="http://schemas.microsoft.com/office/drawing/2014/main" id="{7BCC0DBD-D5E3-4C4B-A6E1-74EB819E1FC8}"/>
               </a:ext>
             </a:extLst>
           </p:cNvPr>
@@ -11480,7 +16372,7 @@
           <p:cNvPr id="23" name="action-accent">
             <a:extLst xmlns:a="http://schemas.openxmlformats.org/drawingml/2006/main">
               <a:ext uri="{FF2B5EF4-FFF2-40B4-BE49-F238E27FC236}">
-                <a16:creationId xmlns:a16="http://schemas.microsoft.com/office/drawing/2014/main" id="{E44CA12B-5BC7-438D-9D8B-1057DB7E8C60}"/>
+                <a16:creationId xmlns:a16="http://schemas.microsoft.com/office/drawing/2014/main" id="{22A88391-5B83-4398-A411-837F7A91A2A0}"/>
               </a:ext>
             </a:extLst>
           </p:cNvPr>
@@ -11511,7 +16403,7 @@
           <p:cNvPr id="24" name="action-title">
             <a:extLst xmlns:a="http://schemas.openxmlformats.org/drawingml/2006/main">
               <a:ext uri="{FF2B5EF4-FFF2-40B4-BE49-F238E27FC236}">
-                <a16:creationId xmlns:a16="http://schemas.microsoft.com/office/drawing/2014/main" id="{A5DEBA82-A095-4598-BFED-83D198820F5A}"/>
+                <a16:creationId xmlns:a16="http://schemas.microsoft.com/office/drawing/2014/main" id="{3D016D16-2F31-42E4-A801-CB854951C66F}"/>
               </a:ext>
             </a:extLst>
           </p:cNvPr>
@@ -11561,7 +16453,7 @@
           <p:cNvPr id="25" name="action-detail">
             <a:extLst xmlns:a="http://schemas.openxmlformats.org/drawingml/2006/main">
               <a:ext uri="{FF2B5EF4-FFF2-40B4-BE49-F238E27FC236}">
-                <a16:creationId xmlns:a16="http://schemas.microsoft.com/office/drawing/2014/main" id="{D65C3A02-CEFE-4641-B596-17791548232A}"/>
+                <a16:creationId xmlns:a16="http://schemas.microsoft.com/office/drawing/2014/main" id="{11760892-E2E1-41BC-BF05-C28BF96CDE78}"/>
               </a:ext>
             </a:extLst>
           </p:cNvPr>
@@ -11609,7 +16501,7 @@
     </p:spTree>
     <p:extLst>
       <p:ext uri="{BB962C8B-B14F-4D97-AF65-F5344CB8AC3E}">
-        <p14:creationId xmlns:p14="http://schemas.microsoft.com/office/powerpoint/2010/main" val="121845280"/>
+        <p14:creationId xmlns:p14="http://schemas.microsoft.com/office/powerpoint/2010/main" val="896505507"/>
       </p:ext>
     </p:extLst>
   </p:cSld>
@@ -11640,7 +16532,7 @@
           <p:cNvPr id="50" name="rule-60-45">
             <a:extLst xmlns:a="http://schemas.openxmlformats.org/drawingml/2006/main">
               <a:ext uri="{FF2B5EF4-FFF2-40B4-BE49-F238E27FC236}">
-                <a16:creationId xmlns:a16="http://schemas.microsoft.com/office/drawing/2014/main" id="{DA1DA7E8-3D27-48DF-82D0-DA643562B908}"/>
+                <a16:creationId xmlns:a16="http://schemas.microsoft.com/office/drawing/2014/main" id="{5D0C7CC3-61AE-4285-A024-B78C6C560EF0}"/>
               </a:ext>
             </a:extLst>
           </p:cNvPr>
@@ -11671,7 +16563,7 @@
           <p:cNvPr id="2" name="chapter-accent">
             <a:extLst xmlns:a="http://schemas.openxmlformats.org/drawingml/2006/main">
               <a:ext uri="{FF2B5EF4-FFF2-40B4-BE49-F238E27FC236}">
-                <a16:creationId xmlns:a16="http://schemas.microsoft.com/office/drawing/2014/main" id="{F58D019B-FBAA-4343-A116-849710593D0F}"/>
+                <a16:creationId xmlns:a16="http://schemas.microsoft.com/office/drawing/2014/main" id="{F2B009C9-66BA-46C0-A884-E527FC5275F5}"/>
               </a:ext>
             </a:extLst>
           </p:cNvPr>
@@ -11702,7 +16594,7 @@
           <p:cNvPr id="3" name="chapter">
             <a:extLst xmlns:a="http://schemas.openxmlformats.org/drawingml/2006/main">
               <a:ext uri="{FF2B5EF4-FFF2-40B4-BE49-F238E27FC236}">
-                <a16:creationId xmlns:a16="http://schemas.microsoft.com/office/drawing/2014/main" id="{C75E2868-09F3-4F64-99C7-C349F84D7DD5}"/>
+                <a16:creationId xmlns:a16="http://schemas.microsoft.com/office/drawing/2014/main" id="{F25AF7A7-0C71-4422-AAED-E40E21289C75}"/>
               </a:ext>
             </a:extLst>
           </p:cNvPr>
@@ -11752,7 +16644,7 @@
           <p:cNvPr id="4" name="page-number">
             <a:extLst xmlns:a="http://schemas.openxmlformats.org/drawingml/2006/main">
               <a:ext uri="{FF2B5EF4-FFF2-40B4-BE49-F238E27FC236}">
-                <a16:creationId xmlns:a16="http://schemas.microsoft.com/office/drawing/2014/main" id="{889893E9-C432-4039-91F0-000C07F0040A}"/>
+                <a16:creationId xmlns:a16="http://schemas.microsoft.com/office/drawing/2014/main" id="{82F6C286-64EF-433F-A817-6BE321CA06C5}"/>
               </a:ext>
             </a:extLst>
           </p:cNvPr>
@@ -11802,7 +16694,7 @@
           <p:cNvPr id="5" name="rule-60-674">
             <a:extLst xmlns:a="http://schemas.openxmlformats.org/drawingml/2006/main">
               <a:ext uri="{FF2B5EF4-FFF2-40B4-BE49-F238E27FC236}">
-                <a16:creationId xmlns:a16="http://schemas.microsoft.com/office/drawing/2014/main" id="{8DFBD356-1626-4D7A-9998-5B1CE2204B41}"/>
+                <a16:creationId xmlns:a16="http://schemas.microsoft.com/office/drawing/2014/main" id="{1BC31A68-24CA-49E4-BDE5-2C9DD9C9DEA9}"/>
               </a:ext>
             </a:extLst>
           </p:cNvPr>
@@ -11833,7 +16725,7 @@
           <p:cNvPr id="6" name="brand">
             <a:extLst xmlns:a="http://schemas.openxmlformats.org/drawingml/2006/main">
               <a:ext uri="{FF2B5EF4-FFF2-40B4-BE49-F238E27FC236}">
-                <a16:creationId xmlns:a16="http://schemas.microsoft.com/office/drawing/2014/main" id="{BC89DA5A-4805-44F5-952E-91CCDAAB7CB4}"/>
+                <a16:creationId xmlns:a16="http://schemas.microsoft.com/office/drawing/2014/main" id="{654D330B-711B-429F-B3BF-73C7DA57B006}"/>
               </a:ext>
             </a:extLst>
           </p:cNvPr>
@@ -11883,7 +16775,7 @@
           <p:cNvPr id="7" name="source">
             <a:extLst xmlns:a="http://schemas.openxmlformats.org/drawingml/2006/main">
               <a:ext uri="{FF2B5EF4-FFF2-40B4-BE49-F238E27FC236}">
-                <a16:creationId xmlns:a16="http://schemas.microsoft.com/office/drawing/2014/main" id="{35FA2576-FD18-4F4B-B10C-74FD6A3FA386}"/>
+                <a16:creationId xmlns:a16="http://schemas.microsoft.com/office/drawing/2014/main" id="{0784A574-1986-4735-954D-57E03385EE0F}"/>
               </a:ext>
             </a:extLst>
           </p:cNvPr>
@@ -11933,7 +16825,7 @@
           <p:cNvPr id="8" name="footer-page">
             <a:extLst xmlns:a="http://schemas.openxmlformats.org/drawingml/2006/main">
               <a:ext uri="{FF2B5EF4-FFF2-40B4-BE49-F238E27FC236}">
-                <a16:creationId xmlns:a16="http://schemas.microsoft.com/office/drawing/2014/main" id="{9C1DCD68-2364-43DA-A0C1-2938A641494A}"/>
+                <a16:creationId xmlns:a16="http://schemas.microsoft.com/office/drawing/2014/main" id="{D602B71F-2B63-4C1B-B8FB-FDCDE0DB3351}"/>
               </a:ext>
             </a:extLst>
           </p:cNvPr>
@@ -11973,7 +16865,7 @@
                   <a:srgbClr val="69766F"/>
                 </a:solidFill>
               </a:rPr>
-              <a:t>03 / 15</a:t>
+              <a:t>03 / 18</a:t>
             </a:r>
           </a:p>
         </p:txBody>
@@ -11983,7 +16875,7 @@
           <p:cNvPr id="9" name="page-title">
             <a:extLst xmlns:a="http://schemas.openxmlformats.org/drawingml/2006/main">
               <a:ext uri="{FF2B5EF4-FFF2-40B4-BE49-F238E27FC236}">
-                <a16:creationId xmlns:a16="http://schemas.microsoft.com/office/drawing/2014/main" id="{8AF2BE44-3A7A-476E-BF4B-B7398AEA71A1}"/>
+                <a16:creationId xmlns:a16="http://schemas.microsoft.com/office/drawing/2014/main" id="{5BF2E353-E36B-4B90-BD79-B1FE154A5B06}"/>
               </a:ext>
             </a:extLst>
           </p:cNvPr>
@@ -12033,7 +16925,7 @@
           <p:cNvPr id="10" name="page-lead">
             <a:extLst xmlns:a="http://schemas.openxmlformats.org/drawingml/2006/main">
               <a:ext uri="{FF2B5EF4-FFF2-40B4-BE49-F238E27FC236}">
-                <a16:creationId xmlns:a16="http://schemas.microsoft.com/office/drawing/2014/main" id="{A06EED62-5E37-4310-A261-DD638B7F9EC7}"/>
+                <a16:creationId xmlns:a16="http://schemas.microsoft.com/office/drawing/2014/main" id="{BA55713A-6340-45DA-B72A-326F83C70DD5}"/>
               </a:ext>
             </a:extLst>
           </p:cNvPr>
@@ -12083,7 +16975,7 @@
           <p:cNvPr id="11" name="layer-0">
             <a:extLst xmlns:a="http://schemas.openxmlformats.org/drawingml/2006/main">
               <a:ext uri="{FF2B5EF4-FFF2-40B4-BE49-F238E27FC236}">
-                <a16:creationId xmlns:a16="http://schemas.microsoft.com/office/drawing/2014/main" id="{5A4D058C-B687-4409-BE97-CD5DA5146D8A}"/>
+                <a16:creationId xmlns:a16="http://schemas.microsoft.com/office/drawing/2014/main" id="{AA1CDE80-3785-42D2-9739-FE598222A05F}"/>
               </a:ext>
             </a:extLst>
           </p:cNvPr>
@@ -12116,7 +17008,7 @@
           <p:cNvPr id="12" name="layer-accent-0">
             <a:extLst xmlns:a="http://schemas.openxmlformats.org/drawingml/2006/main">
               <a:ext uri="{FF2B5EF4-FFF2-40B4-BE49-F238E27FC236}">
-                <a16:creationId xmlns:a16="http://schemas.microsoft.com/office/drawing/2014/main" id="{E6118302-8E14-4A4C-B00D-74C1013D43F6}"/>
+                <a16:creationId xmlns:a16="http://schemas.microsoft.com/office/drawing/2014/main" id="{AC2A6FB7-7656-4A31-A56D-AAA1547ED410}"/>
               </a:ext>
             </a:extLst>
           </p:cNvPr>
@@ -12147,7 +17039,7 @@
           <p:cNvPr id="13" name="layer-no-0">
             <a:extLst xmlns:a="http://schemas.openxmlformats.org/drawingml/2006/main">
               <a:ext uri="{FF2B5EF4-FFF2-40B4-BE49-F238E27FC236}">
-                <a16:creationId xmlns:a16="http://schemas.microsoft.com/office/drawing/2014/main" id="{D478E133-02AB-4047-A38B-B09B55DB17EA}"/>
+                <a16:creationId xmlns:a16="http://schemas.microsoft.com/office/drawing/2014/main" id="{C9F0C5C5-BEE7-46D4-85ED-1574B15F768B}"/>
               </a:ext>
             </a:extLst>
           </p:cNvPr>
@@ -12197,7 +17089,7 @@
           <p:cNvPr id="14" name="layer-name-0">
             <a:extLst xmlns:a="http://schemas.openxmlformats.org/drawingml/2006/main">
               <a:ext uri="{FF2B5EF4-FFF2-40B4-BE49-F238E27FC236}">
-                <a16:creationId xmlns:a16="http://schemas.microsoft.com/office/drawing/2014/main" id="{EDBDB60F-408B-4A08-B089-6A742E6D96CE}"/>
+                <a16:creationId xmlns:a16="http://schemas.microsoft.com/office/drawing/2014/main" id="{9E971550-8D97-43ED-A193-67D5ACBB62FB}"/>
               </a:ext>
             </a:extLst>
           </p:cNvPr>
@@ -12247,7 +17139,7 @@
           <p:cNvPr id="15" name="layer-role-0">
             <a:extLst xmlns:a="http://schemas.openxmlformats.org/drawingml/2006/main">
               <a:ext uri="{FF2B5EF4-FFF2-40B4-BE49-F238E27FC236}">
-                <a16:creationId xmlns:a16="http://schemas.microsoft.com/office/drawing/2014/main" id="{4DEBA523-9D53-4F0C-822E-5A9745081E92}"/>
+                <a16:creationId xmlns:a16="http://schemas.microsoft.com/office/drawing/2014/main" id="{523E837D-901D-446E-AF3D-54041ADF048C}"/>
               </a:ext>
             </a:extLst>
           </p:cNvPr>
@@ -12297,7 +17189,7 @@
           <p:cNvPr id="16" name="entity-a-0-bg">
             <a:extLst xmlns:a="http://schemas.openxmlformats.org/drawingml/2006/main">
               <a:ext uri="{FF2B5EF4-FFF2-40B4-BE49-F238E27FC236}">
-                <a16:creationId xmlns:a16="http://schemas.microsoft.com/office/drawing/2014/main" id="{0330FC13-30FE-49C9-932E-705E12B642E7}"/>
+                <a16:creationId xmlns:a16="http://schemas.microsoft.com/office/drawing/2014/main" id="{90076E4E-4EB7-44F0-B61F-CC9058A6CB22}"/>
               </a:ext>
             </a:extLst>
           </p:cNvPr>
@@ -12330,7 +17222,7 @@
           <p:cNvPr id="17" name="entity-a-0-accent">
             <a:extLst xmlns:a="http://schemas.openxmlformats.org/drawingml/2006/main">
               <a:ext uri="{FF2B5EF4-FFF2-40B4-BE49-F238E27FC236}">
-                <a16:creationId xmlns:a16="http://schemas.microsoft.com/office/drawing/2014/main" id="{86A8D0F7-F8D5-4101-BAEA-AF50D07AB965}"/>
+                <a16:creationId xmlns:a16="http://schemas.microsoft.com/office/drawing/2014/main" id="{F34363EA-52C5-44B1-8EAA-69293D91A136}"/>
               </a:ext>
             </a:extLst>
           </p:cNvPr>
@@ -12361,7 +17253,7 @@
           <p:cNvPr id="18" name="entity-a-0-title">
             <a:extLst xmlns:a="http://schemas.openxmlformats.org/drawingml/2006/main">
               <a:ext uri="{FF2B5EF4-FFF2-40B4-BE49-F238E27FC236}">
-                <a16:creationId xmlns:a16="http://schemas.microsoft.com/office/drawing/2014/main" id="{86BB4D45-B98E-4843-909A-67380359D6CA}"/>
+                <a16:creationId xmlns:a16="http://schemas.microsoft.com/office/drawing/2014/main" id="{185DB473-FD56-4C48-B23B-4E4812214D35}"/>
               </a:ext>
             </a:extLst>
           </p:cNvPr>
@@ -12411,7 +17303,7 @@
           <p:cNvPr id="19" name="entity-a-0-detail">
             <a:extLst xmlns:a="http://schemas.openxmlformats.org/drawingml/2006/main">
               <a:ext uri="{FF2B5EF4-FFF2-40B4-BE49-F238E27FC236}">
-                <a16:creationId xmlns:a16="http://schemas.microsoft.com/office/drawing/2014/main" id="{1AD648D8-1CF6-4A21-AC92-27473AC078EB}"/>
+                <a16:creationId xmlns:a16="http://schemas.microsoft.com/office/drawing/2014/main" id="{2F04F965-3451-456B-9001-0C0D1F18F39B}"/>
               </a:ext>
             </a:extLst>
           </p:cNvPr>
@@ -12461,7 +17353,7 @@
           <p:cNvPr id="20" name="entity-b-0-bg">
             <a:extLst xmlns:a="http://schemas.openxmlformats.org/drawingml/2006/main">
               <a:ext uri="{FF2B5EF4-FFF2-40B4-BE49-F238E27FC236}">
-                <a16:creationId xmlns:a16="http://schemas.microsoft.com/office/drawing/2014/main" id="{E55B2028-59E9-4A10-908D-6B62D4B2EC9D}"/>
+                <a16:creationId xmlns:a16="http://schemas.microsoft.com/office/drawing/2014/main" id="{573267DD-6ACA-430F-B41A-0701B515682E}"/>
               </a:ext>
             </a:extLst>
           </p:cNvPr>
@@ -12494,7 +17386,7 @@
           <p:cNvPr id="21" name="entity-b-0-accent">
             <a:extLst xmlns:a="http://schemas.openxmlformats.org/drawingml/2006/main">
               <a:ext uri="{FF2B5EF4-FFF2-40B4-BE49-F238E27FC236}">
-                <a16:creationId xmlns:a16="http://schemas.microsoft.com/office/drawing/2014/main" id="{9CC4A31D-BF9F-460B-B8BF-CF44F26D3666}"/>
+                <a16:creationId xmlns:a16="http://schemas.microsoft.com/office/drawing/2014/main" id="{517D2BF1-1B2A-4C6D-8118-04BCA650D410}"/>
               </a:ext>
             </a:extLst>
           </p:cNvPr>
@@ -12525,7 +17417,7 @@
           <p:cNvPr id="22" name="entity-b-0-title">
             <a:extLst xmlns:a="http://schemas.openxmlformats.org/drawingml/2006/main">
               <a:ext uri="{FF2B5EF4-FFF2-40B4-BE49-F238E27FC236}">
-                <a16:creationId xmlns:a16="http://schemas.microsoft.com/office/drawing/2014/main" id="{C17B7003-2A41-45B2-93DC-C65F187263EC}"/>
+                <a16:creationId xmlns:a16="http://schemas.microsoft.com/office/drawing/2014/main" id="{E429A058-458E-43A0-82D0-7E320192D1ED}"/>
               </a:ext>
             </a:extLst>
           </p:cNvPr>
@@ -12575,7 +17467,7 @@
           <p:cNvPr id="23" name="entity-b-0-detail">
             <a:extLst xmlns:a="http://schemas.openxmlformats.org/drawingml/2006/main">
               <a:ext uri="{FF2B5EF4-FFF2-40B4-BE49-F238E27FC236}">
-                <a16:creationId xmlns:a16="http://schemas.microsoft.com/office/drawing/2014/main" id="{FD039646-68D5-4D61-83C8-2A19959B91BF}"/>
+                <a16:creationId xmlns:a16="http://schemas.microsoft.com/office/drawing/2014/main" id="{12AB9973-52C8-47EF-85D8-F3D88FA5C7B6}"/>
               </a:ext>
             </a:extLst>
           </p:cNvPr>
@@ -12625,7 +17517,7 @@
           <p:cNvPr id="24" name="layer-1">
             <a:extLst xmlns:a="http://schemas.openxmlformats.org/drawingml/2006/main">
               <a:ext uri="{FF2B5EF4-FFF2-40B4-BE49-F238E27FC236}">
-                <a16:creationId xmlns:a16="http://schemas.microsoft.com/office/drawing/2014/main" id="{397ACF89-96BB-4FE9-8986-AA454A326502}"/>
+                <a16:creationId xmlns:a16="http://schemas.microsoft.com/office/drawing/2014/main" id="{53AE9DA8-1F88-4D4C-9F17-52416729F0F1}"/>
               </a:ext>
             </a:extLst>
           </p:cNvPr>
@@ -12658,7 +17550,7 @@
           <p:cNvPr id="25" name="layer-accent-1">
             <a:extLst xmlns:a="http://schemas.openxmlformats.org/drawingml/2006/main">
               <a:ext uri="{FF2B5EF4-FFF2-40B4-BE49-F238E27FC236}">
-                <a16:creationId xmlns:a16="http://schemas.microsoft.com/office/drawing/2014/main" id="{3B35516C-88C0-437B-BD39-19FF1F9B0056}"/>
+                <a16:creationId xmlns:a16="http://schemas.microsoft.com/office/drawing/2014/main" id="{520D909F-3C42-40B0-8A2C-70011DD1ACC7}"/>
               </a:ext>
             </a:extLst>
           </p:cNvPr>
@@ -12689,7 +17581,7 @@
           <p:cNvPr id="26" name="layer-no-1">
             <a:extLst xmlns:a="http://schemas.openxmlformats.org/drawingml/2006/main">
               <a:ext uri="{FF2B5EF4-FFF2-40B4-BE49-F238E27FC236}">
-                <a16:creationId xmlns:a16="http://schemas.microsoft.com/office/drawing/2014/main" id="{F0A5F96C-308F-4ED3-BFC3-4FF17987A0F4}"/>
+                <a16:creationId xmlns:a16="http://schemas.microsoft.com/office/drawing/2014/main" id="{98283908-5581-4D8C-9687-DD0F3BB76424}"/>
               </a:ext>
             </a:extLst>
           </p:cNvPr>
@@ -12739,7 +17631,7 @@
           <p:cNvPr id="27" name="layer-name-1">
             <a:extLst xmlns:a="http://schemas.openxmlformats.org/drawingml/2006/main">
               <a:ext uri="{FF2B5EF4-FFF2-40B4-BE49-F238E27FC236}">
-                <a16:creationId xmlns:a16="http://schemas.microsoft.com/office/drawing/2014/main" id="{FA7F4B30-32DA-4198-882E-5FC149BFAD16}"/>
+                <a16:creationId xmlns:a16="http://schemas.microsoft.com/office/drawing/2014/main" id="{3512EBD1-0C23-44D2-BB90-0ED0AD9DFAE0}"/>
               </a:ext>
             </a:extLst>
           </p:cNvPr>
@@ -12789,7 +17681,7 @@
           <p:cNvPr id="28" name="layer-role-1">
             <a:extLst xmlns:a="http://schemas.openxmlformats.org/drawingml/2006/main">
               <a:ext uri="{FF2B5EF4-FFF2-40B4-BE49-F238E27FC236}">
-                <a16:creationId xmlns:a16="http://schemas.microsoft.com/office/drawing/2014/main" id="{EE6FCA86-927F-48C3-9C35-CEA40E92E014}"/>
+                <a16:creationId xmlns:a16="http://schemas.microsoft.com/office/drawing/2014/main" id="{65165FD9-4209-4181-8FF1-916E7DA88853}"/>
               </a:ext>
             </a:extLst>
           </p:cNvPr>
@@ -12839,7 +17731,7 @@
           <p:cNvPr id="29" name="entity-a-1-bg">
             <a:extLst xmlns:a="http://schemas.openxmlformats.org/drawingml/2006/main">
               <a:ext uri="{FF2B5EF4-FFF2-40B4-BE49-F238E27FC236}">
-                <a16:creationId xmlns:a16="http://schemas.microsoft.com/office/drawing/2014/main" id="{629D61E9-BBE4-49CD-87AD-7668B51FD8F6}"/>
+                <a16:creationId xmlns:a16="http://schemas.microsoft.com/office/drawing/2014/main" id="{95E012EA-80FA-4511-98F4-6258F3B4F9B5}"/>
               </a:ext>
             </a:extLst>
           </p:cNvPr>
@@ -12872,7 +17764,7 @@
           <p:cNvPr id="30" name="entity-a-1-accent">
             <a:extLst xmlns:a="http://schemas.openxmlformats.org/drawingml/2006/main">
               <a:ext uri="{FF2B5EF4-FFF2-40B4-BE49-F238E27FC236}">
-                <a16:creationId xmlns:a16="http://schemas.microsoft.com/office/drawing/2014/main" id="{F46AD113-F3B3-42B4-8C88-ED870F90FCB4}"/>
+                <a16:creationId xmlns:a16="http://schemas.microsoft.com/office/drawing/2014/main" id="{CEDA045B-51B0-4CC9-9001-F9A9891B82DE}"/>
               </a:ext>
             </a:extLst>
           </p:cNvPr>
@@ -12903,7 +17795,7 @@
           <p:cNvPr id="31" name="entity-a-1-title">
             <a:extLst xmlns:a="http://schemas.openxmlformats.org/drawingml/2006/main">
               <a:ext uri="{FF2B5EF4-FFF2-40B4-BE49-F238E27FC236}">
-                <a16:creationId xmlns:a16="http://schemas.microsoft.com/office/drawing/2014/main" id="{EA04D37C-F8C5-43F7-9CD1-B610FCCC67FE}"/>
+                <a16:creationId xmlns:a16="http://schemas.microsoft.com/office/drawing/2014/main" id="{96804BD6-0D9D-47FB-B546-978C8B5181CB}"/>
               </a:ext>
             </a:extLst>
           </p:cNvPr>
@@ -12953,7 +17845,7 @@
           <p:cNvPr id="32" name="entity-a-1-detail">
             <a:extLst xmlns:a="http://schemas.openxmlformats.org/drawingml/2006/main">
               <a:ext uri="{FF2B5EF4-FFF2-40B4-BE49-F238E27FC236}">
-                <a16:creationId xmlns:a16="http://schemas.microsoft.com/office/drawing/2014/main" id="{1B3480BA-E4DF-412B-BAE0-56C918D0D4EE}"/>
+                <a16:creationId xmlns:a16="http://schemas.microsoft.com/office/drawing/2014/main" id="{3E7AA4E0-1C86-4DAA-B0D3-416C0B588B69}"/>
               </a:ext>
             </a:extLst>
           </p:cNvPr>
@@ -13003,7 +17895,7 @@
           <p:cNvPr id="33" name="entity-b-1-bg">
             <a:extLst xmlns:a="http://schemas.openxmlformats.org/drawingml/2006/main">
               <a:ext uri="{FF2B5EF4-FFF2-40B4-BE49-F238E27FC236}">
-                <a16:creationId xmlns:a16="http://schemas.microsoft.com/office/drawing/2014/main" id="{3BACF317-93E7-43D2-AFAB-B6F65A956C4E}"/>
+                <a16:creationId xmlns:a16="http://schemas.microsoft.com/office/drawing/2014/main" id="{6C5FC9FA-6524-451B-903B-A33BFD7C6928}"/>
               </a:ext>
             </a:extLst>
           </p:cNvPr>
@@ -13036,7 +17928,7 @@
           <p:cNvPr id="34" name="entity-b-1-accent">
             <a:extLst xmlns:a="http://schemas.openxmlformats.org/drawingml/2006/main">
               <a:ext uri="{FF2B5EF4-FFF2-40B4-BE49-F238E27FC236}">
-                <a16:creationId xmlns:a16="http://schemas.microsoft.com/office/drawing/2014/main" id="{5F920BB9-2A1A-408F-8567-4A21517F5D7C}"/>
+                <a16:creationId xmlns:a16="http://schemas.microsoft.com/office/drawing/2014/main" id="{80F126D2-43D4-4E3D-8005-2E2C65710D2B}"/>
               </a:ext>
             </a:extLst>
           </p:cNvPr>
@@ -13067,7 +17959,7 @@
           <p:cNvPr id="35" name="entity-b-1-title">
             <a:extLst xmlns:a="http://schemas.openxmlformats.org/drawingml/2006/main">
               <a:ext uri="{FF2B5EF4-FFF2-40B4-BE49-F238E27FC236}">
-                <a16:creationId xmlns:a16="http://schemas.microsoft.com/office/drawing/2014/main" id="{B58AE302-7602-4EC5-B738-0ED43D55B864}"/>
+                <a16:creationId xmlns:a16="http://schemas.microsoft.com/office/drawing/2014/main" id="{7BC73A26-3A39-459D-BF59-187C2C6527AA}"/>
               </a:ext>
             </a:extLst>
           </p:cNvPr>
@@ -13117,7 +18009,7 @@
           <p:cNvPr id="36" name="entity-b-1-detail">
             <a:extLst xmlns:a="http://schemas.openxmlformats.org/drawingml/2006/main">
               <a:ext uri="{FF2B5EF4-FFF2-40B4-BE49-F238E27FC236}">
-                <a16:creationId xmlns:a16="http://schemas.microsoft.com/office/drawing/2014/main" id="{AE397EB9-BB03-43DA-80CA-E032C579B515}"/>
+                <a16:creationId xmlns:a16="http://schemas.microsoft.com/office/drawing/2014/main" id="{653F088B-696C-4682-90B5-DDFFDD1062D0}"/>
               </a:ext>
             </a:extLst>
           </p:cNvPr>
@@ -13167,7 +18059,7 @@
           <p:cNvPr id="37" name="layer-2">
             <a:extLst xmlns:a="http://schemas.openxmlformats.org/drawingml/2006/main">
               <a:ext uri="{FF2B5EF4-FFF2-40B4-BE49-F238E27FC236}">
-                <a16:creationId xmlns:a16="http://schemas.microsoft.com/office/drawing/2014/main" id="{C422C381-8289-4B6C-990A-5369B2097C6F}"/>
+                <a16:creationId xmlns:a16="http://schemas.microsoft.com/office/drawing/2014/main" id="{353E3DA6-6BEE-462A-8716-1C6464E726BB}"/>
               </a:ext>
             </a:extLst>
           </p:cNvPr>
@@ -13200,7 +18092,7 @@
           <p:cNvPr id="38" name="layer-accent-2">
             <a:extLst xmlns:a="http://schemas.openxmlformats.org/drawingml/2006/main">
               <a:ext uri="{FF2B5EF4-FFF2-40B4-BE49-F238E27FC236}">
-                <a16:creationId xmlns:a16="http://schemas.microsoft.com/office/drawing/2014/main" id="{FDF0762A-7D90-43DD-A001-AA46FE55EC3D}"/>
+                <a16:creationId xmlns:a16="http://schemas.microsoft.com/office/drawing/2014/main" id="{BDE1BEBA-B827-457B-86CF-6ECDD7950144}"/>
               </a:ext>
             </a:extLst>
           </p:cNvPr>
@@ -13231,7 +18123,7 @@
           <p:cNvPr id="39" name="layer-no-2">
             <a:extLst xmlns:a="http://schemas.openxmlformats.org/drawingml/2006/main">
               <a:ext uri="{FF2B5EF4-FFF2-40B4-BE49-F238E27FC236}">
-                <a16:creationId xmlns:a16="http://schemas.microsoft.com/office/drawing/2014/main" id="{D14004E4-6F24-4ED3-B0CB-78013F2633AB}"/>
+                <a16:creationId xmlns:a16="http://schemas.microsoft.com/office/drawing/2014/main" id="{C5158C3A-4482-4BCE-BACD-E479E97744DF}"/>
               </a:ext>
             </a:extLst>
           </p:cNvPr>
@@ -13281,7 +18173,7 @@
           <p:cNvPr id="40" name="layer-name-2">
             <a:extLst xmlns:a="http://schemas.openxmlformats.org/drawingml/2006/main">
               <a:ext uri="{FF2B5EF4-FFF2-40B4-BE49-F238E27FC236}">
-                <a16:creationId xmlns:a16="http://schemas.microsoft.com/office/drawing/2014/main" id="{57D5FDB4-E459-4CB5-A470-84D80D95335C}"/>
+                <a16:creationId xmlns:a16="http://schemas.microsoft.com/office/drawing/2014/main" id="{A4D51C81-39DA-4849-B53F-89511B85B455}"/>
               </a:ext>
             </a:extLst>
           </p:cNvPr>
@@ -13331,7 +18223,7 @@
           <p:cNvPr id="41" name="layer-role-2">
             <a:extLst xmlns:a="http://schemas.openxmlformats.org/drawingml/2006/main">
               <a:ext uri="{FF2B5EF4-FFF2-40B4-BE49-F238E27FC236}">
-                <a16:creationId xmlns:a16="http://schemas.microsoft.com/office/drawing/2014/main" id="{28BC7122-4FF0-4D5B-8350-95AF539B6114}"/>
+                <a16:creationId xmlns:a16="http://schemas.microsoft.com/office/drawing/2014/main" id="{811CFAE9-A24E-47E8-BD9D-6616DDCCE7F4}"/>
               </a:ext>
             </a:extLst>
           </p:cNvPr>
@@ -13381,7 +18273,7 @@
           <p:cNvPr id="42" name="entity-a-2-bg">
             <a:extLst xmlns:a="http://schemas.openxmlformats.org/drawingml/2006/main">
               <a:ext uri="{FF2B5EF4-FFF2-40B4-BE49-F238E27FC236}">
-                <a16:creationId xmlns:a16="http://schemas.microsoft.com/office/drawing/2014/main" id="{2D099BAB-A9E2-4A90-8B95-6996C7465E34}"/>
+                <a16:creationId xmlns:a16="http://schemas.microsoft.com/office/drawing/2014/main" id="{5C27294F-0DFC-4678-B933-BC2CCC7DBE55}"/>
               </a:ext>
             </a:extLst>
           </p:cNvPr>
@@ -13414,7 +18306,7 @@
           <p:cNvPr id="43" name="entity-a-2-accent">
             <a:extLst xmlns:a="http://schemas.openxmlformats.org/drawingml/2006/main">
               <a:ext uri="{FF2B5EF4-FFF2-40B4-BE49-F238E27FC236}">
-                <a16:creationId xmlns:a16="http://schemas.microsoft.com/office/drawing/2014/main" id="{A309E447-3242-427F-8BA2-D87E1EDF9382}"/>
+                <a16:creationId xmlns:a16="http://schemas.microsoft.com/office/drawing/2014/main" id="{DB6D58B2-1E4D-46AD-BE70-DCF973D604F1}"/>
               </a:ext>
             </a:extLst>
           </p:cNvPr>
@@ -13445,7 +18337,7 @@
           <p:cNvPr id="44" name="entity-a-2-title">
             <a:extLst xmlns:a="http://schemas.openxmlformats.org/drawingml/2006/main">
               <a:ext uri="{FF2B5EF4-FFF2-40B4-BE49-F238E27FC236}">
-                <a16:creationId xmlns:a16="http://schemas.microsoft.com/office/drawing/2014/main" id="{3C4FDF3D-3FA6-4F19-BEA3-B654D0086A61}"/>
+                <a16:creationId xmlns:a16="http://schemas.microsoft.com/office/drawing/2014/main" id="{F9844166-93F8-4B69-9866-84A09961E123}"/>
               </a:ext>
             </a:extLst>
           </p:cNvPr>
@@ -13495,7 +18387,7 @@
           <p:cNvPr id="45" name="entity-a-2-detail">
             <a:extLst xmlns:a="http://schemas.openxmlformats.org/drawingml/2006/main">
               <a:ext uri="{FF2B5EF4-FFF2-40B4-BE49-F238E27FC236}">
-                <a16:creationId xmlns:a16="http://schemas.microsoft.com/office/drawing/2014/main" id="{D315052E-9C96-474D-9A79-A4BCF5D68830}"/>
+                <a16:creationId xmlns:a16="http://schemas.microsoft.com/office/drawing/2014/main" id="{EB076434-A37C-44E1-B5AB-D4FA98EE86F0}"/>
               </a:ext>
             </a:extLst>
           </p:cNvPr>
@@ -13545,7 +18437,7 @@
           <p:cNvPr id="46" name="entity-b-2-bg">
             <a:extLst xmlns:a="http://schemas.openxmlformats.org/drawingml/2006/main">
               <a:ext uri="{FF2B5EF4-FFF2-40B4-BE49-F238E27FC236}">
-                <a16:creationId xmlns:a16="http://schemas.microsoft.com/office/drawing/2014/main" id="{9149EC3A-BC96-49A0-BC94-2910F74F474E}"/>
+                <a16:creationId xmlns:a16="http://schemas.microsoft.com/office/drawing/2014/main" id="{5D6ECB9D-E100-4BEE-B077-57AB1026DF51}"/>
               </a:ext>
             </a:extLst>
           </p:cNvPr>
@@ -13578,7 +18470,7 @@
           <p:cNvPr id="47" name="entity-b-2-accent">
             <a:extLst xmlns:a="http://schemas.openxmlformats.org/drawingml/2006/main">
               <a:ext uri="{FF2B5EF4-FFF2-40B4-BE49-F238E27FC236}">
-                <a16:creationId xmlns:a16="http://schemas.microsoft.com/office/drawing/2014/main" id="{B69740B4-24C3-49A9-9086-01633050C170}"/>
+                <a16:creationId xmlns:a16="http://schemas.microsoft.com/office/drawing/2014/main" id="{5D25FF55-FF2F-4BEA-8A27-71CA4D9C84CA}"/>
               </a:ext>
             </a:extLst>
           </p:cNvPr>
@@ -13609,7 +18501,7 @@
           <p:cNvPr id="48" name="entity-b-2-title">
             <a:extLst xmlns:a="http://schemas.openxmlformats.org/drawingml/2006/main">
               <a:ext uri="{FF2B5EF4-FFF2-40B4-BE49-F238E27FC236}">
-                <a16:creationId xmlns:a16="http://schemas.microsoft.com/office/drawing/2014/main" id="{2FAEACF6-CD24-4EF2-BD40-3DF759791F1E}"/>
+                <a16:creationId xmlns:a16="http://schemas.microsoft.com/office/drawing/2014/main" id="{C9FA344D-AB4F-45E4-B4CF-673ABA526EFC}"/>
               </a:ext>
             </a:extLst>
           </p:cNvPr>
@@ -13659,7 +18551,7 @@
           <p:cNvPr id="49" name="entity-b-2-detail">
             <a:extLst xmlns:a="http://schemas.openxmlformats.org/drawingml/2006/main">
               <a:ext uri="{FF2B5EF4-FFF2-40B4-BE49-F238E27FC236}">
-                <a16:creationId xmlns:a16="http://schemas.microsoft.com/office/drawing/2014/main" id="{287AAA87-3F82-4F5B-9160-BF26F57508B4}"/>
+                <a16:creationId xmlns:a16="http://schemas.microsoft.com/office/drawing/2014/main" id="{E02E880F-32C4-4CC5-9597-60697F438ECA}"/>
               </a:ext>
             </a:extLst>
           </p:cNvPr>
@@ -13707,7 +18599,7 @@
     </p:spTree>
     <p:extLst>
       <p:ext uri="{BB962C8B-B14F-4D97-AF65-F5344CB8AC3E}">
-        <p14:creationId xmlns:p14="http://schemas.microsoft.com/office/powerpoint/2010/main" val="1767827251"/>
+        <p14:creationId xmlns:p14="http://schemas.microsoft.com/office/powerpoint/2010/main" val="535186465"/>
       </p:ext>
     </p:extLst>
   </p:cSld>
@@ -13738,7 +18630,7 @@
           <p:cNvPr id="56" name="rule-60-45">
             <a:extLst xmlns:a="http://schemas.openxmlformats.org/drawingml/2006/main">
               <a:ext uri="{FF2B5EF4-FFF2-40B4-BE49-F238E27FC236}">
-                <a16:creationId xmlns:a16="http://schemas.microsoft.com/office/drawing/2014/main" id="{E9F2ED62-43C8-42B3-87F3-6F749C3B942A}"/>
+                <a16:creationId xmlns:a16="http://schemas.microsoft.com/office/drawing/2014/main" id="{B4850FF6-175E-47BA-93D7-8D855C01C3B5}"/>
               </a:ext>
             </a:extLst>
           </p:cNvPr>
@@ -13769,7 +18661,7 @@
           <p:cNvPr id="2" name="chapter-accent">
             <a:extLst xmlns:a="http://schemas.openxmlformats.org/drawingml/2006/main">
               <a:ext uri="{FF2B5EF4-FFF2-40B4-BE49-F238E27FC236}">
-                <a16:creationId xmlns:a16="http://schemas.microsoft.com/office/drawing/2014/main" id="{F3B919AA-DBB9-467A-8882-88E907164A79}"/>
+                <a16:creationId xmlns:a16="http://schemas.microsoft.com/office/drawing/2014/main" id="{EF903F5D-69CA-41D0-9B21-C0C548A78FB0}"/>
               </a:ext>
             </a:extLst>
           </p:cNvPr>
@@ -13800,7 +18692,7 @@
           <p:cNvPr id="3" name="chapter">
             <a:extLst xmlns:a="http://schemas.openxmlformats.org/drawingml/2006/main">
               <a:ext uri="{FF2B5EF4-FFF2-40B4-BE49-F238E27FC236}">
-                <a16:creationId xmlns:a16="http://schemas.microsoft.com/office/drawing/2014/main" id="{CA049F77-F545-477F-8BAC-B1B90D542CE3}"/>
+                <a16:creationId xmlns:a16="http://schemas.microsoft.com/office/drawing/2014/main" id="{EDC0424F-0CF0-47CD-AC4F-ABB9E4F75909}"/>
               </a:ext>
             </a:extLst>
           </p:cNvPr>
@@ -13850,7 +18742,7 @@
           <p:cNvPr id="4" name="page-number">
             <a:extLst xmlns:a="http://schemas.openxmlformats.org/drawingml/2006/main">
               <a:ext uri="{FF2B5EF4-FFF2-40B4-BE49-F238E27FC236}">
-                <a16:creationId xmlns:a16="http://schemas.microsoft.com/office/drawing/2014/main" id="{43D7C1DA-AD4C-4DDB-8F8D-2E3BB6E62C55}"/>
+                <a16:creationId xmlns:a16="http://schemas.microsoft.com/office/drawing/2014/main" id="{673B6B5A-E6B4-4DFF-BA62-015C0920A553}"/>
               </a:ext>
             </a:extLst>
           </p:cNvPr>
@@ -13900,7 +18792,7 @@
           <p:cNvPr id="5" name="rule-60-674">
             <a:extLst xmlns:a="http://schemas.openxmlformats.org/drawingml/2006/main">
               <a:ext uri="{FF2B5EF4-FFF2-40B4-BE49-F238E27FC236}">
-                <a16:creationId xmlns:a16="http://schemas.microsoft.com/office/drawing/2014/main" id="{9E9A7A71-2DF6-4C7F-98AB-47134AA5564F}"/>
+                <a16:creationId xmlns:a16="http://schemas.microsoft.com/office/drawing/2014/main" id="{75D652A9-3C00-45D5-9C4D-D397160D6EF2}"/>
               </a:ext>
             </a:extLst>
           </p:cNvPr>
@@ -13931,7 +18823,7 @@
           <p:cNvPr id="6" name="brand">
             <a:extLst xmlns:a="http://schemas.openxmlformats.org/drawingml/2006/main">
               <a:ext uri="{FF2B5EF4-FFF2-40B4-BE49-F238E27FC236}">
-                <a16:creationId xmlns:a16="http://schemas.microsoft.com/office/drawing/2014/main" id="{0EAD2CF3-68E9-454F-97CF-1F4269B7C3BC}"/>
+                <a16:creationId xmlns:a16="http://schemas.microsoft.com/office/drawing/2014/main" id="{A3E1F087-4E3D-4F07-BFDA-5E45E080AD2F}"/>
               </a:ext>
             </a:extLst>
           </p:cNvPr>
@@ -13981,7 +18873,7 @@
           <p:cNvPr id="7" name="source">
             <a:extLst xmlns:a="http://schemas.openxmlformats.org/drawingml/2006/main">
               <a:ext uri="{FF2B5EF4-FFF2-40B4-BE49-F238E27FC236}">
-                <a16:creationId xmlns:a16="http://schemas.microsoft.com/office/drawing/2014/main" id="{6FA50983-C1B3-4925-8A88-72B6C28BA655}"/>
+                <a16:creationId xmlns:a16="http://schemas.microsoft.com/office/drawing/2014/main" id="{20643B36-60A2-43D6-A477-A1E8EEB7B5E2}"/>
               </a:ext>
             </a:extLst>
           </p:cNvPr>
@@ -14031,7 +18923,7 @@
           <p:cNvPr id="8" name="footer-page">
             <a:extLst xmlns:a="http://schemas.openxmlformats.org/drawingml/2006/main">
               <a:ext uri="{FF2B5EF4-FFF2-40B4-BE49-F238E27FC236}">
-                <a16:creationId xmlns:a16="http://schemas.microsoft.com/office/drawing/2014/main" id="{7917DC83-D7DE-49F1-AEC8-7AFFE27F4C2E}"/>
+                <a16:creationId xmlns:a16="http://schemas.microsoft.com/office/drawing/2014/main" id="{32486B1D-D1F4-4B8A-9175-EE1554A12235}"/>
               </a:ext>
             </a:extLst>
           </p:cNvPr>
@@ -14071,7 +18963,7 @@
                   <a:srgbClr val="69766F"/>
                 </a:solidFill>
               </a:rPr>
-              <a:t>04 / 15</a:t>
+              <a:t>04 / 18</a:t>
             </a:r>
           </a:p>
         </p:txBody>
@@ -14081,7 +18973,7 @@
           <p:cNvPr id="9" name="page-title">
             <a:extLst xmlns:a="http://schemas.openxmlformats.org/drawingml/2006/main">
               <a:ext uri="{FF2B5EF4-FFF2-40B4-BE49-F238E27FC236}">
-                <a16:creationId xmlns:a16="http://schemas.microsoft.com/office/drawing/2014/main" id="{C6F04C1A-C8C3-4EC7-B750-DEF8B984846C}"/>
+                <a16:creationId xmlns:a16="http://schemas.microsoft.com/office/drawing/2014/main" id="{96D6785D-883C-4C22-AC64-000029739C9E}"/>
               </a:ext>
             </a:extLst>
           </p:cNvPr>
@@ -14131,7 +19023,7 @@
           <p:cNvPr id="10" name="page-lead">
             <a:extLst xmlns:a="http://schemas.openxmlformats.org/drawingml/2006/main">
               <a:ext uri="{FF2B5EF4-FFF2-40B4-BE49-F238E27FC236}">
-                <a16:creationId xmlns:a16="http://schemas.microsoft.com/office/drawing/2014/main" id="{BEA4D683-003D-4AB4-A1C5-F0923693A771}"/>
+                <a16:creationId xmlns:a16="http://schemas.microsoft.com/office/drawing/2014/main" id="{219481D4-83B4-46FB-82DD-007931C4CDD5}"/>
               </a:ext>
             </a:extLst>
           </p:cNvPr>
@@ -14181,7 +19073,7 @@
           <p:cNvPr id="11" name="track-0">
             <a:extLst xmlns:a="http://schemas.openxmlformats.org/drawingml/2006/main">
               <a:ext uri="{FF2B5EF4-FFF2-40B4-BE49-F238E27FC236}">
-                <a16:creationId xmlns:a16="http://schemas.microsoft.com/office/drawing/2014/main" id="{82F7A4AD-D7D7-4FA7-8C75-B80CAAFDB5B4}"/>
+                <a16:creationId xmlns:a16="http://schemas.microsoft.com/office/drawing/2014/main" id="{7908B5B2-A1C5-449E-9EFE-95E7D23202E3}"/>
               </a:ext>
             </a:extLst>
           </p:cNvPr>
@@ -14214,7 +19106,7 @@
           <p:cNvPr id="12" name="track-accent-0">
             <a:extLst xmlns:a="http://schemas.openxmlformats.org/drawingml/2006/main">
               <a:ext uri="{FF2B5EF4-FFF2-40B4-BE49-F238E27FC236}">
-                <a16:creationId xmlns:a16="http://schemas.microsoft.com/office/drawing/2014/main" id="{C0D3DF42-9644-4D14-B91D-A72ADEA6D405}"/>
+                <a16:creationId xmlns:a16="http://schemas.microsoft.com/office/drawing/2014/main" id="{8545395B-2864-43DB-BB9C-95D88648F803}"/>
               </a:ext>
             </a:extLst>
           </p:cNvPr>
@@ -14245,7 +19137,7 @@
           <p:cNvPr id="13" name="track-label-0">
             <a:extLst xmlns:a="http://schemas.openxmlformats.org/drawingml/2006/main">
               <a:ext uri="{FF2B5EF4-FFF2-40B4-BE49-F238E27FC236}">
-                <a16:creationId xmlns:a16="http://schemas.microsoft.com/office/drawing/2014/main" id="{181A21A0-4742-492B-8C29-382F71C348C3}"/>
+                <a16:creationId xmlns:a16="http://schemas.microsoft.com/office/drawing/2014/main" id="{9FF24EAA-70D8-4841-9225-14A937206FFF}"/>
               </a:ext>
             </a:extLst>
           </p:cNvPr>
@@ -14295,7 +19187,7 @@
           <p:cNvPr id="14" name="track-name-0">
             <a:extLst xmlns:a="http://schemas.openxmlformats.org/drawingml/2006/main">
               <a:ext uri="{FF2B5EF4-FFF2-40B4-BE49-F238E27FC236}">
-                <a16:creationId xmlns:a16="http://schemas.microsoft.com/office/drawing/2014/main" id="{9D2D2DAE-9C7D-4616-855C-F5AC7175988F}"/>
+                <a16:creationId xmlns:a16="http://schemas.microsoft.com/office/drawing/2014/main" id="{86487FE3-0F5E-4319-9D41-DADBCE2DEF41}"/>
               </a:ext>
             </a:extLst>
           </p:cNvPr>
@@ -14345,7 +19237,7 @@
           <p:cNvPr id="15" name="track-summary-0">
             <a:extLst xmlns:a="http://schemas.openxmlformats.org/drawingml/2006/main">
               <a:ext uri="{FF2B5EF4-FFF2-40B4-BE49-F238E27FC236}">
-                <a16:creationId xmlns:a16="http://schemas.microsoft.com/office/drawing/2014/main" id="{28A21B77-B6F9-4B5E-8AEB-1721FE36F00B}"/>
+                <a16:creationId xmlns:a16="http://schemas.microsoft.com/office/drawing/2014/main" id="{0C3EDAE8-58AD-4CA7-960C-6A5D46FD2AF0}"/>
               </a:ext>
             </a:extLst>
           </p:cNvPr>
@@ -14395,7 +19287,7 @@
           <p:cNvPr id="16" name="track-0-0-stage">
             <a:extLst xmlns:a="http://schemas.openxmlformats.org/drawingml/2006/main">
               <a:ext uri="{FF2B5EF4-FFF2-40B4-BE49-F238E27FC236}">
-                <a16:creationId xmlns:a16="http://schemas.microsoft.com/office/drawing/2014/main" id="{EAE5D7F8-46A4-43C8-BEB4-56C427209B43}"/>
+                <a16:creationId xmlns:a16="http://schemas.microsoft.com/office/drawing/2014/main" id="{D5570081-7D62-4588-B68D-39F4CEECAFCD}"/>
               </a:ext>
             </a:extLst>
           </p:cNvPr>
@@ -14445,7 +19337,7 @@
           <p:cNvPr id="17" name="track-0-0-title">
             <a:extLst xmlns:a="http://schemas.openxmlformats.org/drawingml/2006/main">
               <a:ext uri="{FF2B5EF4-FFF2-40B4-BE49-F238E27FC236}">
-                <a16:creationId xmlns:a16="http://schemas.microsoft.com/office/drawing/2014/main" id="{720DC05F-9E54-4A56-93ED-B4D7A5FF30C1}"/>
+                <a16:creationId xmlns:a16="http://schemas.microsoft.com/office/drawing/2014/main" id="{E3C3BE4A-1E60-46C5-8890-20FAC3F4B1D8}"/>
               </a:ext>
             </a:extLst>
           </p:cNvPr>
@@ -14495,7 +19387,7 @@
           <p:cNvPr id="18" name="track-0-0-detail">
             <a:extLst xmlns:a="http://schemas.openxmlformats.org/drawingml/2006/main">
               <a:ext uri="{FF2B5EF4-FFF2-40B4-BE49-F238E27FC236}">
-                <a16:creationId xmlns:a16="http://schemas.microsoft.com/office/drawing/2014/main" id="{01FD5F08-9FAA-42B5-852B-24B01DA9F186}"/>
+                <a16:creationId xmlns:a16="http://schemas.microsoft.com/office/drawing/2014/main" id="{A3B471F7-C52F-486D-8E59-B311DAE9B332}"/>
               </a:ext>
             </a:extLst>
           </p:cNvPr>
@@ -14545,7 +19437,7 @@
           <p:cNvPr id="19" name="track-0-0-arrow">
             <a:extLst xmlns:a="http://schemas.openxmlformats.org/drawingml/2006/main">
               <a:ext uri="{FF2B5EF4-FFF2-40B4-BE49-F238E27FC236}">
-                <a16:creationId xmlns:a16="http://schemas.microsoft.com/office/drawing/2014/main" id="{9BB029BF-2D36-404C-A5CE-D868C168D776}"/>
+                <a16:creationId xmlns:a16="http://schemas.microsoft.com/office/drawing/2014/main" id="{CFFF86F8-64D7-4C13-8472-AF05D759A37E}"/>
               </a:ext>
             </a:extLst>
           </p:cNvPr>
@@ -14595,7 +19487,7 @@
           <p:cNvPr id="20" name="track-0-1-stage">
             <a:extLst xmlns:a="http://schemas.openxmlformats.org/drawingml/2006/main">
               <a:ext uri="{FF2B5EF4-FFF2-40B4-BE49-F238E27FC236}">
-                <a16:creationId xmlns:a16="http://schemas.microsoft.com/office/drawing/2014/main" id="{3D0390D0-A89C-4936-A220-8ED178016E7E}"/>
+                <a16:creationId xmlns:a16="http://schemas.microsoft.com/office/drawing/2014/main" id="{87649061-4C79-40BA-91A5-EFEBA5816E52}"/>
               </a:ext>
             </a:extLst>
           </p:cNvPr>
@@ -14645,7 +19537,7 @@
           <p:cNvPr id="21" name="track-0-1-title">
             <a:extLst xmlns:a="http://schemas.openxmlformats.org/drawingml/2006/main">
               <a:ext uri="{FF2B5EF4-FFF2-40B4-BE49-F238E27FC236}">
-                <a16:creationId xmlns:a16="http://schemas.microsoft.com/office/drawing/2014/main" id="{502E820A-2FC9-47AE-BC27-99656A31E986}"/>
+                <a16:creationId xmlns:a16="http://schemas.microsoft.com/office/drawing/2014/main" id="{D4758BE2-B954-4847-A3C0-0A18B87D38D3}"/>
               </a:ext>
             </a:extLst>
           </p:cNvPr>
@@ -14695,7 +19587,7 @@
           <p:cNvPr id="22" name="track-0-1-detail">
             <a:extLst xmlns:a="http://schemas.openxmlformats.org/drawingml/2006/main">
               <a:ext uri="{FF2B5EF4-FFF2-40B4-BE49-F238E27FC236}">
-                <a16:creationId xmlns:a16="http://schemas.microsoft.com/office/drawing/2014/main" id="{46572C9A-146D-4A57-8D57-FC439DFB501D}"/>
+                <a16:creationId xmlns:a16="http://schemas.microsoft.com/office/drawing/2014/main" id="{928133E8-EAFD-43EB-A4B0-B75EA29A364E}"/>
               </a:ext>
             </a:extLst>
           </p:cNvPr>
@@ -14745,7 +19637,7 @@
           <p:cNvPr id="23" name="track-0-1-arrow">
             <a:extLst xmlns:a="http://schemas.openxmlformats.org/drawingml/2006/main">
               <a:ext uri="{FF2B5EF4-FFF2-40B4-BE49-F238E27FC236}">
-                <a16:creationId xmlns:a16="http://schemas.microsoft.com/office/drawing/2014/main" id="{D78B87F2-074B-4B74-95E2-224D218A02B2}"/>
+                <a16:creationId xmlns:a16="http://schemas.microsoft.com/office/drawing/2014/main" id="{C90A0A86-206B-4DA3-B476-91B089C9801E}"/>
               </a:ext>
             </a:extLst>
           </p:cNvPr>
@@ -14795,7 +19687,7 @@
           <p:cNvPr id="24" name="track-0-2-stage">
             <a:extLst xmlns:a="http://schemas.openxmlformats.org/drawingml/2006/main">
               <a:ext uri="{FF2B5EF4-FFF2-40B4-BE49-F238E27FC236}">
-                <a16:creationId xmlns:a16="http://schemas.microsoft.com/office/drawing/2014/main" id="{D3DFB6BE-82F9-40E8-83BB-D81865120667}"/>
+                <a16:creationId xmlns:a16="http://schemas.microsoft.com/office/drawing/2014/main" id="{920B3586-9E2A-4495-A8FF-2795F152AD47}"/>
               </a:ext>
             </a:extLst>
           </p:cNvPr>
@@ -14845,7 +19737,7 @@
           <p:cNvPr id="25" name="track-0-2-title">
             <a:extLst xmlns:a="http://schemas.openxmlformats.org/drawingml/2006/main">
               <a:ext uri="{FF2B5EF4-FFF2-40B4-BE49-F238E27FC236}">
-                <a16:creationId xmlns:a16="http://schemas.microsoft.com/office/drawing/2014/main" id="{AB388C17-E4F9-4235-97B7-F4C8F2F833DF}"/>
+                <a16:creationId xmlns:a16="http://schemas.microsoft.com/office/drawing/2014/main" id="{93A6E654-6B2C-4B01-847B-CB29077647A9}"/>
               </a:ext>
             </a:extLst>
           </p:cNvPr>
@@ -14895,7 +19787,7 @@
           <p:cNvPr id="26" name="track-0-2-detail">
             <a:extLst xmlns:a="http://schemas.openxmlformats.org/drawingml/2006/main">
               <a:ext uri="{FF2B5EF4-FFF2-40B4-BE49-F238E27FC236}">
-                <a16:creationId xmlns:a16="http://schemas.microsoft.com/office/drawing/2014/main" id="{698D219B-4204-44C8-B104-D15069B64D1E}"/>
+                <a16:creationId xmlns:a16="http://schemas.microsoft.com/office/drawing/2014/main" id="{BBFCFA93-9151-46A0-87A0-CED44CF8E2DE}"/>
               </a:ext>
             </a:extLst>
           </p:cNvPr>
@@ -14945,7 +19837,7 @@
           <p:cNvPr id="27" name="track-0-2-arrow">
             <a:extLst xmlns:a="http://schemas.openxmlformats.org/drawingml/2006/main">
               <a:ext uri="{FF2B5EF4-FFF2-40B4-BE49-F238E27FC236}">
-                <a16:creationId xmlns:a16="http://schemas.microsoft.com/office/drawing/2014/main" id="{9575606C-4F10-40D9-8170-52486720DBBB}"/>
+                <a16:creationId xmlns:a16="http://schemas.microsoft.com/office/drawing/2014/main" id="{70E32C4B-5C5F-44C8-945F-7F0375F11ACB}"/>
               </a:ext>
             </a:extLst>
           </p:cNvPr>
@@ -14995,7 +19887,7 @@
           <p:cNvPr id="28" name="track-0-3-stage">
             <a:extLst xmlns:a="http://schemas.openxmlformats.org/drawingml/2006/main">
               <a:ext uri="{FF2B5EF4-FFF2-40B4-BE49-F238E27FC236}">
-                <a16:creationId xmlns:a16="http://schemas.microsoft.com/office/drawing/2014/main" id="{4A01B985-791A-4B50-AD75-8EB399808230}"/>
+                <a16:creationId xmlns:a16="http://schemas.microsoft.com/office/drawing/2014/main" id="{E9659F70-0EA8-467A-9B4F-4EB8B0C4DDCB}"/>
               </a:ext>
             </a:extLst>
           </p:cNvPr>
@@ -15045,7 +19937,7 @@
           <p:cNvPr id="29" name="track-0-3-title">
             <a:extLst xmlns:a="http://schemas.openxmlformats.org/drawingml/2006/main">
               <a:ext uri="{FF2B5EF4-FFF2-40B4-BE49-F238E27FC236}">
-                <a16:creationId xmlns:a16="http://schemas.microsoft.com/office/drawing/2014/main" id="{6ABF4FD8-DAC9-4342-8C39-E7D13C141BEA}"/>
+                <a16:creationId xmlns:a16="http://schemas.microsoft.com/office/drawing/2014/main" id="{25731470-8070-4B4E-9FC1-9474F8A75D23}"/>
               </a:ext>
             </a:extLst>
           </p:cNvPr>
@@ -15095,7 +19987,7 @@
           <p:cNvPr id="30" name="track-0-3-detail">
             <a:extLst xmlns:a="http://schemas.openxmlformats.org/drawingml/2006/main">
               <a:ext uri="{FF2B5EF4-FFF2-40B4-BE49-F238E27FC236}">
-                <a16:creationId xmlns:a16="http://schemas.microsoft.com/office/drawing/2014/main" id="{ED544FDD-DE38-4BA8-901F-B98C24EF9052}"/>
+                <a16:creationId xmlns:a16="http://schemas.microsoft.com/office/drawing/2014/main" id="{A868DE45-BCA8-477D-909F-B770C83AECF7}"/>
               </a:ext>
             </a:extLst>
           </p:cNvPr>
@@ -15145,7 +20037,7 @@
           <p:cNvPr id="31" name="track-1">
             <a:extLst xmlns:a="http://schemas.openxmlformats.org/drawingml/2006/main">
               <a:ext uri="{FF2B5EF4-FFF2-40B4-BE49-F238E27FC236}">
-                <a16:creationId xmlns:a16="http://schemas.microsoft.com/office/drawing/2014/main" id="{43CA706F-7ABF-4C12-BE26-64B2FF9E197D}"/>
+                <a16:creationId xmlns:a16="http://schemas.microsoft.com/office/drawing/2014/main" id="{2C484239-0119-4AB3-964E-F89034657BC5}"/>
               </a:ext>
             </a:extLst>
           </p:cNvPr>
@@ -15178,7 +20070,7 @@
           <p:cNvPr id="32" name="track-accent-1">
             <a:extLst xmlns:a="http://schemas.openxmlformats.org/drawingml/2006/main">
               <a:ext uri="{FF2B5EF4-FFF2-40B4-BE49-F238E27FC236}">
-                <a16:creationId xmlns:a16="http://schemas.microsoft.com/office/drawing/2014/main" id="{CB698AF2-D29A-4D3D-B293-E9AC47E30FD4}"/>
+                <a16:creationId xmlns:a16="http://schemas.microsoft.com/office/drawing/2014/main" id="{0244E65A-407A-4896-905E-23A1736EF3BC}"/>
               </a:ext>
             </a:extLst>
           </p:cNvPr>
@@ -15209,7 +20101,7 @@
           <p:cNvPr id="33" name="track-label-1">
             <a:extLst xmlns:a="http://schemas.openxmlformats.org/drawingml/2006/main">
               <a:ext uri="{FF2B5EF4-FFF2-40B4-BE49-F238E27FC236}">
-                <a16:creationId xmlns:a16="http://schemas.microsoft.com/office/drawing/2014/main" id="{599E6434-F21B-4F1D-A735-B8FADD553CE3}"/>
+                <a16:creationId xmlns:a16="http://schemas.microsoft.com/office/drawing/2014/main" id="{C7761925-3A6B-40C0-95D3-38C28D6D112F}"/>
               </a:ext>
             </a:extLst>
           </p:cNvPr>
@@ -15259,7 +20151,7 @@
           <p:cNvPr id="34" name="track-name-1">
             <a:extLst xmlns:a="http://schemas.openxmlformats.org/drawingml/2006/main">
               <a:ext uri="{FF2B5EF4-FFF2-40B4-BE49-F238E27FC236}">
-                <a16:creationId xmlns:a16="http://schemas.microsoft.com/office/drawing/2014/main" id="{99D1A9C4-BA72-4698-843D-ADF6202E5A3D}"/>
+                <a16:creationId xmlns:a16="http://schemas.microsoft.com/office/drawing/2014/main" id="{91996132-68F7-4066-A4C7-36AEC717257C}"/>
               </a:ext>
             </a:extLst>
           </p:cNvPr>
@@ -15309,7 +20201,7 @@
           <p:cNvPr id="35" name="track-summary-1">
             <a:extLst xmlns:a="http://schemas.openxmlformats.org/drawingml/2006/main">
               <a:ext uri="{FF2B5EF4-FFF2-40B4-BE49-F238E27FC236}">
-                <a16:creationId xmlns:a16="http://schemas.microsoft.com/office/drawing/2014/main" id="{731085A5-208F-427D-9457-E2BD230C046C}"/>
+                <a16:creationId xmlns:a16="http://schemas.microsoft.com/office/drawing/2014/main" id="{014B1754-8714-4CAD-8BD4-64A2F97180A7}"/>
               </a:ext>
             </a:extLst>
           </p:cNvPr>
@@ -15359,7 +20251,7 @@
           <p:cNvPr id="36" name="track-1-0-stage">
             <a:extLst xmlns:a="http://schemas.openxmlformats.org/drawingml/2006/main">
               <a:ext uri="{FF2B5EF4-FFF2-40B4-BE49-F238E27FC236}">
-                <a16:creationId xmlns:a16="http://schemas.microsoft.com/office/drawing/2014/main" id="{CC37206D-2995-4C0A-9E66-09D8902FB3B3}"/>
+                <a16:creationId xmlns:a16="http://schemas.microsoft.com/office/drawing/2014/main" id="{F70DD760-C1A7-4291-98A0-5F9E229620F7}"/>
               </a:ext>
             </a:extLst>
           </p:cNvPr>
@@ -15409,7 +20301,7 @@
           <p:cNvPr id="37" name="track-1-0-title">
             <a:extLst xmlns:a="http://schemas.openxmlformats.org/drawingml/2006/main">
               <a:ext uri="{FF2B5EF4-FFF2-40B4-BE49-F238E27FC236}">
-                <a16:creationId xmlns:a16="http://schemas.microsoft.com/office/drawing/2014/main" id="{125F7E77-10C0-4C9D-8647-5CEAEFBFCDD9}"/>
+                <a16:creationId xmlns:a16="http://schemas.microsoft.com/office/drawing/2014/main" id="{B39DCA9D-A532-4B3A-BB75-228C94F7ADFC}"/>
               </a:ext>
             </a:extLst>
           </p:cNvPr>
@@ -15459,7 +20351,7 @@
           <p:cNvPr id="38" name="track-1-0-detail">
             <a:extLst xmlns:a="http://schemas.openxmlformats.org/drawingml/2006/main">
               <a:ext uri="{FF2B5EF4-FFF2-40B4-BE49-F238E27FC236}">
-                <a16:creationId xmlns:a16="http://schemas.microsoft.com/office/drawing/2014/main" id="{942F3F2F-F50A-4BE4-A897-34D4D14842CB}"/>
+                <a16:creationId xmlns:a16="http://schemas.microsoft.com/office/drawing/2014/main" id="{9A365ACE-96DD-4A9D-AD05-18538A5FBE18}"/>
               </a:ext>
             </a:extLst>
           </p:cNvPr>
@@ -15509,7 +20401,7 @@
           <p:cNvPr id="39" name="track-1-0-arrow">
             <a:extLst xmlns:a="http://schemas.openxmlformats.org/drawingml/2006/main">
               <a:ext uri="{FF2B5EF4-FFF2-40B4-BE49-F238E27FC236}">
-                <a16:creationId xmlns:a16="http://schemas.microsoft.com/office/drawing/2014/main" id="{547C3E7A-0110-45B4-89F9-F2DED4DFF0A9}"/>
+                <a16:creationId xmlns:a16="http://schemas.microsoft.com/office/drawing/2014/main" id="{C1A5D24C-1147-4D33-A864-DF8B9E59514B}"/>
               </a:ext>
             </a:extLst>
           </p:cNvPr>
@@ -15559,7 +20451,7 @@
           <p:cNvPr id="40" name="track-1-1-stage">
             <a:extLst xmlns:a="http://schemas.openxmlformats.org/drawingml/2006/main">
               <a:ext uri="{FF2B5EF4-FFF2-40B4-BE49-F238E27FC236}">
-                <a16:creationId xmlns:a16="http://schemas.microsoft.com/office/drawing/2014/main" id="{D76602E2-52F5-4040-968F-5BFA997D7DF8}"/>
+                <a16:creationId xmlns:a16="http://schemas.microsoft.com/office/drawing/2014/main" id="{F72C2370-E1DE-4FD6-8EDF-DA0DCBB44262}"/>
               </a:ext>
             </a:extLst>
           </p:cNvPr>
@@ -15609,7 +20501,7 @@
           <p:cNvPr id="41" name="track-1-1-title">
             <a:extLst xmlns:a="http://schemas.openxmlformats.org/drawingml/2006/main">
               <a:ext uri="{FF2B5EF4-FFF2-40B4-BE49-F238E27FC236}">
-                <a16:creationId xmlns:a16="http://schemas.microsoft.com/office/drawing/2014/main" id="{6CE9A41C-1019-4351-A2BD-B78AD535753B}"/>
+                <a16:creationId xmlns:a16="http://schemas.microsoft.com/office/drawing/2014/main" id="{1BC33B7E-37C6-41E2-B9A5-65B1C2C9AFD4}"/>
               </a:ext>
             </a:extLst>
           </p:cNvPr>
@@ -15659,7 +20551,7 @@
           <p:cNvPr id="42" name="track-1-1-detail">
             <a:extLst xmlns:a="http://schemas.openxmlformats.org/drawingml/2006/main">
               <a:ext uri="{FF2B5EF4-FFF2-40B4-BE49-F238E27FC236}">
-                <a16:creationId xmlns:a16="http://schemas.microsoft.com/office/drawing/2014/main" id="{448BCC8B-111C-41C4-8E60-340704192FD5}"/>
+                <a16:creationId xmlns:a16="http://schemas.microsoft.com/office/drawing/2014/main" id="{E99E64EC-FE0C-4E19-A75D-0DC456714366}"/>
               </a:ext>
             </a:extLst>
           </p:cNvPr>
@@ -15709,7 +20601,7 @@
           <p:cNvPr id="43" name="track-1-1-arrow">
             <a:extLst xmlns:a="http://schemas.openxmlformats.org/drawingml/2006/main">
               <a:ext uri="{FF2B5EF4-FFF2-40B4-BE49-F238E27FC236}">
-                <a16:creationId xmlns:a16="http://schemas.microsoft.com/office/drawing/2014/main" id="{38BE9596-BEB9-4857-B734-00BDE30E696A}"/>
+                <a16:creationId xmlns:a16="http://schemas.microsoft.com/office/drawing/2014/main" id="{F7E60A28-0685-4F01-A5C0-0500F966E5C0}"/>
               </a:ext>
             </a:extLst>
           </p:cNvPr>
@@ -15759,7 +20651,7 @@
           <p:cNvPr id="44" name="track-1-2-stage">
             <a:extLst xmlns:a="http://schemas.openxmlformats.org/drawingml/2006/main">
               <a:ext uri="{FF2B5EF4-FFF2-40B4-BE49-F238E27FC236}">
-                <a16:creationId xmlns:a16="http://schemas.microsoft.com/office/drawing/2014/main" id="{A0BCF01A-A257-4E36-B4DB-821CBC46D544}"/>
+                <a16:creationId xmlns:a16="http://schemas.microsoft.com/office/drawing/2014/main" id="{766E3C17-8FCE-40AF-8113-25EC9F7B181C}"/>
               </a:ext>
             </a:extLst>
           </p:cNvPr>
@@ -15809,7 +20701,7 @@
           <p:cNvPr id="45" name="track-1-2-title">
             <a:extLst xmlns:a="http://schemas.openxmlformats.org/drawingml/2006/main">
               <a:ext uri="{FF2B5EF4-FFF2-40B4-BE49-F238E27FC236}">
-                <a16:creationId xmlns:a16="http://schemas.microsoft.com/office/drawing/2014/main" id="{EE7EBD9A-D3D6-406D-9274-2C28BDBD55C2}"/>
+                <a16:creationId xmlns:a16="http://schemas.microsoft.com/office/drawing/2014/main" id="{2E1E543C-0E49-4030-A262-695C7F43E2D2}"/>
               </a:ext>
             </a:extLst>
           </p:cNvPr>
@@ -15859,7 +20751,7 @@
           <p:cNvPr id="46" name="track-1-2-detail">
             <a:extLst xmlns:a="http://schemas.openxmlformats.org/drawingml/2006/main">
               <a:ext uri="{FF2B5EF4-FFF2-40B4-BE49-F238E27FC236}">
-                <a16:creationId xmlns:a16="http://schemas.microsoft.com/office/drawing/2014/main" id="{4F30BE4D-3949-47C0-A4C3-97E9A27BD1E6}"/>
+                <a16:creationId xmlns:a16="http://schemas.microsoft.com/office/drawing/2014/main" id="{BA46D2C0-9197-4A97-B627-FAFAD11FE4CD}"/>
               </a:ext>
             </a:extLst>
           </p:cNvPr>
@@ -15909,7 +20801,7 @@
           <p:cNvPr id="47" name="track-1-2-arrow">
             <a:extLst xmlns:a="http://schemas.openxmlformats.org/drawingml/2006/main">
               <a:ext uri="{FF2B5EF4-FFF2-40B4-BE49-F238E27FC236}">
-                <a16:creationId xmlns:a16="http://schemas.microsoft.com/office/drawing/2014/main" id="{8A6C1CB3-7DBD-4839-8FEA-8AEE982C5C05}"/>
+                <a16:creationId xmlns:a16="http://schemas.microsoft.com/office/drawing/2014/main" id="{2B730DA5-9C82-4058-9741-2AC684D7394F}"/>
               </a:ext>
             </a:extLst>
           </p:cNvPr>
@@ -15959,7 +20851,7 @@
           <p:cNvPr id="48" name="track-1-3-stage">
             <a:extLst xmlns:a="http://schemas.openxmlformats.org/drawingml/2006/main">
               <a:ext uri="{FF2B5EF4-FFF2-40B4-BE49-F238E27FC236}">
-                <a16:creationId xmlns:a16="http://schemas.microsoft.com/office/drawing/2014/main" id="{5202C768-FC75-4083-AA43-A8F15965E729}"/>
+                <a16:creationId xmlns:a16="http://schemas.microsoft.com/office/drawing/2014/main" id="{BC38DBAC-2144-467A-937C-9898E8AFB30A}"/>
               </a:ext>
             </a:extLst>
           </p:cNvPr>
@@ -16009,7 +20901,7 @@
           <p:cNvPr id="49" name="track-1-3-title">
             <a:extLst xmlns:a="http://schemas.openxmlformats.org/drawingml/2006/main">
               <a:ext uri="{FF2B5EF4-FFF2-40B4-BE49-F238E27FC236}">
-                <a16:creationId xmlns:a16="http://schemas.microsoft.com/office/drawing/2014/main" id="{48271C4B-F5A3-4D64-AD77-107F4D7ACDB6}"/>
+                <a16:creationId xmlns:a16="http://schemas.microsoft.com/office/drawing/2014/main" id="{16302C6A-D721-4062-8049-B25F28C6892A}"/>
               </a:ext>
             </a:extLst>
           </p:cNvPr>
@@ -16059,7 +20951,7 @@
           <p:cNvPr id="50" name="track-1-3-detail">
             <a:extLst xmlns:a="http://schemas.openxmlformats.org/drawingml/2006/main">
               <a:ext uri="{FF2B5EF4-FFF2-40B4-BE49-F238E27FC236}">
-                <a16:creationId xmlns:a16="http://schemas.microsoft.com/office/drawing/2014/main" id="{B60DEEBC-4362-43B0-B88D-8DD659B6B449}"/>
+                <a16:creationId xmlns:a16="http://schemas.microsoft.com/office/drawing/2014/main" id="{EFA7E9CE-58C7-43FE-87FA-123A24B18E83}"/>
               </a:ext>
             </a:extLst>
           </p:cNvPr>
@@ -16109,7 +21001,7 @@
           <p:cNvPr id="51" name="action-bg">
             <a:extLst xmlns:a="http://schemas.openxmlformats.org/drawingml/2006/main">
               <a:ext uri="{FF2B5EF4-FFF2-40B4-BE49-F238E27FC236}">
-                <a16:creationId xmlns:a16="http://schemas.microsoft.com/office/drawing/2014/main" id="{B9430E87-A6B4-4C5F-B4A7-DAAB6DB078C8}"/>
+                <a16:creationId xmlns:a16="http://schemas.microsoft.com/office/drawing/2014/main" id="{C443177B-501A-4BBA-AAEB-20123DB8383B}"/>
               </a:ext>
             </a:extLst>
           </p:cNvPr>
@@ -16140,7 +21032,7 @@
           <p:cNvPr id="52" name="action-title">
             <a:extLst xmlns:a="http://schemas.openxmlformats.org/drawingml/2006/main">
               <a:ext uri="{FF2B5EF4-FFF2-40B4-BE49-F238E27FC236}">
-                <a16:creationId xmlns:a16="http://schemas.microsoft.com/office/drawing/2014/main" id="{A995F4E0-7FE5-473D-9F92-E8878818E691}"/>
+                <a16:creationId xmlns:a16="http://schemas.microsoft.com/office/drawing/2014/main" id="{38CAA976-28DA-4627-AD54-1C2E291A8B3D}"/>
               </a:ext>
             </a:extLst>
           </p:cNvPr>
@@ -16190,7 +21082,7 @@
           <p:cNvPr id="53" name="action-0">
             <a:extLst xmlns:a="http://schemas.openxmlformats.org/drawingml/2006/main">
               <a:ext uri="{FF2B5EF4-FFF2-40B4-BE49-F238E27FC236}">
-                <a16:creationId xmlns:a16="http://schemas.microsoft.com/office/drawing/2014/main" id="{A09107FF-AB5B-4DE6-A05E-556D916FFCEA}"/>
+                <a16:creationId xmlns:a16="http://schemas.microsoft.com/office/drawing/2014/main" id="{6B72818E-1FBC-4839-99AD-B0BCB23A63C7}"/>
               </a:ext>
             </a:extLst>
           </p:cNvPr>
@@ -16240,7 +21132,7 @@
           <p:cNvPr id="54" name="action-1">
             <a:extLst xmlns:a="http://schemas.openxmlformats.org/drawingml/2006/main">
               <a:ext uri="{FF2B5EF4-FFF2-40B4-BE49-F238E27FC236}">
-                <a16:creationId xmlns:a16="http://schemas.microsoft.com/office/drawing/2014/main" id="{FA927127-0AD9-4200-9D85-ECB402DFE709}"/>
+                <a16:creationId xmlns:a16="http://schemas.microsoft.com/office/drawing/2014/main" id="{9A686D07-F814-45AB-84A3-61B517FE1207}"/>
               </a:ext>
             </a:extLst>
           </p:cNvPr>
@@ -16290,7 +21182,7 @@
           <p:cNvPr id="55" name="action-2">
             <a:extLst xmlns:a="http://schemas.openxmlformats.org/drawingml/2006/main">
               <a:ext uri="{FF2B5EF4-FFF2-40B4-BE49-F238E27FC236}">
-                <a16:creationId xmlns:a16="http://schemas.microsoft.com/office/drawing/2014/main" id="{F981A2E9-4843-4B64-8164-AEB39A414AC5}"/>
+                <a16:creationId xmlns:a16="http://schemas.microsoft.com/office/drawing/2014/main" id="{DEFB1139-282C-4163-B17D-59166B21699C}"/>
               </a:ext>
             </a:extLst>
           </p:cNvPr>
@@ -16338,7 +21230,7 @@
     </p:spTree>
     <p:extLst>
       <p:ext uri="{BB962C8B-B14F-4D97-AF65-F5344CB8AC3E}">
-        <p14:creationId xmlns:p14="http://schemas.microsoft.com/office/powerpoint/2010/main" val="860799418"/>
+        <p14:creationId xmlns:p14="http://schemas.microsoft.com/office/powerpoint/2010/main" val="1047346217"/>
       </p:ext>
     </p:extLst>
   </p:cSld>
@@ -16369,7 +21261,7 @@
           <p:cNvPr id="32" name="rule-60-45">
             <a:extLst xmlns:a="http://schemas.openxmlformats.org/drawingml/2006/main">
               <a:ext uri="{FF2B5EF4-FFF2-40B4-BE49-F238E27FC236}">
-                <a16:creationId xmlns:a16="http://schemas.microsoft.com/office/drawing/2014/main" id="{072653F4-78F0-4BE4-B522-1D5989DE6B0B}"/>
+                <a16:creationId xmlns:a16="http://schemas.microsoft.com/office/drawing/2014/main" id="{A4680022-ED95-47DD-A882-9469AC5B218F}"/>
               </a:ext>
             </a:extLst>
           </p:cNvPr>
@@ -16400,7 +21292,7 @@
           <p:cNvPr id="2" name="chapter-accent">
             <a:extLst xmlns:a="http://schemas.openxmlformats.org/drawingml/2006/main">
               <a:ext uri="{FF2B5EF4-FFF2-40B4-BE49-F238E27FC236}">
-                <a16:creationId xmlns:a16="http://schemas.microsoft.com/office/drawing/2014/main" id="{749597CA-50A3-4265-B2CB-F29ED191C6DC}"/>
+                <a16:creationId xmlns:a16="http://schemas.microsoft.com/office/drawing/2014/main" id="{7C39BBA3-6096-4EE2-8438-6D647A8AD1BC}"/>
               </a:ext>
             </a:extLst>
           </p:cNvPr>
@@ -16431,7 +21323,7 @@
           <p:cNvPr id="3" name="chapter">
             <a:extLst xmlns:a="http://schemas.openxmlformats.org/drawingml/2006/main">
               <a:ext uri="{FF2B5EF4-FFF2-40B4-BE49-F238E27FC236}">
-                <a16:creationId xmlns:a16="http://schemas.microsoft.com/office/drawing/2014/main" id="{D1A99A7E-C696-4BF9-BBCF-7A567B8C239C}"/>
+                <a16:creationId xmlns:a16="http://schemas.microsoft.com/office/drawing/2014/main" id="{D77A418B-59CF-4D5E-B0F3-F59A8F521EB3}"/>
               </a:ext>
             </a:extLst>
           </p:cNvPr>
@@ -16481,7 +21373,7 @@
           <p:cNvPr id="4" name="page-number">
             <a:extLst xmlns:a="http://schemas.openxmlformats.org/drawingml/2006/main">
               <a:ext uri="{FF2B5EF4-FFF2-40B4-BE49-F238E27FC236}">
-                <a16:creationId xmlns:a16="http://schemas.microsoft.com/office/drawing/2014/main" id="{0265847C-C3DF-4919-9E60-E394A35E8271}"/>
+                <a16:creationId xmlns:a16="http://schemas.microsoft.com/office/drawing/2014/main" id="{18D75D8A-E3FE-4814-BF37-A74C9613B47F}"/>
               </a:ext>
             </a:extLst>
           </p:cNvPr>
@@ -16531,7 +21423,7 @@
           <p:cNvPr id="5" name="rule-60-674">
             <a:extLst xmlns:a="http://schemas.openxmlformats.org/drawingml/2006/main">
               <a:ext uri="{FF2B5EF4-FFF2-40B4-BE49-F238E27FC236}">
-                <a16:creationId xmlns:a16="http://schemas.microsoft.com/office/drawing/2014/main" id="{35C9102B-B373-4AD7-A215-A6E5CE9A2969}"/>
+                <a16:creationId xmlns:a16="http://schemas.microsoft.com/office/drawing/2014/main" id="{A63AB329-2F70-4910-9FE9-B6EEA9683E89}"/>
               </a:ext>
             </a:extLst>
           </p:cNvPr>
@@ -16562,7 +21454,7 @@
           <p:cNvPr id="6" name="brand">
             <a:extLst xmlns:a="http://schemas.openxmlformats.org/drawingml/2006/main">
               <a:ext uri="{FF2B5EF4-FFF2-40B4-BE49-F238E27FC236}">
-                <a16:creationId xmlns:a16="http://schemas.microsoft.com/office/drawing/2014/main" id="{D6706338-F40F-4F9A-89B9-1EAD5119F3F4}"/>
+                <a16:creationId xmlns:a16="http://schemas.microsoft.com/office/drawing/2014/main" id="{2E1A96B3-14DA-4722-8E45-2947B3DAF8A6}"/>
               </a:ext>
             </a:extLst>
           </p:cNvPr>
@@ -16612,7 +21504,7 @@
           <p:cNvPr id="7" name="source">
             <a:extLst xmlns:a="http://schemas.openxmlformats.org/drawingml/2006/main">
               <a:ext uri="{FF2B5EF4-FFF2-40B4-BE49-F238E27FC236}">
-                <a16:creationId xmlns:a16="http://schemas.microsoft.com/office/drawing/2014/main" id="{F312E820-BA89-4106-85EF-C3E0BD32313D}"/>
+                <a16:creationId xmlns:a16="http://schemas.microsoft.com/office/drawing/2014/main" id="{89740B80-A2D6-4061-BB0F-D05A4CC73DB1}"/>
               </a:ext>
             </a:extLst>
           </p:cNvPr>
@@ -16662,7 +21554,7 @@
           <p:cNvPr id="8" name="footer-page">
             <a:extLst xmlns:a="http://schemas.openxmlformats.org/drawingml/2006/main">
               <a:ext uri="{FF2B5EF4-FFF2-40B4-BE49-F238E27FC236}">
-                <a16:creationId xmlns:a16="http://schemas.microsoft.com/office/drawing/2014/main" id="{3D5FBB76-EBE5-4735-AEFB-D67214B1900E}"/>
+                <a16:creationId xmlns:a16="http://schemas.microsoft.com/office/drawing/2014/main" id="{7D217F89-F8C4-4393-A045-F5F31AFA2908}"/>
               </a:ext>
             </a:extLst>
           </p:cNvPr>
@@ -16702,7 +21594,7 @@
                   <a:srgbClr val="69766F"/>
                 </a:solidFill>
               </a:rPr>
-              <a:t>05 / 15</a:t>
+              <a:t>05 / 18</a:t>
             </a:r>
           </a:p>
         </p:txBody>
@@ -16712,7 +21604,7 @@
           <p:cNvPr id="9" name="page-title">
             <a:extLst xmlns:a="http://schemas.openxmlformats.org/drawingml/2006/main">
               <a:ext uri="{FF2B5EF4-FFF2-40B4-BE49-F238E27FC236}">
-                <a16:creationId xmlns:a16="http://schemas.microsoft.com/office/drawing/2014/main" id="{934B9D0D-B8BB-4A3C-B328-9CBEFDD49784}"/>
+                <a16:creationId xmlns:a16="http://schemas.microsoft.com/office/drawing/2014/main" id="{8AA05EFD-987E-47EA-9739-8FEFF9A2BD89}"/>
               </a:ext>
             </a:extLst>
           </p:cNvPr>
@@ -16762,7 +21654,7 @@
           <p:cNvPr id="10" name="page-lead">
             <a:extLst xmlns:a="http://schemas.openxmlformats.org/drawingml/2006/main">
               <a:ext uri="{FF2B5EF4-FFF2-40B4-BE49-F238E27FC236}">
-                <a16:creationId xmlns:a16="http://schemas.microsoft.com/office/drawing/2014/main" id="{D9F35642-6D30-4A8E-BC9C-75C8A8AF3F4A}"/>
+                <a16:creationId xmlns:a16="http://schemas.microsoft.com/office/drawing/2014/main" id="{ABF96007-045B-4A15-A3C3-00F24BFCA38A}"/>
               </a:ext>
             </a:extLst>
           </p:cNvPr>
@@ -16812,7 +21704,7 @@
           <p:cNvPr id="11" name="rule-95-390">
             <a:extLst xmlns:a="http://schemas.openxmlformats.org/drawingml/2006/main">
               <a:ext uri="{FF2B5EF4-FFF2-40B4-BE49-F238E27FC236}">
-                <a16:creationId xmlns:a16="http://schemas.microsoft.com/office/drawing/2014/main" id="{4D4F2740-F982-46F5-B7EE-83A11A92E450}"/>
+                <a16:creationId xmlns:a16="http://schemas.microsoft.com/office/drawing/2014/main" id="{E2D51C8F-00BF-4BB6-9056-5B7471FD0292}"/>
               </a:ext>
             </a:extLst>
           </p:cNvPr>
@@ -16843,7 +21735,7 @@
           <p:cNvPr id="12" name="process-0">
             <a:extLst xmlns:a="http://schemas.openxmlformats.org/drawingml/2006/main">
               <a:ext uri="{FF2B5EF4-FFF2-40B4-BE49-F238E27FC236}">
-                <a16:creationId xmlns:a16="http://schemas.microsoft.com/office/drawing/2014/main" id="{E1DC4973-A86D-40F7-9535-86779A65D4CE}"/>
+                <a16:creationId xmlns:a16="http://schemas.microsoft.com/office/drawing/2014/main" id="{5A292C9B-488D-4B4F-B08B-EEB60977153A}"/>
               </a:ext>
             </a:extLst>
           </p:cNvPr>
@@ -16876,7 +21768,7 @@
           <p:cNvPr id="13" name="process-no-0">
             <a:extLst xmlns:a="http://schemas.openxmlformats.org/drawingml/2006/main">
               <a:ext uri="{FF2B5EF4-FFF2-40B4-BE49-F238E27FC236}">
-                <a16:creationId xmlns:a16="http://schemas.microsoft.com/office/drawing/2014/main" id="{FDDBA9A3-F672-4F60-A034-1BCF4B2E5E22}"/>
+                <a16:creationId xmlns:a16="http://schemas.microsoft.com/office/drawing/2014/main" id="{4363F925-F116-416F-A29C-AC8594621D9A}"/>
               </a:ext>
             </a:extLst>
           </p:cNvPr>
@@ -16926,7 +21818,7 @@
           <p:cNvPr id="14" name="process-title-0">
             <a:extLst xmlns:a="http://schemas.openxmlformats.org/drawingml/2006/main">
               <a:ext uri="{FF2B5EF4-FFF2-40B4-BE49-F238E27FC236}">
-                <a16:creationId xmlns:a16="http://schemas.microsoft.com/office/drawing/2014/main" id="{A38C9616-677B-4CBB-8EA2-696B298B7EA2}"/>
+                <a16:creationId xmlns:a16="http://schemas.microsoft.com/office/drawing/2014/main" id="{17D2F973-D297-456B-87DE-B6C693F236CE}"/>
               </a:ext>
             </a:extLst>
           </p:cNvPr>
@@ -16976,7 +21868,7 @@
           <p:cNvPr id="15" name="process-detail-0">
             <a:extLst xmlns:a="http://schemas.openxmlformats.org/drawingml/2006/main">
               <a:ext uri="{FF2B5EF4-FFF2-40B4-BE49-F238E27FC236}">
-                <a16:creationId xmlns:a16="http://schemas.microsoft.com/office/drawing/2014/main" id="{FFB3E6D4-6A74-4F52-806A-0E715373B999}"/>
+                <a16:creationId xmlns:a16="http://schemas.microsoft.com/office/drawing/2014/main" id="{5EB28FAA-8D5B-4879-B822-F29BFF6B7E2D}"/>
               </a:ext>
             </a:extLst>
           </p:cNvPr>
@@ -17026,7 +21918,7 @@
           <p:cNvPr id="16" name="process-1">
             <a:extLst xmlns:a="http://schemas.openxmlformats.org/drawingml/2006/main">
               <a:ext uri="{FF2B5EF4-FFF2-40B4-BE49-F238E27FC236}">
-                <a16:creationId xmlns:a16="http://schemas.microsoft.com/office/drawing/2014/main" id="{36308D43-BA72-4D02-A9A1-F243E1274D92}"/>
+                <a16:creationId xmlns:a16="http://schemas.microsoft.com/office/drawing/2014/main" id="{6087BF6A-8DB6-4FB2-A3D4-02386FE7BC15}"/>
               </a:ext>
             </a:extLst>
           </p:cNvPr>
@@ -17059,7 +21951,7 @@
           <p:cNvPr id="17" name="process-no-1">
             <a:extLst xmlns:a="http://schemas.openxmlformats.org/drawingml/2006/main">
               <a:ext uri="{FF2B5EF4-FFF2-40B4-BE49-F238E27FC236}">
-                <a16:creationId xmlns:a16="http://schemas.microsoft.com/office/drawing/2014/main" id="{AF84D40E-EA92-4C56-A20C-F4BABAC580EF}"/>
+                <a16:creationId xmlns:a16="http://schemas.microsoft.com/office/drawing/2014/main" id="{698E8B0C-EC3E-46D1-8D47-E4E0EC0E0B7E}"/>
               </a:ext>
             </a:extLst>
           </p:cNvPr>
@@ -17109,7 +22001,7 @@
           <p:cNvPr id="18" name="process-title-1">
             <a:extLst xmlns:a="http://schemas.openxmlformats.org/drawingml/2006/main">
               <a:ext uri="{FF2B5EF4-FFF2-40B4-BE49-F238E27FC236}">
-                <a16:creationId xmlns:a16="http://schemas.microsoft.com/office/drawing/2014/main" id="{5F732A53-9C9A-4872-B5FB-E84EADF85AA0}"/>
+                <a16:creationId xmlns:a16="http://schemas.microsoft.com/office/drawing/2014/main" id="{4C3097D0-9FB3-490B-91B4-07ED9FAD4399}"/>
               </a:ext>
             </a:extLst>
           </p:cNvPr>
@@ -17159,7 +22051,7 @@
           <p:cNvPr id="19" name="process-detail-1">
             <a:extLst xmlns:a="http://schemas.openxmlformats.org/drawingml/2006/main">
               <a:ext uri="{FF2B5EF4-FFF2-40B4-BE49-F238E27FC236}">
-                <a16:creationId xmlns:a16="http://schemas.microsoft.com/office/drawing/2014/main" id="{F0BF5D42-7286-4E4A-947C-A556A2E76617}"/>
+                <a16:creationId xmlns:a16="http://schemas.microsoft.com/office/drawing/2014/main" id="{F6CE7AE8-FAD4-4DD1-9FEE-A61A5D6AF2F2}"/>
               </a:ext>
             </a:extLst>
           </p:cNvPr>
@@ -17209,7 +22101,7 @@
           <p:cNvPr id="20" name="process-2">
             <a:extLst xmlns:a="http://schemas.openxmlformats.org/drawingml/2006/main">
               <a:ext uri="{FF2B5EF4-FFF2-40B4-BE49-F238E27FC236}">
-                <a16:creationId xmlns:a16="http://schemas.microsoft.com/office/drawing/2014/main" id="{D6E9800E-50A5-4713-92CA-46B3E46A1B3C}"/>
+                <a16:creationId xmlns:a16="http://schemas.microsoft.com/office/drawing/2014/main" id="{AAE0ED95-FA8C-4994-816B-45F3B13235C7}"/>
               </a:ext>
             </a:extLst>
           </p:cNvPr>
@@ -17240,7 +22132,7 @@
           <p:cNvPr id="21" name="process-no-2">
             <a:extLst xmlns:a="http://schemas.openxmlformats.org/drawingml/2006/main">
               <a:ext uri="{FF2B5EF4-FFF2-40B4-BE49-F238E27FC236}">
-                <a16:creationId xmlns:a16="http://schemas.microsoft.com/office/drawing/2014/main" id="{F06901D1-DCFA-45D6-AA18-CDE63145328B}"/>
+                <a16:creationId xmlns:a16="http://schemas.microsoft.com/office/drawing/2014/main" id="{17FC8260-70F6-4184-8BD3-8926C09E37A4}"/>
               </a:ext>
             </a:extLst>
           </p:cNvPr>
@@ -17290,7 +22182,7 @@
           <p:cNvPr id="22" name="process-title-2">
             <a:extLst xmlns:a="http://schemas.openxmlformats.org/drawingml/2006/main">
               <a:ext uri="{FF2B5EF4-FFF2-40B4-BE49-F238E27FC236}">
-                <a16:creationId xmlns:a16="http://schemas.microsoft.com/office/drawing/2014/main" id="{B1C3B8D4-DA22-4243-9C8C-ABFC90F09D52}"/>
+                <a16:creationId xmlns:a16="http://schemas.microsoft.com/office/drawing/2014/main" id="{7E7331DF-E34E-41E3-BC84-A46D0C216E15}"/>
               </a:ext>
             </a:extLst>
           </p:cNvPr>
@@ -17340,7 +22232,7 @@
           <p:cNvPr id="23" name="process-detail-2">
             <a:extLst xmlns:a="http://schemas.openxmlformats.org/drawingml/2006/main">
               <a:ext uri="{FF2B5EF4-FFF2-40B4-BE49-F238E27FC236}">
-                <a16:creationId xmlns:a16="http://schemas.microsoft.com/office/drawing/2014/main" id="{1C4E4A1D-8382-443C-9AC5-FB360F0B21BF}"/>
+                <a16:creationId xmlns:a16="http://schemas.microsoft.com/office/drawing/2014/main" id="{A30D7ED5-DEEC-4958-9D58-1583D2C22DB2}"/>
               </a:ext>
             </a:extLst>
           </p:cNvPr>
@@ -17390,7 +22282,7 @@
           <p:cNvPr id="24" name="process-3">
             <a:extLst xmlns:a="http://schemas.openxmlformats.org/drawingml/2006/main">
               <a:ext uri="{FF2B5EF4-FFF2-40B4-BE49-F238E27FC236}">
-                <a16:creationId xmlns:a16="http://schemas.microsoft.com/office/drawing/2014/main" id="{001C7540-BE24-4B3A-ADBD-FB91E07089A2}"/>
+                <a16:creationId xmlns:a16="http://schemas.microsoft.com/office/drawing/2014/main" id="{15DCC04D-E17E-4C16-AD59-7DC4E3D4579F}"/>
               </a:ext>
             </a:extLst>
           </p:cNvPr>
@@ -17423,7 +22315,7 @@
           <p:cNvPr id="25" name="process-no-3">
             <a:extLst xmlns:a="http://schemas.openxmlformats.org/drawingml/2006/main">
               <a:ext uri="{FF2B5EF4-FFF2-40B4-BE49-F238E27FC236}">
-                <a16:creationId xmlns:a16="http://schemas.microsoft.com/office/drawing/2014/main" id="{68F58D80-C768-4149-8CCB-851024C98DAA}"/>
+                <a16:creationId xmlns:a16="http://schemas.microsoft.com/office/drawing/2014/main" id="{9470E7E8-C0C0-433D-A9B7-1E1F796DC98A}"/>
               </a:ext>
             </a:extLst>
           </p:cNvPr>
@@ -17473,7 +22365,7 @@
           <p:cNvPr id="26" name="process-title-3">
             <a:extLst xmlns:a="http://schemas.openxmlformats.org/drawingml/2006/main">
               <a:ext uri="{FF2B5EF4-FFF2-40B4-BE49-F238E27FC236}">
-                <a16:creationId xmlns:a16="http://schemas.microsoft.com/office/drawing/2014/main" id="{F18F40A3-46C2-4F56-866F-6A40CAE540A9}"/>
+                <a16:creationId xmlns:a16="http://schemas.microsoft.com/office/drawing/2014/main" id="{3D6FCB50-42CF-4BB2-A3F4-D892B194481C}"/>
               </a:ext>
             </a:extLst>
           </p:cNvPr>
@@ -17523,7 +22415,7 @@
           <p:cNvPr id="27" name="process-detail-3">
             <a:extLst xmlns:a="http://schemas.openxmlformats.org/drawingml/2006/main">
               <a:ext uri="{FF2B5EF4-FFF2-40B4-BE49-F238E27FC236}">
-                <a16:creationId xmlns:a16="http://schemas.microsoft.com/office/drawing/2014/main" id="{61FC72F8-7162-4E93-9904-7CC74545CF61}"/>
+                <a16:creationId xmlns:a16="http://schemas.microsoft.com/office/drawing/2014/main" id="{3EC8046E-9041-4E2E-88FC-C836B720D004}"/>
               </a:ext>
             </a:extLst>
           </p:cNvPr>
@@ -17573,7 +22465,7 @@
           <p:cNvPr id="28" name="process-4">
             <a:extLst xmlns:a="http://schemas.openxmlformats.org/drawingml/2006/main">
               <a:ext uri="{FF2B5EF4-FFF2-40B4-BE49-F238E27FC236}">
-                <a16:creationId xmlns:a16="http://schemas.microsoft.com/office/drawing/2014/main" id="{5BFE8D52-DF52-4D9A-A459-EE946703CCC5}"/>
+                <a16:creationId xmlns:a16="http://schemas.microsoft.com/office/drawing/2014/main" id="{EEA7152A-6715-4287-959A-DEB1B7C199DC}"/>
               </a:ext>
             </a:extLst>
           </p:cNvPr>
@@ -17606,7 +22498,7 @@
           <p:cNvPr id="29" name="process-no-4">
             <a:extLst xmlns:a="http://schemas.openxmlformats.org/drawingml/2006/main">
               <a:ext uri="{FF2B5EF4-FFF2-40B4-BE49-F238E27FC236}">
-                <a16:creationId xmlns:a16="http://schemas.microsoft.com/office/drawing/2014/main" id="{F510F1C5-940A-426C-93FE-6C613CD5BF70}"/>
+                <a16:creationId xmlns:a16="http://schemas.microsoft.com/office/drawing/2014/main" id="{669285E9-5515-4238-97CD-87041121914A}"/>
               </a:ext>
             </a:extLst>
           </p:cNvPr>
@@ -17656,7 +22548,7 @@
           <p:cNvPr id="30" name="process-title-4">
             <a:extLst xmlns:a="http://schemas.openxmlformats.org/drawingml/2006/main">
               <a:ext uri="{FF2B5EF4-FFF2-40B4-BE49-F238E27FC236}">
-                <a16:creationId xmlns:a16="http://schemas.microsoft.com/office/drawing/2014/main" id="{67C8CDEA-C194-49AB-8DBE-54885B6BD367}"/>
+                <a16:creationId xmlns:a16="http://schemas.microsoft.com/office/drawing/2014/main" id="{B05806A6-F518-4F3C-849E-37E5530AFBE7}"/>
               </a:ext>
             </a:extLst>
           </p:cNvPr>
@@ -17706,7 +22598,7 @@
           <p:cNvPr id="31" name="process-detail-4">
             <a:extLst xmlns:a="http://schemas.openxmlformats.org/drawingml/2006/main">
               <a:ext uri="{FF2B5EF4-FFF2-40B4-BE49-F238E27FC236}">
-                <a16:creationId xmlns:a16="http://schemas.microsoft.com/office/drawing/2014/main" id="{DBBDA0E4-E853-4923-8ACD-32C3E793F304}"/>
+                <a16:creationId xmlns:a16="http://schemas.microsoft.com/office/drawing/2014/main" id="{1E7BD84D-1B9F-4586-A69F-CBD342B03E0D}"/>
               </a:ext>
             </a:extLst>
           </p:cNvPr>
@@ -17754,7 +22646,7 @@
     </p:spTree>
     <p:extLst>
       <p:ext uri="{BB962C8B-B14F-4D97-AF65-F5344CB8AC3E}">
-        <p14:creationId xmlns:p14="http://schemas.microsoft.com/office/powerpoint/2010/main" val="15272373"/>
+        <p14:creationId xmlns:p14="http://schemas.microsoft.com/office/powerpoint/2010/main" val="725191445"/>
       </p:ext>
     </p:extLst>
   </p:cSld>
@@ -17785,7 +22677,7 @@
           <p:cNvPr id="28" name="rule-60-45">
             <a:extLst xmlns:a="http://schemas.openxmlformats.org/drawingml/2006/main">
               <a:ext uri="{FF2B5EF4-FFF2-40B4-BE49-F238E27FC236}">
-                <a16:creationId xmlns:a16="http://schemas.microsoft.com/office/drawing/2014/main" id="{6FC32818-8826-4CFE-A806-1DBC5450E6B1}"/>
+                <a16:creationId xmlns:a16="http://schemas.microsoft.com/office/drawing/2014/main" id="{4C924570-BF30-4FDE-9E76-225B970048A1}"/>
               </a:ext>
             </a:extLst>
           </p:cNvPr>
@@ -17816,7 +22708,7 @@
           <p:cNvPr id="2" name="chapter-accent">
             <a:extLst xmlns:a="http://schemas.openxmlformats.org/drawingml/2006/main">
               <a:ext uri="{FF2B5EF4-FFF2-40B4-BE49-F238E27FC236}">
-                <a16:creationId xmlns:a16="http://schemas.microsoft.com/office/drawing/2014/main" id="{289D55BF-78B7-4415-ACDB-00CBF89BD44A}"/>
+                <a16:creationId xmlns:a16="http://schemas.microsoft.com/office/drawing/2014/main" id="{09701B1E-11FC-4006-AB46-369B49D37B1B}"/>
               </a:ext>
             </a:extLst>
           </p:cNvPr>
@@ -17847,7 +22739,7 @@
           <p:cNvPr id="3" name="chapter">
             <a:extLst xmlns:a="http://schemas.openxmlformats.org/drawingml/2006/main">
               <a:ext uri="{FF2B5EF4-FFF2-40B4-BE49-F238E27FC236}">
-                <a16:creationId xmlns:a16="http://schemas.microsoft.com/office/drawing/2014/main" id="{BA793A39-AF3F-4D39-8FEC-EE575AD56583}"/>
+                <a16:creationId xmlns:a16="http://schemas.microsoft.com/office/drawing/2014/main" id="{7E387A91-1627-4688-917E-817008AA0E4E}"/>
               </a:ext>
             </a:extLst>
           </p:cNvPr>
@@ -17897,7 +22789,7 @@
           <p:cNvPr id="4" name="page-number">
             <a:extLst xmlns:a="http://schemas.openxmlformats.org/drawingml/2006/main">
               <a:ext uri="{FF2B5EF4-FFF2-40B4-BE49-F238E27FC236}">
-                <a16:creationId xmlns:a16="http://schemas.microsoft.com/office/drawing/2014/main" id="{143ECF19-0EF1-4FAE-BF10-DA1A277D41A9}"/>
+                <a16:creationId xmlns:a16="http://schemas.microsoft.com/office/drawing/2014/main" id="{49C58D3A-B7A6-419B-811A-C019ECC4411D}"/>
               </a:ext>
             </a:extLst>
           </p:cNvPr>
@@ -17947,7 +22839,7 @@
           <p:cNvPr id="5" name="rule-60-674">
             <a:extLst xmlns:a="http://schemas.openxmlformats.org/drawingml/2006/main">
               <a:ext uri="{FF2B5EF4-FFF2-40B4-BE49-F238E27FC236}">
-                <a16:creationId xmlns:a16="http://schemas.microsoft.com/office/drawing/2014/main" id="{71520882-5AE6-4A57-ACD1-2D929FB7708E}"/>
+                <a16:creationId xmlns:a16="http://schemas.microsoft.com/office/drawing/2014/main" id="{C6390DBD-A4EE-4C6F-B110-890FC9AA79A0}"/>
               </a:ext>
             </a:extLst>
           </p:cNvPr>
@@ -17978,7 +22870,7 @@
           <p:cNvPr id="6" name="brand">
             <a:extLst xmlns:a="http://schemas.openxmlformats.org/drawingml/2006/main">
               <a:ext uri="{FF2B5EF4-FFF2-40B4-BE49-F238E27FC236}">
-                <a16:creationId xmlns:a16="http://schemas.microsoft.com/office/drawing/2014/main" id="{34D407FE-A9D8-413D-817D-1083D53F13AC}"/>
+                <a16:creationId xmlns:a16="http://schemas.microsoft.com/office/drawing/2014/main" id="{598134F2-E420-4648-B430-26732DD4DABF}"/>
               </a:ext>
             </a:extLst>
           </p:cNvPr>
@@ -18028,7 +22920,7 @@
           <p:cNvPr id="7" name="source">
             <a:extLst xmlns:a="http://schemas.openxmlformats.org/drawingml/2006/main">
               <a:ext uri="{FF2B5EF4-FFF2-40B4-BE49-F238E27FC236}">
-                <a16:creationId xmlns:a16="http://schemas.microsoft.com/office/drawing/2014/main" id="{18D6AD57-801D-4654-BDC8-197E7AADF8DF}"/>
+                <a16:creationId xmlns:a16="http://schemas.microsoft.com/office/drawing/2014/main" id="{3DB8FB7A-CD0D-4BED-A51A-988864504EFC}"/>
               </a:ext>
             </a:extLst>
           </p:cNvPr>
@@ -18078,7 +22970,7 @@
           <p:cNvPr id="8" name="footer-page">
             <a:extLst xmlns:a="http://schemas.openxmlformats.org/drawingml/2006/main">
               <a:ext uri="{FF2B5EF4-FFF2-40B4-BE49-F238E27FC236}">
-                <a16:creationId xmlns:a16="http://schemas.microsoft.com/office/drawing/2014/main" id="{1AFD5987-96EE-46F5-ACED-2490BA24546C}"/>
+                <a16:creationId xmlns:a16="http://schemas.microsoft.com/office/drawing/2014/main" id="{6FD018B8-A53D-4AEC-8E11-A88D06108ED7}"/>
               </a:ext>
             </a:extLst>
           </p:cNvPr>
@@ -18118,7 +23010,7 @@
                   <a:srgbClr val="69766F"/>
                 </a:solidFill>
               </a:rPr>
-              <a:t>06 / 15</a:t>
+              <a:t>06 / 18</a:t>
             </a:r>
           </a:p>
         </p:txBody>
@@ -18128,7 +23020,7 @@
           <p:cNvPr id="9" name="page-title">
             <a:extLst xmlns:a="http://schemas.openxmlformats.org/drawingml/2006/main">
               <a:ext uri="{FF2B5EF4-FFF2-40B4-BE49-F238E27FC236}">
-                <a16:creationId xmlns:a16="http://schemas.microsoft.com/office/drawing/2014/main" id="{BD20B0B1-A840-484B-8A84-6D27C2E93B54}"/>
+                <a16:creationId xmlns:a16="http://schemas.microsoft.com/office/drawing/2014/main" id="{83C9E00A-1869-428E-9F77-7708F5D5E019}"/>
               </a:ext>
             </a:extLst>
           </p:cNvPr>
@@ -18178,7 +23070,7 @@
           <p:cNvPr id="10" name="page-lead">
             <a:extLst xmlns:a="http://schemas.openxmlformats.org/drawingml/2006/main">
               <a:ext uri="{FF2B5EF4-FFF2-40B4-BE49-F238E27FC236}">
-                <a16:creationId xmlns:a16="http://schemas.microsoft.com/office/drawing/2014/main" id="{4A9193A7-AC2D-4F32-8976-F7CA5592BA51}"/>
+                <a16:creationId xmlns:a16="http://schemas.microsoft.com/office/drawing/2014/main" id="{52839F9C-8459-4E50-B30C-49D26B9C2AD0}"/>
               </a:ext>
             </a:extLst>
           </p:cNvPr>
@@ -18228,7 +23120,7 @@
           <p:cNvPr id="11" name="rule-110-385">
             <a:extLst xmlns:a="http://schemas.openxmlformats.org/drawingml/2006/main">
               <a:ext uri="{FF2B5EF4-FFF2-40B4-BE49-F238E27FC236}">
-                <a16:creationId xmlns:a16="http://schemas.microsoft.com/office/drawing/2014/main" id="{911173D2-C603-4BFF-A09E-107CCDD03D82}"/>
+                <a16:creationId xmlns:a16="http://schemas.microsoft.com/office/drawing/2014/main" id="{A9342F5B-6A10-425F-A2BE-BA49F008F444}"/>
               </a:ext>
             </a:extLst>
           </p:cNvPr>
@@ -18259,7 +23151,7 @@
           <p:cNvPr id="12" name="time-dot-0">
             <a:extLst xmlns:a="http://schemas.openxmlformats.org/drawingml/2006/main">
               <a:ext uri="{FF2B5EF4-FFF2-40B4-BE49-F238E27FC236}">
-                <a16:creationId xmlns:a16="http://schemas.microsoft.com/office/drawing/2014/main" id="{D1A3C2E7-34B5-45EC-B441-BBA27C2F8FC5}"/>
+                <a16:creationId xmlns:a16="http://schemas.microsoft.com/office/drawing/2014/main" id="{D74CC9FD-6413-4F76-BC40-5ADB3AB547E6}"/>
               </a:ext>
             </a:extLst>
           </p:cNvPr>
@@ -18290,7 +23182,7 @@
           <p:cNvPr id="13" name="time-0">
             <a:extLst xmlns:a="http://schemas.openxmlformats.org/drawingml/2006/main">
               <a:ext uri="{FF2B5EF4-FFF2-40B4-BE49-F238E27FC236}">
-                <a16:creationId xmlns:a16="http://schemas.microsoft.com/office/drawing/2014/main" id="{D642AADA-C5C8-439D-A2D4-7B42272AC121}"/>
+                <a16:creationId xmlns:a16="http://schemas.microsoft.com/office/drawing/2014/main" id="{3B71A822-CCCF-449C-97FC-C6FB379EF9B8}"/>
               </a:ext>
             </a:extLst>
           </p:cNvPr>
@@ -18340,7 +23232,7 @@
           <p:cNvPr id="14" name="time-title-0">
             <a:extLst xmlns:a="http://schemas.openxmlformats.org/drawingml/2006/main">
               <a:ext uri="{FF2B5EF4-FFF2-40B4-BE49-F238E27FC236}">
-                <a16:creationId xmlns:a16="http://schemas.microsoft.com/office/drawing/2014/main" id="{28B1FBCA-0475-456C-8676-C66DAE71236C}"/>
+                <a16:creationId xmlns:a16="http://schemas.microsoft.com/office/drawing/2014/main" id="{C303263D-F1C8-4465-89F6-EC261850E2C1}"/>
               </a:ext>
             </a:extLst>
           </p:cNvPr>
@@ -18390,7 +23282,7 @@
           <p:cNvPr id="15" name="time-detail-0">
             <a:extLst xmlns:a="http://schemas.openxmlformats.org/drawingml/2006/main">
               <a:ext uri="{FF2B5EF4-FFF2-40B4-BE49-F238E27FC236}">
-                <a16:creationId xmlns:a16="http://schemas.microsoft.com/office/drawing/2014/main" id="{CCB1C4C2-E1B2-47DA-A3FF-B6EDD5A723F7}"/>
+                <a16:creationId xmlns:a16="http://schemas.microsoft.com/office/drawing/2014/main" id="{CBA652D8-DAC9-468B-A125-69A937B5E423}"/>
               </a:ext>
             </a:extLst>
           </p:cNvPr>
@@ -18440,7 +23332,7 @@
           <p:cNvPr id="16" name="time-dot-1">
             <a:extLst xmlns:a="http://schemas.openxmlformats.org/drawingml/2006/main">
               <a:ext uri="{FF2B5EF4-FFF2-40B4-BE49-F238E27FC236}">
-                <a16:creationId xmlns:a16="http://schemas.microsoft.com/office/drawing/2014/main" id="{5489791B-1D23-442C-B32A-D8408FC3A250}"/>
+                <a16:creationId xmlns:a16="http://schemas.microsoft.com/office/drawing/2014/main" id="{99B4B845-009E-49EE-B272-89916E1D6976}"/>
               </a:ext>
             </a:extLst>
           </p:cNvPr>
@@ -18471,7 +23363,7 @@
           <p:cNvPr id="17" name="time-1">
             <a:extLst xmlns:a="http://schemas.openxmlformats.org/drawingml/2006/main">
               <a:ext uri="{FF2B5EF4-FFF2-40B4-BE49-F238E27FC236}">
-                <a16:creationId xmlns:a16="http://schemas.microsoft.com/office/drawing/2014/main" id="{11D9AA7F-004C-4E34-A524-689958BFE172}"/>
+                <a16:creationId xmlns:a16="http://schemas.microsoft.com/office/drawing/2014/main" id="{0EF5FEAB-3EB7-43A7-8786-6FC32B988284}"/>
               </a:ext>
             </a:extLst>
           </p:cNvPr>
@@ -18521,7 +23413,7 @@
           <p:cNvPr id="18" name="time-title-1">
             <a:extLst xmlns:a="http://schemas.openxmlformats.org/drawingml/2006/main">
               <a:ext uri="{FF2B5EF4-FFF2-40B4-BE49-F238E27FC236}">
-                <a16:creationId xmlns:a16="http://schemas.microsoft.com/office/drawing/2014/main" id="{3526F800-1626-4D37-9916-BACDF64B6F1F}"/>
+                <a16:creationId xmlns:a16="http://schemas.microsoft.com/office/drawing/2014/main" id="{9BDFE997-6C8E-403A-8DC3-756BC01537BE}"/>
               </a:ext>
             </a:extLst>
           </p:cNvPr>
@@ -18571,7 +23463,7 @@
           <p:cNvPr id="19" name="time-detail-1">
             <a:extLst xmlns:a="http://schemas.openxmlformats.org/drawingml/2006/main">
               <a:ext uri="{FF2B5EF4-FFF2-40B4-BE49-F238E27FC236}">
-                <a16:creationId xmlns:a16="http://schemas.microsoft.com/office/drawing/2014/main" id="{E6FD3650-88DD-4CE8-BAE4-4FEB216E2A18}"/>
+                <a16:creationId xmlns:a16="http://schemas.microsoft.com/office/drawing/2014/main" id="{576063B8-1314-4DFB-BF0E-FA8BFFDFBA6D}"/>
               </a:ext>
             </a:extLst>
           </p:cNvPr>
@@ -18621,7 +23513,7 @@
           <p:cNvPr id="20" name="time-dot-2">
             <a:extLst xmlns:a="http://schemas.openxmlformats.org/drawingml/2006/main">
               <a:ext uri="{FF2B5EF4-FFF2-40B4-BE49-F238E27FC236}">
-                <a16:creationId xmlns:a16="http://schemas.microsoft.com/office/drawing/2014/main" id="{C2F0A007-3E40-4774-8B9E-D1345C59D3D3}"/>
+                <a16:creationId xmlns:a16="http://schemas.microsoft.com/office/drawing/2014/main" id="{0196C643-FD0E-40A1-8C80-AC8B9DD1AE32}"/>
               </a:ext>
             </a:extLst>
           </p:cNvPr>
@@ -18652,7 +23544,7 @@
           <p:cNvPr id="21" name="time-2">
             <a:extLst xmlns:a="http://schemas.openxmlformats.org/drawingml/2006/main">
               <a:ext uri="{FF2B5EF4-FFF2-40B4-BE49-F238E27FC236}">
-                <a16:creationId xmlns:a16="http://schemas.microsoft.com/office/drawing/2014/main" id="{D00CBF23-7100-426B-A1C0-17E1CB63872B}"/>
+                <a16:creationId xmlns:a16="http://schemas.microsoft.com/office/drawing/2014/main" id="{BF89A8A5-819A-451C-AEDA-DB1D8E316CC7}"/>
               </a:ext>
             </a:extLst>
           </p:cNvPr>
@@ -18702,7 +23594,7 @@
           <p:cNvPr id="22" name="time-title-2">
             <a:extLst xmlns:a="http://schemas.openxmlformats.org/drawingml/2006/main">
               <a:ext uri="{FF2B5EF4-FFF2-40B4-BE49-F238E27FC236}">
-                <a16:creationId xmlns:a16="http://schemas.microsoft.com/office/drawing/2014/main" id="{A2DB23B4-7EC9-4AAB-991F-35AF330AE708}"/>
+                <a16:creationId xmlns:a16="http://schemas.microsoft.com/office/drawing/2014/main" id="{E43A184C-50D2-4F1F-94F5-69D050E51A87}"/>
               </a:ext>
             </a:extLst>
           </p:cNvPr>
@@ -18752,7 +23644,7 @@
           <p:cNvPr id="23" name="time-detail-2">
             <a:extLst xmlns:a="http://schemas.openxmlformats.org/drawingml/2006/main">
               <a:ext uri="{FF2B5EF4-FFF2-40B4-BE49-F238E27FC236}">
-                <a16:creationId xmlns:a16="http://schemas.microsoft.com/office/drawing/2014/main" id="{363BB84E-4264-4726-A919-DB55899952C0}"/>
+                <a16:creationId xmlns:a16="http://schemas.microsoft.com/office/drawing/2014/main" id="{4300C92A-A4D8-4ECA-AF8C-EE1BADDB2054}"/>
               </a:ext>
             </a:extLst>
           </p:cNvPr>
@@ -18802,7 +23694,7 @@
           <p:cNvPr id="24" name="time-dot-3">
             <a:extLst xmlns:a="http://schemas.openxmlformats.org/drawingml/2006/main">
               <a:ext uri="{FF2B5EF4-FFF2-40B4-BE49-F238E27FC236}">
-                <a16:creationId xmlns:a16="http://schemas.microsoft.com/office/drawing/2014/main" id="{991B8718-21E5-4B74-B819-2C0691A91DBF}"/>
+                <a16:creationId xmlns:a16="http://schemas.microsoft.com/office/drawing/2014/main" id="{94F51D32-A9E9-4AB9-8BA2-F0D3B9C7DE24}"/>
               </a:ext>
             </a:extLst>
           </p:cNvPr>
@@ -18833,7 +23725,7 @@
           <p:cNvPr id="25" name="time-3">
             <a:extLst xmlns:a="http://schemas.openxmlformats.org/drawingml/2006/main">
               <a:ext uri="{FF2B5EF4-FFF2-40B4-BE49-F238E27FC236}">
-                <a16:creationId xmlns:a16="http://schemas.microsoft.com/office/drawing/2014/main" id="{10AE9AAF-1900-4FC2-BA87-5EE212C4C4BF}"/>
+                <a16:creationId xmlns:a16="http://schemas.microsoft.com/office/drawing/2014/main" id="{E743B9F3-A13F-4D3F-81C2-0F16ED0FAC7F}"/>
               </a:ext>
             </a:extLst>
           </p:cNvPr>
@@ -18883,7 +23775,7 @@
           <p:cNvPr id="26" name="time-title-3">
             <a:extLst xmlns:a="http://schemas.openxmlformats.org/drawingml/2006/main">
               <a:ext uri="{FF2B5EF4-FFF2-40B4-BE49-F238E27FC236}">
-                <a16:creationId xmlns:a16="http://schemas.microsoft.com/office/drawing/2014/main" id="{EC395E47-3D16-4941-806B-3612867E76CA}"/>
+                <a16:creationId xmlns:a16="http://schemas.microsoft.com/office/drawing/2014/main" id="{FC7F194B-CB35-4F39-ADAE-8FB974A2ED5A}"/>
               </a:ext>
             </a:extLst>
           </p:cNvPr>
@@ -18933,7 +23825,7 @@
           <p:cNvPr id="27" name="time-detail-3">
             <a:extLst xmlns:a="http://schemas.openxmlformats.org/drawingml/2006/main">
               <a:ext uri="{FF2B5EF4-FFF2-40B4-BE49-F238E27FC236}">
-                <a16:creationId xmlns:a16="http://schemas.microsoft.com/office/drawing/2014/main" id="{AD6E2507-D37A-4568-B2A1-B61E6DF01504}"/>
+                <a16:creationId xmlns:a16="http://schemas.microsoft.com/office/drawing/2014/main" id="{5D836F98-81AF-480D-A3F2-CB09E3F8AE65}"/>
               </a:ext>
             </a:extLst>
           </p:cNvPr>
@@ -18981,7 +23873,7 @@
     </p:spTree>
     <p:extLst>
       <p:ext uri="{BB962C8B-B14F-4D97-AF65-F5344CB8AC3E}">
-        <p14:creationId xmlns:p14="http://schemas.microsoft.com/office/powerpoint/2010/main" val="349880910"/>
+        <p14:creationId xmlns:p14="http://schemas.microsoft.com/office/powerpoint/2010/main" val="1905742792"/>
       </p:ext>
     </p:extLst>
   </p:cSld>
@@ -19012,7 +23904,7 @@
           <p:cNvPr id="35" name="rule-60-45">
             <a:extLst xmlns:a="http://schemas.openxmlformats.org/drawingml/2006/main">
               <a:ext uri="{FF2B5EF4-FFF2-40B4-BE49-F238E27FC236}">
-                <a16:creationId xmlns:a16="http://schemas.microsoft.com/office/drawing/2014/main" id="{ADB486EA-DFA7-47CE-9441-AAD76411C77E}"/>
+                <a16:creationId xmlns:a16="http://schemas.microsoft.com/office/drawing/2014/main" id="{156D17B4-04C2-403D-BD57-ACDD712B0C34}"/>
               </a:ext>
             </a:extLst>
           </p:cNvPr>
@@ -19043,7 +23935,7 @@
           <p:cNvPr id="2" name="chapter-accent">
             <a:extLst xmlns:a="http://schemas.openxmlformats.org/drawingml/2006/main">
               <a:ext uri="{FF2B5EF4-FFF2-40B4-BE49-F238E27FC236}">
-                <a16:creationId xmlns:a16="http://schemas.microsoft.com/office/drawing/2014/main" id="{0AFB8A6F-24B5-4C8A-AAF7-8B747C5D560F}"/>
+                <a16:creationId xmlns:a16="http://schemas.microsoft.com/office/drawing/2014/main" id="{EEE006EE-2242-47B9-9AB2-C9DAD1377C65}"/>
               </a:ext>
             </a:extLst>
           </p:cNvPr>
@@ -19074,7 +23966,7 @@
           <p:cNvPr id="3" name="chapter">
             <a:extLst xmlns:a="http://schemas.openxmlformats.org/drawingml/2006/main">
               <a:ext uri="{FF2B5EF4-FFF2-40B4-BE49-F238E27FC236}">
-                <a16:creationId xmlns:a16="http://schemas.microsoft.com/office/drawing/2014/main" id="{26E4239C-0218-4384-B61B-EFB6B09621E1}"/>
+                <a16:creationId xmlns:a16="http://schemas.microsoft.com/office/drawing/2014/main" id="{3B235BEE-74FF-424F-8B71-C0BEDBC18CD6}"/>
               </a:ext>
             </a:extLst>
           </p:cNvPr>
@@ -19124,7 +24016,7 @@
           <p:cNvPr id="4" name="page-number">
             <a:extLst xmlns:a="http://schemas.openxmlformats.org/drawingml/2006/main">
               <a:ext uri="{FF2B5EF4-FFF2-40B4-BE49-F238E27FC236}">
-                <a16:creationId xmlns:a16="http://schemas.microsoft.com/office/drawing/2014/main" id="{0A05BCC6-6F6C-4232-98BC-3729E8580B84}"/>
+                <a16:creationId xmlns:a16="http://schemas.microsoft.com/office/drawing/2014/main" id="{CD0AEDD8-E612-4AD4-B6FC-FE0426080B55}"/>
               </a:ext>
             </a:extLst>
           </p:cNvPr>
@@ -19174,7 +24066,7 @@
           <p:cNvPr id="5" name="rule-60-674">
             <a:extLst xmlns:a="http://schemas.openxmlformats.org/drawingml/2006/main">
               <a:ext uri="{FF2B5EF4-FFF2-40B4-BE49-F238E27FC236}">
-                <a16:creationId xmlns:a16="http://schemas.microsoft.com/office/drawing/2014/main" id="{D3BD6DA1-95AE-4547-90D4-B7E2FE859606}"/>
+                <a16:creationId xmlns:a16="http://schemas.microsoft.com/office/drawing/2014/main" id="{E15862B7-3720-4E85-9EFA-B9D0583528F0}"/>
               </a:ext>
             </a:extLst>
           </p:cNvPr>
@@ -19205,7 +24097,7 @@
           <p:cNvPr id="6" name="brand">
             <a:extLst xmlns:a="http://schemas.openxmlformats.org/drawingml/2006/main">
               <a:ext uri="{FF2B5EF4-FFF2-40B4-BE49-F238E27FC236}">
-                <a16:creationId xmlns:a16="http://schemas.microsoft.com/office/drawing/2014/main" id="{9D332A15-A262-4DF9-94E0-2DC11F79EB5A}"/>
+                <a16:creationId xmlns:a16="http://schemas.microsoft.com/office/drawing/2014/main" id="{FFD5BF9A-C37D-465B-8536-074C7AE1284C}"/>
               </a:ext>
             </a:extLst>
           </p:cNvPr>
@@ -19255,7 +24147,7 @@
           <p:cNvPr id="7" name="source">
             <a:extLst xmlns:a="http://schemas.openxmlformats.org/drawingml/2006/main">
               <a:ext uri="{FF2B5EF4-FFF2-40B4-BE49-F238E27FC236}">
-                <a16:creationId xmlns:a16="http://schemas.microsoft.com/office/drawing/2014/main" id="{C97487DA-1272-4368-97F6-A881480B9016}"/>
+                <a16:creationId xmlns:a16="http://schemas.microsoft.com/office/drawing/2014/main" id="{587A06A0-0F83-42B3-9FA4-948984148C29}"/>
               </a:ext>
             </a:extLst>
           </p:cNvPr>
@@ -19305,7 +24197,7 @@
           <p:cNvPr id="8" name="footer-page">
             <a:extLst xmlns:a="http://schemas.openxmlformats.org/drawingml/2006/main">
               <a:ext uri="{FF2B5EF4-FFF2-40B4-BE49-F238E27FC236}">
-                <a16:creationId xmlns:a16="http://schemas.microsoft.com/office/drawing/2014/main" id="{4B479D0F-3C21-4D22-AE7D-C33101765270}"/>
+                <a16:creationId xmlns:a16="http://schemas.microsoft.com/office/drawing/2014/main" id="{58B36C2D-E445-437A-B15B-D0A92BECDD43}"/>
               </a:ext>
             </a:extLst>
           </p:cNvPr>
@@ -19345,7 +24237,7 @@
                   <a:srgbClr val="69766F"/>
                 </a:solidFill>
               </a:rPr>
-              <a:t>07 / 15</a:t>
+              <a:t>07 / 18</a:t>
             </a:r>
           </a:p>
         </p:txBody>
@@ -19355,7 +24247,7 @@
           <p:cNvPr id="9" name="page-title">
             <a:extLst xmlns:a="http://schemas.openxmlformats.org/drawingml/2006/main">
               <a:ext uri="{FF2B5EF4-FFF2-40B4-BE49-F238E27FC236}">
-                <a16:creationId xmlns:a16="http://schemas.microsoft.com/office/drawing/2014/main" id="{83EDEBC2-F06F-48C2-8435-BF3B0039A7DE}"/>
+                <a16:creationId xmlns:a16="http://schemas.microsoft.com/office/drawing/2014/main" id="{87585B56-2009-428B-A12A-D46CB44198BC}"/>
               </a:ext>
             </a:extLst>
           </p:cNvPr>
@@ -19405,7 +24297,7 @@
           <p:cNvPr id="10" name="page-lead">
             <a:extLst xmlns:a="http://schemas.openxmlformats.org/drawingml/2006/main">
               <a:ext uri="{FF2B5EF4-FFF2-40B4-BE49-F238E27FC236}">
-                <a16:creationId xmlns:a16="http://schemas.microsoft.com/office/drawing/2014/main" id="{AA20280D-2269-4008-9EA5-B785246D248E}"/>
+                <a16:creationId xmlns:a16="http://schemas.microsoft.com/office/drawing/2014/main" id="{5CE095DC-8A2F-4636-BEB1-C54ED7505174}"/>
               </a:ext>
             </a:extLst>
           </p:cNvPr>
@@ -19455,7 +24347,7 @@
           <p:cNvPr id="11" name="lane-0">
             <a:extLst xmlns:a="http://schemas.openxmlformats.org/drawingml/2006/main">
               <a:ext uri="{FF2B5EF4-FFF2-40B4-BE49-F238E27FC236}">
-                <a16:creationId xmlns:a16="http://schemas.microsoft.com/office/drawing/2014/main" id="{9C1C1ADF-BE73-4B74-8B5F-29FE6AEE2C5D}"/>
+                <a16:creationId xmlns:a16="http://schemas.microsoft.com/office/drawing/2014/main" id="{BD44708B-E34C-4317-BA9C-15564FFFA9B3}"/>
               </a:ext>
             </a:extLst>
           </p:cNvPr>
@@ -19488,7 +24380,7 @@
           <p:cNvPr id="12" name="lane-actor-0">
             <a:extLst xmlns:a="http://schemas.openxmlformats.org/drawingml/2006/main">
               <a:ext uri="{FF2B5EF4-FFF2-40B4-BE49-F238E27FC236}">
-                <a16:creationId xmlns:a16="http://schemas.microsoft.com/office/drawing/2014/main" id="{AA17092C-23D0-4233-A9EA-CE69D7D01B86}"/>
+                <a16:creationId xmlns:a16="http://schemas.microsoft.com/office/drawing/2014/main" id="{4B1FE841-1CA7-49BF-AF0E-4D6079C40070}"/>
               </a:ext>
             </a:extLst>
           </p:cNvPr>
@@ -19538,7 +24430,7 @@
           <p:cNvPr id="13" name="lane-0-0">
             <a:extLst xmlns:a="http://schemas.openxmlformats.org/drawingml/2006/main">
               <a:ext uri="{FF2B5EF4-FFF2-40B4-BE49-F238E27FC236}">
-                <a16:creationId xmlns:a16="http://schemas.microsoft.com/office/drawing/2014/main" id="{DC059394-7C29-42C7-845B-26DF289CB16D}"/>
+                <a16:creationId xmlns:a16="http://schemas.microsoft.com/office/drawing/2014/main" id="{096F6677-1D7E-4646-AF85-59B49739C06A}"/>
               </a:ext>
             </a:extLst>
           </p:cNvPr>
@@ -19588,7 +24480,7 @@
           <p:cNvPr id="14" name="lane-0-1">
             <a:extLst xmlns:a="http://schemas.openxmlformats.org/drawingml/2006/main">
               <a:ext uri="{FF2B5EF4-FFF2-40B4-BE49-F238E27FC236}">
-                <a16:creationId xmlns:a16="http://schemas.microsoft.com/office/drawing/2014/main" id="{63F1465C-F4E0-4AE5-A75E-85EFB295A511}"/>
+                <a16:creationId xmlns:a16="http://schemas.microsoft.com/office/drawing/2014/main" id="{3D54A54E-965D-4988-893F-4BB5B9560977}"/>
               </a:ext>
             </a:extLst>
           </p:cNvPr>
@@ -19638,7 +24530,7 @@
           <p:cNvPr id="15" name="lane-0-2">
             <a:extLst xmlns:a="http://schemas.openxmlformats.org/drawingml/2006/main">
               <a:ext uri="{FF2B5EF4-FFF2-40B4-BE49-F238E27FC236}">
-                <a16:creationId xmlns:a16="http://schemas.microsoft.com/office/drawing/2014/main" id="{1ABF702A-7D4A-4F22-852F-5757448D7940}"/>
+                <a16:creationId xmlns:a16="http://schemas.microsoft.com/office/drawing/2014/main" id="{46BFFBDE-A2E3-4D65-B572-2CC2B5B3247C}"/>
               </a:ext>
             </a:extLst>
           </p:cNvPr>
@@ -19688,7 +24580,7 @@
           <p:cNvPr id="16" name="lane-0-3">
             <a:extLst xmlns:a="http://schemas.openxmlformats.org/drawingml/2006/main">
               <a:ext uri="{FF2B5EF4-FFF2-40B4-BE49-F238E27FC236}">
-                <a16:creationId xmlns:a16="http://schemas.microsoft.com/office/drawing/2014/main" id="{D03DD740-AC1F-4316-ABDA-D1485B17B6DD}"/>
+                <a16:creationId xmlns:a16="http://schemas.microsoft.com/office/drawing/2014/main" id="{D22B7343-CE55-44DB-844C-1FA60B7F980F}"/>
               </a:ext>
             </a:extLst>
           </p:cNvPr>
@@ -19738,7 +24630,7 @@
           <p:cNvPr id="17" name="lane-1">
             <a:extLst xmlns:a="http://schemas.openxmlformats.org/drawingml/2006/main">
               <a:ext uri="{FF2B5EF4-FFF2-40B4-BE49-F238E27FC236}">
-                <a16:creationId xmlns:a16="http://schemas.microsoft.com/office/drawing/2014/main" id="{4BCE790F-37BC-4799-BE33-B62D1A61B9E5}"/>
+                <a16:creationId xmlns:a16="http://schemas.microsoft.com/office/drawing/2014/main" id="{8C2724BB-937B-4849-9B46-64ABCCD908B4}"/>
               </a:ext>
             </a:extLst>
           </p:cNvPr>
@@ -19771,7 +24663,7 @@
           <p:cNvPr id="18" name="lane-actor-1">
             <a:extLst xmlns:a="http://schemas.openxmlformats.org/drawingml/2006/main">
               <a:ext uri="{FF2B5EF4-FFF2-40B4-BE49-F238E27FC236}">
-                <a16:creationId xmlns:a16="http://schemas.microsoft.com/office/drawing/2014/main" id="{99131EF2-D283-4E93-A3D4-90F36AF69918}"/>
+                <a16:creationId xmlns:a16="http://schemas.microsoft.com/office/drawing/2014/main" id="{BECB3CCB-F4A6-4CDC-A461-AFE78C757421}"/>
               </a:ext>
             </a:extLst>
           </p:cNvPr>
@@ -19821,7 +24713,7 @@
           <p:cNvPr id="19" name="lane-1-0">
             <a:extLst xmlns:a="http://schemas.openxmlformats.org/drawingml/2006/main">
               <a:ext uri="{FF2B5EF4-FFF2-40B4-BE49-F238E27FC236}">
-                <a16:creationId xmlns:a16="http://schemas.microsoft.com/office/drawing/2014/main" id="{60FCDA93-8453-4B2D-8235-BACF04AC838D}"/>
+                <a16:creationId xmlns:a16="http://schemas.microsoft.com/office/drawing/2014/main" id="{D37C3582-5E3A-438C-8E6E-1D946770463E}"/>
               </a:ext>
             </a:extLst>
           </p:cNvPr>
@@ -19871,7 +24763,7 @@
           <p:cNvPr id="20" name="lane-1-1">
             <a:extLst xmlns:a="http://schemas.openxmlformats.org/drawingml/2006/main">
               <a:ext uri="{FF2B5EF4-FFF2-40B4-BE49-F238E27FC236}">
-                <a16:creationId xmlns:a16="http://schemas.microsoft.com/office/drawing/2014/main" id="{1CACCEC7-C437-4A13-A4CB-CB3300334A6A}"/>
+                <a16:creationId xmlns:a16="http://schemas.microsoft.com/office/drawing/2014/main" id="{5E067852-B61F-43C7-9B2F-64340009D509}"/>
               </a:ext>
             </a:extLst>
           </p:cNvPr>
@@ -19921,7 +24813,7 @@
           <p:cNvPr id="21" name="lane-1-2">
             <a:extLst xmlns:a="http://schemas.openxmlformats.org/drawingml/2006/main">
               <a:ext uri="{FF2B5EF4-FFF2-40B4-BE49-F238E27FC236}">
-                <a16:creationId xmlns:a16="http://schemas.microsoft.com/office/drawing/2014/main" id="{8A12AD6D-B06C-4707-98E6-E460D606E10B}"/>
+                <a16:creationId xmlns:a16="http://schemas.microsoft.com/office/drawing/2014/main" id="{4B45A059-E1F1-454D-910B-A51ADBE15659}"/>
               </a:ext>
             </a:extLst>
           </p:cNvPr>
@@ -19971,7 +24863,7 @@
           <p:cNvPr id="22" name="lane-1-3">
             <a:extLst xmlns:a="http://schemas.openxmlformats.org/drawingml/2006/main">
               <a:ext uri="{FF2B5EF4-FFF2-40B4-BE49-F238E27FC236}">
-                <a16:creationId xmlns:a16="http://schemas.microsoft.com/office/drawing/2014/main" id="{087EA5EA-D588-4AB9-9AF4-C1C3571F2BC2}"/>
+                <a16:creationId xmlns:a16="http://schemas.microsoft.com/office/drawing/2014/main" id="{5569D57F-80AB-4F10-9639-CF85C7C7CC1B}"/>
               </a:ext>
             </a:extLst>
           </p:cNvPr>
@@ -20021,7 +24913,7 @@
           <p:cNvPr id="23" name="lane-2">
             <a:extLst xmlns:a="http://schemas.openxmlformats.org/drawingml/2006/main">
               <a:ext uri="{FF2B5EF4-FFF2-40B4-BE49-F238E27FC236}">
-                <a16:creationId xmlns:a16="http://schemas.microsoft.com/office/drawing/2014/main" id="{2174BA4B-9969-4E57-801E-612F23868BC9}"/>
+                <a16:creationId xmlns:a16="http://schemas.microsoft.com/office/drawing/2014/main" id="{28DCE4C7-B641-4684-AB58-DC11E0FA08BC}"/>
               </a:ext>
             </a:extLst>
           </p:cNvPr>
@@ -20054,7 +24946,7 @@
           <p:cNvPr id="24" name="lane-actor-2">
             <a:extLst xmlns:a="http://schemas.openxmlformats.org/drawingml/2006/main">
               <a:ext uri="{FF2B5EF4-FFF2-40B4-BE49-F238E27FC236}">
-                <a16:creationId xmlns:a16="http://schemas.microsoft.com/office/drawing/2014/main" id="{0EDDE6FE-E50A-4701-8121-0A0F22EEBCCB}"/>
+                <a16:creationId xmlns:a16="http://schemas.microsoft.com/office/drawing/2014/main" id="{4BEFA98F-885B-4E26-A7C7-04AC2AA7B459}"/>
               </a:ext>
             </a:extLst>
           </p:cNvPr>
@@ -20104,7 +24996,7 @@
           <p:cNvPr id="25" name="lane-2-0">
             <a:extLst xmlns:a="http://schemas.openxmlformats.org/drawingml/2006/main">
               <a:ext uri="{FF2B5EF4-FFF2-40B4-BE49-F238E27FC236}">
-                <a16:creationId xmlns:a16="http://schemas.microsoft.com/office/drawing/2014/main" id="{E0EB392B-C5E2-4F1C-AA8B-08A89628DDF2}"/>
+                <a16:creationId xmlns:a16="http://schemas.microsoft.com/office/drawing/2014/main" id="{80FC4BFE-0F07-4169-AC5B-65130113CD51}"/>
               </a:ext>
             </a:extLst>
           </p:cNvPr>
@@ -20154,7 +25046,7 @@
           <p:cNvPr id="26" name="lane-2-1">
             <a:extLst xmlns:a="http://schemas.openxmlformats.org/drawingml/2006/main">
               <a:ext uri="{FF2B5EF4-FFF2-40B4-BE49-F238E27FC236}">
-                <a16:creationId xmlns:a16="http://schemas.microsoft.com/office/drawing/2014/main" id="{08A5ABAB-D325-4F0D-BFCE-79A1FF40037C}"/>
+                <a16:creationId xmlns:a16="http://schemas.microsoft.com/office/drawing/2014/main" id="{FBBDB7E3-DE17-4BCE-91DB-C56C83625CD0}"/>
               </a:ext>
             </a:extLst>
           </p:cNvPr>
@@ -20204,7 +25096,7 @@
           <p:cNvPr id="27" name="lane-2-2">
             <a:extLst xmlns:a="http://schemas.openxmlformats.org/drawingml/2006/main">
               <a:ext uri="{FF2B5EF4-FFF2-40B4-BE49-F238E27FC236}">
-                <a16:creationId xmlns:a16="http://schemas.microsoft.com/office/drawing/2014/main" id="{EA9A9AFA-21AD-4743-8F18-3BD1D5378ADD}"/>
+                <a16:creationId xmlns:a16="http://schemas.microsoft.com/office/drawing/2014/main" id="{1C6A484B-6477-45D2-818E-8E7BE5A4FAA3}"/>
               </a:ext>
             </a:extLst>
           </p:cNvPr>
@@ -20254,7 +25146,7 @@
           <p:cNvPr id="28" name="lane-2-3">
             <a:extLst xmlns:a="http://schemas.openxmlformats.org/drawingml/2006/main">
               <a:ext uri="{FF2B5EF4-FFF2-40B4-BE49-F238E27FC236}">
-                <a16:creationId xmlns:a16="http://schemas.microsoft.com/office/drawing/2014/main" id="{322BF1BC-E7E1-46CD-87DF-EB7A143AA2F8}"/>
+                <a16:creationId xmlns:a16="http://schemas.microsoft.com/office/drawing/2014/main" id="{81AACBA2-960B-46ED-B0CA-3E8189631467}"/>
               </a:ext>
             </a:extLst>
           </p:cNvPr>
@@ -20304,7 +25196,7 @@
           <p:cNvPr id="29" name="lane-3">
             <a:extLst xmlns:a="http://schemas.openxmlformats.org/drawingml/2006/main">
               <a:ext uri="{FF2B5EF4-FFF2-40B4-BE49-F238E27FC236}">
-                <a16:creationId xmlns:a16="http://schemas.microsoft.com/office/drawing/2014/main" id="{CE916E43-DBB2-4409-8779-BD3047AED0B3}"/>
+                <a16:creationId xmlns:a16="http://schemas.microsoft.com/office/drawing/2014/main" id="{4D940709-8FD2-44E3-9E46-FAD059B79291}"/>
               </a:ext>
             </a:extLst>
           </p:cNvPr>
@@ -20337,7 +25229,7 @@
           <p:cNvPr id="30" name="lane-actor-3">
             <a:extLst xmlns:a="http://schemas.openxmlformats.org/drawingml/2006/main">
               <a:ext uri="{FF2B5EF4-FFF2-40B4-BE49-F238E27FC236}">
-                <a16:creationId xmlns:a16="http://schemas.microsoft.com/office/drawing/2014/main" id="{2D85364D-0233-4E89-BC59-9CE07FDB113D}"/>
+                <a16:creationId xmlns:a16="http://schemas.microsoft.com/office/drawing/2014/main" id="{D45F05D4-FF85-44B0-A56F-5F316D0CD050}"/>
               </a:ext>
             </a:extLst>
           </p:cNvPr>
@@ -20387,7 +25279,7 @@
           <p:cNvPr id="31" name="lane-3-0">
             <a:extLst xmlns:a="http://schemas.openxmlformats.org/drawingml/2006/main">
               <a:ext uri="{FF2B5EF4-FFF2-40B4-BE49-F238E27FC236}">
-                <a16:creationId xmlns:a16="http://schemas.microsoft.com/office/drawing/2014/main" id="{E10EF00A-6C67-486C-AC7E-3DB38013427C}"/>
+                <a16:creationId xmlns:a16="http://schemas.microsoft.com/office/drawing/2014/main" id="{8F844BAD-0F6D-47D6-83B9-372E94F2D416}"/>
               </a:ext>
             </a:extLst>
           </p:cNvPr>
@@ -20437,7 +25329,7 @@
           <p:cNvPr id="32" name="lane-3-1">
             <a:extLst xmlns:a="http://schemas.openxmlformats.org/drawingml/2006/main">
               <a:ext uri="{FF2B5EF4-FFF2-40B4-BE49-F238E27FC236}">
-                <a16:creationId xmlns:a16="http://schemas.microsoft.com/office/drawing/2014/main" id="{FDCE406C-FD7A-46F7-BB2C-4262BEFEAFAA}"/>
+                <a16:creationId xmlns:a16="http://schemas.microsoft.com/office/drawing/2014/main" id="{45923FAC-712F-4A85-8F11-60900D8C64D5}"/>
               </a:ext>
             </a:extLst>
           </p:cNvPr>
@@ -20487,7 +25379,7 @@
           <p:cNvPr id="33" name="lane-3-2">
             <a:extLst xmlns:a="http://schemas.openxmlformats.org/drawingml/2006/main">
               <a:ext uri="{FF2B5EF4-FFF2-40B4-BE49-F238E27FC236}">
-                <a16:creationId xmlns:a16="http://schemas.microsoft.com/office/drawing/2014/main" id="{0C73F925-A4ED-421F-B6C7-02E3237741E9}"/>
+                <a16:creationId xmlns:a16="http://schemas.microsoft.com/office/drawing/2014/main" id="{D53FDD32-4C18-4B61-AA90-C433889970AD}"/>
               </a:ext>
             </a:extLst>
           </p:cNvPr>
@@ -20537,7 +25429,7 @@
           <p:cNvPr id="34" name="lane-3-3">
             <a:extLst xmlns:a="http://schemas.openxmlformats.org/drawingml/2006/main">
               <a:ext uri="{FF2B5EF4-FFF2-40B4-BE49-F238E27FC236}">
-                <a16:creationId xmlns:a16="http://schemas.microsoft.com/office/drawing/2014/main" id="{ABF170F7-5EDA-48CB-8333-545D8D3D0B76}"/>
+                <a16:creationId xmlns:a16="http://schemas.microsoft.com/office/drawing/2014/main" id="{0CEC4ACA-B451-4FA4-8880-163A4E9B56EE}"/>
               </a:ext>
             </a:extLst>
           </p:cNvPr>
@@ -20585,7 +25477,7 @@
     </p:spTree>
     <p:extLst>
       <p:ext uri="{BB962C8B-B14F-4D97-AF65-F5344CB8AC3E}">
-        <p14:creationId xmlns:p14="http://schemas.microsoft.com/office/powerpoint/2010/main" val="1846473203"/>
+        <p14:creationId xmlns:p14="http://schemas.microsoft.com/office/powerpoint/2010/main" val="317317008"/>
       </p:ext>
     </p:extLst>
   </p:cSld>
@@ -20616,7 +25508,7 @@
           <p:cNvPr id="41" name="rule-60-45">
             <a:extLst xmlns:a="http://schemas.openxmlformats.org/drawingml/2006/main">
               <a:ext uri="{FF2B5EF4-FFF2-40B4-BE49-F238E27FC236}">
-                <a16:creationId xmlns:a16="http://schemas.microsoft.com/office/drawing/2014/main" id="{76D8E18B-F4CB-42E6-813A-7A9810B126BB}"/>
+                <a16:creationId xmlns:a16="http://schemas.microsoft.com/office/drawing/2014/main" id="{1C23E234-BF24-4FF8-96C4-02DC332BC812}"/>
               </a:ext>
             </a:extLst>
           </p:cNvPr>
@@ -20647,7 +25539,7 @@
           <p:cNvPr id="2" name="chapter-accent">
             <a:extLst xmlns:a="http://schemas.openxmlformats.org/drawingml/2006/main">
               <a:ext uri="{FF2B5EF4-FFF2-40B4-BE49-F238E27FC236}">
-                <a16:creationId xmlns:a16="http://schemas.microsoft.com/office/drawing/2014/main" id="{051C6CE3-C857-446B-9375-B38F80A0A784}"/>
+                <a16:creationId xmlns:a16="http://schemas.microsoft.com/office/drawing/2014/main" id="{23D73EDC-74DC-4489-BEA7-698C8C4AB558}"/>
               </a:ext>
             </a:extLst>
           </p:cNvPr>
@@ -20678,7 +25570,7 @@
           <p:cNvPr id="3" name="chapter">
             <a:extLst xmlns:a="http://schemas.openxmlformats.org/drawingml/2006/main">
               <a:ext uri="{FF2B5EF4-FFF2-40B4-BE49-F238E27FC236}">
-                <a16:creationId xmlns:a16="http://schemas.microsoft.com/office/drawing/2014/main" id="{A11DF676-8306-47E0-B13A-E926AF512970}"/>
+                <a16:creationId xmlns:a16="http://schemas.microsoft.com/office/drawing/2014/main" id="{78FC80E0-59CC-4474-8D64-A3EBA4BB571F}"/>
               </a:ext>
             </a:extLst>
           </p:cNvPr>
@@ -20728,7 +25620,7 @@
           <p:cNvPr id="4" name="page-number">
             <a:extLst xmlns:a="http://schemas.openxmlformats.org/drawingml/2006/main">
               <a:ext uri="{FF2B5EF4-FFF2-40B4-BE49-F238E27FC236}">
-                <a16:creationId xmlns:a16="http://schemas.microsoft.com/office/drawing/2014/main" id="{E8604C4A-22E7-487F-8EB9-B26BD6AFE3ED}"/>
+                <a16:creationId xmlns:a16="http://schemas.microsoft.com/office/drawing/2014/main" id="{D51E7E9B-C039-43A9-932D-D743FAF14CFF}"/>
               </a:ext>
             </a:extLst>
           </p:cNvPr>
@@ -20778,7 +25670,7 @@
           <p:cNvPr id="5" name="rule-60-674">
             <a:extLst xmlns:a="http://schemas.openxmlformats.org/drawingml/2006/main">
               <a:ext uri="{FF2B5EF4-FFF2-40B4-BE49-F238E27FC236}">
-                <a16:creationId xmlns:a16="http://schemas.microsoft.com/office/drawing/2014/main" id="{9F85E97C-5FAE-46DD-BA36-EE95979883F0}"/>
+                <a16:creationId xmlns:a16="http://schemas.microsoft.com/office/drawing/2014/main" id="{43730EBD-ACD5-42AA-B243-6D0CA702E7FF}"/>
               </a:ext>
             </a:extLst>
           </p:cNvPr>
@@ -20809,7 +25701,7 @@
           <p:cNvPr id="6" name="brand">
             <a:extLst xmlns:a="http://schemas.openxmlformats.org/drawingml/2006/main">
               <a:ext uri="{FF2B5EF4-FFF2-40B4-BE49-F238E27FC236}">
-                <a16:creationId xmlns:a16="http://schemas.microsoft.com/office/drawing/2014/main" id="{6C692188-AF4E-43FD-A1CE-CA29A0A5605F}"/>
+                <a16:creationId xmlns:a16="http://schemas.microsoft.com/office/drawing/2014/main" id="{1868D01D-1E20-45E8-96A2-B3F67B9170AF}"/>
               </a:ext>
             </a:extLst>
           </p:cNvPr>
@@ -20859,7 +25751,7 @@
           <p:cNvPr id="7" name="source">
             <a:extLst xmlns:a="http://schemas.openxmlformats.org/drawingml/2006/main">
               <a:ext uri="{FF2B5EF4-FFF2-40B4-BE49-F238E27FC236}">
-                <a16:creationId xmlns:a16="http://schemas.microsoft.com/office/drawing/2014/main" id="{EC6E9683-0594-449F-9320-EE974A1474CD}"/>
+                <a16:creationId xmlns:a16="http://schemas.microsoft.com/office/drawing/2014/main" id="{CC30CD10-41D7-4CD4-A4D9-8CB647987C4C}"/>
               </a:ext>
             </a:extLst>
           </p:cNvPr>
@@ -20909,7 +25801,7 @@
           <p:cNvPr id="8" name="footer-page">
             <a:extLst xmlns:a="http://schemas.openxmlformats.org/drawingml/2006/main">
               <a:ext uri="{FF2B5EF4-FFF2-40B4-BE49-F238E27FC236}">
-                <a16:creationId xmlns:a16="http://schemas.microsoft.com/office/drawing/2014/main" id="{A4DD4FFB-D403-4DC2-972A-DD0EEB764482}"/>
+                <a16:creationId xmlns:a16="http://schemas.microsoft.com/office/drawing/2014/main" id="{E0531B33-A043-4EC9-97F5-B8DB56194B19}"/>
               </a:ext>
             </a:extLst>
           </p:cNvPr>
@@ -20949,7 +25841,7 @@
                   <a:srgbClr val="69766F"/>
                 </a:solidFill>
               </a:rPr>
-              <a:t>08 / 15</a:t>
+              <a:t>08 / 18</a:t>
             </a:r>
           </a:p>
         </p:txBody>
@@ -20959,7 +25851,7 @@
           <p:cNvPr id="9" name="page-title">
             <a:extLst xmlns:a="http://schemas.openxmlformats.org/drawingml/2006/main">
               <a:ext uri="{FF2B5EF4-FFF2-40B4-BE49-F238E27FC236}">
-                <a16:creationId xmlns:a16="http://schemas.microsoft.com/office/drawing/2014/main" id="{A0779201-E5E8-4528-B90C-76F2D2644A96}"/>
+                <a16:creationId xmlns:a16="http://schemas.microsoft.com/office/drawing/2014/main" id="{500B8BDC-F5E3-4BE8-9B0A-E4984A93DF3D}"/>
               </a:ext>
             </a:extLst>
           </p:cNvPr>
@@ -21009,7 +25901,7 @@
           <p:cNvPr id="10" name="page-lead">
             <a:extLst xmlns:a="http://schemas.openxmlformats.org/drawingml/2006/main">
               <a:ext uri="{FF2B5EF4-FFF2-40B4-BE49-F238E27FC236}">
-                <a16:creationId xmlns:a16="http://schemas.microsoft.com/office/drawing/2014/main" id="{9C3F214B-630E-4D8E-80CC-1A63330F3F82}"/>
+                <a16:creationId xmlns:a16="http://schemas.microsoft.com/office/drawing/2014/main" id="{37A1F024-1E7A-45EF-8D16-538519BD330C}"/>
               </a:ext>
             </a:extLst>
           </p:cNvPr>
@@ -21059,7 +25951,7 @@
           <p:cNvPr id="11" name="comparison-0">
             <a:extLst xmlns:a="http://schemas.openxmlformats.org/drawingml/2006/main">
               <a:ext uri="{FF2B5EF4-FFF2-40B4-BE49-F238E27FC236}">
-                <a16:creationId xmlns:a16="http://schemas.microsoft.com/office/drawing/2014/main" id="{0E633C00-E43E-4A52-A114-1151DD655192}"/>
+                <a16:creationId xmlns:a16="http://schemas.microsoft.com/office/drawing/2014/main" id="{509B8285-EFC5-4D28-8C95-5A949BE711F5}"/>
               </a:ext>
             </a:extLst>
           </p:cNvPr>
@@ -21092,7 +25984,7 @@
           <p:cNvPr id="12" name="comparison-accent-0">
             <a:extLst xmlns:a="http://schemas.openxmlformats.org/drawingml/2006/main">
               <a:ext uri="{FF2B5EF4-FFF2-40B4-BE49-F238E27FC236}">
-                <a16:creationId xmlns:a16="http://schemas.microsoft.com/office/drawing/2014/main" id="{FEFDA0EE-CD59-43C3-B3F0-5E58AD55A658}"/>
+                <a16:creationId xmlns:a16="http://schemas.microsoft.com/office/drawing/2014/main" id="{01A60742-5F08-46C4-84BE-F71BBCDDE1BE}"/>
               </a:ext>
             </a:extLst>
           </p:cNvPr>
@@ -21123,7 +26015,7 @@
           <p:cNvPr id="13" name="comparison-title-0">
             <a:extLst xmlns:a="http://schemas.openxmlformats.org/drawingml/2006/main">
               <a:ext uri="{FF2B5EF4-FFF2-40B4-BE49-F238E27FC236}">
-                <a16:creationId xmlns:a16="http://schemas.microsoft.com/office/drawing/2014/main" id="{ADDD6CF8-3243-4F29-B0FB-393E1BD8406F}"/>
+                <a16:creationId xmlns:a16="http://schemas.microsoft.com/office/drawing/2014/main" id="{E1550E69-158B-4512-8FD2-756C57EA3B49}"/>
               </a:ext>
             </a:extLst>
           </p:cNvPr>
@@ -21173,7 +26065,7 @@
           <p:cNvPr id="14" name="rule-90-292">
             <a:extLst xmlns:a="http://schemas.openxmlformats.org/drawingml/2006/main">
               <a:ext uri="{FF2B5EF4-FFF2-40B4-BE49-F238E27FC236}">
-                <a16:creationId xmlns:a16="http://schemas.microsoft.com/office/drawing/2014/main" id="{34E94091-10F2-40BB-9DBD-590CBB2BF974}"/>
+                <a16:creationId xmlns:a16="http://schemas.microsoft.com/office/drawing/2014/main" id="{1397175F-14E6-4E6C-AD62-551FB9BC5A00}"/>
               </a:ext>
             </a:extLst>
           </p:cNvPr>
@@ -21204,7 +26096,7 @@
           <p:cNvPr id="15" name="comparison-label-0-0">
             <a:extLst xmlns:a="http://schemas.openxmlformats.org/drawingml/2006/main">
               <a:ext uri="{FF2B5EF4-FFF2-40B4-BE49-F238E27FC236}">
-                <a16:creationId xmlns:a16="http://schemas.microsoft.com/office/drawing/2014/main" id="{A1800F50-F497-4CB7-A00B-57AD58F79F77}"/>
+                <a16:creationId xmlns:a16="http://schemas.microsoft.com/office/drawing/2014/main" id="{8D654F39-48C2-4DCB-B9F9-0B9D4488B2FD}"/>
               </a:ext>
             </a:extLst>
           </p:cNvPr>
@@ -21254,7 +26146,7 @@
           <p:cNvPr id="16" name="comparison-value-0-0">
             <a:extLst xmlns:a="http://schemas.openxmlformats.org/drawingml/2006/main">
               <a:ext uri="{FF2B5EF4-FFF2-40B4-BE49-F238E27FC236}">
-                <a16:creationId xmlns:a16="http://schemas.microsoft.com/office/drawing/2014/main" id="{E0408AC0-B3F1-4C9B-9503-01FE5B176291}"/>
+                <a16:creationId xmlns:a16="http://schemas.microsoft.com/office/drawing/2014/main" id="{FB719637-F483-41DE-946B-81B55FBB0185}"/>
               </a:ext>
             </a:extLst>
           </p:cNvPr>
@@ -21304,7 +26196,7 @@
           <p:cNvPr id="17" name="rule-90-356">
             <a:extLst xmlns:a="http://schemas.openxmlformats.org/drawingml/2006/main">
               <a:ext uri="{FF2B5EF4-FFF2-40B4-BE49-F238E27FC236}">
-                <a16:creationId xmlns:a16="http://schemas.microsoft.com/office/drawing/2014/main" id="{150F2980-B9CC-4031-A6AD-3399BF629DDB}"/>
+                <a16:creationId xmlns:a16="http://schemas.microsoft.com/office/drawing/2014/main" id="{D0C3283C-9FEC-47CB-B899-FEBEC6E25BCF}"/>
               </a:ext>
             </a:extLst>
           </p:cNvPr>
@@ -21335,7 +26227,7 @@
           <p:cNvPr id="18" name="comparison-label-0-1">
             <a:extLst xmlns:a="http://schemas.openxmlformats.org/drawingml/2006/main">
               <a:ext uri="{FF2B5EF4-FFF2-40B4-BE49-F238E27FC236}">
-                <a16:creationId xmlns:a16="http://schemas.microsoft.com/office/drawing/2014/main" id="{0A3A47FE-F77B-442E-99D0-3E34034F8698}"/>
+                <a16:creationId xmlns:a16="http://schemas.microsoft.com/office/drawing/2014/main" id="{C9D089B4-AA25-49C9-998A-9DE3F832FC36}"/>
               </a:ext>
             </a:extLst>
           </p:cNvPr>
@@ -21385,7 +26277,7 @@
           <p:cNvPr id="19" name="comparison-value-0-1">
             <a:extLst xmlns:a="http://schemas.openxmlformats.org/drawingml/2006/main">
               <a:ext uri="{FF2B5EF4-FFF2-40B4-BE49-F238E27FC236}">
-                <a16:creationId xmlns:a16="http://schemas.microsoft.com/office/drawing/2014/main" id="{1E6120F1-0557-4D95-B106-A6307772E0DB}"/>
+                <a16:creationId xmlns:a16="http://schemas.microsoft.com/office/drawing/2014/main" id="{F4DD276B-1280-43A3-89AA-55035BC53F26}"/>
               </a:ext>
             </a:extLst>
           </p:cNvPr>
@@ -21435,7 +26327,7 @@
           <p:cNvPr id="20" name="rule-90-420">
             <a:extLst xmlns:a="http://schemas.openxmlformats.org/drawingml/2006/main">
               <a:ext uri="{FF2B5EF4-FFF2-40B4-BE49-F238E27FC236}">
-                <a16:creationId xmlns:a16="http://schemas.microsoft.com/office/drawing/2014/main" id="{C546028F-D63B-4EE9-917E-707F18A2EF0C}"/>
+                <a16:creationId xmlns:a16="http://schemas.microsoft.com/office/drawing/2014/main" id="{FBECAA1A-F2FB-4411-B513-EDC7CA81E06A}"/>
               </a:ext>
             </a:extLst>
           </p:cNvPr>
@@ -21466,7 +26358,7 @@
           <p:cNvPr id="21" name="comparison-label-0-2">
             <a:extLst xmlns:a="http://schemas.openxmlformats.org/drawingml/2006/main">
               <a:ext uri="{FF2B5EF4-FFF2-40B4-BE49-F238E27FC236}">
-                <a16:creationId xmlns:a16="http://schemas.microsoft.com/office/drawing/2014/main" id="{AE8481FE-BD62-4BFB-8463-F79604DDE396}"/>
+                <a16:creationId xmlns:a16="http://schemas.microsoft.com/office/drawing/2014/main" id="{3AFEEF18-9966-4D1C-81DF-52275639D1B1}"/>
               </a:ext>
             </a:extLst>
           </p:cNvPr>
@@ -21516,7 +26408,7 @@
           <p:cNvPr id="22" name="comparison-value-0-2">
             <a:extLst xmlns:a="http://schemas.openxmlformats.org/drawingml/2006/main">
               <a:ext uri="{FF2B5EF4-FFF2-40B4-BE49-F238E27FC236}">
-                <a16:creationId xmlns:a16="http://schemas.microsoft.com/office/drawing/2014/main" id="{EAB69CB8-814B-4694-AA60-2DC01C9AF78F}"/>
+                <a16:creationId xmlns:a16="http://schemas.microsoft.com/office/drawing/2014/main" id="{597C8738-1094-462B-8481-2DBC79B4A50E}"/>
               </a:ext>
             </a:extLst>
           </p:cNvPr>
@@ -21566,7 +26458,7 @@
           <p:cNvPr id="23" name="rule-90-484">
             <a:extLst xmlns:a="http://schemas.openxmlformats.org/drawingml/2006/main">
               <a:ext uri="{FF2B5EF4-FFF2-40B4-BE49-F238E27FC236}">
-                <a16:creationId xmlns:a16="http://schemas.microsoft.com/office/drawing/2014/main" id="{D36EF5B7-1C02-4373-B527-AE3D51A19185}"/>
+                <a16:creationId xmlns:a16="http://schemas.microsoft.com/office/drawing/2014/main" id="{0B0C5D66-3E74-48D3-A4F5-DF1EC768BBED}"/>
               </a:ext>
             </a:extLst>
           </p:cNvPr>
@@ -21597,7 +26489,7 @@
           <p:cNvPr id="24" name="comparison-label-0-3">
             <a:extLst xmlns:a="http://schemas.openxmlformats.org/drawingml/2006/main">
               <a:ext uri="{FF2B5EF4-FFF2-40B4-BE49-F238E27FC236}">
-                <a16:creationId xmlns:a16="http://schemas.microsoft.com/office/drawing/2014/main" id="{F4E479EC-FE89-40C5-A3AC-4528E2F53E87}"/>
+                <a16:creationId xmlns:a16="http://schemas.microsoft.com/office/drawing/2014/main" id="{8D9096A8-8D3A-4795-AE4F-F7039158E4BB}"/>
               </a:ext>
             </a:extLst>
           </p:cNvPr>
@@ -21647,7 +26539,7 @@
           <p:cNvPr id="25" name="comparison-value-0-3">
             <a:extLst xmlns:a="http://schemas.openxmlformats.org/drawingml/2006/main">
               <a:ext uri="{FF2B5EF4-FFF2-40B4-BE49-F238E27FC236}">
-                <a16:creationId xmlns:a16="http://schemas.microsoft.com/office/drawing/2014/main" id="{AD9E065C-1041-405D-B829-EDF40D698E0D}"/>
+                <a16:creationId xmlns:a16="http://schemas.microsoft.com/office/drawing/2014/main" id="{1A2E2374-05E2-490B-B194-945A5165C13B}"/>
               </a:ext>
             </a:extLst>
           </p:cNvPr>
@@ -21697,7 +26589,7 @@
           <p:cNvPr id="26" name="comparison-1">
             <a:extLst xmlns:a="http://schemas.openxmlformats.org/drawingml/2006/main">
               <a:ext uri="{FF2B5EF4-FFF2-40B4-BE49-F238E27FC236}">
-                <a16:creationId xmlns:a16="http://schemas.microsoft.com/office/drawing/2014/main" id="{2CE0B9DC-2A56-4D25-A90B-FCB27B83390B}"/>
+                <a16:creationId xmlns:a16="http://schemas.microsoft.com/office/drawing/2014/main" id="{36480E75-9D83-46BC-9CAA-97E418C20292}"/>
               </a:ext>
             </a:extLst>
           </p:cNvPr>
@@ -21730,7 +26622,7 @@
           <p:cNvPr id="27" name="comparison-accent-1">
             <a:extLst xmlns:a="http://schemas.openxmlformats.org/drawingml/2006/main">
               <a:ext uri="{FF2B5EF4-FFF2-40B4-BE49-F238E27FC236}">
-                <a16:creationId xmlns:a16="http://schemas.microsoft.com/office/drawing/2014/main" id="{ECDF6A0B-E73D-4A70-BDCA-642BE91F630F}"/>
+                <a16:creationId xmlns:a16="http://schemas.microsoft.com/office/drawing/2014/main" id="{3980B2AC-59FB-477E-BEE4-A833F1F94AF7}"/>
               </a:ext>
             </a:extLst>
           </p:cNvPr>
@@ -21761,7 +26653,7 @@
           <p:cNvPr id="28" name="comparison-title-1">
             <a:extLst xmlns:a="http://schemas.openxmlformats.org/drawingml/2006/main">
               <a:ext uri="{FF2B5EF4-FFF2-40B4-BE49-F238E27FC236}">
-                <a16:creationId xmlns:a16="http://schemas.microsoft.com/office/drawing/2014/main" id="{B3715D30-4E85-4813-8392-A903920B7D21}"/>
+                <a16:creationId xmlns:a16="http://schemas.microsoft.com/office/drawing/2014/main" id="{4AF857AE-D072-4158-A0F6-1496F16F4727}"/>
               </a:ext>
             </a:extLst>
           </p:cNvPr>
@@ -21811,7 +26703,7 @@
           <p:cNvPr id="29" name="rule-680-292">
             <a:extLst xmlns:a="http://schemas.openxmlformats.org/drawingml/2006/main">
               <a:ext uri="{FF2B5EF4-FFF2-40B4-BE49-F238E27FC236}">
-                <a16:creationId xmlns:a16="http://schemas.microsoft.com/office/drawing/2014/main" id="{DC5DAC58-C34C-43B5-906B-1FB95C1AA649}"/>
+                <a16:creationId xmlns:a16="http://schemas.microsoft.com/office/drawing/2014/main" id="{152A5501-A2B1-42D2-AE28-F727363EC804}"/>
               </a:ext>
             </a:extLst>
           </p:cNvPr>
@@ -21842,7 +26734,7 @@
           <p:cNvPr id="30" name="comparison-label-1-0">
             <a:extLst xmlns:a="http://schemas.openxmlformats.org/drawingml/2006/main">
               <a:ext uri="{FF2B5EF4-FFF2-40B4-BE49-F238E27FC236}">
-                <a16:creationId xmlns:a16="http://schemas.microsoft.com/office/drawing/2014/main" id="{164AA460-6BCC-497B-B784-505A73EE9D82}"/>
+                <a16:creationId xmlns:a16="http://schemas.microsoft.com/office/drawing/2014/main" id="{865EB682-3967-4AAB-8F7C-D004799055A2}"/>
               </a:ext>
             </a:extLst>
           </p:cNvPr>
@@ -21892,7 +26784,7 @@
           <p:cNvPr id="31" name="comparison-value-1-0">
             <a:extLst xmlns:a="http://schemas.openxmlformats.org/drawingml/2006/main">
               <a:ext uri="{FF2B5EF4-FFF2-40B4-BE49-F238E27FC236}">
-                <a16:creationId xmlns:a16="http://schemas.microsoft.com/office/drawing/2014/main" id="{C5C784FB-1238-4BC3-86BC-E1592E7990FB}"/>
+                <a16:creationId xmlns:a16="http://schemas.microsoft.com/office/drawing/2014/main" id="{F1D793FA-2668-4898-8619-FA802AAB89A5}"/>
               </a:ext>
             </a:extLst>
           </p:cNvPr>
@@ -21942,7 +26834,7 @@
           <p:cNvPr id="32" name="rule-680-356">
             <a:extLst xmlns:a="http://schemas.openxmlformats.org/drawingml/2006/main">
               <a:ext uri="{FF2B5EF4-FFF2-40B4-BE49-F238E27FC236}">
-                <a16:creationId xmlns:a16="http://schemas.microsoft.com/office/drawing/2014/main" id="{5A78D111-8B00-468B-8109-3AA47E3970E2}"/>
+                <a16:creationId xmlns:a16="http://schemas.microsoft.com/office/drawing/2014/main" id="{02B08850-2BC1-40EF-904C-EB1A8E74108C}"/>
               </a:ext>
             </a:extLst>
           </p:cNvPr>
@@ -21973,7 +26865,7 @@
           <p:cNvPr id="33" name="comparison-label-1-1">
             <a:extLst xmlns:a="http://schemas.openxmlformats.org/drawingml/2006/main">
               <a:ext uri="{FF2B5EF4-FFF2-40B4-BE49-F238E27FC236}">
-                <a16:creationId xmlns:a16="http://schemas.microsoft.com/office/drawing/2014/main" id="{F1C1CF38-7DDD-41A8-8D8F-FD9C7D478721}"/>
+                <a16:creationId xmlns:a16="http://schemas.microsoft.com/office/drawing/2014/main" id="{307C41D6-D13F-4D46-A904-CB1E360B7A0B}"/>
               </a:ext>
             </a:extLst>
           </p:cNvPr>
@@ -22023,7 +26915,7 @@
           <p:cNvPr id="34" name="comparison-value-1-1">
             <a:extLst xmlns:a="http://schemas.openxmlformats.org/drawingml/2006/main">
               <a:ext uri="{FF2B5EF4-FFF2-40B4-BE49-F238E27FC236}">
-                <a16:creationId xmlns:a16="http://schemas.microsoft.com/office/drawing/2014/main" id="{60F9774D-96FE-46D7-8920-F63A4D777017}"/>
+                <a16:creationId xmlns:a16="http://schemas.microsoft.com/office/drawing/2014/main" id="{E10BC334-F43B-4462-A907-29F4DC693155}"/>
               </a:ext>
             </a:extLst>
           </p:cNvPr>
@@ -22073,7 +26965,7 @@
           <p:cNvPr id="35" name="rule-680-420">
             <a:extLst xmlns:a="http://schemas.openxmlformats.org/drawingml/2006/main">
               <a:ext uri="{FF2B5EF4-FFF2-40B4-BE49-F238E27FC236}">
-                <a16:creationId xmlns:a16="http://schemas.microsoft.com/office/drawing/2014/main" id="{A42EF90F-A48E-4913-A1FA-8DC83E20E0D4}"/>
+                <a16:creationId xmlns:a16="http://schemas.microsoft.com/office/drawing/2014/main" id="{334464A7-C757-4F89-BB47-D9FDE862E9E2}"/>
               </a:ext>
             </a:extLst>
           </p:cNvPr>
@@ -22104,7 +26996,7 @@
           <p:cNvPr id="36" name="comparison-label-1-2">
             <a:extLst xmlns:a="http://schemas.openxmlformats.org/drawingml/2006/main">
               <a:ext uri="{FF2B5EF4-FFF2-40B4-BE49-F238E27FC236}">
-                <a16:creationId xmlns:a16="http://schemas.microsoft.com/office/drawing/2014/main" id="{D2D7A975-A591-48AB-A3F2-54F479206939}"/>
+                <a16:creationId xmlns:a16="http://schemas.microsoft.com/office/drawing/2014/main" id="{4482AAE1-3CB9-4D39-9325-9D6BC783985F}"/>
               </a:ext>
             </a:extLst>
           </p:cNvPr>
@@ -22154,7 +27046,7 @@
           <p:cNvPr id="37" name="comparison-value-1-2">
             <a:extLst xmlns:a="http://schemas.openxmlformats.org/drawingml/2006/main">
               <a:ext uri="{FF2B5EF4-FFF2-40B4-BE49-F238E27FC236}">
-                <a16:creationId xmlns:a16="http://schemas.microsoft.com/office/drawing/2014/main" id="{6551351F-355F-4DB5-A671-ABC54EE65C09}"/>
+                <a16:creationId xmlns:a16="http://schemas.microsoft.com/office/drawing/2014/main" id="{C8F6F123-98C8-4F15-8320-CEEF5435C9CC}"/>
               </a:ext>
             </a:extLst>
           </p:cNvPr>
@@ -22204,7 +27096,7 @@
           <p:cNvPr id="38" name="rule-680-484">
             <a:extLst xmlns:a="http://schemas.openxmlformats.org/drawingml/2006/main">
               <a:ext uri="{FF2B5EF4-FFF2-40B4-BE49-F238E27FC236}">
-                <a16:creationId xmlns:a16="http://schemas.microsoft.com/office/drawing/2014/main" id="{E73F6F20-5317-45D3-A9BF-D9C962C0BD3A}"/>
+                <a16:creationId xmlns:a16="http://schemas.microsoft.com/office/drawing/2014/main" id="{9F514BDF-C819-4B9A-9B26-4962A35B4F74}"/>
               </a:ext>
             </a:extLst>
           </p:cNvPr>
@@ -22235,7 +27127,7 @@
           <p:cNvPr id="39" name="comparison-label-1-3">
             <a:extLst xmlns:a="http://schemas.openxmlformats.org/drawingml/2006/main">
               <a:ext uri="{FF2B5EF4-FFF2-40B4-BE49-F238E27FC236}">
-                <a16:creationId xmlns:a16="http://schemas.microsoft.com/office/drawing/2014/main" id="{5C6A2924-A9C9-4A11-953C-1A5571DCE6ED}"/>
+                <a16:creationId xmlns:a16="http://schemas.microsoft.com/office/drawing/2014/main" id="{3E281F5F-F046-406B-9A7D-7AAE1A75F026}"/>
               </a:ext>
             </a:extLst>
           </p:cNvPr>
@@ -22285,7 +27177,7 @@
           <p:cNvPr id="40" name="comparison-value-1-3">
             <a:extLst xmlns:a="http://schemas.openxmlformats.org/drawingml/2006/main">
               <a:ext uri="{FF2B5EF4-FFF2-40B4-BE49-F238E27FC236}">
-                <a16:creationId xmlns:a16="http://schemas.microsoft.com/office/drawing/2014/main" id="{A28B75AF-CA97-4505-9FF1-4D2CB8B41474}"/>
+                <a16:creationId xmlns:a16="http://schemas.microsoft.com/office/drawing/2014/main" id="{A2442C6F-FF1A-4B00-A54A-50C3E9083DAC}"/>
               </a:ext>
             </a:extLst>
           </p:cNvPr>
@@ -22333,7 +27225,7 @@
     </p:spTree>
     <p:extLst>
       <p:ext uri="{BB962C8B-B14F-4D97-AF65-F5344CB8AC3E}">
-        <p14:creationId xmlns:p14="http://schemas.microsoft.com/office/powerpoint/2010/main" val="544096693"/>
+        <p14:creationId xmlns:p14="http://schemas.microsoft.com/office/powerpoint/2010/main" val="533011193"/>
       </p:ext>
     </p:extLst>
   </p:cSld>
@@ -22364,7 +27256,7 @@
           <p:cNvPr id="36" name="rule-60-45">
             <a:extLst xmlns:a="http://schemas.openxmlformats.org/drawingml/2006/main">
               <a:ext uri="{FF2B5EF4-FFF2-40B4-BE49-F238E27FC236}">
-                <a16:creationId xmlns:a16="http://schemas.microsoft.com/office/drawing/2014/main" id="{40A2B2E3-3610-409E-8317-AFE900505FEE}"/>
+                <a16:creationId xmlns:a16="http://schemas.microsoft.com/office/drawing/2014/main" id="{1C06AEE5-4E1C-49DD-9D73-0B5C0B261261}"/>
               </a:ext>
             </a:extLst>
           </p:cNvPr>
@@ -22395,7 +27287,7 @@
           <p:cNvPr id="2" name="chapter-accent">
             <a:extLst xmlns:a="http://schemas.openxmlformats.org/drawingml/2006/main">
               <a:ext uri="{FF2B5EF4-FFF2-40B4-BE49-F238E27FC236}">
-                <a16:creationId xmlns:a16="http://schemas.microsoft.com/office/drawing/2014/main" id="{88B650D0-2A25-47BA-9563-0594FF543F3C}"/>
+                <a16:creationId xmlns:a16="http://schemas.microsoft.com/office/drawing/2014/main" id="{481729FC-B4FA-4163-989C-18CAA17768E4}"/>
               </a:ext>
             </a:extLst>
           </p:cNvPr>
@@ -22426,7 +27318,7 @@
           <p:cNvPr id="3" name="chapter">
             <a:extLst xmlns:a="http://schemas.openxmlformats.org/drawingml/2006/main">
               <a:ext uri="{FF2B5EF4-FFF2-40B4-BE49-F238E27FC236}">
-                <a16:creationId xmlns:a16="http://schemas.microsoft.com/office/drawing/2014/main" id="{C7F3834F-BD34-4F6F-A7AC-28D79D320986}"/>
+                <a16:creationId xmlns:a16="http://schemas.microsoft.com/office/drawing/2014/main" id="{89A24B86-4155-42C1-89F5-ACE454FD22FE}"/>
               </a:ext>
             </a:extLst>
           </p:cNvPr>
@@ -22476,7 +27368,7 @@
           <p:cNvPr id="4" name="page-number">
             <a:extLst xmlns:a="http://schemas.openxmlformats.org/drawingml/2006/main">
               <a:ext uri="{FF2B5EF4-FFF2-40B4-BE49-F238E27FC236}">
-                <a16:creationId xmlns:a16="http://schemas.microsoft.com/office/drawing/2014/main" id="{D2979E90-AC92-405B-B2B4-8878E67B54EC}"/>
+                <a16:creationId xmlns:a16="http://schemas.microsoft.com/office/drawing/2014/main" id="{B4D02C2F-BA0D-4F0C-A14E-09A61751CBAD}"/>
               </a:ext>
             </a:extLst>
           </p:cNvPr>
@@ -22526,7 +27418,7 @@
           <p:cNvPr id="5" name="rule-60-674">
             <a:extLst xmlns:a="http://schemas.openxmlformats.org/drawingml/2006/main">
               <a:ext uri="{FF2B5EF4-FFF2-40B4-BE49-F238E27FC236}">
-                <a16:creationId xmlns:a16="http://schemas.microsoft.com/office/drawing/2014/main" id="{26A64936-88CA-4296-8BBC-3C3A555927F6}"/>
+                <a16:creationId xmlns:a16="http://schemas.microsoft.com/office/drawing/2014/main" id="{1356C82F-20E9-424E-936D-4AC2E4DC4D31}"/>
               </a:ext>
             </a:extLst>
           </p:cNvPr>
@@ -22557,7 +27449,7 @@
           <p:cNvPr id="6" name="brand">
             <a:extLst xmlns:a="http://schemas.openxmlformats.org/drawingml/2006/main">
               <a:ext uri="{FF2B5EF4-FFF2-40B4-BE49-F238E27FC236}">
-                <a16:creationId xmlns:a16="http://schemas.microsoft.com/office/drawing/2014/main" id="{D3540A41-B777-4069-8BB9-1EE976533F04}"/>
+                <a16:creationId xmlns:a16="http://schemas.microsoft.com/office/drawing/2014/main" id="{78CAE17E-B8E2-45DA-B610-9CF227EB5593}"/>
               </a:ext>
             </a:extLst>
           </p:cNvPr>
@@ -22607,7 +27499,7 @@
           <p:cNvPr id="7" name="source">
             <a:extLst xmlns:a="http://schemas.openxmlformats.org/drawingml/2006/main">
               <a:ext uri="{FF2B5EF4-FFF2-40B4-BE49-F238E27FC236}">
-                <a16:creationId xmlns:a16="http://schemas.microsoft.com/office/drawing/2014/main" id="{6616B15B-431C-4B4F-9C49-9D8775DB7460}"/>
+                <a16:creationId xmlns:a16="http://schemas.microsoft.com/office/drawing/2014/main" id="{F3F87EC1-0C67-4536-91FE-4F715D40D5C4}"/>
               </a:ext>
             </a:extLst>
           </p:cNvPr>
@@ -22657,7 +27549,7 @@
           <p:cNvPr id="8" name="footer-page">
             <a:extLst xmlns:a="http://schemas.openxmlformats.org/drawingml/2006/main">
               <a:ext uri="{FF2B5EF4-FFF2-40B4-BE49-F238E27FC236}">
-                <a16:creationId xmlns:a16="http://schemas.microsoft.com/office/drawing/2014/main" id="{4CB0BD06-2358-4D56-99EB-6488BB94BB4C}"/>
+                <a16:creationId xmlns:a16="http://schemas.microsoft.com/office/drawing/2014/main" id="{2B3CC9A1-319F-477B-9804-77CDDF2DBA6E}"/>
               </a:ext>
             </a:extLst>
           </p:cNvPr>
@@ -22697,7 +27589,7 @@
                   <a:srgbClr val="69766F"/>
                 </a:solidFill>
               </a:rPr>
-              <a:t>09 / 15</a:t>
+              <a:t>09 / 18</a:t>
             </a:r>
           </a:p>
         </p:txBody>
@@ -22707,7 +27599,7 @@
           <p:cNvPr id="9" name="page-title">
             <a:extLst xmlns:a="http://schemas.openxmlformats.org/drawingml/2006/main">
               <a:ext uri="{FF2B5EF4-FFF2-40B4-BE49-F238E27FC236}">
-                <a16:creationId xmlns:a16="http://schemas.microsoft.com/office/drawing/2014/main" id="{2D6F1997-F625-45E2-8AB1-1F697195F8BA}"/>
+                <a16:creationId xmlns:a16="http://schemas.microsoft.com/office/drawing/2014/main" id="{5AC15BDE-5823-4249-9A40-4A372B1989DC}"/>
               </a:ext>
             </a:extLst>
           </p:cNvPr>
@@ -22757,7 +27649,7 @@
           <p:cNvPr id="10" name="page-lead">
             <a:extLst xmlns:a="http://schemas.openxmlformats.org/drawingml/2006/main">
               <a:ext uri="{FF2B5EF4-FFF2-40B4-BE49-F238E27FC236}">
-                <a16:creationId xmlns:a16="http://schemas.microsoft.com/office/drawing/2014/main" id="{67A57D73-64CF-4A11-8C2E-90F62B2799C6}"/>
+                <a16:creationId xmlns:a16="http://schemas.microsoft.com/office/drawing/2014/main" id="{B98FF07B-4C91-437D-BE59-054C5DD77F0B}"/>
               </a:ext>
             </a:extLst>
           </p:cNvPr>
@@ -22807,7 +27699,7 @@
           <p:cNvPr id="11" name="matrix-col-0">
             <a:extLst xmlns:a="http://schemas.openxmlformats.org/drawingml/2006/main">
               <a:ext uri="{FF2B5EF4-FFF2-40B4-BE49-F238E27FC236}">
-                <a16:creationId xmlns:a16="http://schemas.microsoft.com/office/drawing/2014/main" id="{8C2BE6B9-6024-4F33-A1A6-BFEB8DE6FE8D}"/>
+                <a16:creationId xmlns:a16="http://schemas.microsoft.com/office/drawing/2014/main" id="{E5293492-D711-4CD8-B583-03C055CB6AE9}"/>
               </a:ext>
             </a:extLst>
           </p:cNvPr>
@@ -22857,7 +27749,7 @@
           <p:cNvPr id="12" name="matrix-col-1">
             <a:extLst xmlns:a="http://schemas.openxmlformats.org/drawingml/2006/main">
               <a:ext uri="{FF2B5EF4-FFF2-40B4-BE49-F238E27FC236}">
-                <a16:creationId xmlns:a16="http://schemas.microsoft.com/office/drawing/2014/main" id="{478CEC2F-6736-4620-AC29-D1C0D670E3D2}"/>
+                <a16:creationId xmlns:a16="http://schemas.microsoft.com/office/drawing/2014/main" id="{47FE8AD9-BAAF-4AFC-A2EE-BE0973AF0EB5}"/>
               </a:ext>
             </a:extLst>
           </p:cNvPr>
@@ -22907,7 +27799,7 @@
           <p:cNvPr id="13" name="matrix-col-2">
             <a:extLst xmlns:a="http://schemas.openxmlformats.org/drawingml/2006/main">
               <a:ext uri="{FF2B5EF4-FFF2-40B4-BE49-F238E27FC236}">
-                <a16:creationId xmlns:a16="http://schemas.microsoft.com/office/drawing/2014/main" id="{948FF496-85EE-407C-8A7D-716FA6AC49B3}"/>
+                <a16:creationId xmlns:a16="http://schemas.microsoft.com/office/drawing/2014/main" id="{66A0FCD1-253E-4243-BDB2-409F27233DE4}"/>
               </a:ext>
             </a:extLst>
           </p:cNvPr>
@@ -22957,7 +27849,7 @@
           <p:cNvPr id="14" name="matrix-head">
             <a:extLst xmlns:a="http://schemas.openxmlformats.org/drawingml/2006/main">
               <a:ext uri="{FF2B5EF4-FFF2-40B4-BE49-F238E27FC236}">
-                <a16:creationId xmlns:a16="http://schemas.microsoft.com/office/drawing/2014/main" id="{84EA7DD3-8433-40FB-95AF-C995A425EA2C}"/>
+                <a16:creationId xmlns:a16="http://schemas.microsoft.com/office/drawing/2014/main" id="{3910DB26-C159-4715-9976-26F14CF76100}"/>
               </a:ext>
             </a:extLst>
           </p:cNvPr>
@@ -22988,7 +27880,7 @@
           <p:cNvPr id="15" name="matrix-row-0">
             <a:extLst xmlns:a="http://schemas.openxmlformats.org/drawingml/2006/main">
               <a:ext uri="{FF2B5EF4-FFF2-40B4-BE49-F238E27FC236}">
-                <a16:creationId xmlns:a16="http://schemas.microsoft.com/office/drawing/2014/main" id="{E6BD24AF-0548-432F-8237-BF7F5E7983FA}"/>
+                <a16:creationId xmlns:a16="http://schemas.microsoft.com/office/drawing/2014/main" id="{2377640A-C8C3-4B44-9DF8-2D4ADC22C0A7}"/>
               </a:ext>
             </a:extLst>
           </p:cNvPr>
@@ -23038,7 +27930,7 @@
           <p:cNvPr id="16" name="matrix-cell-0-0">
             <a:extLst xmlns:a="http://schemas.openxmlformats.org/drawingml/2006/main">
               <a:ext uri="{FF2B5EF4-FFF2-40B4-BE49-F238E27FC236}">
-                <a16:creationId xmlns:a16="http://schemas.microsoft.com/office/drawing/2014/main" id="{F2EEF3A4-3BCD-4206-9476-CBDA0EFB347D}"/>
+                <a16:creationId xmlns:a16="http://schemas.microsoft.com/office/drawing/2014/main" id="{C27EC1B0-5602-4FE4-A17D-B53D0812AE48}"/>
               </a:ext>
             </a:extLst>
           </p:cNvPr>
@@ -23071,7 +27963,7 @@
           <p:cNvPr id="17" name="matrix-copy-0-0">
             <a:extLst xmlns:a="http://schemas.openxmlformats.org/drawingml/2006/main">
               <a:ext uri="{FF2B5EF4-FFF2-40B4-BE49-F238E27FC236}">
-                <a16:creationId xmlns:a16="http://schemas.microsoft.com/office/drawing/2014/main" id="{5148F600-8CB8-47F8-9681-E5BB7FE28F25}"/>
+                <a16:creationId xmlns:a16="http://schemas.microsoft.com/office/drawing/2014/main" id="{C7307ABF-4A78-4496-B5D7-3359E5AA873A}"/>
               </a:ext>
             </a:extLst>
           </p:cNvPr>
@@ -23121,7 +28013,7 @@
           <p:cNvPr id="18" name="matrix-cell-0-1">
             <a:extLst xmlns:a="http://schemas.openxmlformats.org/drawingml/2006/main">
               <a:ext uri="{FF2B5EF4-FFF2-40B4-BE49-F238E27FC236}">
-                <a16:creationId xmlns:a16="http://schemas.microsoft.com/office/drawing/2014/main" id="{EF655AA3-B1FA-47D8-AD3D-EBFE41F2DDB3}"/>
+                <a16:creationId xmlns:a16="http://schemas.microsoft.com/office/drawing/2014/main" id="{B8A0B39A-47F0-4699-9272-1BEFBF79E378}"/>
               </a:ext>
             </a:extLst>
           </p:cNvPr>
@@ -23154,7 +28046,7 @@
           <p:cNvPr id="19" name="matrix-copy-0-1">
             <a:extLst xmlns:a="http://schemas.openxmlformats.org/drawingml/2006/main">
               <a:ext uri="{FF2B5EF4-FFF2-40B4-BE49-F238E27FC236}">
-                <a16:creationId xmlns:a16="http://schemas.microsoft.com/office/drawing/2014/main" id="{37F29521-5B60-4DA3-BF90-CB90528959C3}"/>
+                <a16:creationId xmlns:a16="http://schemas.microsoft.com/office/drawing/2014/main" id="{6F92368E-D298-436D-BD07-4842CE8092FB}"/>
               </a:ext>
             </a:extLst>
           </p:cNvPr>
@@ -23204,7 +28096,7 @@
           <p:cNvPr id="20" name="matrix-cell-0-2">
             <a:extLst xmlns:a="http://schemas.openxmlformats.org/drawingml/2006/main">
               <a:ext uri="{FF2B5EF4-FFF2-40B4-BE49-F238E27FC236}">
-                <a16:creationId xmlns:a16="http://schemas.microsoft.com/office/drawing/2014/main" id="{5DAB50ED-5D0D-416B-A0A7-88C9E32E4A29}"/>
+                <a16:creationId xmlns:a16="http://schemas.microsoft.com/office/drawing/2014/main" id="{0C076F96-5C8E-4D25-9B83-12D32F85EEA3}"/>
               </a:ext>
             </a:extLst>
           </p:cNvPr>
@@ -23237,7 +28129,7 @@
           <p:cNvPr id="21" name="matrix-copy-0-2">
             <a:extLst xmlns:a="http://schemas.openxmlformats.org/drawingml/2006/main">
               <a:ext uri="{FF2B5EF4-FFF2-40B4-BE49-F238E27FC236}">
-                <a16:creationId xmlns:a16="http://schemas.microsoft.com/office/drawing/2014/main" id="{E2F3AF00-6B23-4198-ADF6-597FCD947EC5}"/>
+                <a16:creationId xmlns:a16="http://schemas.microsoft.com/office/drawing/2014/main" id="{636C9C80-B2AE-4179-B113-88E03BFFF4EF}"/>
               </a:ext>
             </a:extLst>
           </p:cNvPr>
@@ -23287,7 +28179,7 @@
           <p:cNvPr id="22" name="matrix-row-1">
             <a:extLst xmlns:a="http://schemas.openxmlformats.org/drawingml/2006/main">
               <a:ext uri="{FF2B5EF4-FFF2-40B4-BE49-F238E27FC236}">
-                <a16:creationId xmlns:a16="http://schemas.microsoft.com/office/drawing/2014/main" id="{CB24F788-4175-4060-8283-409335F735DA}"/>
+                <a16:creationId xmlns:a16="http://schemas.microsoft.com/office/drawing/2014/main" id="{B70ABFCE-7AA3-4F4B-8D54-E2C2FBF95171}"/>
               </a:ext>
             </a:extLst>
           </p:cNvPr>
@@ -23337,7 +28229,7 @@
           <p:cNvPr id="23" name="matrix-cell-1-0">
             <a:extLst xmlns:a="http://schemas.openxmlformats.org/drawingml/2006/main">
               <a:ext uri="{FF2B5EF4-FFF2-40B4-BE49-F238E27FC236}">
-                <a16:creationId xmlns:a16="http://schemas.microsoft.com/office/drawing/2014/main" id="{ACAFC609-F523-429C-9C0F-E0704BAFF612}"/>
+                <a16:creationId xmlns:a16="http://schemas.microsoft.com/office/drawing/2014/main" id="{787C6559-9A4C-44B1-987E-46F9D146D791}"/>
               </a:ext>
             </a:extLst>
           </p:cNvPr>
@@ -23370,7 +28262,7 @@
           <p:cNvPr id="24" name="matrix-copy-1-0">
             <a:extLst xmlns:a="http://schemas.openxmlformats.org/drawingml/2006/main">
               <a:ext uri="{FF2B5EF4-FFF2-40B4-BE49-F238E27FC236}">
-                <a16:creationId xmlns:a16="http://schemas.microsoft.com/office/drawing/2014/main" id="{9B922175-0B1F-45BA-A6EF-D1AD18307BA5}"/>
+                <a16:creationId xmlns:a16="http://schemas.microsoft.com/office/drawing/2014/main" id="{8DF64A83-E7DC-4593-9DF2-3893D7F7DD13}"/>
               </a:ext>
             </a:extLst>
           </p:cNvPr>
@@ -23420,7 +28312,7 @@
           <p:cNvPr id="25" name="matrix-cell-1-1">
             <a:extLst xmlns:a="http://schemas.openxmlformats.org/drawingml/2006/main">
               <a:ext uri="{FF2B5EF4-FFF2-40B4-BE49-F238E27FC236}">
-                <a16:creationId xmlns:a16="http://schemas.microsoft.com/office/drawing/2014/main" id="{015D93F3-944D-489F-99FE-CDBEE211C258}"/>
+                <a16:creationId xmlns:a16="http://schemas.microsoft.com/office/drawing/2014/main" id="{DE149FE4-6958-4426-AA8F-E7C95B67D49D}"/>
               </a:ext>
             </a:extLst>
           </p:cNvPr>
@@ -23453,7 +28345,7 @@
           <p:cNvPr id="26" name="matrix-copy-1-1">
             <a:extLst xmlns:a="http://schemas.openxmlformats.org/drawingml/2006/main">
               <a:ext uri="{FF2B5EF4-FFF2-40B4-BE49-F238E27FC236}">
-                <a16:creationId xmlns:a16="http://schemas.microsoft.com/office/drawing/2014/main" id="{269C0D59-BCB2-4057-BF5D-0ECC1D278675}"/>
+                <a16:creationId xmlns:a16="http://schemas.microsoft.com/office/drawing/2014/main" id="{9E09ACC6-56F9-4531-A9E6-D76DF1D835B7}"/>
               </a:ext>
             </a:extLst>
           </p:cNvPr>
@@ -23503,7 +28395,7 @@
           <p:cNvPr id="27" name="matrix-cell-1-2">
             <a:extLst xmlns:a="http://schemas.openxmlformats.org/drawingml/2006/main">
               <a:ext uri="{FF2B5EF4-FFF2-40B4-BE49-F238E27FC236}">
-                <a16:creationId xmlns:a16="http://schemas.microsoft.com/office/drawing/2014/main" id="{CF3D04C9-4D72-4094-9913-FC65B35BAA8C}"/>
+                <a16:creationId xmlns:a16="http://schemas.microsoft.com/office/drawing/2014/main" id="{225B348B-A5F8-4FB0-887E-89E762D8B7BD}"/>
               </a:ext>
             </a:extLst>
           </p:cNvPr>
@@ -23536,7 +28428,7 @@
           <p:cNvPr id="28" name="matrix-copy-1-2">
             <a:extLst xmlns:a="http://schemas.openxmlformats.org/drawingml/2006/main">
               <a:ext uri="{FF2B5EF4-FFF2-40B4-BE49-F238E27FC236}">
-                <a16:creationId xmlns:a16="http://schemas.microsoft.com/office/drawing/2014/main" id="{99F8FC20-230E-4A85-BD99-28A2EBE7E643}"/>
+                <a16:creationId xmlns:a16="http://schemas.microsoft.com/office/drawing/2014/main" id="{2D81212D-7C94-425F-A1AF-545DE64D5746}"/>
               </a:ext>
             </a:extLst>
           </p:cNvPr>
@@ -23586,7 +28478,7 @@
           <p:cNvPr id="29" name="matrix-row-2">
             <a:extLst xmlns:a="http://schemas.openxmlformats.org/drawingml/2006/main">
               <a:ext uri="{FF2B5EF4-FFF2-40B4-BE49-F238E27FC236}">
-                <a16:creationId xmlns:a16="http://schemas.microsoft.com/office/drawing/2014/main" id="{0F5E7696-FD31-4E24-A975-03804CF5440D}"/>
+                <a16:creationId xmlns:a16="http://schemas.microsoft.com/office/drawing/2014/main" id="{1B1AC6BB-D6A3-464B-BD3F-FD91A9A805AA}"/>
               </a:ext>
             </a:extLst>
           </p:cNvPr>
@@ -23636,7 +28528,7 @@
           <p:cNvPr id="30" name="matrix-cell-2-0">
             <a:extLst xmlns:a="http://schemas.openxmlformats.org/drawingml/2006/main">
               <a:ext uri="{FF2B5EF4-FFF2-40B4-BE49-F238E27FC236}">
-                <a16:creationId xmlns:a16="http://schemas.microsoft.com/office/drawing/2014/main" id="{022C2B85-14B3-4F53-B48D-2969944199F5}"/>
+                <a16:creationId xmlns:a16="http://schemas.microsoft.com/office/drawing/2014/main" id="{E4E785DE-D986-425C-800C-15D22EE0D64E}"/>
               </a:ext>
             </a:extLst>
           </p:cNvPr>
@@ -23669,7 +28561,7 @@
           <p:cNvPr id="31" name="matrix-copy-2-0">
             <a:extLst xmlns:a="http://schemas.openxmlformats.org/drawingml/2006/main">
               <a:ext uri="{FF2B5EF4-FFF2-40B4-BE49-F238E27FC236}">
-                <a16:creationId xmlns:a16="http://schemas.microsoft.com/office/drawing/2014/main" id="{FD3C59DC-61D2-45C1-983F-6208135E2D89}"/>
+                <a16:creationId xmlns:a16="http://schemas.microsoft.com/office/drawing/2014/main" id="{415FAC57-982A-47D3-B7E7-2CAD3DFC5CBE}"/>
               </a:ext>
             </a:extLst>
           </p:cNvPr>
@@ -23719,7 +28611,7 @@
           <p:cNvPr id="32" name="matrix-cell-2-1">
             <a:extLst xmlns:a="http://schemas.openxmlformats.org/drawingml/2006/main">
               <a:ext uri="{FF2B5EF4-FFF2-40B4-BE49-F238E27FC236}">
-                <a16:creationId xmlns:a16="http://schemas.microsoft.com/office/drawing/2014/main" id="{FABD7E9C-CA37-4723-8594-790D980CE267}"/>
+                <a16:creationId xmlns:a16="http://schemas.microsoft.com/office/drawing/2014/main" id="{B698CBFD-F4D0-4DC7-89F9-54E1E3C6BA20}"/>
               </a:ext>
             </a:extLst>
           </p:cNvPr>
@@ -23752,7 +28644,7 @@
           <p:cNvPr id="33" name="matrix-copy-2-1">
             <a:extLst xmlns:a="http://schemas.openxmlformats.org/drawingml/2006/main">
               <a:ext uri="{FF2B5EF4-FFF2-40B4-BE49-F238E27FC236}">
-                <a16:creationId xmlns:a16="http://schemas.microsoft.com/office/drawing/2014/main" id="{54102C26-045C-40E5-A79B-A0FB258AAF5F}"/>
+                <a16:creationId xmlns:a16="http://schemas.microsoft.com/office/drawing/2014/main" id="{34AEB144-731C-4D21-B75B-253596538474}"/>
               </a:ext>
             </a:extLst>
           </p:cNvPr>
@@ -23802,7 +28694,7 @@
           <p:cNvPr id="34" name="matrix-cell-2-2">
             <a:extLst xmlns:a="http://schemas.openxmlformats.org/drawingml/2006/main">
               <a:ext uri="{FF2B5EF4-FFF2-40B4-BE49-F238E27FC236}">
-                <a16:creationId xmlns:a16="http://schemas.microsoft.com/office/drawing/2014/main" id="{6C0A307E-00AA-4DAC-83F9-C2E1B30828DD}"/>
+                <a16:creationId xmlns:a16="http://schemas.microsoft.com/office/drawing/2014/main" id="{487BD0CA-3D8A-46D1-9B79-7F8480C3C1E4}"/>
               </a:ext>
             </a:extLst>
           </p:cNvPr>
@@ -23835,7 +28727,7 @@
           <p:cNvPr id="35" name="matrix-copy-2-2">
             <a:extLst xmlns:a="http://schemas.openxmlformats.org/drawingml/2006/main">
               <a:ext uri="{FF2B5EF4-FFF2-40B4-BE49-F238E27FC236}">
-                <a16:creationId xmlns:a16="http://schemas.microsoft.com/office/drawing/2014/main" id="{793494CF-40E9-408F-BBEB-9770FFE3F1BB}"/>
+                <a16:creationId xmlns:a16="http://schemas.microsoft.com/office/drawing/2014/main" id="{D847D551-CA65-4E1A-BE2A-1DAC208FC158}"/>
               </a:ext>
             </a:extLst>
           </p:cNvPr>
@@ -23883,7 +28775,7 @@
     </p:spTree>
     <p:extLst>
       <p:ext uri="{BB962C8B-B14F-4D97-AF65-F5344CB8AC3E}">
-        <p14:creationId xmlns:p14="http://schemas.microsoft.com/office/powerpoint/2010/main" val="1957232244"/>
+        <p14:creationId xmlns:p14="http://schemas.microsoft.com/office/powerpoint/2010/main" val="1573909409"/>
       </p:ext>
     </p:extLst>
   </p:cSld>
